--- a/docs/presentation/output/VGA_Presentation_Yossi the rel deal.pptx
+++ b/docs/presentation/output/VGA_Presentation_Yossi the rel deal.pptx
@@ -5,7 +5,7 @@
     <p:sldMasterId id="2147483648" r:id="rId1"/>
   </p:sldMasterIdLst>
   <p:notesMasterIdLst>
-    <p:notesMasterId r:id="rId30"/>
+    <p:notesMasterId r:id="rId31"/>
   </p:notesMasterIdLst>
   <p:sldIdLst>
     <p:sldId id="256" r:id="rId2"/>
@@ -14,28 +14,29 @@
     <p:sldId id="259" r:id="rId5"/>
     <p:sldId id="260" r:id="rId6"/>
     <p:sldId id="261" r:id="rId7"/>
-    <p:sldId id="263" r:id="rId8"/>
-    <p:sldId id="264" r:id="rId9"/>
-    <p:sldId id="265" r:id="rId10"/>
-    <p:sldId id="267" r:id="rId11"/>
-    <p:sldId id="268" r:id="rId12"/>
-    <p:sldId id="269" r:id="rId13"/>
-    <p:sldId id="270" r:id="rId14"/>
-    <p:sldId id="271" r:id="rId15"/>
-    <p:sldId id="272" r:id="rId16"/>
-    <p:sldId id="273" r:id="rId17"/>
-    <p:sldId id="274" r:id="rId18"/>
-    <p:sldId id="275" r:id="rId19"/>
+    <p:sldId id="288" r:id="rId8"/>
+    <p:sldId id="263" r:id="rId9"/>
+    <p:sldId id="264" r:id="rId10"/>
+    <p:sldId id="265" r:id="rId11"/>
+    <p:sldId id="267" r:id="rId12"/>
+    <p:sldId id="268" r:id="rId13"/>
+    <p:sldId id="269" r:id="rId14"/>
+    <p:sldId id="270" r:id="rId15"/>
+    <p:sldId id="271" r:id="rId16"/>
+    <p:sldId id="272" r:id="rId17"/>
+    <p:sldId id="273" r:id="rId18"/>
+    <p:sldId id="277" r:id="rId19"/>
     <p:sldId id="276" r:id="rId20"/>
-    <p:sldId id="277" r:id="rId21"/>
-    <p:sldId id="278" r:id="rId22"/>
-    <p:sldId id="279" r:id="rId23"/>
-    <p:sldId id="280" r:id="rId24"/>
-    <p:sldId id="287" r:id="rId25"/>
-    <p:sldId id="281" r:id="rId26"/>
-    <p:sldId id="282" r:id="rId27"/>
-    <p:sldId id="284" r:id="rId28"/>
-    <p:sldId id="286" r:id="rId29"/>
+    <p:sldId id="274" r:id="rId21"/>
+    <p:sldId id="275" r:id="rId22"/>
+    <p:sldId id="278" r:id="rId23"/>
+    <p:sldId id="279" r:id="rId24"/>
+    <p:sldId id="280" r:id="rId25"/>
+    <p:sldId id="287" r:id="rId26"/>
+    <p:sldId id="281" r:id="rId27"/>
+    <p:sldId id="282" r:id="rId28"/>
+    <p:sldId id="284" r:id="rId29"/>
+    <p:sldId id="286" r:id="rId30"/>
   </p:sldIdLst>
   <p:sldSz cx="9144000" cy="6858000" type="screen4x3"/>
   <p:notesSz cx="6858000" cy="9144000"/>
@@ -235,7 +236,7 @@
           <a:p>
             <a:fld id="{07002FAE-C8C6-47A9-917F-069B340A5C16}" type="datetimeFigureOut">
               <a:rPr lang="he-IL" smtClean="0"/>
-              <a:t>ד'/אלול/תשפ"ו</a:t>
+              <a:t>ה'/אלול/תשפ"ו</a:t>
             </a:fld>
             <a:endParaRPr lang="he-IL"/>
           </a:p>
@@ -567,7 +568,91 @@
           <a:p>
             <a:fld id="{6BB60923-6C8D-45DF-8473-B9DD050EE40B}" type="slidenum">
               <a:rPr lang="he-IL" smtClean="0"/>
-              <a:t>24</a:t>
+              <a:t>21</a:t>
+            </a:fld>
+            <a:endParaRPr lang="he-IL"/>
+          </a:p>
+        </p:txBody>
+      </p:sp>
+    </p:spTree>
+    <p:extLst>
+      <p:ext uri="{BB962C8B-B14F-4D97-AF65-F5344CB8AC3E}">
+        <p14:creationId xmlns:p14="http://schemas.microsoft.com/office/powerpoint/2010/main" val="2098287362"/>
+      </p:ext>
+    </p:extLst>
+  </p:cSld>
+  <p:clrMapOvr>
+    <a:masterClrMapping/>
+  </p:clrMapOvr>
+</p:notes>
+</file>
+
+<file path=ppt/notesSlides/notesSlide2.xml><?xml version="1.0" encoding="utf-8"?>
+<p:notes xmlns:a="http://schemas.openxmlformats.org/drawingml/2006/main" xmlns:r="http://schemas.openxmlformats.org/officeDocument/2006/relationships" xmlns:p="http://schemas.openxmlformats.org/presentationml/2006/main">
+  <p:cSld>
+    <p:spTree>
+      <p:nvGrpSpPr>
+        <p:cNvPr id="1" name=""/>
+        <p:cNvGrpSpPr/>
+        <p:nvPr/>
+      </p:nvGrpSpPr>
+      <p:grpSpPr>
+        <a:xfrm>
+          <a:off x="0" y="0"/>
+          <a:ext cx="0" cy="0"/>
+          <a:chOff x="0" y="0"/>
+          <a:chExt cx="0" cy="0"/>
+        </a:xfrm>
+      </p:grpSpPr>
+      <p:sp>
+        <p:nvSpPr>
+          <p:cNvPr id="2" name="מציין מיקום של תמונת שקופית 1"/>
+          <p:cNvSpPr>
+            <a:spLocks noGrp="1" noRot="1" noChangeAspect="1"/>
+          </p:cNvSpPr>
+          <p:nvPr>
+            <p:ph type="sldImg"/>
+          </p:nvPr>
+        </p:nvSpPr>
+        <p:spPr/>
+      </p:sp>
+      <p:sp>
+        <p:nvSpPr>
+          <p:cNvPr id="3" name="מציין מיקום של הערות 2"/>
+          <p:cNvSpPr>
+            <a:spLocks noGrp="1"/>
+          </p:cNvSpPr>
+          <p:nvPr>
+            <p:ph type="body" idx="1"/>
+          </p:nvPr>
+        </p:nvSpPr>
+        <p:spPr/>
+        <p:txBody>
+          <a:bodyPr/>
+          <a:lstStyle/>
+          <a:p>
+            <a:endParaRPr lang="he-IL" dirty="0"/>
+          </a:p>
+        </p:txBody>
+      </p:sp>
+      <p:sp>
+        <p:nvSpPr>
+          <p:cNvPr id="4" name="מציין מיקום של מספר שקופית 3"/>
+          <p:cNvSpPr>
+            <a:spLocks noGrp="1"/>
+          </p:cNvSpPr>
+          <p:nvPr>
+            <p:ph type="sldNum" sz="quarter" idx="5"/>
+          </p:nvPr>
+        </p:nvSpPr>
+        <p:spPr/>
+        <p:txBody>
+          <a:bodyPr/>
+          <a:lstStyle/>
+          <a:p>
+            <a:fld id="{6BB60923-6C8D-45DF-8473-B9DD050EE40B}" type="slidenum">
+              <a:rPr lang="he-IL" smtClean="0"/>
+              <a:t>25</a:t>
             </a:fld>
             <a:endParaRPr lang="he-IL"/>
           </a:p>
@@ -765,7 +850,7 @@
           <a:p>
             <a:fld id="{5BCAD085-E8A6-8845-BD4E-CB4CCA059FC4}" type="datetimeFigureOut">
               <a:rPr lang="en-US" smtClean="0"/>
-              <a:t>8/17/2026</a:t>
+              <a:t>8/18/2026</a:t>
             </a:fld>
             <a:endParaRPr lang="en-US"/>
           </a:p>
@@ -933,7 +1018,7 @@
           <a:p>
             <a:fld id="{5BCAD085-E8A6-8845-BD4E-CB4CCA059FC4}" type="datetimeFigureOut">
               <a:rPr lang="en-US" smtClean="0"/>
-              <a:t>8/17/2026</a:t>
+              <a:t>8/18/2026</a:t>
             </a:fld>
             <a:endParaRPr lang="en-US"/>
           </a:p>
@@ -1111,7 +1196,7 @@
           <a:p>
             <a:fld id="{5BCAD085-E8A6-8845-BD4E-CB4CCA059FC4}" type="datetimeFigureOut">
               <a:rPr lang="en-US" smtClean="0"/>
-              <a:t>8/17/2026</a:t>
+              <a:t>8/18/2026</a:t>
             </a:fld>
             <a:endParaRPr lang="en-US"/>
           </a:p>
@@ -1279,7 +1364,7 @@
           <a:p>
             <a:fld id="{5BCAD085-E8A6-8845-BD4E-CB4CCA059FC4}" type="datetimeFigureOut">
               <a:rPr lang="en-US" smtClean="0"/>
-              <a:t>8/17/2026</a:t>
+              <a:t>8/18/2026</a:t>
             </a:fld>
             <a:endParaRPr lang="en-US"/>
           </a:p>
@@ -1524,7 +1609,7 @@
           <a:p>
             <a:fld id="{5BCAD085-E8A6-8845-BD4E-CB4CCA059FC4}" type="datetimeFigureOut">
               <a:rPr lang="en-US" smtClean="0"/>
-              <a:t>8/17/2026</a:t>
+              <a:t>8/18/2026</a:t>
             </a:fld>
             <a:endParaRPr lang="en-US"/>
           </a:p>
@@ -1809,7 +1894,7 @@
           <a:p>
             <a:fld id="{5BCAD085-E8A6-8845-BD4E-CB4CCA059FC4}" type="datetimeFigureOut">
               <a:rPr lang="en-US" smtClean="0"/>
-              <a:t>8/17/2026</a:t>
+              <a:t>8/18/2026</a:t>
             </a:fld>
             <a:endParaRPr lang="en-US"/>
           </a:p>
@@ -2228,7 +2313,7 @@
           <a:p>
             <a:fld id="{5BCAD085-E8A6-8845-BD4E-CB4CCA059FC4}" type="datetimeFigureOut">
               <a:rPr lang="en-US" smtClean="0"/>
-              <a:t>8/17/2026</a:t>
+              <a:t>8/18/2026</a:t>
             </a:fld>
             <a:endParaRPr lang="en-US"/>
           </a:p>
@@ -2345,7 +2430,7 @@
           <a:p>
             <a:fld id="{5BCAD085-E8A6-8845-BD4E-CB4CCA059FC4}" type="datetimeFigureOut">
               <a:rPr lang="en-US" smtClean="0"/>
-              <a:t>8/17/2026</a:t>
+              <a:t>8/18/2026</a:t>
             </a:fld>
             <a:endParaRPr lang="en-US"/>
           </a:p>
@@ -2440,7 +2525,7 @@
           <a:p>
             <a:fld id="{5BCAD085-E8A6-8845-BD4E-CB4CCA059FC4}" type="datetimeFigureOut">
               <a:rPr lang="en-US" smtClean="0"/>
-              <a:t>8/17/2026</a:t>
+              <a:t>8/18/2026</a:t>
             </a:fld>
             <a:endParaRPr lang="en-US"/>
           </a:p>
@@ -2715,7 +2800,7 @@
           <a:p>
             <a:fld id="{5BCAD085-E8A6-8845-BD4E-CB4CCA059FC4}" type="datetimeFigureOut">
               <a:rPr lang="en-US" smtClean="0"/>
-              <a:t>8/17/2026</a:t>
+              <a:t>8/18/2026</a:t>
             </a:fld>
             <a:endParaRPr lang="en-US"/>
           </a:p>
@@ -2967,7 +3052,7 @@
           <a:p>
             <a:fld id="{5BCAD085-E8A6-8845-BD4E-CB4CCA059FC4}" type="datetimeFigureOut">
               <a:rPr lang="en-US" smtClean="0"/>
-              <a:t>8/17/2026</a:t>
+              <a:t>8/18/2026</a:t>
             </a:fld>
             <a:endParaRPr lang="en-US"/>
           </a:p>
@@ -3178,7 +3263,7 @@
           <a:p>
             <a:fld id="{5BCAD085-E8A6-8845-BD4E-CB4CCA059FC4}" type="datetimeFigureOut">
               <a:rPr lang="en-US" smtClean="0"/>
-              <a:t>8/17/2026</a:t>
+              <a:t>8/18/2026</a:t>
             </a:fld>
             <a:endParaRPr lang="en-US"/>
           </a:p>
@@ -3596,6 +3681,10 @@
               <a:t> FPGA </a:t>
             </a:r>
             <a:r>
+              <a:rPr lang="he-IL" dirty="0"/>
+              <a:t> </a:t>
+            </a:r>
+            <a:r>
               <a:rPr dirty="0" err="1"/>
               <a:t>להתראת</a:t>
             </a:r>
@@ -3934,6 +4023,689 @@
 </file>
 
 <file path=ppt/slides/slide10.xml><?xml version="1.0" encoding="utf-8"?>
+<p:sld xmlns:a="http://schemas.openxmlformats.org/drawingml/2006/main" xmlns:r="http://schemas.openxmlformats.org/officeDocument/2006/relationships" xmlns:p="http://schemas.openxmlformats.org/presentationml/2006/main">
+  <p:cSld>
+    <p:spTree>
+      <p:nvGrpSpPr>
+        <p:cNvPr id="1" name=""/>
+        <p:cNvGrpSpPr/>
+        <p:nvPr/>
+      </p:nvGrpSpPr>
+      <p:grpSpPr>
+        <a:xfrm>
+          <a:off x="0" y="0"/>
+          <a:ext cx="0" cy="0"/>
+          <a:chOff x="0" y="0"/>
+          <a:chExt cx="0" cy="0"/>
+        </a:xfrm>
+      </p:grpSpPr>
+      <p:sp>
+        <p:nvSpPr>
+          <p:cNvPr id="2" name="Title 1"/>
+          <p:cNvSpPr>
+            <a:spLocks noGrp="1"/>
+          </p:cNvSpPr>
+          <p:nvPr>
+            <p:ph type="title"/>
+          </p:nvPr>
+        </p:nvSpPr>
+        <p:spPr>
+          <a:xfrm>
+            <a:off x="457200" y="204360"/>
+            <a:ext cx="8229599" cy="809297"/>
+          </a:xfrm>
+        </p:spPr>
+        <p:txBody>
+          <a:bodyPr>
+            <a:normAutofit fontScale="90000"/>
+          </a:bodyPr>
+          <a:lstStyle/>
+          <a:p>
+            <a:pPr algn="ctr" rtl="1"/>
+            <a:r>
+              <a:rPr lang="he-IL" dirty="0"/>
+              <a:t>המרת </a:t>
+            </a:r>
+            <a:r>
+              <a:rPr lang="en-US" dirty="0"/>
+              <a:t>D TO A</a:t>
+            </a:r>
+            <a:br>
+              <a:rPr lang="en-US" dirty="0"/>
+            </a:br>
+            <a:r>
+              <a:rPr lang="he-IL" dirty="0"/>
+              <a:t>משקלי הביטים:</a:t>
+            </a:r>
+            <a:endParaRPr dirty="0"/>
+          </a:p>
+        </p:txBody>
+      </p:sp>
+      <p:sp>
+        <p:nvSpPr>
+          <p:cNvPr id="3" name="TextBox 2"/>
+          <p:cNvSpPr txBox="1"/>
+          <p:nvPr/>
+        </p:nvSpPr>
+        <p:spPr>
+          <a:xfrm>
+            <a:off x="640694" y="730513"/>
+            <a:ext cx="8229598" cy="3077766"/>
+          </a:xfrm>
+          <a:prstGeom prst="rect">
+            <a:avLst/>
+          </a:prstGeom>
+          <a:noFill/>
+        </p:spPr>
+        <p:txBody>
+          <a:bodyPr wrap="square">
+            <a:spAutoFit/>
+          </a:bodyPr>
+          <a:lstStyle/>
+          <a:p>
+            <a:endParaRPr dirty="0"/>
+          </a:p>
+          <a:p>
+            <a:pPr algn="r" rtl="1">
+              <a:defRPr sz="1600"/>
+            </a:pPr>
+            <a:r>
+              <a:rPr lang="he-IL" dirty="0"/>
+              <a:t>• משקל פיזי לכל ביט</a:t>
+            </a:r>
+          </a:p>
+          <a:p>
+            <a:pPr algn="r" rtl="1">
+              <a:defRPr sz="1600"/>
+            </a:pPr>
+            <a:r>
+              <a:rPr lang="en-US" dirty="0"/>
+              <a:t> MSB  </a:t>
+            </a:r>
+            <a:r>
+              <a:rPr lang="he-IL" dirty="0"/>
+              <a:t>לעומת </a:t>
+            </a:r>
+            <a:r>
+              <a:rPr lang="en-US" dirty="0"/>
+              <a:t>LSB</a:t>
+            </a:r>
+            <a:r>
+              <a:rPr lang="he-IL" dirty="0"/>
+              <a:t> :</a:t>
+            </a:r>
+            <a:endParaRPr lang="en-US" dirty="0"/>
+          </a:p>
+          <a:p>
+            <a:pPr algn="r" rtl="1">
+              <a:defRPr sz="1600"/>
+            </a:pPr>
+            <a:r>
+              <a:rPr lang="he-IL" dirty="0"/>
+              <a:t>הביט המשמעותי ביותר (</a:t>
+            </a:r>
+            <a:r>
+              <a:rPr lang="en-US" dirty="0" err="1"/>
+              <a:t>msb</a:t>
+            </a:r>
+            <a:r>
+              <a:rPr lang="he-IL" dirty="0"/>
+              <a:t>)מחובר לנגד הקטן ביותר, ולכן מזרים את הזרם הגדול ביותר למעגל          ומשפיע משמעותית על עוצמת הצבע,</a:t>
+            </a:r>
+          </a:p>
+          <a:p>
+            <a:pPr algn="r" rtl="1">
+              <a:defRPr sz="1600"/>
+            </a:pPr>
+            <a:r>
+              <a:rPr dirty="0"/>
+              <a:t> </a:t>
+            </a:r>
+            <a:r>
+              <a:rPr dirty="0" err="1"/>
+              <a:t>לעומתו</a:t>
+            </a:r>
+            <a:r>
+              <a:rPr dirty="0"/>
+              <a:t>, </a:t>
+            </a:r>
+            <a:r>
+              <a:rPr dirty="0" err="1"/>
+              <a:t>הביט</a:t>
+            </a:r>
+            <a:r>
+              <a:rPr dirty="0"/>
+              <a:t> </a:t>
+            </a:r>
+            <a:r>
+              <a:rPr dirty="0" err="1"/>
+              <a:t>הפחות</a:t>
+            </a:r>
+            <a:r>
+              <a:rPr dirty="0"/>
+              <a:t> </a:t>
+            </a:r>
+            <a:r>
+              <a:rPr dirty="0" err="1"/>
+              <a:t>משמעותי</a:t>
+            </a:r>
+            <a:r>
+              <a:rPr dirty="0"/>
+              <a:t> (LSB) </a:t>
+            </a:r>
+            <a:r>
+              <a:rPr dirty="0" err="1"/>
+              <a:t>מחובר</a:t>
+            </a:r>
+            <a:r>
+              <a:rPr dirty="0"/>
+              <a:t> </a:t>
+            </a:r>
+            <a:r>
+              <a:rPr dirty="0" err="1"/>
+              <a:t>לנגד</a:t>
+            </a:r>
+            <a:r>
+              <a:rPr dirty="0"/>
+              <a:t> </a:t>
+            </a:r>
+            <a:r>
+              <a:rPr dirty="0" err="1"/>
+              <a:t>הגדול</a:t>
+            </a:r>
+            <a:r>
+              <a:rPr dirty="0"/>
+              <a:t> </a:t>
+            </a:r>
+            <a:r>
+              <a:rPr dirty="0" err="1"/>
+              <a:t>ביותר</a:t>
+            </a:r>
+            <a:r>
+              <a:rPr dirty="0"/>
+              <a:t> </a:t>
+            </a:r>
+            <a:r>
+              <a:rPr dirty="0" err="1"/>
+              <a:t>בסולם</a:t>
+            </a:r>
+            <a:endParaRPr lang="he-IL" dirty="0"/>
+          </a:p>
+          <a:p>
+            <a:pPr algn="r" rtl="1">
+              <a:defRPr sz="1600"/>
+            </a:pPr>
+            <a:r>
+              <a:rPr lang="he-IL" dirty="0"/>
+              <a:t> ו</a:t>
+            </a:r>
+            <a:r>
+              <a:rPr dirty="0" err="1"/>
+              <a:t>תרומתו</a:t>
+            </a:r>
+            <a:r>
+              <a:rPr dirty="0"/>
+              <a:t> </a:t>
+            </a:r>
+            <a:r>
+              <a:rPr dirty="0" err="1"/>
+              <a:t>לזרם</a:t>
+            </a:r>
+            <a:r>
+              <a:rPr dirty="0"/>
+              <a:t> </a:t>
+            </a:r>
+            <a:r>
+              <a:rPr dirty="0" err="1"/>
+              <a:t>הכולל</a:t>
+            </a:r>
+            <a:r>
+              <a:rPr dirty="0"/>
+              <a:t> </a:t>
+            </a:r>
+            <a:r>
+              <a:rPr dirty="0" err="1"/>
+              <a:t>היא</a:t>
+            </a:r>
+            <a:r>
+              <a:rPr dirty="0"/>
+              <a:t> </a:t>
+            </a:r>
+            <a:r>
+              <a:rPr dirty="0" err="1"/>
+              <a:t>מזערית</a:t>
+            </a:r>
+            <a:r>
+              <a:rPr dirty="0"/>
+              <a:t> </a:t>
+            </a:r>
+            <a:r>
+              <a:rPr dirty="0" err="1"/>
+              <a:t>ונועדה</a:t>
+            </a:r>
+            <a:r>
+              <a:rPr dirty="0"/>
+              <a:t> </a:t>
+            </a:r>
+            <a:r>
+              <a:rPr dirty="0" err="1"/>
+              <a:t>לכוונון</a:t>
+            </a:r>
+            <a:r>
+              <a:rPr dirty="0"/>
+              <a:t> </a:t>
+            </a:r>
+            <a:r>
+              <a:rPr dirty="0" err="1"/>
+              <a:t>עדין</a:t>
+            </a:r>
+            <a:r>
+              <a:rPr dirty="0"/>
+              <a:t> </a:t>
+            </a:r>
+            <a:r>
+              <a:rPr dirty="0" err="1"/>
+              <a:t>של</a:t>
+            </a:r>
+            <a:r>
+              <a:rPr dirty="0"/>
+              <a:t> </a:t>
+            </a:r>
+            <a:r>
+              <a:rPr dirty="0" err="1"/>
+              <a:t>הגוון</a:t>
+            </a:r>
+            <a:r>
+              <a:rPr dirty="0"/>
+              <a:t>.</a:t>
+            </a:r>
+          </a:p>
+          <a:p>
+            <a:pPr algn="r" rtl="1">
+              <a:defRPr sz="1600"/>
+            </a:pPr>
+            <a:r>
+              <a:rPr lang="he-IL" dirty="0"/>
+              <a:t>•</a:t>
+            </a:r>
+            <a:r>
+              <a:rPr dirty="0"/>
+              <a:t> </a:t>
+            </a:r>
+            <a:r>
+              <a:rPr dirty="0" err="1"/>
+              <a:t>סכימה</a:t>
+            </a:r>
+            <a:r>
+              <a:rPr dirty="0"/>
+              <a:t> </a:t>
+            </a:r>
+            <a:r>
+              <a:rPr dirty="0" err="1"/>
+              <a:t>אנלוגית</a:t>
+            </a:r>
+            <a:r>
+              <a:rPr dirty="0"/>
+              <a:t> </a:t>
+            </a:r>
+            <a:r>
+              <a:rPr dirty="0" err="1"/>
+              <a:t>על</a:t>
+            </a:r>
+            <a:r>
+              <a:rPr dirty="0"/>
+              <a:t> </a:t>
+            </a:r>
+            <a:r>
+              <a:rPr dirty="0" err="1"/>
+              <a:t>המסך</a:t>
+            </a:r>
+            <a:r>
+              <a:rPr dirty="0"/>
+              <a:t>: </a:t>
+            </a:r>
+            <a:endParaRPr lang="he-IL" dirty="0"/>
+          </a:p>
+          <a:p>
+            <a:pPr algn="r" rtl="1">
+              <a:defRPr sz="1600"/>
+            </a:pPr>
+            <a:r>
+              <a:rPr dirty="0" err="1"/>
+              <a:t>כל</a:t>
+            </a:r>
+            <a:r>
+              <a:rPr dirty="0"/>
+              <a:t> </a:t>
+            </a:r>
+            <a:r>
+              <a:rPr dirty="0" err="1"/>
+              <a:t>הזרמים</a:t>
+            </a:r>
+            <a:r>
+              <a:rPr dirty="0"/>
+              <a:t> </a:t>
+            </a:r>
+            <a:r>
+              <a:rPr dirty="0" err="1"/>
+              <a:t>מהביטים</a:t>
+            </a:r>
+            <a:r>
+              <a:rPr dirty="0"/>
+              <a:t> </a:t>
+            </a:r>
+            <a:r>
+              <a:rPr dirty="0" err="1"/>
+              <a:t>הפעילים</a:t>
+            </a:r>
+            <a:r>
+              <a:rPr dirty="0"/>
+              <a:t> ('1') </a:t>
+            </a:r>
+            <a:r>
+              <a:rPr dirty="0" err="1"/>
+              <a:t>מתחברים</a:t>
+            </a:r>
+            <a:r>
+              <a:rPr dirty="0"/>
+              <a:t> </a:t>
+            </a:r>
+            <a:r>
+              <a:rPr dirty="0" err="1"/>
+              <a:t>וזורמים</a:t>
+            </a:r>
+            <a:r>
+              <a:rPr dirty="0"/>
+              <a:t> </a:t>
+            </a:r>
+            <a:r>
+              <a:rPr dirty="0" err="1"/>
+              <a:t>יחד</a:t>
+            </a:r>
+            <a:r>
+              <a:rPr dirty="0"/>
+              <a:t> </a:t>
+            </a:r>
+            <a:r>
+              <a:rPr dirty="0" err="1"/>
+              <a:t>דרך</a:t>
+            </a:r>
+            <a:r>
+              <a:rPr dirty="0"/>
+              <a:t> </a:t>
+            </a:r>
+            <a:r>
+              <a:rPr dirty="0" err="1"/>
+              <a:t>נגד</a:t>
+            </a:r>
+            <a:r>
+              <a:rPr dirty="0"/>
+              <a:t> </a:t>
+            </a:r>
+            <a:r>
+              <a:rPr dirty="0" err="1"/>
+              <a:t>הסיומת</a:t>
+            </a:r>
+            <a:r>
+              <a:rPr dirty="0"/>
+              <a:t> </a:t>
+            </a:r>
+            <a:r>
+              <a:rPr dirty="0" err="1"/>
+              <a:t>של</a:t>
+            </a:r>
+            <a:r>
+              <a:rPr dirty="0"/>
+              <a:t> </a:t>
+            </a:r>
+            <a:r>
+              <a:rPr dirty="0" err="1"/>
+              <a:t>המסך</a:t>
+            </a:r>
+            <a:r>
+              <a:rPr dirty="0"/>
+              <a:t> (75Ω) </a:t>
+            </a:r>
+            <a:r>
+              <a:rPr dirty="0" err="1"/>
+              <a:t>אל</a:t>
+            </a:r>
+            <a:r>
+              <a:rPr dirty="0"/>
+              <a:t> </a:t>
+            </a:r>
+            <a:r>
+              <a:rPr dirty="0" err="1"/>
+              <a:t>האדמה</a:t>
+            </a:r>
+            <a:r>
+              <a:rPr dirty="0"/>
+              <a:t>. </a:t>
+            </a:r>
+            <a:r>
+              <a:rPr dirty="0" err="1"/>
+              <a:t>כך</a:t>
+            </a:r>
+            <a:r>
+              <a:rPr dirty="0"/>
+              <a:t> </a:t>
+            </a:r>
+            <a:r>
+              <a:rPr dirty="0" err="1"/>
+              <a:t>נוצר</a:t>
+            </a:r>
+            <a:r>
+              <a:rPr dirty="0"/>
+              <a:t> </a:t>
+            </a:r>
+            <a:r>
+              <a:rPr dirty="0" err="1"/>
+              <a:t>מחלק</a:t>
+            </a:r>
+            <a:r>
+              <a:rPr dirty="0"/>
+              <a:t> </a:t>
+            </a:r>
+            <a:r>
+              <a:rPr dirty="0" err="1"/>
+              <a:t>מתח</a:t>
+            </a:r>
+            <a:r>
+              <a:rPr dirty="0"/>
+              <a:t> </a:t>
+            </a:r>
+            <a:r>
+              <a:rPr dirty="0" err="1"/>
+              <a:t>דינמי</a:t>
+            </a:r>
+            <a:r>
+              <a:rPr dirty="0"/>
+              <a:t> </a:t>
+            </a:r>
+            <a:r>
+              <a:rPr dirty="0" err="1"/>
+              <a:t>המפיק</a:t>
+            </a:r>
+            <a:r>
+              <a:rPr dirty="0"/>
+              <a:t> 0V </a:t>
+            </a:r>
+            <a:r>
+              <a:rPr dirty="0" err="1"/>
+              <a:t>עד</a:t>
+            </a:r>
+            <a:r>
+              <a:rPr dirty="0"/>
+              <a:t> </a:t>
+            </a:r>
+            <a:r>
+              <a:rPr lang="en-US" dirty="0"/>
+              <a:t>3.3</a:t>
+            </a:r>
+            <a:r>
+              <a:rPr dirty="0"/>
+              <a:t>V</a:t>
+            </a:r>
+            <a:r>
+              <a:rPr lang="he-IL" dirty="0"/>
+              <a:t>.</a:t>
+            </a:r>
+            <a:endParaRPr lang="en-US" dirty="0"/>
+          </a:p>
+          <a:p>
+            <a:pPr algn="r" rtl="1">
+              <a:defRPr sz="1600"/>
+            </a:pPr>
+            <a:endParaRPr lang="en-US" dirty="0"/>
+          </a:p>
+          <a:p>
+            <a:pPr algn="r" rtl="1">
+              <a:defRPr sz="1600"/>
+            </a:pPr>
+            <a:r>
+              <a:rPr lang="he-IL" dirty="0"/>
+              <a:t>מימין בצבע כחול מיוצג החיבור הפיזי במסך ,משמאל מיוצג החיבור בלוח ה</a:t>
+            </a:r>
+            <a:r>
+              <a:rPr lang="en-US" dirty="0"/>
+              <a:t>FPGA</a:t>
+            </a:r>
+            <a:endParaRPr dirty="0"/>
+          </a:p>
+        </p:txBody>
+      </p:sp>
+      <p:pic>
+        <p:nvPicPr>
+          <p:cNvPr id="4" name="Picture 3" descr="vga_voltage_divider_dac.png"/>
+          <p:cNvPicPr>
+            <a:picLocks noChangeAspect="1"/>
+          </p:cNvPicPr>
+          <p:nvPr/>
+        </p:nvPicPr>
+        <p:blipFill rotWithShape="1">
+          <a:blip r:embed="rId2"/>
+          <a:srcRect t="10239" b="6031"/>
+          <a:stretch/>
+        </p:blipFill>
+        <p:spPr>
+          <a:xfrm>
+            <a:off x="2612972" y="3919335"/>
+            <a:ext cx="3918056" cy="2611193"/>
+          </a:xfrm>
+          <a:prstGeom prst="rect">
+            <a:avLst/>
+          </a:prstGeom>
+        </p:spPr>
+      </p:pic>
+      <p:sp>
+        <p:nvSpPr>
+          <p:cNvPr id="5" name="Rectangle 5">
+            <a:extLst>
+              <a:ext uri="{FF2B5EF4-FFF2-40B4-BE49-F238E27FC236}">
+                <a16:creationId xmlns:a16="http://schemas.microsoft.com/office/drawing/2014/main" id="{25C6F1A3-CEA7-43DA-BE32-B9A50E2F2E7C}"/>
+              </a:ext>
+            </a:extLst>
+          </p:cNvPr>
+          <p:cNvSpPr/>
+          <p:nvPr/>
+        </p:nvSpPr>
+        <p:spPr>
+          <a:xfrm>
+            <a:off x="5263018" y="3808279"/>
+            <a:ext cx="1148933" cy="2862458"/>
+          </a:xfrm>
+          <a:prstGeom prst="rect">
+            <a:avLst/>
+          </a:prstGeom>
+          <a:noFill/>
+          <a:ln w="50800">
+            <a:solidFill>
+              <a:srgbClr val="0070C0"/>
+            </a:solidFill>
+          </a:ln>
+        </p:spPr>
+        <p:style>
+          <a:lnRef idx="1">
+            <a:schemeClr val="accent1"/>
+          </a:lnRef>
+          <a:fillRef idx="3">
+            <a:schemeClr val="accent1"/>
+          </a:fillRef>
+          <a:effectRef idx="2">
+            <a:schemeClr val="accent1"/>
+          </a:effectRef>
+          <a:fontRef idx="minor">
+            <a:schemeClr val="lt1"/>
+          </a:fontRef>
+        </p:style>
+        <p:txBody>
+          <a:bodyPr rtlCol="0" anchor="ctr"/>
+          <a:lstStyle/>
+          <a:p>
+            <a:pPr algn="ctr"/>
+            <a:endParaRPr/>
+          </a:p>
+        </p:txBody>
+      </p:sp>
+      <p:sp>
+        <p:nvSpPr>
+          <p:cNvPr id="6" name="Rectangle 4">
+            <a:extLst>
+              <a:ext uri="{FF2B5EF4-FFF2-40B4-BE49-F238E27FC236}">
+                <a16:creationId xmlns:a16="http://schemas.microsoft.com/office/drawing/2014/main" id="{73D7872E-440C-47D3-9128-B0BE4AC00DBD}"/>
+              </a:ext>
+            </a:extLst>
+          </p:cNvPr>
+          <p:cNvSpPr/>
+          <p:nvPr/>
+        </p:nvSpPr>
+        <p:spPr>
+          <a:xfrm>
+            <a:off x="2683517" y="3808279"/>
+            <a:ext cx="2396007" cy="2862458"/>
+          </a:xfrm>
+          <a:prstGeom prst="rect">
+            <a:avLst/>
+          </a:prstGeom>
+          <a:noFill/>
+          <a:ln w="38100">
+            <a:solidFill>
+              <a:srgbClr val="FF0000"/>
+            </a:solidFill>
+          </a:ln>
+        </p:spPr>
+        <p:style>
+          <a:lnRef idx="1">
+            <a:schemeClr val="accent1"/>
+          </a:lnRef>
+          <a:fillRef idx="3">
+            <a:schemeClr val="accent1"/>
+          </a:fillRef>
+          <a:effectRef idx="2">
+            <a:schemeClr val="accent1"/>
+          </a:effectRef>
+          <a:fontRef idx="minor">
+            <a:schemeClr val="lt1"/>
+          </a:fontRef>
+        </p:style>
+        <p:txBody>
+          <a:bodyPr rtlCol="0" anchor="ctr"/>
+          <a:lstStyle/>
+          <a:p>
+            <a:pPr algn="ctr"/>
+            <a:endParaRPr/>
+          </a:p>
+        </p:txBody>
+      </p:sp>
+    </p:spTree>
+  </p:cSld>
+  <p:clrMapOvr>
+    <a:masterClrMapping/>
+  </p:clrMapOvr>
+</p:sld>
+</file>
+
+<file path=ppt/slides/slide11.xml><?xml version="1.0" encoding="utf-8"?>
 <p:sld xmlns:a="http://schemas.openxmlformats.org/drawingml/2006/main" xmlns:r="http://schemas.openxmlformats.org/officeDocument/2006/relationships" xmlns:p="http://schemas.openxmlformats.org/presentationml/2006/main">
   <p:cSld>
     <p:spTree>
@@ -4622,7 +5394,7 @@
 </p:sld>
 </file>
 
-<file path=ppt/slides/slide11.xml><?xml version="1.0" encoding="utf-8"?>
+<file path=ppt/slides/slide12.xml><?xml version="1.0" encoding="utf-8"?>
 <p:sld xmlns:a="http://schemas.openxmlformats.org/drawingml/2006/main" xmlns:r="http://schemas.openxmlformats.org/officeDocument/2006/relationships" xmlns:p="http://schemas.openxmlformats.org/presentationml/2006/main">
   <p:cSld>
     <p:spTree>
@@ -5106,660 +5878,6 @@
           <a:xfrm>
             <a:off x="2722179" y="3484125"/>
             <a:ext cx="4708635" cy="3099238"/>
-          </a:xfrm>
-          <a:prstGeom prst="rect">
-            <a:avLst/>
-          </a:prstGeom>
-        </p:spPr>
-      </p:pic>
-    </p:spTree>
-  </p:cSld>
-  <p:clrMapOvr>
-    <a:masterClrMapping/>
-  </p:clrMapOvr>
-</p:sld>
-</file>
-
-<file path=ppt/slides/slide12.xml><?xml version="1.0" encoding="utf-8"?>
-<p:sld xmlns:a="http://schemas.openxmlformats.org/drawingml/2006/main" xmlns:r="http://schemas.openxmlformats.org/officeDocument/2006/relationships" xmlns:p="http://schemas.openxmlformats.org/presentationml/2006/main">
-  <p:cSld>
-    <p:spTree>
-      <p:nvGrpSpPr>
-        <p:cNvPr id="1" name=""/>
-        <p:cNvGrpSpPr/>
-        <p:nvPr/>
-      </p:nvGrpSpPr>
-      <p:grpSpPr>
-        <a:xfrm>
-          <a:off x="0" y="0"/>
-          <a:ext cx="0" cy="0"/>
-          <a:chOff x="0" y="0"/>
-          <a:chExt cx="0" cy="0"/>
-        </a:xfrm>
-      </p:grpSpPr>
-      <p:sp>
-        <p:nvSpPr>
-          <p:cNvPr id="2" name="Title 1"/>
-          <p:cNvSpPr>
-            <a:spLocks noGrp="1"/>
-          </p:cNvSpPr>
-          <p:nvPr>
-            <p:ph type="title"/>
-          </p:nvPr>
-        </p:nvSpPr>
-        <p:spPr/>
-        <p:txBody>
-          <a:bodyPr>
-            <a:normAutofit fontScale="90000"/>
-          </a:bodyPr>
-          <a:lstStyle/>
-          <a:p>
-            <a:pPr algn="ctr" rtl="1"/>
-            <a:r>
-              <a:rPr dirty="0" err="1"/>
-              <a:t>זיכרון</a:t>
-            </a:r>
-            <a:r>
-              <a:rPr dirty="0"/>
-              <a:t> </a:t>
-            </a:r>
-            <a:r>
-              <a:rPr dirty="0" err="1"/>
-              <a:t>הBRAM</a:t>
-            </a:r>
-            <a:br>
-              <a:rPr lang="he-IL" dirty="0"/>
-            </a:br>
-            <a:r>
-              <a:rPr dirty="0"/>
-              <a:t>(Frame Buffer)</a:t>
-            </a:r>
-          </a:p>
-        </p:txBody>
-      </p:sp>
-      <p:sp>
-        <p:nvSpPr>
-          <p:cNvPr id="3" name="TextBox 2"/>
-          <p:cNvSpPr txBox="1"/>
-          <p:nvPr/>
-        </p:nvSpPr>
-        <p:spPr>
-          <a:xfrm>
-            <a:off x="71120" y="1097280"/>
-            <a:ext cx="9072880" cy="2585323"/>
-          </a:xfrm>
-          <a:prstGeom prst="rect">
-            <a:avLst/>
-          </a:prstGeom>
-          <a:noFill/>
-        </p:spPr>
-        <p:txBody>
-          <a:bodyPr wrap="square">
-            <a:spAutoFit/>
-          </a:bodyPr>
-          <a:lstStyle/>
-          <a:p>
-            <a:endParaRPr dirty="0"/>
-          </a:p>
-          <a:p>
-            <a:pPr algn="r" rtl="1">
-              <a:defRPr sz="1600"/>
-            </a:pPr>
-            <a:r>
-              <a:rPr dirty="0"/>
-              <a:t>• </a:t>
-            </a:r>
-            <a:r>
-              <a:rPr dirty="0" err="1"/>
-              <a:t>תצורת</a:t>
-            </a:r>
-            <a:r>
-              <a:rPr dirty="0"/>
-              <a:t> Dual-Port</a:t>
-            </a:r>
-            <a:r>
-              <a:rPr lang="he-IL" dirty="0"/>
-              <a:t>:</a:t>
-            </a:r>
-          </a:p>
-          <a:p>
-            <a:pPr algn="r" rtl="1">
-              <a:defRPr sz="1600"/>
-            </a:pPr>
-            <a:r>
-              <a:rPr lang="he-IL" dirty="0"/>
-              <a:t>   </a:t>
-            </a:r>
-            <a:r>
-              <a:rPr dirty="0" err="1"/>
-              <a:t>הפרדה</a:t>
-            </a:r>
-            <a:r>
-              <a:rPr dirty="0"/>
-              <a:t> </a:t>
-            </a:r>
-            <a:r>
-              <a:rPr dirty="0" err="1"/>
-              <a:t>מוחלטת</a:t>
-            </a:r>
-            <a:r>
-              <a:rPr dirty="0"/>
-              <a:t> </a:t>
-            </a:r>
-            <a:r>
-              <a:rPr dirty="0" err="1"/>
-              <a:t>לחומרת</a:t>
-            </a:r>
-            <a:r>
-              <a:rPr dirty="0"/>
-              <a:t> </a:t>
-            </a:r>
-            <a:r>
-              <a:rPr dirty="0" err="1"/>
-              <a:t>כתיבה</a:t>
-            </a:r>
-            <a:r>
-              <a:rPr dirty="0"/>
-              <a:t> (A) </a:t>
-            </a:r>
-            <a:r>
-              <a:rPr lang="he-IL" dirty="0"/>
-              <a:t> </a:t>
-            </a:r>
-            <a:r>
-              <a:rPr dirty="0" err="1"/>
-              <a:t>וקריאה</a:t>
-            </a:r>
-            <a:r>
-              <a:rPr dirty="0"/>
-              <a:t> (B) </a:t>
-            </a:r>
-            <a:r>
-              <a:rPr lang="he-IL" dirty="0"/>
-              <a:t>,</a:t>
-            </a:r>
-            <a:r>
-              <a:rPr dirty="0" err="1"/>
-              <a:t>זהו</a:t>
-            </a:r>
-            <a:r>
-              <a:rPr dirty="0"/>
-              <a:t> </a:t>
-            </a:r>
-            <a:r>
-              <a:rPr dirty="0" err="1"/>
-              <a:t>הפתרון</a:t>
-            </a:r>
-            <a:r>
-              <a:rPr dirty="0"/>
-              <a:t> </a:t>
-            </a:r>
-            <a:r>
-              <a:rPr dirty="0" err="1"/>
-              <a:t>שלנו</a:t>
-            </a:r>
-            <a:r>
-              <a:rPr dirty="0"/>
-              <a:t> ל-</a:t>
-            </a:r>
-            <a:r>
-              <a:rPr dirty="0" err="1"/>
-              <a:t>חציית</a:t>
-            </a:r>
-            <a:r>
-              <a:rPr dirty="0"/>
-              <a:t> </a:t>
-            </a:r>
-            <a:r>
-              <a:rPr dirty="0" err="1"/>
-              <a:t>תחומי</a:t>
-            </a:r>
-            <a:r>
-              <a:rPr dirty="0"/>
-              <a:t> </a:t>
-            </a:r>
-            <a:r>
-              <a:rPr dirty="0" err="1"/>
-              <a:t>שעון</a:t>
-            </a:r>
-            <a:r>
-              <a:rPr dirty="0"/>
-              <a:t>) </a:t>
-            </a:r>
-            <a:r>
-              <a:rPr lang="he-IL" dirty="0" err="1"/>
-              <a:t>למנו</a:t>
-            </a:r>
-            <a:r>
-              <a:rPr dirty="0"/>
-              <a:t>ע </a:t>
-            </a:r>
-            <a:r>
-              <a:rPr dirty="0" err="1"/>
-              <a:t>התנגשויות</a:t>
-            </a:r>
-            <a:r>
-              <a:rPr dirty="0"/>
-              <a:t> </a:t>
-            </a:r>
-            <a:r>
-              <a:rPr dirty="0" err="1"/>
-              <a:t>נתוני</a:t>
-            </a:r>
-            <a:r>
-              <a:rPr lang="he-IL" dirty="0"/>
-              <a:t>ם)</a:t>
-            </a:r>
-            <a:endParaRPr dirty="0"/>
-          </a:p>
-          <a:p>
-            <a:pPr algn="r" rtl="1">
-              <a:defRPr sz="1600"/>
-            </a:pPr>
-            <a:r>
-              <a:rPr dirty="0"/>
-              <a:t>• </a:t>
-            </a:r>
-            <a:r>
-              <a:rPr dirty="0" err="1"/>
-              <a:t>שעונים</a:t>
-            </a:r>
-            <a:r>
-              <a:rPr dirty="0"/>
-              <a:t> א-</a:t>
-            </a:r>
-            <a:r>
-              <a:rPr dirty="0" err="1"/>
-              <a:t>סינכרוניים</a:t>
-            </a:r>
-            <a:r>
-              <a:rPr dirty="0"/>
-              <a:t>: </a:t>
-            </a:r>
-            <a:endParaRPr lang="he-IL" dirty="0"/>
-          </a:p>
-          <a:p>
-            <a:pPr algn="r" rtl="1">
-              <a:defRPr sz="1600"/>
-            </a:pPr>
-            <a:r>
-              <a:rPr lang="he-IL" dirty="0"/>
-              <a:t>   </a:t>
-            </a:r>
-            <a:r>
-              <a:rPr dirty="0" err="1"/>
-              <a:t>הכתיבה</a:t>
-            </a:r>
-            <a:r>
-              <a:rPr dirty="0"/>
-              <a:t> (</a:t>
-            </a:r>
-            <a:r>
-              <a:rPr dirty="0" err="1"/>
-              <a:t>clka</a:t>
-            </a:r>
-            <a:r>
-              <a:rPr dirty="0"/>
-              <a:t>) </a:t>
-            </a:r>
-            <a:r>
-              <a:rPr dirty="0" err="1"/>
-              <a:t>מתבצעת</a:t>
-            </a:r>
-            <a:r>
-              <a:rPr dirty="0"/>
-              <a:t> </a:t>
-            </a:r>
-            <a:r>
-              <a:rPr dirty="0" err="1"/>
-              <a:t>בתדר</a:t>
-            </a:r>
-            <a:r>
-              <a:rPr dirty="0"/>
-              <a:t> </a:t>
-            </a:r>
-            <a:r>
-              <a:rPr dirty="0" err="1"/>
-              <a:t>המערכת</a:t>
-            </a:r>
-            <a:r>
-              <a:rPr dirty="0"/>
-              <a:t> (100MHz), </a:t>
-            </a:r>
-            <a:r>
-              <a:rPr lang="he-IL" dirty="0"/>
-              <a:t>,</a:t>
-            </a:r>
-            <a:r>
-              <a:rPr dirty="0" err="1"/>
-              <a:t>בעוד</a:t>
-            </a:r>
-            <a:r>
-              <a:rPr dirty="0"/>
-              <a:t> </a:t>
-            </a:r>
-            <a:r>
-              <a:rPr dirty="0" err="1"/>
-              <a:t>הקריאה</a:t>
-            </a:r>
-            <a:r>
-              <a:rPr dirty="0"/>
-              <a:t> </a:t>
-            </a:r>
-            <a:r>
-              <a:rPr dirty="0" err="1"/>
-              <a:t>למסך</a:t>
-            </a:r>
-            <a:r>
-              <a:rPr dirty="0"/>
-              <a:t> (</a:t>
-            </a:r>
-            <a:r>
-              <a:rPr dirty="0" err="1"/>
-              <a:t>clkb</a:t>
-            </a:r>
-            <a:r>
-              <a:rPr dirty="0"/>
-              <a:t>) </a:t>
-            </a:r>
-            <a:r>
-              <a:rPr dirty="0" err="1"/>
-              <a:t>מונעת</a:t>
-            </a:r>
-            <a:r>
-              <a:rPr dirty="0"/>
-              <a:t> </a:t>
-            </a:r>
-            <a:r>
-              <a:rPr dirty="0" err="1"/>
-              <a:t>בלעדית</a:t>
-            </a:r>
-            <a:r>
-              <a:rPr dirty="0"/>
-              <a:t> </a:t>
-            </a:r>
-            <a:r>
-              <a:rPr dirty="0" err="1"/>
-              <a:t>על</a:t>
-            </a:r>
-            <a:r>
-              <a:rPr dirty="0"/>
-              <a:t> </a:t>
-            </a:r>
-            <a:r>
-              <a:rPr dirty="0" err="1"/>
-              <a:t>ידי</a:t>
-            </a:r>
-            <a:r>
-              <a:rPr dirty="0"/>
-              <a:t> </a:t>
-            </a:r>
-            <a:r>
-              <a:rPr dirty="0" err="1"/>
-              <a:t>שעון</a:t>
-            </a:r>
-            <a:r>
-              <a:rPr dirty="0"/>
-              <a:t> ה-VGA </a:t>
-            </a:r>
-            <a:r>
-              <a:rPr dirty="0" err="1"/>
-              <a:t>שלנו</a:t>
-            </a:r>
-            <a:r>
-              <a:rPr dirty="0"/>
-              <a:t> (25MHz).</a:t>
-            </a:r>
-          </a:p>
-          <a:p>
-            <a:pPr algn="r" rtl="1">
-              <a:defRPr sz="1600"/>
-            </a:pPr>
-            <a:r>
-              <a:rPr dirty="0"/>
-              <a:t>• </a:t>
-            </a:r>
-            <a:r>
-              <a:rPr dirty="0" err="1"/>
-              <a:t>ממדי</a:t>
-            </a:r>
-            <a:r>
-              <a:rPr dirty="0"/>
-              <a:t> </a:t>
-            </a:r>
-            <a:r>
-              <a:rPr dirty="0" err="1"/>
-              <a:t>הזיכרון</a:t>
-            </a:r>
-            <a:r>
-              <a:rPr dirty="0"/>
-              <a:t> (307,200x12) </a:t>
-            </a:r>
-            <a:r>
-              <a:rPr lang="he-IL" dirty="0"/>
-              <a:t>:</a:t>
-            </a:r>
-          </a:p>
-          <a:p>
-            <a:pPr algn="r" rtl="1">
-              <a:defRPr sz="1600"/>
-            </a:pPr>
-            <a:r>
-              <a:rPr lang="he-IL" dirty="0"/>
-              <a:t>  </a:t>
-            </a:r>
-            <a:r>
-              <a:rPr dirty="0" err="1"/>
-              <a:t>הזיכרון</a:t>
-            </a:r>
-            <a:r>
-              <a:rPr dirty="0"/>
-              <a:t> </a:t>
-            </a:r>
-            <a:r>
-              <a:rPr dirty="0" err="1"/>
-              <a:t>מוקצה</a:t>
-            </a:r>
-            <a:r>
-              <a:rPr dirty="0"/>
-              <a:t> </a:t>
-            </a:r>
-            <a:r>
-              <a:rPr dirty="0" err="1"/>
-              <a:t>להכיל</a:t>
-            </a:r>
-            <a:r>
-              <a:rPr dirty="0"/>
-              <a:t> 307,200 </a:t>
-            </a:r>
-            <a:r>
-              <a:rPr lang="he-IL" dirty="0"/>
-              <a:t> </a:t>
-            </a:r>
-            <a:r>
-              <a:rPr dirty="0" err="1"/>
-              <a:t>פיקסלים</a:t>
-            </a:r>
-            <a:r>
-              <a:rPr dirty="0"/>
-              <a:t> </a:t>
-            </a:r>
-            <a:r>
-              <a:rPr lang="he-IL" dirty="0"/>
-              <a:t>,</a:t>
-            </a:r>
-            <a:r>
-              <a:rPr dirty="0" err="1"/>
-              <a:t>רזולוציה</a:t>
-            </a:r>
-            <a:r>
-              <a:rPr dirty="0"/>
-              <a:t> </a:t>
-            </a:r>
-            <a:r>
-              <a:rPr dirty="0" err="1"/>
-              <a:t>של</a:t>
-            </a:r>
-            <a:r>
-              <a:rPr dirty="0"/>
-              <a:t> 640x480</a:t>
-            </a:r>
-          </a:p>
-          <a:p>
-            <a:pPr algn="r" rtl="1">
-              <a:defRPr sz="1600"/>
-            </a:pPr>
-            <a:r>
-              <a:rPr dirty="0"/>
-              <a:t>• </a:t>
-            </a:r>
-            <a:r>
-              <a:rPr dirty="0" err="1"/>
-              <a:t>תפוקת</a:t>
-            </a:r>
-            <a:r>
-              <a:rPr dirty="0"/>
-              <a:t> </a:t>
-            </a:r>
-            <a:r>
-              <a:rPr dirty="0" err="1"/>
-              <a:t>הנתונים</a:t>
-            </a:r>
-            <a:r>
-              <a:rPr dirty="0"/>
-              <a:t>: </a:t>
-            </a:r>
-            <a:endParaRPr lang="he-IL" dirty="0"/>
-          </a:p>
-          <a:p>
-            <a:pPr algn="r" rtl="1">
-              <a:defRPr sz="1600"/>
-            </a:pPr>
-            <a:r>
-              <a:rPr lang="he-IL" dirty="0"/>
-              <a:t>  </a:t>
-            </a:r>
-            <a:r>
-              <a:rPr dirty="0" err="1"/>
-              <a:t>האות</a:t>
-            </a:r>
-            <a:r>
-              <a:rPr dirty="0"/>
-              <a:t> </a:t>
-            </a:r>
-            <a:r>
-              <a:rPr dirty="0" err="1"/>
-              <a:t>doutb</a:t>
-            </a:r>
-            <a:r>
-              <a:rPr dirty="0"/>
-              <a:t> </a:t>
-            </a:r>
-            <a:r>
-              <a:rPr lang="he-IL" dirty="0"/>
-              <a:t> </a:t>
-            </a:r>
-            <a:r>
-              <a:rPr dirty="0" err="1"/>
-              <a:t>משחרר</a:t>
-            </a:r>
-            <a:r>
-              <a:rPr dirty="0"/>
-              <a:t> 12 </a:t>
-            </a:r>
-            <a:r>
-              <a:rPr dirty="0" err="1"/>
-              <a:t>ביט</a:t>
-            </a:r>
-            <a:r>
-              <a:rPr dirty="0"/>
-              <a:t> </a:t>
-            </a:r>
-            <a:r>
-              <a:rPr dirty="0" err="1"/>
-              <a:t>של</a:t>
-            </a:r>
-            <a:r>
-              <a:rPr dirty="0"/>
-              <a:t> </a:t>
-            </a:r>
-            <a:r>
-              <a:rPr dirty="0" err="1"/>
-              <a:t>צבע</a:t>
-            </a:r>
-            <a:r>
-              <a:rPr dirty="0"/>
-              <a:t> </a:t>
-            </a:r>
-            <a:r>
-              <a:rPr lang="he-IL" dirty="0"/>
-              <a:t> </a:t>
-            </a:r>
-            <a:r>
-              <a:rPr dirty="0"/>
-              <a:t>(RGB) </a:t>
-            </a:r>
-            <a:r>
-              <a:rPr dirty="0" err="1"/>
-              <a:t>בכל</a:t>
-            </a:r>
-            <a:r>
-              <a:rPr dirty="0"/>
-              <a:t> </a:t>
-            </a:r>
-            <a:r>
-              <a:rPr dirty="0" err="1"/>
-              <a:t>מחזור</a:t>
-            </a:r>
-            <a:r>
-              <a:rPr dirty="0"/>
-              <a:t> </a:t>
-            </a:r>
-            <a:r>
-              <a:rPr dirty="0" err="1"/>
-              <a:t>שעון</a:t>
-            </a:r>
-            <a:r>
-              <a:rPr dirty="0"/>
-              <a:t> (25MHz) </a:t>
-            </a:r>
-            <a:r>
-              <a:rPr dirty="0" err="1"/>
-              <a:t>ישירות</a:t>
-            </a:r>
-            <a:r>
-              <a:rPr dirty="0"/>
-              <a:t> </a:t>
-            </a:r>
-            <a:r>
-              <a:rPr dirty="0" err="1"/>
-              <a:t>לבקר</a:t>
-            </a:r>
-            <a:r>
-              <a:rPr dirty="0"/>
-              <a:t> ה-VGA.</a:t>
-            </a:r>
-          </a:p>
-        </p:txBody>
-      </p:sp>
-      <p:pic>
-        <p:nvPicPr>
-          <p:cNvPr id="4" name="Picture 3" descr="bram_ip_symbol.png"/>
-          <p:cNvPicPr>
-            <a:picLocks noChangeAspect="1"/>
-          </p:cNvPicPr>
-          <p:nvPr/>
-        </p:nvPicPr>
-        <p:blipFill>
-          <a:blip r:embed="rId2"/>
-          <a:stretch>
-            <a:fillRect/>
-          </a:stretch>
-        </p:blipFill>
-        <p:spPr>
-          <a:xfrm>
-            <a:off x="1582451" y="3735593"/>
-            <a:ext cx="5458429" cy="2585323"/>
           </a:xfrm>
           <a:prstGeom prst="rect">
             <a:avLst/>
@@ -5801,12 +5919,7 @@
             <p:ph type="title"/>
           </p:nvPr>
         </p:nvSpPr>
-        <p:spPr>
-          <a:xfrm>
-            <a:off x="457200" y="274638"/>
-            <a:ext cx="8686800" cy="822642"/>
-          </a:xfrm>
-        </p:spPr>
+        <p:spPr/>
         <p:txBody>
           <a:bodyPr>
             <a:normAutofit fontScale="90000"/>
@@ -5816,53 +5929,23 @@
             <a:pPr algn="ctr" rtl="1"/>
             <a:r>
               <a:rPr dirty="0" err="1"/>
-              <a:t>ממשק</a:t>
-            </a:r>
-            <a:r>
-              <a:rPr dirty="0"/>
-              <a:t> </a:t>
-            </a:r>
-            <a:r>
-              <a:rPr dirty="0" err="1"/>
-              <a:t>המצלמה</a:t>
-            </a:r>
-            <a:r>
-              <a:rPr lang="he-IL" dirty="0"/>
-              <a:t>,</a:t>
-            </a:r>
-            <a:r>
-              <a:rPr dirty="0"/>
-              <a:t> </a:t>
-            </a:r>
-            <a:r>
-              <a:rPr dirty="0" err="1"/>
-              <a:t>מהעולם</a:t>
-            </a:r>
-            <a:r>
-              <a:rPr dirty="0"/>
-              <a:t> </a:t>
-            </a:r>
-            <a:r>
-              <a:rPr dirty="0" err="1"/>
-              <a:t>הפיזי</a:t>
-            </a:r>
-            <a:r>
-              <a:rPr dirty="0"/>
-              <a:t> </a:t>
-            </a:r>
-            <a:r>
-              <a:rPr dirty="0" err="1"/>
-              <a:t>אל</a:t>
-            </a:r>
-            <a:r>
-              <a:rPr dirty="0"/>
-              <a:t> </a:t>
-            </a:r>
-            <a:r>
-              <a:rPr dirty="0" err="1"/>
-              <a:t>הזיכרון</a:t>
-            </a:r>
-            <a:endParaRPr dirty="0"/>
+              <a:t>זיכרון</a:t>
+            </a:r>
+            <a:r>
+              <a:rPr dirty="0"/>
+              <a:t> </a:t>
+            </a:r>
+            <a:r>
+              <a:rPr dirty="0" err="1"/>
+              <a:t>הBRAM</a:t>
+            </a:r>
+            <a:br>
+              <a:rPr lang="he-IL" dirty="0"/>
+            </a:br>
+            <a:r>
+              <a:rPr dirty="0"/>
+              <a:t>(Frame Buffer)</a:t>
+            </a:r>
           </a:p>
         </p:txBody>
       </p:sp>
@@ -5874,8 +5957,8 @@
         </p:nvSpPr>
         <p:spPr>
           <a:xfrm>
-            <a:off x="3392906" y="1097280"/>
-            <a:ext cx="8686800" cy="646331"/>
+            <a:off x="71120" y="1097280"/>
+            <a:ext cx="9072880" cy="2585323"/>
           </a:xfrm>
           <a:prstGeom prst="rect">
             <a:avLst/>
@@ -5888,19 +5971,552 @@
           </a:bodyPr>
           <a:lstStyle/>
           <a:p>
-            <a:r>
-              <a:rPr lang="he-IL" dirty="0"/>
-              <a:t>התקשורת בין המצלמה ללוח מחולקת לשני ערוצים מקבילים:</a:t>
-            </a:r>
-          </a:p>
-          <a:p>
             <a:endParaRPr dirty="0"/>
+          </a:p>
+          <a:p>
+            <a:pPr algn="r" rtl="1">
+              <a:defRPr sz="1600"/>
+            </a:pPr>
+            <a:r>
+              <a:rPr dirty="0"/>
+              <a:t>• </a:t>
+            </a:r>
+            <a:r>
+              <a:rPr dirty="0" err="1"/>
+              <a:t>תצורת</a:t>
+            </a:r>
+            <a:r>
+              <a:rPr dirty="0"/>
+              <a:t> Dual-Port</a:t>
+            </a:r>
+            <a:r>
+              <a:rPr lang="he-IL" dirty="0"/>
+              <a:t>:</a:t>
+            </a:r>
+          </a:p>
+          <a:p>
+            <a:pPr algn="r" rtl="1">
+              <a:defRPr sz="1600"/>
+            </a:pPr>
+            <a:r>
+              <a:rPr lang="he-IL" dirty="0"/>
+              <a:t>   </a:t>
+            </a:r>
+            <a:r>
+              <a:rPr dirty="0" err="1"/>
+              <a:t>הפרדה</a:t>
+            </a:r>
+            <a:r>
+              <a:rPr dirty="0"/>
+              <a:t> </a:t>
+            </a:r>
+            <a:r>
+              <a:rPr dirty="0" err="1"/>
+              <a:t>מוחלטת</a:t>
+            </a:r>
+            <a:r>
+              <a:rPr dirty="0"/>
+              <a:t> </a:t>
+            </a:r>
+            <a:r>
+              <a:rPr dirty="0" err="1"/>
+              <a:t>לחומרת</a:t>
+            </a:r>
+            <a:r>
+              <a:rPr dirty="0"/>
+              <a:t> </a:t>
+            </a:r>
+            <a:r>
+              <a:rPr dirty="0" err="1"/>
+              <a:t>כתיבה</a:t>
+            </a:r>
+            <a:r>
+              <a:rPr dirty="0"/>
+              <a:t> (A) </a:t>
+            </a:r>
+            <a:r>
+              <a:rPr lang="he-IL" dirty="0"/>
+              <a:t> </a:t>
+            </a:r>
+            <a:r>
+              <a:rPr dirty="0" err="1"/>
+              <a:t>וקריאה</a:t>
+            </a:r>
+            <a:r>
+              <a:rPr dirty="0"/>
+              <a:t> (B) </a:t>
+            </a:r>
+            <a:r>
+              <a:rPr lang="he-IL" dirty="0"/>
+              <a:t>,</a:t>
+            </a:r>
+            <a:r>
+              <a:rPr dirty="0" err="1"/>
+              <a:t>זהו</a:t>
+            </a:r>
+            <a:r>
+              <a:rPr dirty="0"/>
+              <a:t> </a:t>
+            </a:r>
+            <a:r>
+              <a:rPr dirty="0" err="1"/>
+              <a:t>הפתרון</a:t>
+            </a:r>
+            <a:r>
+              <a:rPr dirty="0"/>
+              <a:t> </a:t>
+            </a:r>
+            <a:r>
+              <a:rPr dirty="0" err="1"/>
+              <a:t>שלנו</a:t>
+            </a:r>
+            <a:r>
+              <a:rPr dirty="0"/>
+              <a:t> ל-</a:t>
+            </a:r>
+            <a:r>
+              <a:rPr dirty="0" err="1"/>
+              <a:t>חציית</a:t>
+            </a:r>
+            <a:r>
+              <a:rPr dirty="0"/>
+              <a:t> </a:t>
+            </a:r>
+            <a:r>
+              <a:rPr dirty="0" err="1"/>
+              <a:t>תחומי</a:t>
+            </a:r>
+            <a:r>
+              <a:rPr dirty="0"/>
+              <a:t> </a:t>
+            </a:r>
+            <a:r>
+              <a:rPr dirty="0" err="1"/>
+              <a:t>שעון</a:t>
+            </a:r>
+            <a:r>
+              <a:rPr dirty="0"/>
+              <a:t>) </a:t>
+            </a:r>
+            <a:r>
+              <a:rPr lang="he-IL" dirty="0" err="1"/>
+              <a:t>למנו</a:t>
+            </a:r>
+            <a:r>
+              <a:rPr dirty="0"/>
+              <a:t>ע </a:t>
+            </a:r>
+            <a:r>
+              <a:rPr dirty="0" err="1"/>
+              <a:t>התנגשויות</a:t>
+            </a:r>
+            <a:r>
+              <a:rPr dirty="0"/>
+              <a:t> </a:t>
+            </a:r>
+            <a:r>
+              <a:rPr dirty="0" err="1"/>
+              <a:t>נתוני</a:t>
+            </a:r>
+            <a:r>
+              <a:rPr lang="he-IL" dirty="0"/>
+              <a:t>ם)</a:t>
+            </a:r>
+            <a:endParaRPr dirty="0"/>
+          </a:p>
+          <a:p>
+            <a:pPr algn="r" rtl="1">
+              <a:defRPr sz="1600"/>
+            </a:pPr>
+            <a:r>
+              <a:rPr dirty="0"/>
+              <a:t>• </a:t>
+            </a:r>
+            <a:r>
+              <a:rPr dirty="0" err="1"/>
+              <a:t>שעונים</a:t>
+            </a:r>
+            <a:r>
+              <a:rPr dirty="0"/>
+              <a:t> א-</a:t>
+            </a:r>
+            <a:r>
+              <a:rPr dirty="0" err="1"/>
+              <a:t>סינכרוניים</a:t>
+            </a:r>
+            <a:r>
+              <a:rPr dirty="0"/>
+              <a:t>: </a:t>
+            </a:r>
+            <a:endParaRPr lang="he-IL" dirty="0"/>
+          </a:p>
+          <a:p>
+            <a:pPr algn="r" rtl="1">
+              <a:defRPr sz="1600"/>
+            </a:pPr>
+            <a:r>
+              <a:rPr lang="he-IL" dirty="0"/>
+              <a:t>   </a:t>
+            </a:r>
+            <a:r>
+              <a:rPr dirty="0" err="1"/>
+              <a:t>הכתיבה</a:t>
+            </a:r>
+            <a:r>
+              <a:rPr dirty="0"/>
+              <a:t> (</a:t>
+            </a:r>
+            <a:r>
+              <a:rPr dirty="0" err="1"/>
+              <a:t>clka</a:t>
+            </a:r>
+            <a:r>
+              <a:rPr dirty="0"/>
+              <a:t>) </a:t>
+            </a:r>
+            <a:r>
+              <a:rPr dirty="0" err="1"/>
+              <a:t>מתבצעת</a:t>
+            </a:r>
+            <a:r>
+              <a:rPr dirty="0"/>
+              <a:t> </a:t>
+            </a:r>
+            <a:r>
+              <a:rPr dirty="0" err="1"/>
+              <a:t>בתדר</a:t>
+            </a:r>
+            <a:r>
+              <a:rPr dirty="0"/>
+              <a:t> </a:t>
+            </a:r>
+            <a:r>
+              <a:rPr dirty="0" err="1"/>
+              <a:t>המערכת</a:t>
+            </a:r>
+            <a:r>
+              <a:rPr dirty="0"/>
+              <a:t> (100MHz), </a:t>
+            </a:r>
+            <a:r>
+              <a:rPr lang="he-IL" dirty="0"/>
+              <a:t>,</a:t>
+            </a:r>
+            <a:r>
+              <a:rPr dirty="0" err="1"/>
+              <a:t>בעוד</a:t>
+            </a:r>
+            <a:r>
+              <a:rPr dirty="0"/>
+              <a:t> </a:t>
+            </a:r>
+            <a:r>
+              <a:rPr dirty="0" err="1"/>
+              <a:t>הקריאה</a:t>
+            </a:r>
+            <a:r>
+              <a:rPr dirty="0"/>
+              <a:t> </a:t>
+            </a:r>
+            <a:r>
+              <a:rPr dirty="0" err="1"/>
+              <a:t>למסך</a:t>
+            </a:r>
+            <a:r>
+              <a:rPr dirty="0"/>
+              <a:t> (</a:t>
+            </a:r>
+            <a:r>
+              <a:rPr dirty="0" err="1"/>
+              <a:t>clkb</a:t>
+            </a:r>
+            <a:r>
+              <a:rPr dirty="0"/>
+              <a:t>) </a:t>
+            </a:r>
+            <a:r>
+              <a:rPr dirty="0" err="1"/>
+              <a:t>מונעת</a:t>
+            </a:r>
+            <a:r>
+              <a:rPr dirty="0"/>
+              <a:t> </a:t>
+            </a:r>
+            <a:r>
+              <a:rPr dirty="0" err="1"/>
+              <a:t>בלעדית</a:t>
+            </a:r>
+            <a:r>
+              <a:rPr dirty="0"/>
+              <a:t> </a:t>
+            </a:r>
+            <a:r>
+              <a:rPr dirty="0" err="1"/>
+              <a:t>על</a:t>
+            </a:r>
+            <a:r>
+              <a:rPr dirty="0"/>
+              <a:t> </a:t>
+            </a:r>
+            <a:r>
+              <a:rPr dirty="0" err="1"/>
+              <a:t>ידי</a:t>
+            </a:r>
+            <a:r>
+              <a:rPr dirty="0"/>
+              <a:t> </a:t>
+            </a:r>
+            <a:r>
+              <a:rPr dirty="0" err="1"/>
+              <a:t>שעון</a:t>
+            </a:r>
+            <a:r>
+              <a:rPr dirty="0"/>
+              <a:t> ה-VGA </a:t>
+            </a:r>
+            <a:r>
+              <a:rPr dirty="0" err="1"/>
+              <a:t>שלנו</a:t>
+            </a:r>
+            <a:r>
+              <a:rPr dirty="0"/>
+              <a:t> (25MHz).</a:t>
+            </a:r>
+          </a:p>
+          <a:p>
+            <a:pPr algn="r" rtl="1">
+              <a:defRPr sz="1600"/>
+            </a:pPr>
+            <a:r>
+              <a:rPr dirty="0"/>
+              <a:t>• </a:t>
+            </a:r>
+            <a:r>
+              <a:rPr dirty="0" err="1"/>
+              <a:t>ממדי</a:t>
+            </a:r>
+            <a:r>
+              <a:rPr dirty="0"/>
+              <a:t> </a:t>
+            </a:r>
+            <a:r>
+              <a:rPr dirty="0" err="1"/>
+              <a:t>הזיכרון</a:t>
+            </a:r>
+            <a:r>
+              <a:rPr dirty="0"/>
+              <a:t> (307,200x12) </a:t>
+            </a:r>
+            <a:r>
+              <a:rPr lang="he-IL" dirty="0"/>
+              <a:t>:</a:t>
+            </a:r>
+          </a:p>
+          <a:p>
+            <a:pPr algn="r" rtl="1">
+              <a:defRPr sz="1600"/>
+            </a:pPr>
+            <a:r>
+              <a:rPr lang="he-IL" dirty="0"/>
+              <a:t>  </a:t>
+            </a:r>
+            <a:r>
+              <a:rPr dirty="0" err="1"/>
+              <a:t>הזיכרון</a:t>
+            </a:r>
+            <a:r>
+              <a:rPr dirty="0"/>
+              <a:t> </a:t>
+            </a:r>
+            <a:r>
+              <a:rPr dirty="0" err="1"/>
+              <a:t>מוקצה</a:t>
+            </a:r>
+            <a:r>
+              <a:rPr dirty="0"/>
+              <a:t> </a:t>
+            </a:r>
+            <a:r>
+              <a:rPr dirty="0" err="1"/>
+              <a:t>להכיל</a:t>
+            </a:r>
+            <a:r>
+              <a:rPr dirty="0"/>
+              <a:t> 307,200 </a:t>
+            </a:r>
+            <a:r>
+              <a:rPr lang="he-IL" dirty="0"/>
+              <a:t> </a:t>
+            </a:r>
+            <a:r>
+              <a:rPr dirty="0" err="1"/>
+              <a:t>פיקסלים</a:t>
+            </a:r>
+            <a:r>
+              <a:rPr dirty="0"/>
+              <a:t> </a:t>
+            </a:r>
+            <a:r>
+              <a:rPr lang="he-IL" dirty="0"/>
+              <a:t>,</a:t>
+            </a:r>
+            <a:r>
+              <a:rPr dirty="0" err="1"/>
+              <a:t>רזולוציה</a:t>
+            </a:r>
+            <a:r>
+              <a:rPr dirty="0"/>
+              <a:t> </a:t>
+            </a:r>
+            <a:r>
+              <a:rPr dirty="0" err="1"/>
+              <a:t>של</a:t>
+            </a:r>
+            <a:r>
+              <a:rPr dirty="0"/>
+              <a:t> 640x480</a:t>
+            </a:r>
+          </a:p>
+          <a:p>
+            <a:pPr algn="r" rtl="1">
+              <a:defRPr sz="1600"/>
+            </a:pPr>
+            <a:r>
+              <a:rPr dirty="0"/>
+              <a:t>• </a:t>
+            </a:r>
+            <a:r>
+              <a:rPr dirty="0" err="1"/>
+              <a:t>תפוקת</a:t>
+            </a:r>
+            <a:r>
+              <a:rPr dirty="0"/>
+              <a:t> </a:t>
+            </a:r>
+            <a:r>
+              <a:rPr dirty="0" err="1"/>
+              <a:t>הנתונים</a:t>
+            </a:r>
+            <a:r>
+              <a:rPr dirty="0"/>
+              <a:t>: </a:t>
+            </a:r>
+            <a:endParaRPr lang="he-IL" dirty="0"/>
+          </a:p>
+          <a:p>
+            <a:pPr algn="r" rtl="1">
+              <a:defRPr sz="1600"/>
+            </a:pPr>
+            <a:r>
+              <a:rPr lang="he-IL" dirty="0"/>
+              <a:t>  </a:t>
+            </a:r>
+            <a:r>
+              <a:rPr dirty="0" err="1"/>
+              <a:t>האות</a:t>
+            </a:r>
+            <a:r>
+              <a:rPr dirty="0"/>
+              <a:t> </a:t>
+            </a:r>
+            <a:r>
+              <a:rPr dirty="0" err="1"/>
+              <a:t>doutb</a:t>
+            </a:r>
+            <a:r>
+              <a:rPr dirty="0"/>
+              <a:t> </a:t>
+            </a:r>
+            <a:r>
+              <a:rPr lang="he-IL" dirty="0"/>
+              <a:t> </a:t>
+            </a:r>
+            <a:r>
+              <a:rPr dirty="0" err="1"/>
+              <a:t>משחרר</a:t>
+            </a:r>
+            <a:r>
+              <a:rPr dirty="0"/>
+              <a:t> 12 </a:t>
+            </a:r>
+            <a:r>
+              <a:rPr dirty="0" err="1"/>
+              <a:t>ביט</a:t>
+            </a:r>
+            <a:r>
+              <a:rPr dirty="0"/>
+              <a:t> </a:t>
+            </a:r>
+            <a:r>
+              <a:rPr dirty="0" err="1"/>
+              <a:t>של</a:t>
+            </a:r>
+            <a:r>
+              <a:rPr dirty="0"/>
+              <a:t> </a:t>
+            </a:r>
+            <a:r>
+              <a:rPr dirty="0" err="1"/>
+              <a:t>צבע</a:t>
+            </a:r>
+            <a:r>
+              <a:rPr dirty="0"/>
+              <a:t> </a:t>
+            </a:r>
+            <a:r>
+              <a:rPr lang="he-IL" dirty="0"/>
+              <a:t> </a:t>
+            </a:r>
+            <a:r>
+              <a:rPr dirty="0"/>
+              <a:t>(RGB) </a:t>
+            </a:r>
+            <a:r>
+              <a:rPr dirty="0" err="1"/>
+              <a:t>בכל</a:t>
+            </a:r>
+            <a:r>
+              <a:rPr dirty="0"/>
+              <a:t> </a:t>
+            </a:r>
+            <a:r>
+              <a:rPr dirty="0" err="1"/>
+              <a:t>מחזור</a:t>
+            </a:r>
+            <a:r>
+              <a:rPr dirty="0"/>
+              <a:t> </a:t>
+            </a:r>
+            <a:r>
+              <a:rPr dirty="0" err="1"/>
+              <a:t>שעון</a:t>
+            </a:r>
+            <a:r>
+              <a:rPr dirty="0"/>
+              <a:t> (25MHz) </a:t>
+            </a:r>
+            <a:r>
+              <a:rPr dirty="0" err="1"/>
+              <a:t>ישירות</a:t>
+            </a:r>
+            <a:r>
+              <a:rPr dirty="0"/>
+              <a:t> </a:t>
+            </a:r>
+            <a:r>
+              <a:rPr dirty="0" err="1"/>
+              <a:t>לבקר</a:t>
+            </a:r>
+            <a:r>
+              <a:rPr dirty="0"/>
+              <a:t> ה-VGA.</a:t>
+            </a:r>
           </a:p>
         </p:txBody>
       </p:sp>
       <p:pic>
         <p:nvPicPr>
-          <p:cNvPr id="4" name="Picture 3" descr="camera_capture_flow.png.jpeg"/>
+          <p:cNvPr id="4" name="Picture 3" descr="bram_ip_symbol.png"/>
           <p:cNvPicPr>
             <a:picLocks noChangeAspect="1"/>
           </p:cNvPicPr>
@@ -5914,169 +6530,14 @@
         </p:blipFill>
         <p:spPr>
           <a:xfrm>
-            <a:off x="3038596" y="3429000"/>
-            <a:ext cx="3992824" cy="3136469"/>
+            <a:off x="1582451" y="3735593"/>
+            <a:ext cx="5458429" cy="2585323"/>
           </a:xfrm>
           <a:prstGeom prst="rect">
             <a:avLst/>
           </a:prstGeom>
         </p:spPr>
       </p:pic>
-      <p:sp>
-        <p:nvSpPr>
-          <p:cNvPr id="7" name="תיבת טקסט 6">
-            <a:extLst>
-              <a:ext uri="{FF2B5EF4-FFF2-40B4-BE49-F238E27FC236}">
-                <a16:creationId xmlns:a16="http://schemas.microsoft.com/office/drawing/2014/main" id="{8087304A-78FE-4B66-A4CF-6BC507A5CA47}"/>
-              </a:ext>
-            </a:extLst>
-          </p:cNvPr>
-          <p:cNvSpPr txBox="1"/>
-          <p:nvPr/>
-        </p:nvSpPr>
-        <p:spPr>
-          <a:xfrm>
-            <a:off x="0" y="1397675"/>
-            <a:ext cx="8916506" cy="2031325"/>
-          </a:xfrm>
-          <a:prstGeom prst="rect">
-            <a:avLst/>
-          </a:prstGeom>
-          <a:noFill/>
-        </p:spPr>
-        <p:txBody>
-          <a:bodyPr wrap="square" rtlCol="1">
-            <a:spAutoFit/>
-          </a:bodyPr>
-          <a:lstStyle/>
-          <a:p>
-            <a:pPr algn="r" rtl="1"/>
-            <a:r>
-              <a:rPr lang="he-IL" dirty="0">
-                <a:effectLst/>
-              </a:rPr>
-              <a:t>•</a:t>
-            </a:r>
-            <a:r>
-              <a:rPr lang="he-IL" b="1" dirty="0"/>
-              <a:t>ערוץ בקרה </a:t>
-            </a:r>
-            <a:r>
-              <a:rPr lang="en-US" b="1" dirty="0"/>
-              <a:t>(SCCB)</a:t>
-            </a:r>
-            <a:r>
-              <a:rPr lang="he-IL" b="1" dirty="0"/>
-              <a:t> :                                                </a:t>
-            </a:r>
-            <a:endParaRPr lang="he-IL" dirty="0">
-              <a:effectLst/>
-            </a:endParaRPr>
-          </a:p>
-          <a:p>
-            <a:pPr algn="r" rtl="1"/>
-            <a:r>
-              <a:rPr lang="he-IL" dirty="0">
-                <a:effectLst/>
-              </a:rPr>
-              <a:t>ממשק תקשורת דמוי </a:t>
-            </a:r>
-            <a:r>
-              <a:rPr lang="en-US" dirty="0">
-                <a:effectLst/>
-              </a:rPr>
-              <a:t>I2C </a:t>
-            </a:r>
-            <a:r>
-              <a:rPr lang="he-IL" dirty="0">
-                <a:effectLst/>
-              </a:rPr>
-              <a:t> המשמש </a:t>
-            </a:r>
-            <a:r>
-              <a:rPr lang="he-IL" dirty="0" err="1">
-                <a:effectLst/>
-              </a:rPr>
-              <a:t>לקינפוג</a:t>
-            </a:r>
-            <a:r>
-              <a:rPr lang="he-IL" dirty="0">
-                <a:effectLst/>
-              </a:rPr>
-              <a:t> ראשוני של הגדרות המצלמה</a:t>
-            </a:r>
-          </a:p>
-          <a:p>
-            <a:pPr algn="r" rtl="1"/>
-            <a:r>
-              <a:rPr lang="he-IL" dirty="0">
-                <a:effectLst/>
-              </a:rPr>
-              <a:t> (כמו רזולוציה ופורמט תמונה) בתחילת העבודה.</a:t>
-            </a:r>
-          </a:p>
-          <a:p>
-            <a:pPr algn="r" rtl="1"/>
-            <a:r>
-              <a:rPr lang="he-IL" dirty="0">
-                <a:effectLst/>
-              </a:rPr>
-              <a:t>•</a:t>
-            </a:r>
-            <a:r>
-              <a:rPr lang="he-IL" b="1" dirty="0"/>
-              <a:t>ערוץ נתונים וסנכרון:</a:t>
-            </a:r>
-            <a:r>
-              <a:rPr lang="he-IL" dirty="0"/>
-              <a:t> המצלמה מזרימה את נתוני התמונה ברצף החוצה, ומלווה אותם בשלושה אותות סנכרון פשוטים – </a:t>
-            </a:r>
-            <a:r>
-              <a:rPr lang="en-US" dirty="0"/>
-              <a:t>VSYNC (</a:t>
-            </a:r>
-            <a:r>
-              <a:rPr lang="he-IL" dirty="0"/>
-              <a:t>תחילת פריים), </a:t>
-            </a:r>
-            <a:r>
-              <a:rPr lang="en-US" dirty="0"/>
-              <a:t>HREF (</a:t>
-            </a:r>
-            <a:r>
-              <a:rPr lang="he-IL" dirty="0"/>
-              <a:t>תחילת שורה) ו-</a:t>
-            </a:r>
-            <a:r>
-              <a:rPr lang="en-US" dirty="0"/>
-              <a:t>PCLK (</a:t>
-            </a:r>
-            <a:r>
-              <a:rPr lang="he-IL" dirty="0"/>
-              <a:t>שעון נתונים). אותות אלו מאפשרים ל-</a:t>
-            </a:r>
-            <a:r>
-              <a:rPr lang="en-US" dirty="0"/>
-              <a:t>FPGA "</a:t>
-            </a:r>
-            <a:r>
-              <a:rPr lang="he-IL" dirty="0"/>
-              <a:t>להאזין" למצלמה, לדעת בדיוק מתי מתחילה תמונה חדשה, ולדחוף את המידע ישירות לזיכרון ה-</a:t>
-            </a:r>
-            <a:r>
-              <a:rPr lang="en-US" dirty="0"/>
-              <a:t>BRAM </a:t>
-            </a:r>
-            <a:r>
-              <a:rPr lang="he-IL" dirty="0"/>
-              <a:t>בצורה חלקה</a:t>
-            </a:r>
-            <a:endParaRPr lang="he-IL" dirty="0">
-              <a:effectLst/>
-            </a:endParaRPr>
-          </a:p>
-        </p:txBody>
-      </p:sp>
     </p:spTree>
   </p:cSld>
   <p:clrMapOvr>
@@ -6114,8 +6575,8 @@
         </p:nvSpPr>
         <p:spPr>
           <a:xfrm>
-            <a:off x="0" y="30843"/>
-            <a:ext cx="9085942" cy="978496"/>
+            <a:off x="457200" y="274638"/>
+            <a:ext cx="8686800" cy="822642"/>
           </a:xfrm>
         </p:spPr>
         <p:txBody>
@@ -6135,15 +6596,43 @@
             </a:r>
             <a:r>
               <a:rPr dirty="0" err="1"/>
+              <a:t>המצלמה</a:t>
+            </a:r>
+            <a:r>
+              <a:rPr lang="he-IL" dirty="0"/>
+              <a:t>,</a:t>
+            </a:r>
+            <a:r>
+              <a:rPr dirty="0"/>
+              <a:t> </a:t>
+            </a:r>
+            <a:r>
+              <a:rPr dirty="0" err="1"/>
+              <a:t>מהעולם</a:t>
+            </a:r>
+            <a:r>
+              <a:rPr dirty="0"/>
+              <a:t> </a:t>
+            </a:r>
+            <a:r>
+              <a:rPr dirty="0" err="1"/>
+              <a:t>הפיזי</a:t>
+            </a:r>
+            <a:r>
+              <a:rPr dirty="0"/>
+              <a:t> </a:t>
+            </a:r>
+            <a:r>
+              <a:rPr dirty="0" err="1"/>
+              <a:t>אל</a:t>
+            </a:r>
+            <a:r>
+              <a:rPr dirty="0"/>
+              <a:t> </a:t>
+            </a:r>
+            <a:r>
+              <a:rPr dirty="0" err="1"/>
               <a:t>הזיכרון</a:t>
-            </a:r>
-            <a:r>
-              <a:rPr dirty="0"/>
-              <a:t> (BRAM)</a:t>
-            </a:r>
-            <a:r>
-              <a:rPr lang="he-IL" dirty="0"/>
-              <a:t> וסנכרון נתונים למסך</a:t>
             </a:r>
             <a:endParaRPr dirty="0"/>
           </a:p>
@@ -6157,8 +6646,8 @@
         </p:nvSpPr>
         <p:spPr>
           <a:xfrm>
-            <a:off x="58058" y="713048"/>
-            <a:ext cx="8817428" cy="2339102"/>
+            <a:off x="3392906" y="1097280"/>
+            <a:ext cx="8686800" cy="646331"/>
           </a:xfrm>
           <a:prstGeom prst="rect">
             <a:avLst/>
@@ -6171,596 +6660,198 @@
           </a:bodyPr>
           <a:lstStyle/>
           <a:p>
-            <a:endParaRPr dirty="0"/>
-          </a:p>
-          <a:p>
-            <a:pPr algn="r" rtl="1">
-              <a:defRPr sz="1600"/>
-            </a:pPr>
-            <a:r>
-              <a:rPr dirty="0"/>
-              <a:t>• </a:t>
-            </a:r>
-            <a:r>
-              <a:rPr dirty="0" err="1"/>
-              <a:t>תרגום</a:t>
-            </a:r>
-            <a:r>
-              <a:rPr dirty="0"/>
-              <a:t> </a:t>
-            </a:r>
-            <a:r>
-              <a:rPr dirty="0" err="1"/>
-              <a:t>קואורדינטות</a:t>
-            </a:r>
-            <a:r>
-              <a:rPr dirty="0"/>
-              <a:t>: </a:t>
-            </a:r>
-            <a:endParaRPr lang="he-IL" dirty="0"/>
-          </a:p>
-          <a:p>
-            <a:pPr algn="r" rtl="1">
-              <a:defRPr sz="1600"/>
-            </a:pPr>
-            <a:r>
-              <a:rPr dirty="0" err="1"/>
-              <a:t>הכתובת</a:t>
-            </a:r>
-            <a:r>
-              <a:rPr dirty="0"/>
-              <a:t> </a:t>
-            </a:r>
-            <a:r>
-              <a:rPr dirty="0" err="1"/>
-              <a:t>לזיכרון</a:t>
-            </a:r>
-            <a:r>
-              <a:rPr dirty="0"/>
-              <a:t> </a:t>
-            </a:r>
-            <a:r>
-              <a:rPr dirty="0" err="1"/>
-              <a:t>addrb</a:t>
-            </a:r>
-            <a:r>
-              <a:rPr dirty="0"/>
-              <a:t> </a:t>
-            </a:r>
-            <a:r>
-              <a:rPr lang="he-IL" dirty="0"/>
-              <a:t> </a:t>
-            </a:r>
-            <a:r>
-              <a:rPr dirty="0" err="1"/>
-              <a:t>באורך</a:t>
-            </a:r>
-            <a:r>
-              <a:rPr dirty="0"/>
-              <a:t> 19 </a:t>
-            </a:r>
-            <a:r>
-              <a:rPr dirty="0" err="1"/>
-              <a:t>ביט</a:t>
-            </a:r>
-            <a:r>
-              <a:rPr dirty="0"/>
-              <a:t> </a:t>
-            </a:r>
-            <a:r>
-              <a:rPr dirty="0" err="1"/>
-              <a:t>מחושבת</a:t>
-            </a:r>
-            <a:r>
-              <a:rPr dirty="0"/>
-              <a:t> </a:t>
-            </a:r>
-            <a:r>
-              <a:rPr dirty="0" err="1"/>
-              <a:t>מתמטית</a:t>
-            </a:r>
-            <a:r>
-              <a:rPr dirty="0"/>
-              <a:t> </a:t>
-            </a:r>
-            <a:r>
-              <a:rPr dirty="0" err="1"/>
-              <a:t>לפי</a:t>
-            </a:r>
-            <a:r>
-              <a:rPr dirty="0"/>
-              <a:t> </a:t>
-            </a:r>
-            <a:r>
-              <a:rPr dirty="0" err="1"/>
-              <a:t>המיקום</a:t>
-            </a:r>
-            <a:r>
-              <a:rPr dirty="0"/>
-              <a:t> </a:t>
-            </a:r>
-            <a:r>
-              <a:rPr dirty="0" err="1"/>
-              <a:t>באזור</a:t>
-            </a:r>
-            <a:r>
-              <a:rPr dirty="0"/>
-              <a:t> </a:t>
-            </a:r>
-            <a:r>
-              <a:rPr dirty="0" err="1"/>
-              <a:t>הפעיל</a:t>
-            </a:r>
-            <a:r>
-              <a:rPr dirty="0"/>
-              <a:t>: Y * 640 + X.</a:t>
-            </a:r>
-          </a:p>
-          <a:p>
-            <a:pPr algn="r" rtl="1">
-              <a:defRPr sz="1600"/>
-            </a:pPr>
-            <a:r>
-              <a:rPr dirty="0"/>
-              <a:t>• </a:t>
-            </a:r>
-            <a:r>
-              <a:rPr dirty="0" err="1"/>
-              <a:t>מנגנון</a:t>
-            </a:r>
-            <a:r>
-              <a:rPr dirty="0"/>
-              <a:t> ה-Pipeline </a:t>
-            </a:r>
-            <a:r>
-              <a:rPr lang="he-IL" dirty="0" err="1"/>
-              <a:t>דילאיי</a:t>
-            </a:r>
-            <a:r>
-              <a:rPr dirty="0"/>
-              <a:t>: </a:t>
-            </a:r>
-            <a:endParaRPr lang="he-IL" dirty="0"/>
-          </a:p>
-          <a:p>
-            <a:pPr algn="r" rtl="1">
-              <a:defRPr sz="1600"/>
-            </a:pPr>
-            <a:r>
-              <a:rPr lang="he-IL" dirty="0"/>
-              <a:t> </a:t>
-            </a:r>
-            <a:r>
-              <a:rPr dirty="0" err="1"/>
-              <a:t>הקריאה</a:t>
-            </a:r>
-            <a:r>
-              <a:rPr dirty="0"/>
-              <a:t> </a:t>
-            </a:r>
-            <a:r>
-              <a:rPr dirty="0" err="1"/>
-              <a:t>מהזיכרון</a:t>
-            </a:r>
-            <a:r>
-              <a:rPr dirty="0"/>
-              <a:t> א-</a:t>
-            </a:r>
-            <a:r>
-              <a:rPr dirty="0" err="1"/>
-              <a:t>סינכרונית</a:t>
-            </a:r>
-            <a:r>
-              <a:rPr dirty="0"/>
-              <a:t>. </a:t>
-            </a:r>
-            <a:r>
-              <a:rPr dirty="0" err="1"/>
-              <a:t>כדי</a:t>
-            </a:r>
-            <a:r>
-              <a:rPr dirty="0"/>
-              <a:t> </a:t>
-            </a:r>
-            <a:r>
-              <a:rPr dirty="0" err="1"/>
-              <a:t>להבטיח</a:t>
-            </a:r>
-            <a:r>
-              <a:rPr dirty="0"/>
-              <a:t> </a:t>
-            </a:r>
-            <a:r>
-              <a:rPr dirty="0" err="1"/>
-              <a:t>יציבות</a:t>
-            </a:r>
-            <a:r>
-              <a:rPr dirty="0"/>
-              <a:t>, </a:t>
-            </a:r>
-            <a:r>
-              <a:rPr dirty="0" err="1"/>
-              <a:t>הקוד</a:t>
-            </a:r>
-            <a:r>
-              <a:rPr dirty="0"/>
-              <a:t> </a:t>
-            </a:r>
-            <a:r>
-              <a:rPr dirty="0" err="1"/>
-              <a:t>נועל</a:t>
-            </a:r>
-            <a:r>
-              <a:rPr dirty="0"/>
-              <a:t> </a:t>
-            </a:r>
-            <a:r>
-              <a:rPr dirty="0" err="1"/>
-              <a:t>את</a:t>
-            </a:r>
-            <a:r>
-              <a:rPr dirty="0"/>
-              <a:t> </a:t>
-            </a:r>
-            <a:r>
-              <a:rPr dirty="0" err="1"/>
-              <a:t>הנתון</a:t>
-            </a:r>
-            <a:r>
-              <a:rPr dirty="0"/>
-              <a:t> </a:t>
-            </a:r>
-            <a:r>
-              <a:rPr dirty="0" err="1"/>
-              <a:t>הנכנס</a:t>
-            </a:r>
-            <a:r>
-              <a:rPr dirty="0"/>
-              <a:t> (</a:t>
-            </a:r>
-            <a:r>
-              <a:rPr dirty="0" err="1"/>
-              <a:t>doutb</a:t>
-            </a:r>
-            <a:r>
-              <a:rPr dirty="0"/>
-              <a:t>) </a:t>
-            </a:r>
-            <a:r>
-              <a:rPr lang="he-IL" dirty="0"/>
-              <a:t> </a:t>
-            </a:r>
-            <a:r>
-              <a:rPr dirty="0" err="1"/>
-              <a:t>לתוך</a:t>
-            </a:r>
-            <a:r>
-              <a:rPr dirty="0"/>
-              <a:t> </a:t>
-            </a:r>
-            <a:r>
-              <a:rPr dirty="0" err="1"/>
-              <a:t>אוגר</a:t>
-            </a:r>
-            <a:r>
-              <a:rPr dirty="0"/>
-              <a:t> </a:t>
-            </a:r>
-            <a:r>
-              <a:rPr dirty="0" err="1"/>
-              <a:t>פנימי</a:t>
-            </a:r>
-            <a:r>
-              <a:rPr dirty="0"/>
-              <a:t> (</a:t>
-            </a:r>
-            <a:r>
-              <a:rPr dirty="0" err="1"/>
-              <a:t>pxl_data_reg</a:t>
-            </a:r>
-            <a:r>
-              <a:rPr dirty="0"/>
-              <a:t>) </a:t>
-            </a:r>
-            <a:r>
-              <a:rPr dirty="0" err="1"/>
-              <a:t>בעליית</a:t>
-            </a:r>
-            <a:r>
-              <a:rPr dirty="0"/>
-              <a:t> </a:t>
-            </a:r>
-            <a:r>
-              <a:rPr dirty="0" err="1"/>
-              <a:t>השעון</a:t>
-            </a:r>
-            <a:r>
-              <a:rPr dirty="0"/>
-              <a:t> </a:t>
-            </a:r>
-            <a:r>
-              <a:rPr dirty="0" err="1"/>
-              <a:t>הבאה</a:t>
-            </a:r>
-            <a:r>
-              <a:rPr dirty="0"/>
-              <a:t>.</a:t>
-            </a:r>
-          </a:p>
-          <a:p>
-            <a:pPr algn="r" rtl="1">
-              <a:defRPr sz="1600"/>
-            </a:pPr>
-            <a:r>
-              <a:rPr dirty="0"/>
-              <a:t>• </a:t>
-            </a:r>
-            <a:r>
-              <a:rPr dirty="0" err="1"/>
-              <a:t>כדי</a:t>
-            </a:r>
-            <a:r>
-              <a:rPr dirty="0"/>
-              <a:t> </a:t>
-            </a:r>
-            <a:r>
-              <a:rPr dirty="0" err="1"/>
-              <a:t>לפצות</a:t>
-            </a:r>
-            <a:r>
-              <a:rPr dirty="0"/>
-              <a:t> </a:t>
-            </a:r>
-            <a:r>
-              <a:rPr dirty="0" err="1"/>
-              <a:t>על</a:t>
-            </a:r>
-            <a:r>
-              <a:rPr dirty="0"/>
-              <a:t> </a:t>
-            </a:r>
-            <a:r>
-              <a:rPr dirty="0" err="1"/>
-              <a:t>השהיית</a:t>
-            </a:r>
-            <a:r>
-              <a:rPr dirty="0"/>
-              <a:t> </a:t>
-            </a:r>
-            <a:r>
-              <a:rPr dirty="0" err="1"/>
-              <a:t>הזיכרון</a:t>
-            </a:r>
-            <a:r>
-              <a:rPr dirty="0"/>
-              <a:t>, </a:t>
-            </a:r>
-            <a:r>
-              <a:rPr dirty="0" err="1"/>
-              <a:t>דגל</a:t>
-            </a:r>
-            <a:r>
-              <a:rPr dirty="0"/>
-              <a:t> </a:t>
-            </a:r>
-            <a:r>
-              <a:rPr dirty="0" err="1"/>
-              <a:t>אזור</a:t>
-            </a:r>
-            <a:r>
-              <a:rPr dirty="0"/>
-              <a:t> </a:t>
-            </a:r>
-            <a:r>
-              <a:rPr dirty="0" err="1"/>
-              <a:t>התצוגה</a:t>
-            </a:r>
-            <a:r>
-              <a:rPr dirty="0"/>
-              <a:t> (</a:t>
-            </a:r>
-            <a:r>
-              <a:rPr dirty="0" err="1"/>
-              <a:t>in_display_area</a:t>
-            </a:r>
-            <a:r>
-              <a:rPr dirty="0"/>
-              <a:t>) </a:t>
-            </a:r>
-            <a:r>
-              <a:rPr lang="he-IL" dirty="0"/>
-              <a:t> </a:t>
-            </a:r>
-            <a:r>
-              <a:rPr dirty="0" err="1"/>
-              <a:t>מושהה</a:t>
-            </a:r>
-            <a:r>
-              <a:rPr dirty="0"/>
-              <a:t> </a:t>
-            </a:r>
-            <a:r>
-              <a:rPr dirty="0" err="1"/>
-              <a:t>גם</a:t>
-            </a:r>
-            <a:r>
-              <a:rPr dirty="0"/>
-              <a:t> </a:t>
-            </a:r>
-            <a:r>
-              <a:rPr dirty="0" err="1"/>
-              <a:t>הוא</a:t>
-            </a:r>
-            <a:r>
-              <a:rPr dirty="0"/>
-              <a:t> </a:t>
-            </a:r>
-            <a:r>
-              <a:rPr dirty="0" err="1"/>
-              <a:t>במחזור</a:t>
-            </a:r>
-            <a:r>
-              <a:rPr dirty="0"/>
-              <a:t> </a:t>
-            </a:r>
-            <a:r>
-              <a:rPr dirty="0" err="1"/>
-              <a:t>שעון</a:t>
-            </a:r>
-            <a:r>
-              <a:rPr dirty="0"/>
-              <a:t> </a:t>
-            </a:r>
-            <a:r>
-              <a:rPr dirty="0" err="1"/>
-              <a:t>אחד</a:t>
-            </a:r>
-            <a:endParaRPr dirty="0"/>
-          </a:p>
-          <a:p>
-            <a:pPr algn="r" rtl="1">
-              <a:defRPr sz="1600"/>
-            </a:pPr>
-            <a:r>
-              <a:rPr dirty="0"/>
-              <a:t>• </a:t>
-            </a:r>
-            <a:r>
-              <a:rPr dirty="0" err="1"/>
-              <a:t>ניתוב</a:t>
-            </a:r>
-            <a:r>
-              <a:rPr dirty="0"/>
-              <a:t> </a:t>
-            </a:r>
-            <a:r>
-              <a:rPr dirty="0" err="1"/>
-              <a:t>דיגיטלי</a:t>
-            </a:r>
-            <a:r>
-              <a:rPr dirty="0"/>
-              <a:t> (Mux) </a:t>
-            </a:r>
-            <a:r>
-              <a:rPr lang="he-IL" dirty="0"/>
-              <a:t>:</a:t>
-            </a:r>
-          </a:p>
-          <a:p>
-            <a:pPr algn="r" rtl="1">
-              <a:defRPr sz="1600"/>
-            </a:pPr>
-            <a:r>
-              <a:rPr dirty="0" err="1"/>
-              <a:t>רק</a:t>
-            </a:r>
-            <a:r>
-              <a:rPr dirty="0"/>
-              <a:t> </a:t>
-            </a:r>
-            <a:r>
-              <a:rPr dirty="0" err="1"/>
-              <a:t>כאשר</a:t>
-            </a:r>
-            <a:r>
-              <a:rPr dirty="0"/>
-              <a:t> </a:t>
-            </a:r>
-            <a:r>
-              <a:rPr dirty="0" err="1"/>
-              <a:t>הדגל</a:t>
-            </a:r>
-            <a:r>
-              <a:rPr dirty="0"/>
-              <a:t> </a:t>
-            </a:r>
-            <a:r>
-              <a:rPr dirty="0" err="1"/>
-              <a:t>המושהה</a:t>
-            </a:r>
-            <a:r>
-              <a:rPr dirty="0"/>
-              <a:t> </a:t>
-            </a:r>
-            <a:r>
-              <a:rPr dirty="0" err="1"/>
-              <a:t>דולק</a:t>
-            </a:r>
-            <a:r>
-              <a:rPr dirty="0"/>
-              <a:t> 12 </a:t>
-            </a:r>
-            <a:r>
-              <a:rPr dirty="0" err="1"/>
-              <a:t>הביטים</a:t>
-            </a:r>
-            <a:r>
-              <a:rPr dirty="0"/>
-              <a:t> </a:t>
-            </a:r>
-            <a:r>
-              <a:rPr dirty="0" err="1"/>
-              <a:t>מפוצלים</a:t>
-            </a:r>
-            <a:r>
-              <a:rPr dirty="0"/>
-              <a:t> </a:t>
-            </a:r>
-            <a:r>
-              <a:rPr dirty="0" err="1"/>
-              <a:t>ומנותבים</a:t>
-            </a:r>
-            <a:r>
-              <a:rPr dirty="0"/>
-              <a:t> </a:t>
-            </a:r>
-            <a:r>
-              <a:rPr dirty="0" err="1"/>
-              <a:t>ליציאות</a:t>
-            </a:r>
-            <a:r>
-              <a:rPr dirty="0"/>
-              <a:t> VGA_R, VGA_G ו-VGA_B 4 </a:t>
-            </a:r>
-            <a:r>
-              <a:rPr dirty="0" err="1"/>
-              <a:t>ביטים</a:t>
-            </a:r>
-            <a:r>
-              <a:rPr dirty="0"/>
-              <a:t> </a:t>
-            </a:r>
-            <a:r>
-              <a:rPr dirty="0" err="1"/>
-              <a:t>לצבע</a:t>
-            </a:r>
+            <a:r>
+              <a:rPr lang="he-IL" dirty="0"/>
+              <a:t>התקשורת בין המצלמה ללוח מחולקת לשני ערוצים מקבילים:</a:t>
+            </a:r>
+          </a:p>
+          <a:p>
             <a:endParaRPr dirty="0"/>
           </a:p>
         </p:txBody>
       </p:sp>
       <p:pic>
         <p:nvPicPr>
-          <p:cNvPr id="4" name="Picture 3" descr="vga_address_logic_code.png"/>
+          <p:cNvPr id="4" name="Picture 3" descr="camera_capture_flow.png.jpeg"/>
           <p:cNvPicPr>
             <a:picLocks noChangeAspect="1"/>
           </p:cNvPicPr>
           <p:nvPr/>
         </p:nvPicPr>
-        <p:blipFill rotWithShape="1">
+        <p:blipFill>
           <a:blip r:embed="rId2"/>
-          <a:srcRect l="5217" t="10044" r="4783" b="5896"/>
-          <a:stretch/>
+          <a:stretch>
+            <a:fillRect/>
+          </a:stretch>
         </p:blipFill>
         <p:spPr>
           <a:xfrm>
-            <a:off x="1074056" y="3298371"/>
-            <a:ext cx="6473372" cy="3282043"/>
+            <a:off x="3175686" y="3536688"/>
+            <a:ext cx="3855734" cy="3028781"/>
           </a:xfrm>
           <a:prstGeom prst="rect">
             <a:avLst/>
           </a:prstGeom>
         </p:spPr>
       </p:pic>
+      <p:sp>
+        <p:nvSpPr>
+          <p:cNvPr id="7" name="תיבת טקסט 6">
+            <a:extLst>
+              <a:ext uri="{FF2B5EF4-FFF2-40B4-BE49-F238E27FC236}">
+                <a16:creationId xmlns:a16="http://schemas.microsoft.com/office/drawing/2014/main" id="{8087304A-78FE-4B66-A4CF-6BC507A5CA47}"/>
+              </a:ext>
+            </a:extLst>
+          </p:cNvPr>
+          <p:cNvSpPr txBox="1"/>
+          <p:nvPr/>
+        </p:nvSpPr>
+        <p:spPr>
+          <a:xfrm>
+            <a:off x="0" y="1397675"/>
+            <a:ext cx="8916506" cy="2308324"/>
+          </a:xfrm>
+          <a:prstGeom prst="rect">
+            <a:avLst/>
+          </a:prstGeom>
+          <a:noFill/>
+        </p:spPr>
+        <p:txBody>
+          <a:bodyPr wrap="square" rtlCol="1">
+            <a:spAutoFit/>
+          </a:bodyPr>
+          <a:lstStyle/>
+          <a:p>
+            <a:pPr algn="r" rtl="1"/>
+            <a:r>
+              <a:rPr lang="he-IL" dirty="0">
+                <a:effectLst/>
+              </a:rPr>
+              <a:t>•</a:t>
+            </a:r>
+            <a:r>
+              <a:rPr lang="he-IL" dirty="0"/>
+              <a:t>ערוץ בקרה </a:t>
+            </a:r>
+            <a:r>
+              <a:rPr lang="en-US" dirty="0"/>
+              <a:t>(SCCB)</a:t>
+            </a:r>
+            <a:r>
+              <a:rPr lang="he-IL" dirty="0"/>
+              <a:t> :                                                </a:t>
+            </a:r>
+            <a:endParaRPr lang="he-IL" dirty="0">
+              <a:effectLst/>
+            </a:endParaRPr>
+          </a:p>
+          <a:p>
+            <a:pPr algn="r" rtl="1"/>
+            <a:r>
+              <a:rPr lang="he-IL" dirty="0">
+                <a:effectLst/>
+              </a:rPr>
+              <a:t>ממשק תקשורת דמוי </a:t>
+            </a:r>
+            <a:r>
+              <a:rPr lang="en-US" dirty="0">
+                <a:effectLst/>
+              </a:rPr>
+              <a:t>I2C </a:t>
+            </a:r>
+            <a:r>
+              <a:rPr lang="he-IL" dirty="0">
+                <a:effectLst/>
+              </a:rPr>
+              <a:t> המשמש </a:t>
+            </a:r>
+            <a:r>
+              <a:rPr lang="he-IL" dirty="0" err="1">
+                <a:effectLst/>
+              </a:rPr>
+              <a:t>לקינפוג</a:t>
+            </a:r>
+            <a:r>
+              <a:rPr lang="he-IL" dirty="0">
+                <a:effectLst/>
+              </a:rPr>
+              <a:t> ראשוני של הגדרות המצלמה</a:t>
+            </a:r>
+          </a:p>
+          <a:p>
+            <a:pPr algn="r" rtl="1"/>
+            <a:r>
+              <a:rPr lang="he-IL" dirty="0">
+                <a:effectLst/>
+              </a:rPr>
+              <a:t> (כמו רזולוציה ופורמט תמונה) בתחילת העבודה.</a:t>
+            </a:r>
+          </a:p>
+          <a:p>
+            <a:pPr algn="r" rtl="1"/>
+            <a:r>
+              <a:rPr lang="he-IL" dirty="0">
+                <a:effectLst/>
+              </a:rPr>
+              <a:t>•</a:t>
+            </a:r>
+            <a:r>
+              <a:rPr lang="he-IL" dirty="0"/>
+              <a:t>ערוץ נתונים וסנכרון:</a:t>
+            </a:r>
+          </a:p>
+          <a:p>
+            <a:pPr algn="r" rtl="1"/>
+            <a:r>
+              <a:rPr lang="he-IL" dirty="0"/>
+              <a:t> המצלמה מזרימה את נתוני התמונה ברצף החוצה, ומלווה אותם בשלושה אותות סנכרון פשוטים – </a:t>
+            </a:r>
+            <a:r>
+              <a:rPr lang="en-US" dirty="0"/>
+              <a:t>VSYNC </a:t>
+            </a:r>
+            <a:r>
+              <a:rPr lang="he-IL" dirty="0"/>
+              <a:t>(תחילת פריים), </a:t>
+            </a:r>
+            <a:r>
+              <a:rPr lang="en-US" dirty="0"/>
+              <a:t>HREF </a:t>
+            </a:r>
+            <a:r>
+              <a:rPr lang="he-IL" dirty="0"/>
+              <a:t>(תחילת שורה) ו-</a:t>
+            </a:r>
+            <a:r>
+              <a:rPr lang="en-US" dirty="0"/>
+              <a:t>)PCLK </a:t>
+            </a:r>
+            <a:r>
+              <a:rPr lang="he-IL" dirty="0"/>
+              <a:t>שעון נתונים). אותות אלו מאפשרים ל-</a:t>
+            </a:r>
+            <a:r>
+              <a:rPr lang="en-US" dirty="0"/>
+              <a:t>FPGA "</a:t>
+            </a:r>
+            <a:r>
+              <a:rPr lang="he-IL" dirty="0"/>
+              <a:t>להאזין" למצלמה, לדעת בדיוק מתי מתחילה תמונה חדשה, ולדחוף את המידע ישירות לזיכרון ה-</a:t>
+            </a:r>
+            <a:r>
+              <a:rPr lang="en-US" dirty="0"/>
+              <a:t>BRAM </a:t>
+            </a:r>
+            <a:r>
+              <a:rPr lang="he-IL" dirty="0"/>
+              <a:t>בצורה חלקה</a:t>
+            </a:r>
+            <a:endParaRPr lang="he-IL" dirty="0">
+              <a:effectLst/>
+            </a:endParaRPr>
+          </a:p>
+        </p:txBody>
+      </p:sp>
     </p:spTree>
   </p:cSld>
   <p:clrMapOvr>
@@ -6796,7 +6887,12 @@
             <p:ph type="title"/>
           </p:nvPr>
         </p:nvSpPr>
-        <p:spPr/>
+        <p:spPr>
+          <a:xfrm>
+            <a:off x="0" y="30843"/>
+            <a:ext cx="9085942" cy="978496"/>
+          </a:xfrm>
+        </p:spPr>
         <p:txBody>
           <a:bodyPr>
             <a:normAutofit fontScale="90000"/>
@@ -6806,31 +6902,25 @@
             <a:pPr algn="ctr" rtl="1"/>
             <a:r>
               <a:rPr dirty="0" err="1"/>
-              <a:t>אימות</a:t>
-            </a:r>
-            <a:r>
-              <a:rPr dirty="0"/>
-              <a:t> </a:t>
-            </a:r>
-            <a:r>
-              <a:rPr dirty="0" err="1"/>
-              <a:t>מסלול</a:t>
-            </a:r>
-            <a:r>
-              <a:rPr dirty="0"/>
-              <a:t> </a:t>
-            </a:r>
-            <a:r>
-              <a:rPr dirty="0" err="1"/>
-              <a:t>הנתונים</a:t>
-            </a:r>
-            <a:br>
-              <a:rPr lang="he-IL" dirty="0"/>
-            </a:br>
-            <a:r>
-              <a:rPr dirty="0"/>
-              <a:t> VGA Controller ↔ BRAM</a:t>
-            </a:r>
+              <a:t>ממשק</a:t>
+            </a:r>
+            <a:r>
+              <a:rPr dirty="0"/>
+              <a:t> </a:t>
+            </a:r>
+            <a:r>
+              <a:rPr dirty="0" err="1"/>
+              <a:t>הזיכרון</a:t>
+            </a:r>
+            <a:r>
+              <a:rPr dirty="0"/>
+              <a:t> (BRAM)</a:t>
+            </a:r>
+            <a:r>
+              <a:rPr lang="he-IL" dirty="0"/>
+              <a:t> וסנכרון נתונים למסך</a:t>
+            </a:r>
+            <a:endParaRPr dirty="0"/>
           </a:p>
         </p:txBody>
       </p:sp>
@@ -6842,8 +6932,8 @@
         </p:nvSpPr>
         <p:spPr>
           <a:xfrm>
-            <a:off x="-372979" y="1097280"/>
-            <a:ext cx="9240253" cy="1846659"/>
+            <a:off x="58058" y="713048"/>
+            <a:ext cx="8817428" cy="2339102"/>
           </a:xfrm>
           <a:prstGeom prst="rect">
             <a:avLst/>
@@ -6868,15 +6958,15 @@
             </a:r>
             <a:r>
               <a:rPr dirty="0" err="1"/>
-              <a:t>מטרת</a:t>
-            </a:r>
-            <a:r>
-              <a:rPr dirty="0"/>
-              <a:t> </a:t>
-            </a:r>
-            <a:r>
-              <a:rPr dirty="0" err="1"/>
-              <a:t>הסימולציה</a:t>
+              <a:t>תרגום</a:t>
+            </a:r>
+            <a:r>
+              <a:rPr dirty="0"/>
+              <a:t> </a:t>
+            </a:r>
+            <a:r>
+              <a:rPr dirty="0" err="1"/>
+              <a:t>קואורדינטות</a:t>
             </a:r>
             <a:r>
               <a:rPr dirty="0"/>
@@ -6889,56 +6979,20 @@
               <a:defRPr sz="1600"/>
             </a:pPr>
             <a:r>
-              <a:rPr lang="he-IL" dirty="0"/>
-              <a:t>   </a:t>
-            </a:r>
-            <a:r>
-              <a:rPr dirty="0" err="1"/>
-              <a:t>הוכחת</a:t>
-            </a:r>
-            <a:r>
-              <a:rPr dirty="0"/>
-              <a:t> </a:t>
-            </a:r>
-            <a:r>
-              <a:rPr dirty="0" err="1"/>
-              <a:t>לחיצת</a:t>
-            </a:r>
-            <a:r>
-              <a:rPr dirty="0"/>
-              <a:t> </a:t>
-            </a:r>
-            <a:r>
-              <a:rPr dirty="0" err="1"/>
-              <a:t>היד</a:t>
-            </a:r>
-            <a:r>
-              <a:rPr dirty="0"/>
-              <a:t> </a:t>
-            </a:r>
-            <a:r>
-              <a:rPr dirty="0" err="1"/>
-              <a:t>שבין</a:t>
-            </a:r>
-            <a:r>
-              <a:rPr dirty="0"/>
-              <a:t> </a:t>
-            </a:r>
-            <a:r>
-              <a:rPr dirty="0" err="1"/>
-              <a:t>בקשת</a:t>
-            </a:r>
-            <a:r>
-              <a:rPr dirty="0"/>
-              <a:t> </a:t>
-            </a:r>
-            <a:r>
               <a:rPr dirty="0" err="1"/>
               <a:t>הכתובת</a:t>
             </a:r>
             <a:r>
               <a:rPr dirty="0"/>
-              <a:t> (</a:t>
+              <a:t> </a:t>
+            </a:r>
+            <a:r>
+              <a:rPr dirty="0" err="1"/>
+              <a:t>לזיכרון</a:t>
+            </a:r>
+            <a:r>
+              <a:rPr dirty="0"/>
+              <a:t> </a:t>
             </a:r>
             <a:r>
               <a:rPr dirty="0" err="1"/>
@@ -6946,43 +7000,75 @@
             </a:r>
             <a:r>
               <a:rPr dirty="0"/>
-              <a:t>) </a:t>
-            </a:r>
-            <a:r>
-              <a:rPr lang="he-IL" dirty="0"/>
-              <a:t> </a:t>
-            </a:r>
-            <a:r>
-              <a:rPr dirty="0" err="1"/>
-              <a:t>לקבלת</a:t>
-            </a:r>
-            <a:r>
-              <a:rPr dirty="0"/>
-              <a:t> </a:t>
-            </a:r>
-            <a:r>
-              <a:rPr dirty="0" err="1"/>
-              <a:t>נתוני</a:t>
-            </a:r>
-            <a:r>
-              <a:rPr dirty="0"/>
-              <a:t> </a:t>
-            </a:r>
-            <a:r>
-              <a:rPr dirty="0" err="1"/>
-              <a:t>הפיקסל</a:t>
-            </a:r>
-            <a:r>
-              <a:rPr dirty="0"/>
-              <a:t> (</a:t>
-            </a:r>
-            <a:r>
-              <a:rPr dirty="0" err="1"/>
-              <a:t>doutb</a:t>
-            </a:r>
-            <a:r>
-              <a:rPr dirty="0"/>
-              <a:t>).</a:t>
+              <a:t> </a:t>
+            </a:r>
+            <a:r>
+              <a:rPr lang="he-IL" dirty="0"/>
+              <a:t> </a:t>
+            </a:r>
+            <a:r>
+              <a:rPr dirty="0" err="1"/>
+              <a:t>באורך</a:t>
+            </a:r>
+            <a:r>
+              <a:rPr dirty="0"/>
+              <a:t> 19 </a:t>
+            </a:r>
+            <a:r>
+              <a:rPr dirty="0" err="1"/>
+              <a:t>ביט</a:t>
+            </a:r>
+            <a:r>
+              <a:rPr dirty="0"/>
+              <a:t> </a:t>
+            </a:r>
+            <a:r>
+              <a:rPr dirty="0" err="1"/>
+              <a:t>מחושבת</a:t>
+            </a:r>
+            <a:r>
+              <a:rPr dirty="0"/>
+              <a:t> </a:t>
+            </a:r>
+            <a:r>
+              <a:rPr dirty="0" err="1"/>
+              <a:t>מתמטית</a:t>
+            </a:r>
+            <a:r>
+              <a:rPr dirty="0"/>
+              <a:t> </a:t>
+            </a:r>
+            <a:r>
+              <a:rPr dirty="0" err="1"/>
+              <a:t>לפי</a:t>
+            </a:r>
+            <a:r>
+              <a:rPr dirty="0"/>
+              <a:t> </a:t>
+            </a:r>
+            <a:r>
+              <a:rPr dirty="0" err="1"/>
+              <a:t>המיקום</a:t>
+            </a:r>
+            <a:r>
+              <a:rPr dirty="0"/>
+              <a:t> </a:t>
+            </a:r>
+            <a:r>
+              <a:rPr dirty="0" err="1"/>
+              <a:t>באזור</a:t>
+            </a:r>
+            <a:r>
+              <a:rPr dirty="0"/>
+              <a:t> </a:t>
+            </a:r>
+            <a:r>
+              <a:rPr dirty="0" err="1"/>
+              <a:t>הפעיל</a:t>
+            </a:r>
+            <a:r>
+              <a:rPr dirty="0"/>
+              <a:t>: Y * 640 + X.</a:t>
             </a:r>
           </a:p>
           <a:p>
@@ -6995,23 +7081,15 @@
             </a:r>
             <a:r>
               <a:rPr dirty="0" err="1"/>
-              <a:t>דגימה</a:t>
-            </a:r>
-            <a:r>
-              <a:rPr dirty="0"/>
-              <a:t> </a:t>
-            </a:r>
-            <a:r>
-              <a:rPr dirty="0" err="1"/>
-              <a:t>בזמן</a:t>
-            </a:r>
-            <a:r>
-              <a:rPr dirty="0"/>
-              <a:t> </a:t>
-            </a:r>
-            <a:r>
-              <a:rPr dirty="0" err="1"/>
-              <a:t>אמת</a:t>
+              <a:t>מנגנון</a:t>
+            </a:r>
+            <a:r>
+              <a:rPr dirty="0"/>
+              <a:t> ה-Pipeline </a:t>
+            </a:r>
+            <a:r>
+              <a:rPr lang="he-IL" dirty="0" err="1"/>
+              <a:t>דילאיי</a:t>
             </a:r>
             <a:r>
               <a:rPr dirty="0"/>
@@ -7025,51 +7103,51 @@
             </a:pPr>
             <a:r>
               <a:rPr lang="he-IL" dirty="0"/>
-              <a:t>   </a:t>
-            </a:r>
-            <a:r>
-              <a:rPr dirty="0" err="1"/>
-              <a:t>ניתן</a:t>
-            </a:r>
-            <a:r>
-              <a:rPr dirty="0"/>
-              <a:t> </a:t>
-            </a:r>
-            <a:r>
-              <a:rPr dirty="0" err="1"/>
-              <a:t>לראות</a:t>
-            </a:r>
-            <a:r>
-              <a:rPr dirty="0"/>
-              <a:t> </a:t>
-            </a:r>
-            <a:r>
-              <a:rPr dirty="0" err="1"/>
-              <a:t>בבירור</a:t>
-            </a:r>
-            <a:r>
-              <a:rPr dirty="0"/>
-              <a:t> </a:t>
-            </a:r>
-            <a:r>
-              <a:rPr dirty="0" err="1"/>
-              <a:t>כיצד</a:t>
-            </a:r>
-            <a:r>
-              <a:rPr dirty="0"/>
-              <a:t> </a:t>
-            </a:r>
-            <a:r>
-              <a:rPr dirty="0" err="1"/>
-              <a:t>הכתובת</a:t>
-            </a:r>
-            <a:r>
-              <a:rPr dirty="0"/>
-              <a:t> </a:t>
-            </a:r>
-            <a:r>
-              <a:rPr dirty="0" err="1"/>
-              <a:t>עולה</a:t>
+              <a:t> </a:t>
+            </a:r>
+            <a:r>
+              <a:rPr dirty="0" err="1"/>
+              <a:t>הקריאה</a:t>
+            </a:r>
+            <a:r>
+              <a:rPr dirty="0"/>
+              <a:t> </a:t>
+            </a:r>
+            <a:r>
+              <a:rPr dirty="0" err="1"/>
+              <a:t>מהזיכרון</a:t>
+            </a:r>
+            <a:r>
+              <a:rPr dirty="0"/>
+              <a:t> א-</a:t>
+            </a:r>
+            <a:r>
+              <a:rPr dirty="0" err="1"/>
+              <a:t>סינכרונית</a:t>
+            </a:r>
+            <a:r>
+              <a:rPr dirty="0"/>
+              <a:t>. </a:t>
+            </a:r>
+            <a:r>
+              <a:rPr dirty="0" err="1"/>
+              <a:t>כדי</a:t>
+            </a:r>
+            <a:r>
+              <a:rPr dirty="0"/>
+              <a:t> </a:t>
+            </a:r>
+            <a:r>
+              <a:rPr dirty="0" err="1"/>
+              <a:t>להבטיח</a:t>
+            </a:r>
+            <a:r>
+              <a:rPr dirty="0"/>
+              <a:t> </a:t>
+            </a:r>
+            <a:r>
+              <a:rPr dirty="0" err="1"/>
+              <a:t>יציבות</a:t>
             </a:r>
             <a:r>
               <a:rPr dirty="0"/>
@@ -7077,27 +7155,43 @@
             </a:r>
             <a:r>
               <a:rPr dirty="0" err="1"/>
-              <a:t>המידע</a:t>
-            </a:r>
-            <a:r>
-              <a:rPr dirty="0"/>
-              <a:t> </a:t>
-            </a:r>
-            <a:r>
-              <a:rPr dirty="0" err="1"/>
-              <a:t>מופיע</a:t>
-            </a:r>
-            <a:r>
-              <a:rPr dirty="0"/>
-              <a:t> </a:t>
-            </a:r>
-            <a:r>
-              <a:rPr dirty="0" err="1"/>
-              <a:t>מיידית</a:t>
-            </a:r>
-            <a:r>
-              <a:rPr dirty="0"/>
-              <a:t> ב-</a:t>
+              <a:t>הקוד</a:t>
+            </a:r>
+            <a:r>
+              <a:rPr dirty="0"/>
+              <a:t> </a:t>
+            </a:r>
+            <a:r>
+              <a:rPr dirty="0" err="1"/>
+              <a:t>נועל</a:t>
+            </a:r>
+            <a:r>
+              <a:rPr dirty="0"/>
+              <a:t> </a:t>
+            </a:r>
+            <a:r>
+              <a:rPr dirty="0" err="1"/>
+              <a:t>את</a:t>
+            </a:r>
+            <a:r>
+              <a:rPr dirty="0"/>
+              <a:t> </a:t>
+            </a:r>
+            <a:r>
+              <a:rPr dirty="0" err="1"/>
+              <a:t>הנתון</a:t>
+            </a:r>
+            <a:r>
+              <a:rPr dirty="0"/>
+              <a:t> </a:t>
+            </a:r>
+            <a:r>
+              <a:rPr dirty="0" err="1"/>
+              <a:t>הנכנס</a:t>
+            </a:r>
+            <a:r>
+              <a:rPr dirty="0"/>
+              <a:t> (</a:t>
             </a:r>
             <a:r>
               <a:rPr dirty="0" err="1"/>
@@ -7105,39 +7199,35 @@
             </a:r>
             <a:r>
               <a:rPr dirty="0"/>
-              <a:t> </a:t>
-            </a:r>
-            <a:r>
-              <a:rPr dirty="0" err="1"/>
-              <a:t>קריאה</a:t>
-            </a:r>
-            <a:r>
-              <a:rPr dirty="0"/>
-              <a:t> א-</a:t>
-            </a:r>
-            <a:r>
-              <a:rPr dirty="0" err="1"/>
-              <a:t>סינכרונית</a:t>
-            </a:r>
-            <a:r>
-              <a:rPr lang="he-IL" dirty="0"/>
-              <a:t>,</a:t>
-            </a:r>
-            <a:r>
-              <a:rPr dirty="0" err="1"/>
-              <a:t>וננעל</a:t>
-            </a:r>
-            <a:r>
-              <a:rPr dirty="0"/>
-              <a:t> </a:t>
-            </a:r>
-            <a:r>
-              <a:rPr dirty="0" err="1"/>
-              <a:t>באוגר</a:t>
-            </a:r>
-            <a:r>
-              <a:rPr dirty="0"/>
-              <a:t> </a:t>
+              <a:t>) </a:t>
+            </a:r>
+            <a:r>
+              <a:rPr lang="he-IL" dirty="0"/>
+              <a:t> </a:t>
+            </a:r>
+            <a:r>
+              <a:rPr dirty="0" err="1"/>
+              <a:t>לתוך</a:t>
+            </a:r>
+            <a:r>
+              <a:rPr dirty="0"/>
+              <a:t> </a:t>
+            </a:r>
+            <a:r>
+              <a:rPr dirty="0" err="1"/>
+              <a:t>אוגר</a:t>
+            </a:r>
+            <a:r>
+              <a:rPr dirty="0"/>
+              <a:t> </a:t>
+            </a:r>
+            <a:r>
+              <a:rPr dirty="0" err="1"/>
+              <a:t>פנימי</a:t>
+            </a:r>
+            <a:r>
+              <a:rPr dirty="0"/>
+              <a:t> (</a:t>
             </a:r>
             <a:r>
               <a:rPr dirty="0" err="1"/>
@@ -7145,7 +7235,7 @@
             </a:r>
             <a:r>
               <a:rPr dirty="0"/>
-              <a:t> </a:t>
+              <a:t>) </a:t>
             </a:r>
             <a:r>
               <a:rPr dirty="0" err="1"/>
@@ -7176,13 +7266,256 @@
             <a:pPr algn="r" rtl="1">
               <a:defRPr sz="1600"/>
             </a:pPr>
+            <a:r>
+              <a:rPr dirty="0"/>
+              <a:t>• </a:t>
+            </a:r>
+            <a:r>
+              <a:rPr dirty="0" err="1"/>
+              <a:t>כדי</a:t>
+            </a:r>
+            <a:r>
+              <a:rPr dirty="0"/>
+              <a:t> </a:t>
+            </a:r>
+            <a:r>
+              <a:rPr dirty="0" err="1"/>
+              <a:t>לפצות</a:t>
+            </a:r>
+            <a:r>
+              <a:rPr dirty="0"/>
+              <a:t> </a:t>
+            </a:r>
+            <a:r>
+              <a:rPr dirty="0" err="1"/>
+              <a:t>על</a:t>
+            </a:r>
+            <a:r>
+              <a:rPr dirty="0"/>
+              <a:t> </a:t>
+            </a:r>
+            <a:r>
+              <a:rPr dirty="0" err="1"/>
+              <a:t>השהיית</a:t>
+            </a:r>
+            <a:r>
+              <a:rPr dirty="0"/>
+              <a:t> </a:t>
+            </a:r>
+            <a:r>
+              <a:rPr dirty="0" err="1"/>
+              <a:t>הזיכרון</a:t>
+            </a:r>
+            <a:r>
+              <a:rPr dirty="0"/>
+              <a:t>, </a:t>
+            </a:r>
+            <a:r>
+              <a:rPr dirty="0" err="1"/>
+              <a:t>דגל</a:t>
+            </a:r>
+            <a:r>
+              <a:rPr dirty="0"/>
+              <a:t> </a:t>
+            </a:r>
+            <a:r>
+              <a:rPr dirty="0" err="1"/>
+              <a:t>אזור</a:t>
+            </a:r>
+            <a:r>
+              <a:rPr dirty="0"/>
+              <a:t> </a:t>
+            </a:r>
+            <a:r>
+              <a:rPr dirty="0" err="1"/>
+              <a:t>התצוגה</a:t>
+            </a:r>
+            <a:r>
+              <a:rPr dirty="0"/>
+              <a:t> (</a:t>
+            </a:r>
+            <a:r>
+              <a:rPr dirty="0" err="1"/>
+              <a:t>in_display_area</a:t>
+            </a:r>
+            <a:r>
+              <a:rPr dirty="0"/>
+              <a:t>) </a:t>
+            </a:r>
+            <a:r>
+              <a:rPr lang="he-IL" dirty="0"/>
+              <a:t> </a:t>
+            </a:r>
+            <a:r>
+              <a:rPr dirty="0" err="1"/>
+              <a:t>מושהה</a:t>
+            </a:r>
+            <a:r>
+              <a:rPr dirty="0"/>
+              <a:t> </a:t>
+            </a:r>
+            <a:r>
+              <a:rPr dirty="0" err="1"/>
+              <a:t>גם</a:t>
+            </a:r>
+            <a:r>
+              <a:rPr dirty="0"/>
+              <a:t> </a:t>
+            </a:r>
+            <a:r>
+              <a:rPr dirty="0" err="1"/>
+              <a:t>הוא</a:t>
+            </a:r>
+            <a:r>
+              <a:rPr dirty="0"/>
+              <a:t> </a:t>
+            </a:r>
+            <a:r>
+              <a:rPr dirty="0" err="1"/>
+              <a:t>במחזור</a:t>
+            </a:r>
+            <a:r>
+              <a:rPr dirty="0"/>
+              <a:t> </a:t>
+            </a:r>
+            <a:r>
+              <a:rPr dirty="0" err="1"/>
+              <a:t>שעון</a:t>
+            </a:r>
+            <a:r>
+              <a:rPr dirty="0"/>
+              <a:t> </a:t>
+            </a:r>
+            <a:r>
+              <a:rPr dirty="0" err="1"/>
+              <a:t>אחד</a:t>
+            </a:r>
+            <a:endParaRPr dirty="0"/>
+          </a:p>
+          <a:p>
+            <a:pPr algn="r" rtl="1">
+              <a:defRPr sz="1600"/>
+            </a:pPr>
+            <a:r>
+              <a:rPr dirty="0"/>
+              <a:t>• </a:t>
+            </a:r>
+            <a:r>
+              <a:rPr dirty="0" err="1"/>
+              <a:t>ניתוב</a:t>
+            </a:r>
+            <a:r>
+              <a:rPr dirty="0"/>
+              <a:t> </a:t>
+            </a:r>
+            <a:r>
+              <a:rPr dirty="0" err="1"/>
+              <a:t>דיגיטלי</a:t>
+            </a:r>
+            <a:r>
+              <a:rPr dirty="0"/>
+              <a:t> (Mux) </a:t>
+            </a:r>
+            <a:r>
+              <a:rPr lang="he-IL" dirty="0"/>
+              <a:t>:</a:t>
+            </a:r>
+          </a:p>
+          <a:p>
+            <a:pPr algn="r" rtl="1">
+              <a:defRPr sz="1600"/>
+            </a:pPr>
+            <a:r>
+              <a:rPr dirty="0" err="1"/>
+              <a:t>רק</a:t>
+            </a:r>
+            <a:r>
+              <a:rPr dirty="0"/>
+              <a:t> </a:t>
+            </a:r>
+            <a:r>
+              <a:rPr dirty="0" err="1"/>
+              <a:t>כאשר</a:t>
+            </a:r>
+            <a:r>
+              <a:rPr dirty="0"/>
+              <a:t> </a:t>
+            </a:r>
+            <a:r>
+              <a:rPr dirty="0" err="1"/>
+              <a:t>הדגל</a:t>
+            </a:r>
+            <a:r>
+              <a:rPr dirty="0"/>
+              <a:t> </a:t>
+            </a:r>
+            <a:r>
+              <a:rPr dirty="0" err="1"/>
+              <a:t>המושהה</a:t>
+            </a:r>
+            <a:r>
+              <a:rPr dirty="0"/>
+              <a:t> </a:t>
+            </a:r>
+            <a:r>
+              <a:rPr dirty="0" err="1"/>
+              <a:t>דולק</a:t>
+            </a:r>
+            <a:r>
+              <a:rPr dirty="0"/>
+              <a:t> 12 </a:t>
+            </a:r>
+            <a:r>
+              <a:rPr dirty="0" err="1"/>
+              <a:t>הביטים</a:t>
+            </a:r>
+            <a:r>
+              <a:rPr dirty="0"/>
+              <a:t> </a:t>
+            </a:r>
+            <a:r>
+              <a:rPr dirty="0" err="1"/>
+              <a:t>מפוצלים</a:t>
+            </a:r>
+            <a:r>
+              <a:rPr dirty="0"/>
+              <a:t> </a:t>
+            </a:r>
+            <a:r>
+              <a:rPr dirty="0" err="1"/>
+              <a:t>ומנותבים</a:t>
+            </a:r>
+            <a:r>
+              <a:rPr dirty="0"/>
+              <a:t> </a:t>
+            </a:r>
+            <a:r>
+              <a:rPr dirty="0" err="1"/>
+              <a:t>ליציאות</a:t>
+            </a:r>
+            <a:r>
+              <a:rPr dirty="0"/>
+              <a:t> VGA_R, VGA_G ו-VGA_B 4 </a:t>
+            </a:r>
+            <a:r>
+              <a:rPr dirty="0" err="1"/>
+              <a:t>ביטים</a:t>
+            </a:r>
+            <a:r>
+              <a:rPr dirty="0"/>
+              <a:t> </a:t>
+            </a:r>
+            <a:r>
+              <a:rPr dirty="0" err="1"/>
+              <a:t>לצבע</a:t>
+            </a:r>
             <a:endParaRPr dirty="0"/>
           </a:p>
         </p:txBody>
       </p:sp>
       <p:pic>
         <p:nvPicPr>
-          <p:cNvPr id="4" name="Picture 3" descr="modelsim_data_path_flow.png"/>
+          <p:cNvPr id="4" name="Picture 3" descr="vga_address_logic_code.png"/>
           <p:cNvPicPr>
             <a:picLocks noChangeAspect="1"/>
           </p:cNvPicPr>
@@ -7190,13 +7523,13 @@
         </p:nvPicPr>
         <p:blipFill rotWithShape="1">
           <a:blip r:embed="rId2"/>
-          <a:srcRect t="20716" b="5381"/>
+          <a:srcRect l="5217" t="10044" r="4783" b="5896"/>
           <a:stretch/>
         </p:blipFill>
         <p:spPr>
           <a:xfrm>
-            <a:off x="-126733" y="2679778"/>
-            <a:ext cx="9240253" cy="4310302"/>
+            <a:off x="1074056" y="3298371"/>
+            <a:ext cx="6473372" cy="3282043"/>
           </a:xfrm>
           <a:prstGeom prst="rect">
             <a:avLst/>
@@ -7240,12 +7573,14 @@
         </p:nvSpPr>
         <p:spPr>
           <a:xfrm>
-            <a:off x="457200" y="-141973"/>
+            <a:off x="386080" y="0"/>
             <a:ext cx="8229600" cy="1143000"/>
           </a:xfrm>
         </p:spPr>
         <p:txBody>
-          <a:bodyPr/>
+          <a:bodyPr>
+            <a:normAutofit fontScale="90000"/>
+          </a:bodyPr>
           <a:lstStyle/>
           <a:p>
             <a:pPr algn="ctr" rtl="1"/>
@@ -7259,35 +7594,22 @@
             </a:r>
             <a:r>
               <a:rPr dirty="0" err="1"/>
-              <a:t>התקן</a:t>
-            </a:r>
-            <a:r>
-              <a:rPr dirty="0"/>
-              <a:t>: </a:t>
-            </a:r>
-            <a:r>
-              <a:rPr dirty="0" err="1"/>
-              <a:t>מחזור</a:t>
-            </a:r>
-            <a:r>
-              <a:rPr dirty="0"/>
-              <a:t> </a:t>
-            </a:r>
-            <a:r>
-              <a:rPr dirty="0" err="1"/>
-              <a:t>שורה</a:t>
-            </a:r>
-            <a:r>
-              <a:rPr dirty="0"/>
-              <a:t> </a:t>
-            </a:r>
-            <a:r>
-              <a:rPr dirty="0" err="1"/>
-              <a:t>שלם</a:t>
-            </a:r>
-            <a:r>
-              <a:rPr dirty="0"/>
-              <a:t> (Ts)</a:t>
+              <a:t>מסלול</a:t>
+            </a:r>
+            <a:r>
+              <a:rPr dirty="0"/>
+              <a:t> </a:t>
+            </a:r>
+            <a:r>
+              <a:rPr dirty="0" err="1"/>
+              <a:t>הנתונים</a:t>
+            </a:r>
+            <a:br>
+              <a:rPr lang="he-IL" dirty="0"/>
+            </a:br>
+            <a:r>
+              <a:rPr dirty="0"/>
+              <a:t> VGA Controller ↔ BRAM</a:t>
             </a:r>
           </a:p>
         </p:txBody>
@@ -7300,8 +7622,8 @@
         </p:nvSpPr>
         <p:spPr>
           <a:xfrm>
-            <a:off x="1" y="429527"/>
-            <a:ext cx="9144000" cy="2092881"/>
+            <a:off x="-365225" y="1265248"/>
+            <a:ext cx="9240253" cy="1815882"/>
           </a:xfrm>
           <a:prstGeom prst="rect">
             <a:avLst/>
@@ -7314,153 +7636,21 @@
           </a:bodyPr>
           <a:lstStyle/>
           <a:p>
-            <a:endParaRPr dirty="0"/>
-          </a:p>
-          <a:p>
             <a:pPr algn="r" rtl="1">
               <a:defRPr sz="1600"/>
             </a:pPr>
             <a:r>
-              <a:rPr dirty="0" err="1"/>
-              <a:t>לאחר</a:t>
-            </a:r>
-            <a:r>
-              <a:rPr dirty="0"/>
-              <a:t> </a:t>
-            </a:r>
-            <a:r>
-              <a:rPr dirty="0" err="1"/>
-              <a:t>שה</a:t>
-            </a:r>
-            <a:r>
-              <a:rPr lang="he-IL" dirty="0"/>
-              <a:t>ראנו</a:t>
-            </a:r>
-            <a:r>
-              <a:rPr dirty="0"/>
-              <a:t> </a:t>
-            </a:r>
-            <a:r>
-              <a:rPr dirty="0" err="1"/>
-              <a:t>את</a:t>
-            </a:r>
-            <a:r>
-              <a:rPr dirty="0"/>
-              <a:t> </a:t>
-            </a:r>
-            <a:r>
-              <a:rPr dirty="0" err="1"/>
-              <a:t>אמינות</a:t>
-            </a:r>
-            <a:r>
-              <a:rPr dirty="0"/>
-              <a:t> </a:t>
-            </a:r>
-            <a:r>
-              <a:rPr dirty="0" err="1"/>
-              <a:t>שליפת</a:t>
-            </a:r>
-            <a:r>
-              <a:rPr dirty="0"/>
-              <a:t> </a:t>
-            </a:r>
-            <a:r>
-              <a:rPr dirty="0" err="1"/>
-              <a:t>הנתונים</a:t>
-            </a:r>
-            <a:r>
-              <a:rPr dirty="0"/>
-              <a:t> </a:t>
-            </a:r>
-            <a:r>
-              <a:rPr dirty="0" err="1"/>
-              <a:t>מהזיכרון</a:t>
-            </a:r>
-            <a:r>
-              <a:rPr dirty="0"/>
-              <a:t>, </a:t>
-            </a:r>
-            <a:r>
-              <a:rPr dirty="0" err="1"/>
-              <a:t>כעת</a:t>
-            </a:r>
-            <a:r>
-              <a:rPr dirty="0"/>
-              <a:t> </a:t>
-            </a:r>
-            <a:r>
-              <a:rPr dirty="0" err="1"/>
-              <a:t>נוכיח</a:t>
-            </a:r>
-            <a:r>
-              <a:rPr dirty="0"/>
-              <a:t> </a:t>
-            </a:r>
-            <a:r>
-              <a:rPr dirty="0" err="1"/>
-              <a:t>שהחומרה</a:t>
-            </a:r>
-            <a:r>
-              <a:rPr dirty="0"/>
-              <a:t> </a:t>
-            </a:r>
-            <a:r>
-              <a:rPr dirty="0" err="1"/>
-              <a:t>מייצרת</a:t>
-            </a:r>
-            <a:r>
-              <a:rPr dirty="0"/>
-              <a:t> </a:t>
-            </a:r>
-            <a:r>
-              <a:rPr dirty="0" err="1"/>
-              <a:t>את</a:t>
-            </a:r>
-            <a:r>
-              <a:rPr dirty="0"/>
-              <a:t> </a:t>
-            </a:r>
-            <a:r>
-              <a:rPr dirty="0" err="1"/>
-              <a:t>התזמונים</a:t>
-            </a:r>
-            <a:r>
-              <a:rPr dirty="0"/>
-              <a:t> </a:t>
-            </a:r>
-            <a:r>
-              <a:rPr dirty="0" err="1"/>
-              <a:t>הפיזיים</a:t>
-            </a:r>
-            <a:r>
-              <a:rPr dirty="0"/>
-              <a:t> </a:t>
-            </a:r>
-            <a:r>
-              <a:rPr dirty="0" err="1"/>
-              <a:t>הנדרשים</a:t>
-            </a:r>
-            <a:r>
-              <a:rPr dirty="0"/>
-              <a:t> </a:t>
-            </a:r>
-            <a:r>
-              <a:rPr lang="he-IL" dirty="0"/>
-              <a:t> </a:t>
-            </a:r>
-            <a:r>
-              <a:rPr dirty="0" err="1"/>
-              <a:t>בתקן</a:t>
-            </a:r>
-            <a:r>
-              <a:rPr dirty="0"/>
-              <a:t> ה-VGA</a:t>
-            </a:r>
-            <a:r>
-              <a:rPr lang="he-IL" dirty="0"/>
-              <a:t>.</a:t>
-            </a:r>
-            <a:endParaRPr lang="en-US" dirty="0"/>
+              <a:rPr lang="he-IL" dirty="0"/>
+              <a:t>קריאה מזיכרון ללא השהיה עלולה לייצר </a:t>
+            </a:r>
+            <a:r>
+              <a:rPr lang="he-IL" dirty="0" err="1"/>
+              <a:t>גליצ'ים</a:t>
+            </a:r>
+            <a:r>
+              <a:rPr lang="he-IL" dirty="0"/>
+              <a:t> ורעשים בעת החלפת כתובת</a:t>
+            </a:r>
           </a:p>
           <a:p>
             <a:pPr algn="r" rtl="1">
@@ -7468,15 +7658,15 @@
             </a:pPr>
             <a:r>
               <a:rPr lang="he-IL" dirty="0"/>
-              <a:t>•  נעבוד עם הדגימות לפי </a:t>
-            </a:r>
-            <a:r>
-              <a:rPr lang="he-IL" dirty="0" err="1"/>
-              <a:t>הסדר,מהגדול</a:t>
-            </a:r>
-            <a:r>
-              <a:rPr lang="he-IL" dirty="0"/>
-              <a:t> לקטן:</a:t>
+              <a:t>לשם כך משתמשים ברגיסטר דוגם </a:t>
+            </a:r>
+            <a:r>
+              <a:rPr lang="en-US" dirty="0" err="1"/>
+              <a:t>pxl_data_reg</a:t>
+            </a:r>
+            <a:r>
+              <a:rPr lang="he-IL" dirty="0"/>
+              <a:t> בבקר</a:t>
             </a:r>
           </a:p>
           <a:p>
@@ -7485,161 +7675,29 @@
             </a:pPr>
             <a:r>
               <a:rPr lang="he-IL" dirty="0"/>
-              <a:t> </a:t>
-            </a:r>
-            <a:r>
-              <a:rPr dirty="0" err="1"/>
-              <a:t>נתחיל</a:t>
-            </a:r>
-            <a:r>
-              <a:rPr dirty="0"/>
-              <a:t> </a:t>
-            </a:r>
-            <a:r>
-              <a:rPr dirty="0" err="1"/>
-              <a:t>ממבט-על</a:t>
-            </a:r>
-            <a:r>
-              <a:rPr dirty="0"/>
-              <a:t> </a:t>
-            </a:r>
-            <a:r>
-              <a:rPr dirty="0" err="1"/>
-              <a:t>של</a:t>
-            </a:r>
-            <a:r>
-              <a:rPr dirty="0"/>
-              <a:t> </a:t>
-            </a:r>
-            <a:r>
-              <a:rPr dirty="0" err="1"/>
-              <a:t>שורת</a:t>
-            </a:r>
-            <a:r>
-              <a:rPr dirty="0"/>
-              <a:t> </a:t>
-            </a:r>
-            <a:r>
-              <a:rPr dirty="0" err="1"/>
-              <a:t>מסך</a:t>
-            </a:r>
-            <a:r>
-              <a:rPr dirty="0"/>
-              <a:t> </a:t>
-            </a:r>
-            <a:r>
-              <a:rPr dirty="0" err="1"/>
-              <a:t>שלמה</a:t>
-            </a:r>
-            <a:r>
-              <a:rPr dirty="0"/>
-              <a:t>, </a:t>
-            </a:r>
-            <a:r>
-              <a:rPr dirty="0" err="1"/>
-              <a:t>ונצלול</a:t>
-            </a:r>
-            <a:r>
-              <a:rPr dirty="0"/>
-              <a:t> </a:t>
-            </a:r>
-            <a:r>
-              <a:rPr dirty="0" err="1"/>
-              <a:t>בהדרגה</a:t>
-            </a:r>
-            <a:r>
-              <a:rPr dirty="0"/>
-              <a:t> </a:t>
-            </a:r>
-            <a:r>
-              <a:rPr dirty="0" err="1"/>
-              <a:t>לניתוח</a:t>
-            </a:r>
-            <a:r>
-              <a:rPr dirty="0"/>
-              <a:t> </a:t>
-            </a:r>
-            <a:r>
-              <a:rPr dirty="0" err="1"/>
-              <a:t>האזורים</a:t>
-            </a:r>
-            <a:r>
-              <a:rPr dirty="0"/>
-              <a:t> </a:t>
-            </a:r>
-            <a:r>
-              <a:rPr dirty="0" err="1"/>
-              <a:t>הפעילים</a:t>
-            </a:r>
-            <a:r>
-              <a:rPr dirty="0"/>
-              <a:t>, </a:t>
-            </a:r>
-            <a:r>
-              <a:rPr dirty="0" err="1"/>
-              <a:t>זמני</a:t>
-            </a:r>
-            <a:r>
-              <a:rPr dirty="0"/>
-              <a:t> </a:t>
-            </a:r>
-            <a:r>
-              <a:rPr dirty="0" err="1"/>
-              <a:t>ההמתנה</a:t>
-            </a:r>
-            <a:r>
-              <a:rPr dirty="0"/>
-              <a:t> (Porches) </a:t>
-            </a:r>
-            <a:r>
-              <a:rPr dirty="0" err="1"/>
-              <a:t>ודופק</a:t>
-            </a:r>
-            <a:r>
-              <a:rPr dirty="0"/>
-              <a:t> </a:t>
-            </a:r>
-            <a:r>
-              <a:rPr dirty="0" err="1"/>
-              <a:t>הסנכרון</a:t>
-            </a:r>
-            <a:r>
-              <a:rPr dirty="0"/>
-              <a:t>.</a:t>
+              <a:t>וכן דגימת הנתון מה </a:t>
+            </a:r>
+            <a:r>
+              <a:rPr lang="en-US" dirty="0" err="1"/>
+              <a:t>doutb</a:t>
+            </a:r>
+            <a:r>
+              <a:rPr lang="he-IL" dirty="0"/>
+              <a:t> מתבצעת רק בעליית </a:t>
+            </a:r>
+            <a:r>
+              <a:rPr lang="he-IL" dirty="0" err="1"/>
+              <a:t>שעון,כאשר</a:t>
+            </a:r>
+            <a:r>
+              <a:rPr lang="he-IL" dirty="0"/>
+              <a:t> המידע יציב ונקי מרעשים</a:t>
             </a:r>
           </a:p>
           <a:p>
             <a:pPr algn="r" rtl="1">
               <a:defRPr sz="1600"/>
             </a:pPr>
-            <a:r>
-              <a:rPr dirty="0"/>
-              <a:t>• </a:t>
-            </a:r>
-            <a:r>
-              <a:rPr dirty="0" err="1"/>
-              <a:t>הוכחת</a:t>
-            </a:r>
-            <a:r>
-              <a:rPr dirty="0"/>
-              <a:t> </a:t>
-            </a:r>
-            <a:r>
-              <a:rPr dirty="0" err="1"/>
-              <a:t>מחזור</a:t>
-            </a:r>
-            <a:r>
-              <a:rPr dirty="0"/>
-              <a:t> </a:t>
-            </a:r>
-            <a:r>
-              <a:rPr dirty="0" err="1"/>
-              <a:t>השורה</a:t>
-            </a:r>
-            <a:r>
-              <a:rPr dirty="0"/>
-              <a:t>: </a:t>
-            </a:r>
             <a:endParaRPr lang="he-IL" dirty="0"/>
           </a:p>
           <a:p>
@@ -7647,115 +7705,109 @@
               <a:defRPr sz="1600"/>
             </a:pPr>
             <a:r>
-              <a:rPr dirty="0" err="1"/>
-              <a:t>התקן</a:t>
-            </a:r>
-            <a:r>
-              <a:rPr dirty="0"/>
-              <a:t> </a:t>
-            </a:r>
-            <a:r>
-              <a:rPr dirty="0" err="1"/>
-              <a:t>דורש</a:t>
-            </a:r>
-            <a:r>
-              <a:rPr dirty="0"/>
-              <a:t> 800 </a:t>
-            </a:r>
-            <a:r>
-              <a:rPr lang="he-IL" dirty="0"/>
-              <a:t> </a:t>
-            </a:r>
-            <a:r>
-              <a:rPr dirty="0" err="1"/>
-              <a:t>מחזורי</a:t>
-            </a:r>
-            <a:r>
-              <a:rPr dirty="0"/>
-              <a:t> </a:t>
-            </a:r>
-            <a:r>
-              <a:rPr dirty="0" err="1"/>
-              <a:t>שעון</a:t>
-            </a:r>
-            <a:r>
-              <a:rPr lang="he-IL" dirty="0"/>
-              <a:t> </a:t>
-            </a:r>
-            <a:r>
-              <a:rPr dirty="0"/>
-              <a:t> </a:t>
-            </a:r>
-            <a:r>
-              <a:rPr dirty="0" err="1"/>
-              <a:t>מונה</a:t>
-            </a:r>
-            <a:r>
-              <a:rPr dirty="0"/>
-              <a:t> ה-</a:t>
-            </a:r>
-            <a:r>
-              <a:rPr dirty="0" err="1"/>
-              <a:t>hsync_reg</a:t>
-            </a:r>
-            <a:r>
-              <a:rPr dirty="0"/>
-              <a:t> </a:t>
-            </a:r>
-            <a:r>
-              <a:rPr lang="he-IL" dirty="0"/>
-              <a:t> </a:t>
-            </a:r>
-            <a:r>
-              <a:rPr dirty="0"/>
-              <a:t>סופר0-799 </a:t>
-            </a:r>
-            <a:r>
-              <a:rPr lang="he-IL" dirty="0"/>
-              <a:t> </a:t>
-            </a:r>
-            <a:r>
-              <a:rPr dirty="0" err="1"/>
-              <a:t>במדויק</a:t>
-            </a:r>
-            <a:r>
-              <a:rPr dirty="0"/>
-              <a:t>, </a:t>
-            </a:r>
-            <a:r>
-              <a:rPr dirty="0" err="1"/>
-              <a:t>ומדידת</a:t>
-            </a:r>
-            <a:r>
-              <a:rPr dirty="0"/>
-              <a:t> ה</a:t>
+              <a:rPr lang="he-IL" dirty="0"/>
+              <a:t>מה שרואים כאן זה בעצם </a:t>
             </a:r>
             <a:r>
               <a:rPr lang="he-IL" dirty="0" err="1"/>
-              <a:t>קרסרים</a:t>
-            </a:r>
-            <a:r>
-              <a:rPr dirty="0"/>
-              <a:t> </a:t>
-            </a:r>
-            <a:r>
-              <a:rPr lang="he-IL" dirty="0"/>
-              <a:t>מראה הפרש </a:t>
-            </a:r>
-            <a:r>
-              <a:rPr dirty="0" err="1"/>
-              <a:t>של</a:t>
-            </a:r>
-            <a:r>
-              <a:rPr dirty="0"/>
-              <a:t> 32us.</a:t>
-            </a:r>
+              <a:t>שאיך</a:t>
+            </a:r>
+            <a:r>
+              <a:rPr lang="he-IL" dirty="0"/>
+              <a:t> שהדגל </a:t>
+            </a:r>
+            <a:r>
+              <a:rPr lang="he-IL" dirty="0" err="1"/>
+              <a:t>נפתח,החל</a:t>
+            </a:r>
+            <a:r>
+              <a:rPr lang="he-IL" dirty="0"/>
+              <a:t> משעון </a:t>
+            </a:r>
+            <a:r>
+              <a:rPr lang="he-IL" dirty="0" err="1"/>
+              <a:t>לאחריו,המידע</a:t>
+            </a:r>
+            <a:r>
+              <a:rPr lang="he-IL" dirty="0"/>
+              <a:t> שהיה ב </a:t>
+            </a:r>
+            <a:r>
+              <a:rPr lang="en-US" dirty="0" err="1"/>
+              <a:t>doutb</a:t>
+            </a:r>
+            <a:r>
+              <a:rPr lang="he-IL" dirty="0"/>
+              <a:t> עובר ל </a:t>
+            </a:r>
+            <a:r>
+              <a:rPr lang="en-US" dirty="0"/>
+              <a:t>R G B</a:t>
+            </a:r>
+            <a:endParaRPr lang="he-IL" dirty="0"/>
+          </a:p>
+          <a:p>
+            <a:pPr algn="r" rtl="1">
+              <a:defRPr sz="1600"/>
+            </a:pPr>
+            <a:r>
+              <a:rPr lang="he-IL" dirty="0"/>
+              <a:t>וממשיך להתעדכן בהתאם למה שמגיע מה</a:t>
+            </a:r>
+            <a:r>
+              <a:rPr lang="en-US" dirty="0" err="1"/>
+              <a:t>addrb</a:t>
+            </a:r>
+            <a:r>
+              <a:rPr lang="he-IL" dirty="0"/>
+              <a:t> ,שקובע איזה פיקסל נשלף מהזיכרון ,בכל מחזור </a:t>
+            </a:r>
+            <a:r>
+              <a:rPr lang="he-IL" dirty="0" err="1"/>
+              <a:t>נתון,יעבור</a:t>
+            </a:r>
+            <a:r>
+              <a:rPr lang="he-IL" dirty="0"/>
+              <a:t> דרך</a:t>
+            </a:r>
+          </a:p>
+          <a:p>
+            <a:pPr algn="r" rtl="1">
+              <a:defRPr sz="1600"/>
+            </a:pPr>
+            <a:r>
+              <a:rPr lang="en-US" dirty="0" err="1"/>
+              <a:t>pxl_data_reg</a:t>
+            </a:r>
+            <a:r>
+              <a:rPr lang="he-IL" dirty="0"/>
+              <a:t> וישודר </a:t>
+            </a:r>
+            <a:r>
+              <a:rPr lang="he-IL" dirty="0" err="1"/>
+              <a:t>למסך,דרך</a:t>
+            </a:r>
+            <a:r>
+              <a:rPr lang="he-IL" dirty="0"/>
+              <a:t> ה </a:t>
+            </a:r>
+            <a:r>
+              <a:rPr lang="en-US"/>
+              <a:t>R G B </a:t>
+            </a:r>
+            <a:endParaRPr dirty="0"/>
           </a:p>
         </p:txBody>
       </p:sp>
       <p:pic>
         <p:nvPicPr>
-          <p:cNvPr id="4" name="Picture 3" descr="modelsim_full_line_ts.png"/>
+          <p:cNvPr id="6" name="תמונה 5">
+            <a:extLst>
+              <a:ext uri="{FF2B5EF4-FFF2-40B4-BE49-F238E27FC236}">
+                <a16:creationId xmlns:a16="http://schemas.microsoft.com/office/drawing/2014/main" id="{5571DB6E-4AA8-4839-9CEB-03BF006F8538}"/>
+              </a:ext>
+            </a:extLst>
+          </p:cNvPr>
           <p:cNvPicPr>
             <a:picLocks noChangeAspect="1"/>
           </p:cNvPicPr>
@@ -7763,13 +7815,13 @@
         </p:nvPicPr>
         <p:blipFill rotWithShape="1">
           <a:blip r:embed="rId2"/>
-          <a:srcRect l="1656" t="22021"/>
+          <a:srcRect t="21017"/>
           <a:stretch/>
         </p:blipFill>
         <p:spPr>
           <a:xfrm>
-            <a:off x="0" y="2641600"/>
-            <a:ext cx="9143999" cy="4216399"/>
+            <a:off x="-71120" y="3164840"/>
+            <a:ext cx="9144000" cy="3723957"/>
           </a:xfrm>
           <a:prstGeom prst="rect">
             <a:avLst/>
@@ -7813,8 +7865,8 @@
         </p:nvSpPr>
         <p:spPr>
           <a:xfrm>
-            <a:off x="457200" y="0"/>
-            <a:ext cx="8229600" cy="822642"/>
+            <a:off x="457200" y="-141973"/>
+            <a:ext cx="8229600" cy="1143000"/>
           </a:xfrm>
         </p:spPr>
         <p:txBody>
@@ -7824,41 +7876,68 @@
             <a:pPr algn="ctr" rtl="1"/>
             <a:r>
               <a:rPr dirty="0" err="1"/>
-              <a:t>האזור</a:t>
-            </a:r>
-            <a:r>
-              <a:rPr dirty="0"/>
-              <a:t> </a:t>
-            </a:r>
-            <a:r>
-              <a:rPr dirty="0" err="1"/>
-              <a:t>הפעיל</a:t>
-            </a:r>
-            <a:r>
-              <a:rPr dirty="0"/>
-              <a:t> (</a:t>
-            </a:r>
-            <a:r>
-              <a:rPr dirty="0" err="1"/>
-              <a:t>Tdisp</a:t>
-            </a:r>
-            <a:r>
-              <a:rPr dirty="0"/>
-              <a:t>)</a:t>
+              <a:t>אימות</a:t>
+            </a:r>
+            <a:r>
+              <a:rPr lang="he-IL" dirty="0"/>
+              <a:t> </a:t>
+            </a:r>
+            <a:r>
+              <a:rPr dirty="0" err="1"/>
+              <a:t>שורה</a:t>
+            </a:r>
+            <a:r>
+              <a:rPr dirty="0"/>
+              <a:t> Ts</a:t>
             </a:r>
           </a:p>
         </p:txBody>
       </p:sp>
+      <p:pic>
+        <p:nvPicPr>
+          <p:cNvPr id="6" name="תמונה 5">
+            <a:extLst>
+              <a:ext uri="{FF2B5EF4-FFF2-40B4-BE49-F238E27FC236}">
+                <a16:creationId xmlns:a16="http://schemas.microsoft.com/office/drawing/2014/main" id="{2463DDB5-46E6-4FA1-B256-428A6B706610}"/>
+              </a:ext>
+            </a:extLst>
+          </p:cNvPr>
+          <p:cNvPicPr>
+            <a:picLocks noChangeAspect="1"/>
+          </p:cNvPicPr>
+          <p:nvPr/>
+        </p:nvPicPr>
+        <p:blipFill rotWithShape="1">
+          <a:blip r:embed="rId2"/>
+          <a:srcRect t="21832"/>
+          <a:stretch/>
+        </p:blipFill>
+        <p:spPr>
+          <a:xfrm>
+            <a:off x="1" y="2833679"/>
+            <a:ext cx="9144000" cy="3594794"/>
+          </a:xfrm>
+          <a:prstGeom prst="rect">
+            <a:avLst/>
+          </a:prstGeom>
+        </p:spPr>
+      </p:pic>
       <p:sp>
         <p:nvSpPr>
-          <p:cNvPr id="3" name="TextBox 2"/>
+          <p:cNvPr id="7" name="תיבת טקסט 6">
+            <a:extLst>
+              <a:ext uri="{FF2B5EF4-FFF2-40B4-BE49-F238E27FC236}">
+                <a16:creationId xmlns:a16="http://schemas.microsoft.com/office/drawing/2014/main" id="{CA7F9E92-FBE0-4D47-93E2-083EBC9DB985}"/>
+              </a:ext>
+            </a:extLst>
+          </p:cNvPr>
           <p:cNvSpPr txBox="1"/>
           <p:nvPr/>
         </p:nvSpPr>
         <p:spPr>
           <a:xfrm>
-            <a:off x="457200" y="297928"/>
-            <a:ext cx="8615680" cy="2092881"/>
+            <a:off x="736600" y="1001027"/>
+            <a:ext cx="7670800" cy="923330"/>
           </a:xfrm>
           <a:prstGeom prst="rect">
             <a:avLst/>
@@ -7866,439 +7945,217 @@
           <a:noFill/>
         </p:spPr>
         <p:txBody>
-          <a:bodyPr wrap="square">
+          <a:bodyPr wrap="square" rtlCol="1">
             <a:spAutoFit/>
           </a:bodyPr>
           <a:lstStyle/>
           <a:p>
-            <a:endParaRPr dirty="0"/>
-          </a:p>
-          <a:p>
-            <a:pPr algn="r" rtl="1">
-              <a:defRPr sz="1600"/>
-            </a:pPr>
-            <a:r>
-              <a:rPr dirty="0"/>
-              <a:t>• </a:t>
-            </a:r>
-            <a:r>
-              <a:rPr dirty="0" err="1"/>
-              <a:t>תזמון</a:t>
-            </a:r>
-            <a:r>
-              <a:rPr dirty="0"/>
-              <a:t> </a:t>
-            </a:r>
-            <a:r>
-              <a:rPr dirty="0" err="1"/>
-              <a:t>הנתונים</a:t>
-            </a:r>
-            <a:r>
-              <a:rPr dirty="0"/>
-              <a:t>: </a:t>
-            </a:r>
-            <a:endParaRPr lang="he-IL" dirty="0"/>
-          </a:p>
-          <a:p>
-            <a:pPr algn="r" rtl="1">
-              <a:defRPr sz="1600"/>
-            </a:pPr>
-            <a:r>
-              <a:rPr lang="he-IL" dirty="0"/>
-              <a:t>  </a:t>
-            </a:r>
-            <a:r>
-              <a:rPr dirty="0" err="1"/>
-              <a:t>מתוך</a:t>
-            </a:r>
-            <a:r>
-              <a:rPr dirty="0"/>
-              <a:t> </a:t>
-            </a:r>
-            <a:r>
-              <a:rPr dirty="0" err="1"/>
-              <a:t>כלל</a:t>
-            </a:r>
-            <a:r>
-              <a:rPr dirty="0"/>
-              <a:t> </a:t>
-            </a:r>
-            <a:r>
-              <a:rPr dirty="0" err="1"/>
-              <a:t>מחזור</a:t>
-            </a:r>
-            <a:r>
-              <a:rPr dirty="0"/>
-              <a:t> </a:t>
-            </a:r>
-            <a:r>
-              <a:rPr dirty="0" err="1"/>
-              <a:t>השורה</a:t>
-            </a:r>
-            <a:r>
-              <a:rPr dirty="0"/>
-              <a:t>, </a:t>
-            </a:r>
-            <a:r>
-              <a:rPr dirty="0" err="1"/>
-              <a:t>מוקצים</a:t>
-            </a:r>
-            <a:r>
-              <a:rPr dirty="0"/>
-              <a:t> </a:t>
-            </a:r>
-            <a:r>
-              <a:rPr dirty="0" err="1"/>
-              <a:t>בדיוק</a:t>
-            </a:r>
-            <a:r>
-              <a:rPr dirty="0"/>
-              <a:t> 640 </a:t>
-            </a:r>
-            <a:r>
-              <a:rPr dirty="0" err="1"/>
-              <a:t>מחזורי</a:t>
-            </a:r>
-            <a:r>
-              <a:rPr dirty="0"/>
-              <a:t> </a:t>
-            </a:r>
-            <a:r>
-              <a:rPr dirty="0" err="1"/>
-              <a:t>שעון</a:t>
-            </a:r>
-            <a:r>
-              <a:rPr dirty="0"/>
-              <a:t> </a:t>
-            </a:r>
-            <a:r>
-              <a:rPr dirty="0" err="1"/>
-              <a:t>לציור</a:t>
-            </a:r>
-            <a:r>
-              <a:rPr dirty="0"/>
-              <a:t> </a:t>
-            </a:r>
-            <a:r>
-              <a:rPr dirty="0" err="1"/>
-              <a:t>הפיקסלים</a:t>
-            </a:r>
-            <a:r>
-              <a:rPr dirty="0"/>
-              <a:t> (25.6us).</a:t>
-            </a:r>
-          </a:p>
-          <a:p>
-            <a:pPr algn="r" rtl="1">
-              <a:defRPr sz="1600"/>
-            </a:pPr>
-            <a:r>
-              <a:rPr dirty="0"/>
-              <a:t>• </a:t>
-            </a:r>
-            <a:r>
-              <a:rPr dirty="0" err="1"/>
-              <a:t>דגל</a:t>
-            </a:r>
-            <a:r>
-              <a:rPr dirty="0"/>
-              <a:t> </a:t>
-            </a:r>
-            <a:r>
-              <a:rPr dirty="0" err="1"/>
-              <a:t>הבקרה</a:t>
-            </a:r>
-            <a:r>
-              <a:rPr dirty="0"/>
-              <a:t>: </a:t>
-            </a:r>
-            <a:r>
-              <a:rPr lang="he-IL" dirty="0"/>
-              <a:t> </a:t>
-            </a:r>
-          </a:p>
-          <a:p>
-            <a:pPr algn="r" rtl="1">
-              <a:defRPr sz="1600"/>
-            </a:pPr>
-            <a:r>
-              <a:rPr dirty="0" err="1"/>
-              <a:t>האות</a:t>
-            </a:r>
-            <a:r>
-              <a:rPr dirty="0"/>
-              <a:t> </a:t>
-            </a:r>
-            <a:r>
-              <a:rPr dirty="0" err="1"/>
-              <a:t>in_display_area</a:t>
-            </a:r>
-            <a:r>
-              <a:rPr dirty="0"/>
-              <a:t> </a:t>
-            </a:r>
-            <a:r>
-              <a:rPr lang="he-IL" dirty="0"/>
-              <a:t> </a:t>
-            </a:r>
-            <a:r>
-              <a:rPr dirty="0" err="1"/>
-              <a:t>עולה</a:t>
-            </a:r>
-            <a:r>
-              <a:rPr dirty="0"/>
-              <a:t> ל-'1' </a:t>
-            </a:r>
-            <a:r>
-              <a:rPr dirty="0" err="1"/>
-              <a:t>ומאפשר</a:t>
-            </a:r>
-            <a:r>
-              <a:rPr dirty="0"/>
-              <a:t> </a:t>
-            </a:r>
-            <a:r>
-              <a:rPr dirty="0" err="1"/>
-              <a:t>את</a:t>
-            </a:r>
-            <a:r>
-              <a:rPr dirty="0"/>
-              <a:t> </a:t>
-            </a:r>
-            <a:r>
-              <a:rPr dirty="0" err="1"/>
-              <a:t>שליפת</a:t>
-            </a:r>
-            <a:r>
-              <a:rPr dirty="0"/>
-              <a:t> </a:t>
-            </a:r>
-            <a:r>
-              <a:rPr dirty="0" err="1"/>
-              <a:t>הנתונים</a:t>
-            </a:r>
-            <a:r>
-              <a:rPr dirty="0"/>
-              <a:t> </a:t>
-            </a:r>
-            <a:r>
-              <a:rPr dirty="0" err="1"/>
-              <a:t>רק</a:t>
-            </a:r>
-            <a:r>
-              <a:rPr dirty="0"/>
-              <a:t> </a:t>
-            </a:r>
-            <a:r>
-              <a:rPr dirty="0" err="1"/>
-              <a:t>בטווח</a:t>
-            </a:r>
-            <a:r>
-              <a:rPr dirty="0"/>
-              <a:t> </a:t>
-            </a:r>
-            <a:r>
-              <a:rPr dirty="0" err="1"/>
-              <a:t>המורשה</a:t>
-            </a:r>
-            <a:r>
-              <a:rPr dirty="0"/>
-              <a:t>.</a:t>
-            </a:r>
-          </a:p>
-          <a:p>
-            <a:pPr algn="r" rtl="1">
-              <a:defRPr sz="1600"/>
-            </a:pPr>
-            <a:r>
-              <a:rPr dirty="0"/>
-              <a:t>• </a:t>
-            </a:r>
-            <a:r>
-              <a:rPr dirty="0" err="1"/>
-              <a:t>מונה</a:t>
-            </a:r>
-            <a:r>
-              <a:rPr dirty="0"/>
-              <a:t> </a:t>
-            </a:r>
-            <a:r>
-              <a:rPr dirty="0" err="1"/>
-              <a:t>הפיקסלים</a:t>
-            </a:r>
-            <a:r>
-              <a:rPr dirty="0"/>
-              <a:t> </a:t>
-            </a:r>
-            <a:r>
-              <a:rPr dirty="0" err="1"/>
-              <a:t>הפעיל</a:t>
-            </a:r>
-            <a:r>
-              <a:rPr dirty="0"/>
-              <a:t>: </a:t>
-            </a:r>
-            <a:endParaRPr lang="he-IL" dirty="0"/>
-          </a:p>
-          <a:p>
-            <a:pPr algn="r" rtl="1">
-              <a:defRPr sz="1600"/>
-            </a:pPr>
-            <a:r>
-              <a:rPr lang="he-IL" dirty="0"/>
-              <a:t>  </a:t>
-            </a:r>
-            <a:r>
-              <a:rPr dirty="0" err="1"/>
-              <a:t>המונה</a:t>
-            </a:r>
-            <a:r>
-              <a:rPr dirty="0"/>
-              <a:t> </a:t>
-            </a:r>
-            <a:r>
-              <a:rPr dirty="0" err="1"/>
-              <a:t>display_x</a:t>
-            </a:r>
-            <a:r>
-              <a:rPr dirty="0"/>
-              <a:t> </a:t>
-            </a:r>
-            <a:r>
-              <a:rPr lang="he-IL" dirty="0"/>
-              <a:t> </a:t>
-            </a:r>
-            <a:r>
-              <a:rPr dirty="0" err="1"/>
-              <a:t>סופר</a:t>
-            </a:r>
-            <a:r>
-              <a:rPr dirty="0"/>
-              <a:t> </a:t>
-            </a:r>
-            <a:r>
-              <a:rPr dirty="0" err="1"/>
-              <a:t>במדויק</a:t>
-            </a:r>
-            <a:r>
-              <a:rPr dirty="0"/>
-              <a:t> מ-0 </a:t>
-            </a:r>
-            <a:r>
-              <a:rPr dirty="0" err="1"/>
-              <a:t>ועד</a:t>
-            </a:r>
-            <a:r>
-              <a:rPr dirty="0"/>
-              <a:t> 639. </a:t>
-            </a:r>
-            <a:r>
-              <a:rPr lang="he-IL" dirty="0"/>
-              <a:t> </a:t>
-            </a:r>
-          </a:p>
-          <a:p>
-            <a:pPr algn="r" rtl="1">
-              <a:defRPr sz="1600"/>
-            </a:pPr>
-            <a:r>
-              <a:rPr dirty="0" err="1"/>
-              <a:t>לאורך</a:t>
-            </a:r>
-            <a:r>
-              <a:rPr dirty="0"/>
-              <a:t> </a:t>
-            </a:r>
-            <a:r>
-              <a:rPr dirty="0" err="1"/>
-              <a:t>כל</a:t>
-            </a:r>
-            <a:r>
-              <a:rPr dirty="0"/>
-              <a:t> </a:t>
-            </a:r>
-            <a:r>
-              <a:rPr dirty="0" err="1"/>
-              <a:t>החלון</a:t>
-            </a:r>
-            <a:r>
-              <a:rPr dirty="0"/>
-              <a:t> </a:t>
-            </a:r>
-            <a:r>
-              <a:rPr dirty="0" err="1"/>
-              <a:t>הזה</a:t>
-            </a:r>
-            <a:r>
-              <a:rPr dirty="0"/>
-              <a:t>, </a:t>
-            </a:r>
-            <a:r>
-              <a:rPr dirty="0" err="1"/>
-              <a:t>יציאות</a:t>
-            </a:r>
-            <a:r>
-              <a:rPr dirty="0"/>
-              <a:t> ה-RGB </a:t>
-            </a:r>
-            <a:r>
-              <a:rPr dirty="0" err="1"/>
-              <a:t>פולטות</a:t>
-            </a:r>
-            <a:r>
-              <a:rPr dirty="0"/>
-              <a:t> </a:t>
-            </a:r>
-            <a:r>
-              <a:rPr dirty="0" err="1"/>
-              <a:t>נתונים</a:t>
-            </a:r>
-            <a:r>
-              <a:rPr dirty="0"/>
-              <a:t> </a:t>
-            </a:r>
-            <a:r>
-              <a:rPr dirty="0" err="1"/>
-              <a:t>אקטיביים</a:t>
-            </a:r>
-            <a:r>
-              <a:rPr dirty="0"/>
-              <a:t> </a:t>
-            </a:r>
-            <a:r>
-              <a:rPr dirty="0" err="1"/>
-              <a:t>למסך</a:t>
-            </a:r>
-            <a:r>
-              <a:rPr dirty="0"/>
-              <a:t>.</a:t>
-            </a:r>
+            <a:pPr algn="ctr"/>
+            <a:r>
+              <a:rPr lang="he-IL" dirty="0"/>
+              <a:t>אימות עמידות הלוגיקה </a:t>
+            </a:r>
+          </a:p>
+          <a:p>
+            <a:pPr algn="ctr"/>
+            <a:r>
+              <a:rPr lang="he-IL" dirty="0"/>
+              <a:t>640פיקסלים</a:t>
+            </a:r>
+            <a:r>
+              <a:rPr lang="en-US" dirty="0"/>
+              <a:t>x480</a:t>
+            </a:r>
+            <a:r>
+              <a:rPr lang="he-IL" dirty="0"/>
+              <a:t>בגודל </a:t>
+            </a:r>
+            <a:r>
+              <a:rPr lang="en-US" dirty="0"/>
+              <a:t> 60Hz </a:t>
+            </a:r>
+            <a:r>
+              <a:rPr lang="he-IL" dirty="0"/>
+              <a:t>עבור תדר</a:t>
+            </a:r>
+            <a:endParaRPr lang="en-US" dirty="0"/>
+          </a:p>
+          <a:p>
+            <a:pPr algn="ctr"/>
+            <a:r>
+              <a:rPr lang="he-IL" dirty="0"/>
+              <a:t>25</a:t>
+            </a:r>
+            <a:r>
+              <a:rPr lang="en-US" dirty="0"/>
+              <a:t>MHz</a:t>
+            </a:r>
+            <a:r>
+              <a:rPr lang="he-IL" dirty="0"/>
+              <a:t>שעון </a:t>
+            </a:r>
+            <a:endParaRPr lang="en-US" dirty="0"/>
           </a:p>
         </p:txBody>
       </p:sp>
-      <p:pic>
-        <p:nvPicPr>
-          <p:cNvPr id="4" name="Picture 3" descr="modelsim_active_display_tdisp.png"/>
-          <p:cNvPicPr>
-            <a:picLocks noChangeAspect="1"/>
-          </p:cNvPicPr>
+      <p:sp>
+        <p:nvSpPr>
+          <p:cNvPr id="8" name="תיבת טקסט 7">
+            <a:extLst>
+              <a:ext uri="{FF2B5EF4-FFF2-40B4-BE49-F238E27FC236}">
+                <a16:creationId xmlns:a16="http://schemas.microsoft.com/office/drawing/2014/main" id="{E065CB7F-BC96-4526-B2C9-F3ED780C2AC0}"/>
+              </a:ext>
+            </a:extLst>
+          </p:cNvPr>
+          <p:cNvSpPr txBox="1"/>
           <p:nvPr/>
-        </p:nvPicPr>
-        <p:blipFill rotWithShape="1">
-          <a:blip r:embed="rId2"/>
-          <a:srcRect l="1225" t="21251"/>
-          <a:stretch/>
-        </p:blipFill>
+        </p:nvSpPr>
         <p:spPr>
           <a:xfrm>
-            <a:off x="0" y="2594009"/>
-            <a:ext cx="9144000" cy="4541169"/>
+            <a:off x="1955800" y="2052134"/>
+            <a:ext cx="6324600" cy="369332"/>
           </a:xfrm>
           <a:prstGeom prst="rect">
             <a:avLst/>
           </a:prstGeom>
+          <a:noFill/>
         </p:spPr>
-      </p:pic>
+        <p:txBody>
+          <a:bodyPr wrap="square" rtlCol="1">
+            <a:spAutoFit/>
+          </a:bodyPr>
+          <a:lstStyle/>
+          <a:p>
+            <a:r>
+              <a:rPr lang="he-IL" dirty="0"/>
+              <a:t>כאן רואים מבט על של המניה המלאה,מ0 עד 799 </a:t>
+            </a:r>
+          </a:p>
+        </p:txBody>
+      </p:sp>
+      <p:sp>
+        <p:nvSpPr>
+          <p:cNvPr id="9" name="תיבת טקסט 8">
+            <a:extLst>
+              <a:ext uri="{FF2B5EF4-FFF2-40B4-BE49-F238E27FC236}">
+                <a16:creationId xmlns:a16="http://schemas.microsoft.com/office/drawing/2014/main" id="{C1EE0865-6F43-4B10-A643-CBD0CB45A289}"/>
+              </a:ext>
+            </a:extLst>
+          </p:cNvPr>
+          <p:cNvSpPr txBox="1"/>
+          <p:nvPr/>
+        </p:nvSpPr>
+        <p:spPr>
+          <a:xfrm>
+            <a:off x="1312332" y="2379133"/>
+            <a:ext cx="6129868" cy="369332"/>
+          </a:xfrm>
+          <a:prstGeom prst="rect">
+            <a:avLst/>
+          </a:prstGeom>
+          <a:noFill/>
+        </p:spPr>
+        <p:txBody>
+          <a:bodyPr wrap="square" rtlCol="1">
+            <a:spAutoFit/>
+          </a:bodyPr>
+          <a:lstStyle/>
+          <a:p>
+            <a:r>
+              <a:rPr lang="he-IL" dirty="0"/>
+              <a:t>ובשקפים הבאים נתמקד בכל אחד ואחד מהמאפיינים של הפרוטוקול</a:t>
+            </a:r>
+          </a:p>
+        </p:txBody>
+      </p:sp>
+      <p:sp>
+        <p:nvSpPr>
+          <p:cNvPr id="3" name="חץ: ימינה 2">
+            <a:extLst>
+              <a:ext uri="{FF2B5EF4-FFF2-40B4-BE49-F238E27FC236}">
+                <a16:creationId xmlns:a16="http://schemas.microsoft.com/office/drawing/2014/main" id="{0EAC7BD6-1A70-4013-A323-57E8CC145715}"/>
+              </a:ext>
+            </a:extLst>
+          </p:cNvPr>
+          <p:cNvSpPr/>
+          <p:nvPr/>
+        </p:nvSpPr>
+        <p:spPr>
+          <a:xfrm rot="10800000">
+            <a:off x="2416915" y="3010194"/>
+            <a:ext cx="978408" cy="320594"/>
+          </a:xfrm>
+          <a:prstGeom prst="rightArrow">
+            <a:avLst/>
+          </a:prstGeom>
+        </p:spPr>
+        <p:style>
+          <a:lnRef idx="1">
+            <a:schemeClr val="accent1"/>
+          </a:lnRef>
+          <a:fillRef idx="3">
+            <a:schemeClr val="accent1"/>
+          </a:fillRef>
+          <a:effectRef idx="2">
+            <a:schemeClr val="accent1"/>
+          </a:effectRef>
+          <a:fontRef idx="minor">
+            <a:schemeClr val="lt1"/>
+          </a:fontRef>
+        </p:style>
+        <p:txBody>
+          <a:bodyPr rtlCol="1" anchor="ctr"/>
+          <a:lstStyle/>
+          <a:p>
+            <a:pPr algn="ctr"/>
+            <a:endParaRPr lang="he-IL"/>
+          </a:p>
+        </p:txBody>
+      </p:sp>
+      <p:sp>
+        <p:nvSpPr>
+          <p:cNvPr id="4" name="חץ: ימינה 3">
+            <a:extLst>
+              <a:ext uri="{FF2B5EF4-FFF2-40B4-BE49-F238E27FC236}">
+                <a16:creationId xmlns:a16="http://schemas.microsoft.com/office/drawing/2014/main" id="{29C79C78-D323-4C45-A09B-BB40E6B18ABA}"/>
+              </a:ext>
+            </a:extLst>
+          </p:cNvPr>
+          <p:cNvSpPr/>
+          <p:nvPr/>
+        </p:nvSpPr>
+        <p:spPr>
+          <a:xfrm rot="9906466">
+            <a:off x="6243318" y="5979204"/>
+            <a:ext cx="978408" cy="208052"/>
+          </a:xfrm>
+          <a:prstGeom prst="rightArrow">
+            <a:avLst/>
+          </a:prstGeom>
+        </p:spPr>
+        <p:style>
+          <a:lnRef idx="1">
+            <a:schemeClr val="accent1"/>
+          </a:lnRef>
+          <a:fillRef idx="3">
+            <a:schemeClr val="accent1"/>
+          </a:fillRef>
+          <a:effectRef idx="2">
+            <a:schemeClr val="accent1"/>
+          </a:effectRef>
+          <a:fontRef idx="minor">
+            <a:schemeClr val="lt1"/>
+          </a:fontRef>
+        </p:style>
+        <p:txBody>
+          <a:bodyPr rtlCol="1" anchor="ctr"/>
+          <a:lstStyle/>
+          <a:p>
+            <a:pPr algn="ctr"/>
+            <a:endParaRPr lang="he-IL"/>
+          </a:p>
+        </p:txBody>
+      </p:sp>
     </p:spTree>
   </p:cSld>
   <p:clrMapOvr>
@@ -8336,23 +8193,22 @@
         </p:nvSpPr>
         <p:spPr>
           <a:xfrm>
-            <a:off x="395984" y="-194594"/>
+            <a:off x="328080" y="-281179"/>
             <a:ext cx="8229600" cy="1143000"/>
           </a:xfrm>
         </p:spPr>
         <p:txBody>
-          <a:bodyPr/>
+          <a:bodyPr>
+            <a:normAutofit/>
+          </a:bodyPr>
           <a:lstStyle/>
           <a:p>
             <a:pPr algn="ctr" rtl="1"/>
             <a:r>
-              <a:rPr lang="en-US" dirty="0"/>
-              <a:t>Front </a:t>
-            </a:r>
-            <a:r>
-              <a:rPr dirty="0"/>
-              <a:t>Porch</a:t>
-            </a:r>
+              <a:rPr dirty="0" err="1"/>
+              <a:t>Tpw</a:t>
+            </a:r>
+            <a:endParaRPr dirty="0"/>
           </a:p>
         </p:txBody>
       </p:sp>
@@ -8364,8 +8220,8 @@
         </p:nvSpPr>
         <p:spPr>
           <a:xfrm>
-            <a:off x="-190390" y="274638"/>
-            <a:ext cx="9262200" cy="2339102"/>
+            <a:off x="75617" y="519650"/>
+            <a:ext cx="9059916" cy="2585323"/>
           </a:xfrm>
           <a:prstGeom prst="rect">
             <a:avLst/>
@@ -8378,435 +8234,136 @@
           </a:bodyPr>
           <a:lstStyle/>
           <a:p>
-            <a:endParaRPr dirty="0"/>
-          </a:p>
-          <a:p>
-            <a:pPr algn="r" rtl="1">
-              <a:defRPr sz="1600"/>
-            </a:pPr>
-            <a:r>
-              <a:rPr dirty="0"/>
-              <a:t>• </a:t>
-            </a:r>
-            <a:r>
-              <a:rPr dirty="0" err="1"/>
-              <a:t>משמעות</a:t>
-            </a:r>
-            <a:r>
-              <a:rPr dirty="0"/>
-              <a:t> ה</a:t>
-            </a:r>
-            <a:r>
-              <a:rPr lang="he-IL" dirty="0"/>
-              <a:t>פרוצס:</a:t>
-            </a:r>
-          </a:p>
-          <a:p>
-            <a:pPr algn="r" rtl="1">
-              <a:defRPr sz="1600"/>
-            </a:pPr>
-            <a:r>
-              <a:rPr dirty="0"/>
-              <a:t> </a:t>
-            </a:r>
-            <a:r>
-              <a:rPr lang="he-IL" dirty="0"/>
-              <a:t>  </a:t>
-            </a:r>
-            <a:r>
-              <a:rPr dirty="0"/>
-              <a:t>ה-Front Porch </a:t>
-            </a:r>
-            <a:r>
-              <a:rPr dirty="0" err="1"/>
-              <a:t>וה</a:t>
-            </a:r>
-            <a:r>
-              <a:rPr dirty="0"/>
-              <a:t>-Back Porch </a:t>
-            </a:r>
-            <a:r>
-              <a:rPr dirty="0" err="1"/>
-              <a:t>נועדו</a:t>
-            </a:r>
-            <a:r>
-              <a:rPr dirty="0"/>
-              <a:t> </a:t>
-            </a:r>
-            <a:r>
-              <a:rPr dirty="0" err="1"/>
-              <a:t>לייצוב</a:t>
-            </a:r>
-            <a:r>
-              <a:rPr dirty="0"/>
-              <a:t> </a:t>
-            </a:r>
-            <a:r>
-              <a:rPr dirty="0" err="1"/>
-              <a:t>תנועת</a:t>
-            </a:r>
-            <a:r>
-              <a:rPr dirty="0"/>
-              <a:t> </a:t>
-            </a:r>
-            <a:r>
-              <a:rPr dirty="0" err="1"/>
-              <a:t>הקרן</a:t>
-            </a:r>
+            <a:pPr algn="ctr"/>
+            <a:r>
+              <a:rPr lang="he-IL" dirty="0"/>
+              <a:t>זהו תחילת מחזור השורה</a:t>
+            </a:r>
+          </a:p>
+          <a:p>
+            <a:pPr algn="ctr"/>
+            <a:r>
+              <a:rPr lang="he-IL" dirty="0"/>
+              <a:t>הוא המונה האופקי </a:t>
+            </a:r>
+            <a:r>
+              <a:rPr lang="en-US" dirty="0"/>
+              <a:t> </a:t>
+            </a:r>
+            <a:r>
+              <a:rPr lang="en-US" dirty="0" err="1"/>
+              <a:t>hsync_reg</a:t>
+            </a:r>
+            <a:endParaRPr lang="en-US" dirty="0"/>
+          </a:p>
+          <a:p>
+            <a:pPr algn="ctr"/>
+            <a:r>
+              <a:rPr lang="he-IL" dirty="0"/>
+              <a:t>עד 799</a:t>
+            </a:r>
+            <a:r>
+              <a:rPr lang="en-US" dirty="0"/>
+              <a:t> </a:t>
+            </a:r>
+            <a:r>
+              <a:rPr lang="he-IL" dirty="0"/>
+              <a:t>מתחיל לספור מ0</a:t>
+            </a:r>
+          </a:p>
+          <a:p>
+            <a:pPr algn="ctr"/>
+            <a:r>
+              <a:rPr lang="he-IL" dirty="0"/>
+              <a:t>כאשר המונה נמצא בין 0 ל95 ,האות הפיזי</a:t>
+            </a:r>
+          </a:p>
+          <a:p>
+            <a:pPr algn="ctr"/>
+            <a:r>
+              <a:rPr lang="he-IL" dirty="0"/>
+              <a:t> </a:t>
+            </a:r>
+            <a:r>
+              <a:rPr lang="en-US" dirty="0"/>
+              <a:t> </a:t>
+            </a:r>
+            <a:r>
+              <a:rPr lang="en-US" dirty="0" err="1"/>
+              <a:t>hsync</a:t>
+            </a:r>
+            <a:r>
+              <a:rPr lang="en-US" dirty="0"/>
+              <a:t> </a:t>
+            </a:r>
+            <a:endParaRPr lang="he-IL" dirty="0"/>
+          </a:p>
+          <a:p>
+            <a:pPr algn="ctr"/>
+            <a:r>
+              <a:rPr lang="he-IL" dirty="0"/>
+              <a:t>עולה ל1 </a:t>
+            </a:r>
+            <a:r>
+              <a:rPr lang="he-IL" dirty="0" err="1"/>
+              <a:t>לוגי,זה</a:t>
+            </a:r>
+            <a:r>
+              <a:rPr lang="he-IL" dirty="0"/>
+              <a:t> מייצר את פולס הסנכרון הפיזי אל המסך (לפי </a:t>
+            </a:r>
+            <a:r>
+              <a:rPr lang="he-IL" dirty="0" err="1"/>
+              <a:t>הפרוטוקול,זהו</a:t>
+            </a:r>
+            <a:r>
+              <a:rPr lang="he-IL" dirty="0"/>
+              <a:t> התזמון של תחילת שורה)</a:t>
+            </a:r>
+            <a:r>
+              <a:rPr lang="en-US" dirty="0"/>
+              <a:t>   </a:t>
+            </a:r>
+            <a:endParaRPr lang="he-IL" dirty="0"/>
+          </a:p>
+          <a:p>
+            <a:pPr algn="ctr"/>
+            <a:r>
+              <a:rPr lang="he-IL" dirty="0"/>
+              <a:t>באותו הזמן המערכת מושתקת לצבע שחור (0000).ניתן לראות שבזמן </a:t>
+            </a:r>
+            <a:r>
+              <a:rPr lang="he-IL" dirty="0" err="1"/>
+              <a:t>אחר,יש</a:t>
+            </a:r>
+            <a:r>
+              <a:rPr lang="he-IL" dirty="0"/>
+              <a:t> מידע</a:t>
+            </a:r>
+            <a:r>
+              <a:rPr lang="en-US" dirty="0"/>
+              <a:t> </a:t>
+            </a:r>
+            <a:endParaRPr lang="he-IL" dirty="0"/>
+          </a:p>
+          <a:p>
+            <a:pPr algn="ctr"/>
             <a:r>
               <a:rPr dirty="0"/>
               <a:t>.</a:t>
             </a:r>
-          </a:p>
-          <a:p>
-            <a:pPr algn="r" rtl="1">
-              <a:defRPr sz="1600"/>
-            </a:pPr>
-            <a:r>
-              <a:rPr dirty="0"/>
-              <a:t>• </a:t>
-            </a:r>
-            <a:r>
-              <a:rPr dirty="0" err="1"/>
-              <a:t>אכיפה</a:t>
-            </a:r>
-            <a:r>
-              <a:rPr dirty="0"/>
-              <a:t> </a:t>
-            </a:r>
-            <a:r>
-              <a:rPr dirty="0" err="1"/>
-              <a:t>לוגית</a:t>
-            </a:r>
-            <a:r>
-              <a:rPr dirty="0"/>
-              <a:t>: </a:t>
-            </a:r>
-            <a:endParaRPr lang="he-IL" dirty="0"/>
-          </a:p>
-          <a:p>
-            <a:pPr algn="r" rtl="1">
-              <a:defRPr sz="1600"/>
-            </a:pPr>
-            <a:r>
-              <a:rPr lang="he-IL" dirty="0"/>
-              <a:t>  </a:t>
-            </a:r>
-            <a:r>
-              <a:rPr dirty="0" err="1"/>
-              <a:t>בסימולציה</a:t>
-            </a:r>
-            <a:r>
-              <a:rPr dirty="0"/>
-              <a:t> </a:t>
-            </a:r>
-            <a:r>
-              <a:rPr dirty="0" err="1"/>
-              <a:t>ניתן</a:t>
-            </a:r>
-            <a:r>
-              <a:rPr dirty="0"/>
-              <a:t> </a:t>
-            </a:r>
-            <a:r>
-              <a:rPr dirty="0" err="1"/>
-              <a:t>לראות</a:t>
-            </a:r>
-            <a:r>
-              <a:rPr dirty="0"/>
-              <a:t> </a:t>
-            </a:r>
-            <a:r>
-              <a:rPr dirty="0" err="1"/>
-              <a:t>כי</a:t>
-            </a:r>
-            <a:r>
-              <a:rPr dirty="0"/>
-              <a:t> </a:t>
-            </a:r>
-            <a:r>
-              <a:rPr dirty="0" err="1"/>
-              <a:t>ברגע</a:t>
-            </a:r>
-            <a:r>
-              <a:rPr dirty="0"/>
-              <a:t> </a:t>
-            </a:r>
-            <a:r>
-              <a:rPr dirty="0" err="1"/>
-              <a:t>שהקרן</a:t>
-            </a:r>
-            <a:r>
-              <a:rPr dirty="0"/>
-              <a:t> </a:t>
-            </a:r>
-            <a:r>
-              <a:rPr dirty="0" err="1"/>
-              <a:t>חורגת</a:t>
-            </a:r>
-            <a:r>
-              <a:rPr dirty="0"/>
-              <a:t> </a:t>
-            </a:r>
-            <a:r>
-              <a:rPr dirty="0" err="1"/>
-              <a:t>מהאזור</a:t>
-            </a:r>
-            <a:r>
-              <a:rPr dirty="0"/>
-              <a:t> </a:t>
-            </a:r>
-            <a:r>
-              <a:rPr dirty="0" err="1"/>
-              <a:t>הפעיל</a:t>
-            </a:r>
-            <a:r>
-              <a:rPr dirty="0"/>
-              <a:t> </a:t>
-            </a:r>
-            <a:r>
-              <a:rPr dirty="0" err="1"/>
-              <a:t>display_x</a:t>
-            </a:r>
-            <a:r>
-              <a:rPr dirty="0"/>
-              <a:t> </a:t>
-            </a:r>
-            <a:r>
-              <a:rPr lang="he-IL" dirty="0"/>
-              <a:t> </a:t>
-            </a:r>
-            <a:r>
-              <a:rPr dirty="0" err="1"/>
-              <a:t>המערכת</a:t>
-            </a:r>
-            <a:r>
-              <a:rPr dirty="0"/>
-              <a:t> </a:t>
-            </a:r>
-            <a:r>
-              <a:rPr dirty="0" err="1"/>
-              <a:t>מאלצת</a:t>
-            </a:r>
-            <a:r>
-              <a:rPr dirty="0"/>
-              <a:t> </a:t>
-            </a:r>
-            <a:r>
-              <a:rPr dirty="0" err="1"/>
-              <a:t>את</a:t>
-            </a:r>
-            <a:r>
-              <a:rPr dirty="0"/>
-              <a:t> </a:t>
-            </a:r>
-            <a:r>
-              <a:rPr dirty="0" err="1"/>
-              <a:t>כל</a:t>
-            </a:r>
-            <a:r>
-              <a:rPr dirty="0"/>
-              <a:t> </a:t>
-            </a:r>
-            <a:r>
-              <a:rPr dirty="0" err="1"/>
-              <a:t>ערוצי</a:t>
-            </a:r>
-            <a:r>
-              <a:rPr dirty="0"/>
-              <a:t> ה-RGB ל-'0000'.</a:t>
-            </a:r>
-            <a:r>
-              <a:rPr lang="he-IL" dirty="0"/>
-              <a:t>,ניתן גם לראות את הזמנים שנמדדו,640 </a:t>
-            </a:r>
-            <a:r>
-              <a:rPr lang="en-US" dirty="0"/>
-              <a:t>ns</a:t>
-            </a:r>
-            <a:r>
-              <a:rPr lang="he-IL" dirty="0"/>
-              <a:t> ו16 </a:t>
-            </a:r>
-            <a:r>
-              <a:rPr lang="he-IL" dirty="0" err="1"/>
-              <a:t>קלוקים,כנדרש</a:t>
-            </a:r>
-            <a:endParaRPr dirty="0"/>
-          </a:p>
-          <a:p>
-            <a:pPr algn="r" rtl="1">
-              <a:defRPr sz="1600"/>
-            </a:pPr>
-            <a:r>
-              <a:rPr dirty="0"/>
-              <a:t>• </a:t>
-            </a:r>
-            <a:r>
-              <a:rPr dirty="0" err="1"/>
-              <a:t>התוצאה</a:t>
-            </a:r>
-            <a:r>
-              <a:rPr dirty="0"/>
-              <a:t>: </a:t>
-            </a:r>
-            <a:endParaRPr lang="he-IL" dirty="0"/>
-          </a:p>
-          <a:p>
-            <a:pPr algn="r" rtl="1">
-              <a:defRPr sz="1600"/>
-            </a:pPr>
-            <a:r>
-              <a:rPr lang="he-IL" dirty="0"/>
-              <a:t>  </a:t>
-            </a:r>
-            <a:r>
-              <a:rPr dirty="0" err="1"/>
-              <a:t>שחור</a:t>
-            </a:r>
-            <a:r>
-              <a:rPr dirty="0"/>
-              <a:t> </a:t>
-            </a:r>
-            <a:r>
-              <a:rPr dirty="0" err="1"/>
-              <a:t>מוחלט</a:t>
-            </a:r>
-            <a:r>
-              <a:rPr dirty="0"/>
-              <a:t> </a:t>
-            </a:r>
-            <a:r>
-              <a:rPr dirty="0" err="1"/>
-              <a:t>על</a:t>
-            </a:r>
-            <a:r>
-              <a:rPr dirty="0"/>
-              <a:t> </a:t>
-            </a:r>
-            <a:r>
-              <a:rPr dirty="0" err="1"/>
-              <a:t>המסך</a:t>
-            </a:r>
-            <a:r>
-              <a:rPr dirty="0"/>
-              <a:t> </a:t>
-            </a:r>
-            <a:r>
-              <a:rPr dirty="0" err="1"/>
-              <a:t>באזורי</a:t>
-            </a:r>
-            <a:r>
-              <a:rPr dirty="0"/>
-              <a:t> </a:t>
-            </a:r>
-            <a:r>
-              <a:rPr dirty="0" err="1"/>
-              <a:t>המעבר</a:t>
-            </a:r>
-            <a:r>
-              <a:rPr dirty="0"/>
-              <a:t>, </a:t>
-            </a:r>
-            <a:r>
-              <a:rPr dirty="0" err="1"/>
-              <a:t>מה</a:t>
-            </a:r>
-            <a:r>
-              <a:rPr dirty="0"/>
-              <a:t> </a:t>
-            </a:r>
-            <a:r>
-              <a:rPr dirty="0" err="1"/>
-              <a:t>שמונע</a:t>
-            </a:r>
-            <a:r>
-              <a:rPr dirty="0"/>
-              <a:t> '</a:t>
-            </a:r>
-            <a:r>
-              <a:rPr dirty="0" err="1"/>
-              <a:t>מריחות</a:t>
-            </a:r>
-            <a:r>
-              <a:rPr dirty="0"/>
-              <a:t>' </a:t>
-            </a:r>
-            <a:r>
-              <a:rPr dirty="0" err="1"/>
-              <a:t>צבע</a:t>
-            </a:r>
-            <a:r>
-              <a:rPr dirty="0"/>
-              <a:t> </a:t>
-            </a:r>
-            <a:r>
-              <a:rPr dirty="0" err="1"/>
-              <a:t>ומאפשר</a:t>
-            </a:r>
-            <a:r>
-              <a:rPr dirty="0"/>
-              <a:t> </a:t>
-            </a:r>
-            <a:r>
-              <a:rPr dirty="0" err="1"/>
-              <a:t>למסך</a:t>
-            </a:r>
-            <a:r>
-              <a:rPr dirty="0"/>
-              <a:t> </a:t>
-            </a:r>
-            <a:r>
-              <a:rPr dirty="0" err="1"/>
-              <a:t>להסתנכרן</a:t>
-            </a:r>
-            <a:r>
-              <a:rPr dirty="0"/>
-              <a:t> </a:t>
-            </a:r>
-            <a:r>
-              <a:rPr dirty="0" err="1"/>
-              <a:t>בצורה</a:t>
-            </a:r>
-            <a:r>
-              <a:rPr dirty="0"/>
-              <a:t> </a:t>
-            </a:r>
-            <a:r>
-              <a:rPr dirty="0" err="1"/>
-              <a:t>חלקה</a:t>
-            </a:r>
-            <a:r>
-              <a:rPr dirty="0"/>
-              <a:t>.</a:t>
-            </a:r>
-            <a:r>
-              <a:rPr lang="he-IL" dirty="0"/>
-              <a:t>(רואים את זה מוחשי יותר </a:t>
-            </a:r>
-            <a:r>
-              <a:rPr lang="he-IL" dirty="0" err="1"/>
-              <a:t>בבאים,מתברר</a:t>
-            </a:r>
-            <a:r>
-              <a:rPr lang="he-IL" dirty="0"/>
-              <a:t> שה</a:t>
-            </a:r>
-            <a:r>
-              <a:rPr lang="en-US" dirty="0"/>
-              <a:t>TB</a:t>
-            </a:r>
-            <a:r>
-              <a:rPr lang="he-IL" dirty="0"/>
-              <a:t> זרק רוב הזמן שחור אז היה קשה לאתר זמנים פיזית של צבע)</a:t>
-            </a:r>
-            <a:endParaRPr dirty="0"/>
           </a:p>
         </p:txBody>
       </p:sp>
       <p:pic>
         <p:nvPicPr>
-          <p:cNvPr id="4" name="Picture 3" descr="modelsim_porches_blanking.png"/>
+          <p:cNvPr id="6" name="תמונה 5">
+            <a:extLst>
+              <a:ext uri="{FF2B5EF4-FFF2-40B4-BE49-F238E27FC236}">
+                <a16:creationId xmlns:a16="http://schemas.microsoft.com/office/drawing/2014/main" id="{57835301-BCA5-4626-BBB7-E951CA7CC400}"/>
+              </a:ext>
+            </a:extLst>
+          </p:cNvPr>
           <p:cNvPicPr>
             <a:picLocks noChangeAspect="1"/>
           </p:cNvPicPr>
@@ -8814,19 +8371,151 @@
         </p:nvPicPr>
         <p:blipFill rotWithShape="1">
           <a:blip r:embed="rId2"/>
-          <a:srcRect t="27369" b="2658"/>
+          <a:srcRect t="18498" b="16130"/>
           <a:stretch/>
         </p:blipFill>
         <p:spPr>
           <a:xfrm>
-            <a:off x="72189" y="3031958"/>
-            <a:ext cx="8999621" cy="3551404"/>
+            <a:off x="0" y="2973989"/>
+            <a:ext cx="9144000" cy="3722112"/>
           </a:xfrm>
           <a:prstGeom prst="rect">
             <a:avLst/>
           </a:prstGeom>
         </p:spPr>
       </p:pic>
+      <p:sp>
+        <p:nvSpPr>
+          <p:cNvPr id="10" name="חץ: ימינה 9">
+            <a:extLst>
+              <a:ext uri="{FF2B5EF4-FFF2-40B4-BE49-F238E27FC236}">
+                <a16:creationId xmlns:a16="http://schemas.microsoft.com/office/drawing/2014/main" id="{3B7F1FEF-5744-4AA2-A951-9948CD2D0625}"/>
+              </a:ext>
+            </a:extLst>
+          </p:cNvPr>
+          <p:cNvSpPr/>
+          <p:nvPr/>
+        </p:nvSpPr>
+        <p:spPr>
+          <a:xfrm rot="10800000">
+            <a:off x="2354786" y="3203170"/>
+            <a:ext cx="598620" cy="249478"/>
+          </a:xfrm>
+          <a:prstGeom prst="rightArrow">
+            <a:avLst/>
+          </a:prstGeom>
+        </p:spPr>
+        <p:style>
+          <a:lnRef idx="1">
+            <a:schemeClr val="accent1"/>
+          </a:lnRef>
+          <a:fillRef idx="3">
+            <a:schemeClr val="accent1"/>
+          </a:fillRef>
+          <a:effectRef idx="2">
+            <a:schemeClr val="accent1"/>
+          </a:effectRef>
+          <a:fontRef idx="minor">
+            <a:schemeClr val="lt1"/>
+          </a:fontRef>
+        </p:style>
+        <p:txBody>
+          <a:bodyPr rtlCol="1" anchor="ctr"/>
+          <a:lstStyle/>
+          <a:p>
+            <a:pPr algn="ctr"/>
+            <a:endParaRPr lang="he-IL"/>
+          </a:p>
+        </p:txBody>
+      </p:sp>
+      <p:sp>
+        <p:nvSpPr>
+          <p:cNvPr id="11" name="חץ: ימינה 10">
+            <a:extLst>
+              <a:ext uri="{FF2B5EF4-FFF2-40B4-BE49-F238E27FC236}">
+                <a16:creationId xmlns:a16="http://schemas.microsoft.com/office/drawing/2014/main" id="{45837202-5424-47A8-AE54-81BA35E9DA45}"/>
+              </a:ext>
+            </a:extLst>
+          </p:cNvPr>
+          <p:cNvSpPr/>
+          <p:nvPr/>
+        </p:nvSpPr>
+        <p:spPr>
+          <a:xfrm>
+            <a:off x="3994166" y="3281997"/>
+            <a:ext cx="1239751" cy="199109"/>
+          </a:xfrm>
+          <a:prstGeom prst="rightArrow">
+            <a:avLst/>
+          </a:prstGeom>
+        </p:spPr>
+        <p:style>
+          <a:lnRef idx="1">
+            <a:schemeClr val="accent1"/>
+          </a:lnRef>
+          <a:fillRef idx="3">
+            <a:schemeClr val="accent1"/>
+          </a:fillRef>
+          <a:effectRef idx="2">
+            <a:schemeClr val="accent1"/>
+          </a:effectRef>
+          <a:fontRef idx="minor">
+            <a:schemeClr val="lt1"/>
+          </a:fontRef>
+        </p:style>
+        <p:txBody>
+          <a:bodyPr rtlCol="1" anchor="ctr"/>
+          <a:lstStyle/>
+          <a:p>
+            <a:pPr algn="ctr"/>
+            <a:endParaRPr lang="he-IL" dirty="0"/>
+          </a:p>
+        </p:txBody>
+      </p:sp>
+      <p:sp>
+        <p:nvSpPr>
+          <p:cNvPr id="12" name="חץ: ימינה 11">
+            <a:extLst>
+              <a:ext uri="{FF2B5EF4-FFF2-40B4-BE49-F238E27FC236}">
+                <a16:creationId xmlns:a16="http://schemas.microsoft.com/office/drawing/2014/main" id="{279D2AB3-268B-4F80-AF3F-0903607D016E}"/>
+              </a:ext>
+            </a:extLst>
+          </p:cNvPr>
+          <p:cNvSpPr/>
+          <p:nvPr/>
+        </p:nvSpPr>
+        <p:spPr>
+          <a:xfrm rot="1551998">
+            <a:off x="4462607" y="6059903"/>
+            <a:ext cx="1286678" cy="187912"/>
+          </a:xfrm>
+          <a:prstGeom prst="rightArrow">
+            <a:avLst/>
+          </a:prstGeom>
+        </p:spPr>
+        <p:style>
+          <a:lnRef idx="1">
+            <a:schemeClr val="accent1"/>
+          </a:lnRef>
+          <a:fillRef idx="3">
+            <a:schemeClr val="accent1"/>
+          </a:fillRef>
+          <a:effectRef idx="2">
+            <a:schemeClr val="accent1"/>
+          </a:effectRef>
+          <a:fontRef idx="minor">
+            <a:schemeClr val="lt1"/>
+          </a:fontRef>
+        </p:style>
+        <p:txBody>
+          <a:bodyPr rtlCol="1" anchor="ctr"/>
+          <a:lstStyle/>
+          <a:p>
+            <a:pPr algn="ctr"/>
+            <a:endParaRPr lang="he-IL"/>
+          </a:p>
+        </p:txBody>
+      </p:sp>
     </p:spTree>
   </p:cSld>
   <p:clrMapOvr>
@@ -8890,8 +8579,8 @@
         </p:nvSpPr>
         <p:spPr>
           <a:xfrm>
-            <a:off x="84222" y="688206"/>
-            <a:ext cx="8868540" cy="1846659"/>
+            <a:off x="-84083" y="912614"/>
+            <a:ext cx="9228083" cy="2585323"/>
           </a:xfrm>
           <a:prstGeom prst="rect">
             <a:avLst/>
@@ -8904,371 +8593,120 @@
           </a:bodyPr>
           <a:lstStyle/>
           <a:p>
-            <a:endParaRPr dirty="0"/>
-          </a:p>
-          <a:p>
-            <a:pPr algn="r" rtl="1">
-              <a:defRPr sz="1600"/>
-            </a:pPr>
-            <a:r>
-              <a:rPr dirty="0"/>
-              <a:t>• </a:t>
-            </a:r>
-            <a:r>
-              <a:rPr dirty="0" err="1"/>
-              <a:t>זמן</a:t>
-            </a:r>
-            <a:r>
-              <a:rPr dirty="0"/>
-              <a:t> </a:t>
-            </a:r>
-            <a:r>
-              <a:rPr dirty="0" err="1"/>
-              <a:t>המתנה</a:t>
-            </a:r>
-            <a:r>
-              <a:rPr dirty="0"/>
-              <a:t> (Back Porch): </a:t>
-            </a:r>
+            <a:pPr algn="ctr"/>
+            <a:r>
+              <a:rPr lang="he-IL" dirty="0"/>
+              <a:t>כרונולוגית </a:t>
+            </a:r>
+            <a:r>
+              <a:rPr lang="he-IL" dirty="0" err="1"/>
+              <a:t>ופיזית,מיד</a:t>
+            </a:r>
+            <a:r>
+              <a:rPr lang="he-IL" dirty="0"/>
+              <a:t> לאחר ה</a:t>
+            </a:r>
+          </a:p>
+          <a:p>
+            <a:pPr algn="ctr"/>
+            <a:r>
+              <a:rPr lang="en-US" dirty="0" err="1"/>
+              <a:t>Tpw</a:t>
+            </a:r>
+            <a:endParaRPr lang="en-US" dirty="0"/>
+          </a:p>
+          <a:p>
+            <a:pPr algn="r"/>
+            <a:r>
+              <a:rPr lang="he-IL" dirty="0"/>
+              <a:t>אלו בעצם 48 מחזורי שעון </a:t>
+            </a:r>
+            <a:r>
+              <a:rPr lang="he-IL" dirty="0" err="1"/>
+              <a:t>נוספים,שבהם</a:t>
+            </a:r>
+            <a:r>
+              <a:rPr lang="he-IL" dirty="0"/>
+              <a:t> לא משדרים עדיין </a:t>
+            </a:r>
+            <a:r>
+              <a:rPr lang="he-IL" dirty="0" err="1"/>
+              <a:t>מידע,זהו</a:t>
+            </a:r>
+            <a:r>
+              <a:rPr lang="he-IL" dirty="0"/>
+              <a:t> "זמן התייצבות" מיד אחר הסנכרון</a:t>
+            </a:r>
+          </a:p>
+          <a:p>
+            <a:pPr algn="ctr"/>
             <a:endParaRPr lang="he-IL" dirty="0"/>
           </a:p>
           <a:p>
-            <a:pPr algn="r" rtl="1">
-              <a:defRPr sz="1600"/>
-            </a:pPr>
-            <a:r>
-              <a:rPr lang="he-IL" dirty="0"/>
-              <a:t> </a:t>
-            </a:r>
-            <a:r>
-              <a:rPr dirty="0" err="1"/>
-              <a:t>לאחר</a:t>
-            </a:r>
-            <a:r>
-              <a:rPr dirty="0"/>
-              <a:t> </a:t>
-            </a:r>
-            <a:r>
-              <a:rPr dirty="0" err="1"/>
-              <a:t>סיום</a:t>
-            </a:r>
-            <a:r>
-              <a:rPr dirty="0"/>
-              <a:t> </a:t>
-            </a:r>
-            <a:r>
-              <a:rPr dirty="0" err="1"/>
-              <a:t>דופק</a:t>
-            </a:r>
-            <a:r>
-              <a:rPr dirty="0"/>
-              <a:t> </a:t>
-            </a:r>
-            <a:r>
-              <a:rPr dirty="0" err="1"/>
-              <a:t>הסנכרון</a:t>
-            </a:r>
-            <a:r>
-              <a:rPr dirty="0"/>
-              <a:t>, </a:t>
-            </a:r>
-            <a:r>
-              <a:rPr dirty="0" err="1"/>
-              <a:t>המערכת</a:t>
-            </a:r>
-            <a:r>
-              <a:rPr dirty="0"/>
-              <a:t> </a:t>
-            </a:r>
-            <a:r>
-              <a:rPr dirty="0" err="1"/>
-              <a:t>ממתינה</a:t>
-            </a:r>
-            <a:r>
-              <a:rPr dirty="0"/>
-              <a:t> 48 </a:t>
-            </a:r>
-            <a:r>
-              <a:rPr dirty="0" err="1"/>
-              <a:t>מחזורי</a:t>
-            </a:r>
-            <a:r>
-              <a:rPr dirty="0"/>
-              <a:t> </a:t>
-            </a:r>
-            <a:r>
-              <a:rPr dirty="0" err="1"/>
-              <a:t>שעון</a:t>
-            </a:r>
-            <a:r>
-              <a:rPr dirty="0"/>
-              <a:t> (1.92us) </a:t>
-            </a:r>
-            <a:r>
-              <a:rPr dirty="0" err="1"/>
-              <a:t>לייצוב</a:t>
-            </a:r>
-            <a:r>
-              <a:rPr dirty="0"/>
-              <a:t> </a:t>
-            </a:r>
-            <a:r>
-              <a:rPr dirty="0" err="1"/>
-              <a:t>הקרן</a:t>
-            </a:r>
-            <a:r>
-              <a:rPr dirty="0"/>
-              <a:t> </a:t>
-            </a:r>
-            <a:r>
-              <a:rPr dirty="0" err="1"/>
-              <a:t>בתחילת</a:t>
-            </a:r>
-            <a:r>
-              <a:rPr dirty="0"/>
-              <a:t> </a:t>
-            </a:r>
-            <a:r>
-              <a:rPr dirty="0" err="1"/>
-              <a:t>השורה</a:t>
-            </a:r>
-            <a:r>
-              <a:rPr dirty="0"/>
-              <a:t>.</a:t>
-            </a:r>
-          </a:p>
-          <a:p>
-            <a:pPr algn="r" rtl="1">
-              <a:defRPr sz="1600"/>
-            </a:pPr>
-            <a:r>
-              <a:rPr dirty="0"/>
-              <a:t>• </a:t>
-            </a:r>
-            <a:r>
-              <a:rPr dirty="0" err="1"/>
-              <a:t>המשך</a:t>
-            </a:r>
-            <a:r>
-              <a:rPr dirty="0"/>
-              <a:t> </a:t>
-            </a:r>
-            <a:r>
-              <a:rPr dirty="0" err="1"/>
-              <a:t>החשכה</a:t>
-            </a:r>
-            <a:r>
-              <a:rPr dirty="0"/>
-              <a:t>: </a:t>
-            </a:r>
+            <a:pPr algn="r"/>
+            <a:r>
+              <a:rPr lang="he-IL" dirty="0"/>
+              <a:t>בעצם אנחנו כרגע מושתקים על 96 של הסנכרון של </a:t>
+            </a:r>
+            <a:r>
+              <a:rPr lang="he-IL" dirty="0" err="1"/>
+              <a:t>התחילת</a:t>
+            </a:r>
+            <a:r>
+              <a:rPr lang="he-IL" dirty="0"/>
+              <a:t> </a:t>
+            </a:r>
+            <a:r>
+              <a:rPr lang="he-IL" dirty="0" err="1"/>
+              <a:t>שורה,פלוס</a:t>
+            </a:r>
+            <a:r>
+              <a:rPr lang="he-IL" dirty="0"/>
+              <a:t> ה48 של </a:t>
+            </a:r>
+            <a:r>
+              <a:rPr lang="he-IL" dirty="0" err="1"/>
+              <a:t>ההתייצבות,סך</a:t>
+            </a:r>
+            <a:r>
+              <a:rPr lang="he-IL" dirty="0"/>
+              <a:t> </a:t>
+            </a:r>
+            <a:r>
+              <a:rPr lang="he-IL" dirty="0" err="1"/>
+              <a:t>הכל</a:t>
+            </a:r>
+            <a:r>
+              <a:rPr lang="he-IL" dirty="0"/>
+              <a:t> 144 מחזורי שעון</a:t>
+            </a:r>
+          </a:p>
+          <a:p>
+            <a:pPr algn="r"/>
             <a:endParaRPr lang="he-IL" dirty="0"/>
           </a:p>
           <a:p>
-            <a:pPr algn="r" rtl="1">
-              <a:defRPr sz="1600"/>
-            </a:pPr>
-            <a:r>
-              <a:rPr lang="he-IL" dirty="0"/>
-              <a:t> </a:t>
-            </a:r>
-            <a:r>
-              <a:rPr dirty="0" err="1"/>
-              <a:t>בדומה</a:t>
-            </a:r>
-            <a:r>
-              <a:rPr dirty="0"/>
-              <a:t> </a:t>
-            </a:r>
-            <a:r>
-              <a:rPr lang="he-IL" dirty="0"/>
-              <a:t>לפרונט פורץ</a:t>
-            </a:r>
-            <a:r>
-              <a:rPr dirty="0"/>
-              <a:t>, ה-RGB </a:t>
-            </a:r>
-            <a:r>
-              <a:rPr dirty="0" err="1"/>
-              <a:t>מוחזק</a:t>
-            </a:r>
-            <a:r>
-              <a:rPr dirty="0"/>
-              <a:t> </a:t>
-            </a:r>
-            <a:r>
-              <a:rPr dirty="0" err="1"/>
-              <a:t>במכוון</a:t>
-            </a:r>
-            <a:r>
-              <a:rPr dirty="0"/>
-              <a:t> </a:t>
-            </a:r>
-            <a:r>
-              <a:rPr dirty="0" err="1"/>
-              <a:t>על</a:t>
-            </a:r>
-            <a:r>
-              <a:rPr dirty="0"/>
-              <a:t> '0000' </a:t>
-            </a:r>
-            <a:r>
-              <a:rPr dirty="0" err="1"/>
-              <a:t>כדי</a:t>
-            </a:r>
-            <a:r>
-              <a:rPr dirty="0"/>
-              <a:t> </a:t>
-            </a:r>
-            <a:r>
-              <a:rPr dirty="0" err="1"/>
-              <a:t>למנוע</a:t>
-            </a:r>
-            <a:r>
-              <a:rPr dirty="0"/>
-              <a:t> </a:t>
-            </a:r>
-            <a:r>
-              <a:rPr dirty="0" err="1"/>
-              <a:t>זליגות</a:t>
-            </a:r>
-            <a:r>
-              <a:rPr dirty="0"/>
-              <a:t> </a:t>
-            </a:r>
-            <a:r>
-              <a:rPr dirty="0" err="1"/>
-              <a:t>צבע</a:t>
-            </a:r>
-            <a:r>
-              <a:rPr dirty="0"/>
-              <a:t>.</a:t>
-            </a:r>
-          </a:p>
-          <a:p>
-            <a:pPr algn="r" rtl="1">
-              <a:defRPr sz="1600"/>
-            </a:pPr>
-            <a:r>
-              <a:rPr dirty="0"/>
-              <a:t>• </a:t>
-            </a:r>
-            <a:r>
-              <a:rPr dirty="0" err="1"/>
-              <a:t>חזרת</a:t>
-            </a:r>
-            <a:r>
-              <a:rPr dirty="0"/>
-              <a:t> </a:t>
-            </a:r>
-            <a:r>
-              <a:rPr dirty="0" err="1"/>
-              <a:t>הצבעים</a:t>
-            </a:r>
-            <a:r>
-              <a:rPr dirty="0"/>
-              <a:t>: </a:t>
-            </a:r>
-            <a:endParaRPr lang="he-IL" dirty="0"/>
-          </a:p>
-          <a:p>
-            <a:pPr algn="r" rtl="1">
-              <a:defRPr sz="1600"/>
-            </a:pPr>
-            <a:r>
-              <a:rPr dirty="0" err="1"/>
-              <a:t>ברגע</a:t>
-            </a:r>
-            <a:r>
-              <a:rPr dirty="0"/>
-              <a:t> </a:t>
-            </a:r>
-            <a:r>
-              <a:rPr dirty="0" err="1"/>
-              <a:t>שהאות</a:t>
-            </a:r>
-            <a:r>
-              <a:rPr dirty="0"/>
-              <a:t> </a:t>
-            </a:r>
-            <a:r>
-              <a:rPr dirty="0" err="1"/>
-              <a:t>in_display_area</a:t>
-            </a:r>
-            <a:r>
-              <a:rPr dirty="0"/>
-              <a:t> </a:t>
-            </a:r>
-            <a:r>
-              <a:rPr dirty="0" err="1"/>
-              <a:t>עולה</a:t>
-            </a:r>
-            <a:r>
-              <a:rPr dirty="0"/>
-              <a:t> ל-'1', </a:t>
-            </a:r>
-            <a:r>
-              <a:rPr dirty="0" err="1"/>
-              <a:t>רואים</a:t>
-            </a:r>
-            <a:r>
-              <a:rPr dirty="0"/>
-              <a:t> </a:t>
-            </a:r>
-            <a:r>
-              <a:rPr dirty="0" err="1"/>
-              <a:t>את</a:t>
-            </a:r>
-            <a:r>
-              <a:rPr dirty="0"/>
-              <a:t> </a:t>
-            </a:r>
-            <a:r>
-              <a:rPr dirty="0" err="1"/>
-              <a:t>נתוני</a:t>
-            </a:r>
-            <a:r>
-              <a:rPr dirty="0"/>
-              <a:t> ה-RGB  </a:t>
-            </a:r>
-            <a:r>
-              <a:rPr dirty="0" err="1"/>
-              <a:t>מהזיכרון</a:t>
-            </a:r>
-            <a:r>
-              <a:rPr dirty="0"/>
-              <a:t> </a:t>
-            </a:r>
-            <a:r>
-              <a:rPr dirty="0" err="1"/>
-              <a:t>מציירים</a:t>
-            </a:r>
-            <a:r>
-              <a:rPr dirty="0"/>
-              <a:t> </a:t>
-            </a:r>
-            <a:r>
-              <a:rPr dirty="0" err="1"/>
-              <a:t>את</a:t>
-            </a:r>
-            <a:r>
-              <a:rPr dirty="0"/>
-              <a:t> </a:t>
-            </a:r>
-            <a:r>
-              <a:rPr dirty="0" err="1"/>
-              <a:t>הפיקסל</a:t>
-            </a:r>
-            <a:r>
-              <a:rPr lang="he-IL" dirty="0"/>
-              <a:t>ים</a:t>
-            </a:r>
+            <a:pPr algn="r"/>
+            <a:r>
+              <a:rPr lang="he-IL" dirty="0"/>
+              <a:t>ניתן לראות שהחל מהמחזור שעון הבא ,המידע נפתח</a:t>
+            </a:r>
+          </a:p>
+          <a:p>
+            <a:pPr algn="r"/>
             <a:endParaRPr dirty="0"/>
           </a:p>
         </p:txBody>
       </p:sp>
       <p:pic>
         <p:nvPicPr>
-          <p:cNvPr id="4" name="Picture 3" descr="modelsim_back_porch.png"/>
+          <p:cNvPr id="6" name="תמונה 5">
+            <a:extLst>
+              <a:ext uri="{FF2B5EF4-FFF2-40B4-BE49-F238E27FC236}">
+                <a16:creationId xmlns:a16="http://schemas.microsoft.com/office/drawing/2014/main" id="{C855A071-C517-4AA1-B0DE-7F47C62E21E3}"/>
+              </a:ext>
+            </a:extLst>
+          </p:cNvPr>
           <p:cNvPicPr>
             <a:picLocks noChangeAspect="1"/>
           </p:cNvPicPr>
@@ -9276,19 +8714,151 @@
         </p:nvPicPr>
         <p:blipFill rotWithShape="1">
           <a:blip r:embed="rId2"/>
-          <a:srcRect t="24715" b="2352"/>
+          <a:srcRect t="18936" b="13065"/>
           <a:stretch/>
         </p:blipFill>
         <p:spPr>
           <a:xfrm>
-            <a:off x="10617" y="2773467"/>
-            <a:ext cx="9122766" cy="3850105"/>
+            <a:off x="0" y="3360461"/>
+            <a:ext cx="9144000" cy="3497539"/>
           </a:xfrm>
           <a:prstGeom prst="rect">
             <a:avLst/>
           </a:prstGeom>
         </p:spPr>
       </p:pic>
+      <p:sp>
+        <p:nvSpPr>
+          <p:cNvPr id="7" name="חץ: ימינה 6">
+            <a:extLst>
+              <a:ext uri="{FF2B5EF4-FFF2-40B4-BE49-F238E27FC236}">
+                <a16:creationId xmlns:a16="http://schemas.microsoft.com/office/drawing/2014/main" id="{0A2A4ABA-FE27-41B3-B916-A6E375786A44}"/>
+              </a:ext>
+            </a:extLst>
+          </p:cNvPr>
+          <p:cNvSpPr/>
+          <p:nvPr/>
+        </p:nvSpPr>
+        <p:spPr>
+          <a:xfrm>
+            <a:off x="3421748" y="4017886"/>
+            <a:ext cx="978408" cy="231227"/>
+          </a:xfrm>
+          <a:prstGeom prst="rightArrow">
+            <a:avLst/>
+          </a:prstGeom>
+        </p:spPr>
+        <p:style>
+          <a:lnRef idx="1">
+            <a:schemeClr val="accent1"/>
+          </a:lnRef>
+          <a:fillRef idx="3">
+            <a:schemeClr val="accent1"/>
+          </a:fillRef>
+          <a:effectRef idx="2">
+            <a:schemeClr val="accent1"/>
+          </a:effectRef>
+          <a:fontRef idx="minor">
+            <a:schemeClr val="lt1"/>
+          </a:fontRef>
+        </p:style>
+        <p:txBody>
+          <a:bodyPr rtlCol="1" anchor="ctr"/>
+          <a:lstStyle/>
+          <a:p>
+            <a:pPr algn="ctr"/>
+            <a:endParaRPr lang="he-IL"/>
+          </a:p>
+        </p:txBody>
+      </p:sp>
+      <p:sp>
+        <p:nvSpPr>
+          <p:cNvPr id="10" name="חץ: ימינה 9">
+            <a:extLst>
+              <a:ext uri="{FF2B5EF4-FFF2-40B4-BE49-F238E27FC236}">
+                <a16:creationId xmlns:a16="http://schemas.microsoft.com/office/drawing/2014/main" id="{B3BB8985-27F5-4704-BD5E-E60A61B5B4C3}"/>
+              </a:ext>
+            </a:extLst>
+          </p:cNvPr>
+          <p:cNvSpPr/>
+          <p:nvPr/>
+        </p:nvSpPr>
+        <p:spPr>
+          <a:xfrm rot="10800000">
+            <a:off x="7426032" y="3902273"/>
+            <a:ext cx="978408" cy="231227"/>
+          </a:xfrm>
+          <a:prstGeom prst="rightArrow">
+            <a:avLst/>
+          </a:prstGeom>
+        </p:spPr>
+        <p:style>
+          <a:lnRef idx="1">
+            <a:schemeClr val="accent1"/>
+          </a:lnRef>
+          <a:fillRef idx="3">
+            <a:schemeClr val="accent1"/>
+          </a:fillRef>
+          <a:effectRef idx="2">
+            <a:schemeClr val="accent1"/>
+          </a:effectRef>
+          <a:fontRef idx="minor">
+            <a:schemeClr val="lt1"/>
+          </a:fontRef>
+        </p:style>
+        <p:txBody>
+          <a:bodyPr rtlCol="1" anchor="ctr"/>
+          <a:lstStyle/>
+          <a:p>
+            <a:pPr algn="ctr"/>
+            <a:endParaRPr lang="he-IL"/>
+          </a:p>
+        </p:txBody>
+      </p:sp>
+      <p:sp>
+        <p:nvSpPr>
+          <p:cNvPr id="11" name="חץ: ימינה 10">
+            <a:extLst>
+              <a:ext uri="{FF2B5EF4-FFF2-40B4-BE49-F238E27FC236}">
+                <a16:creationId xmlns:a16="http://schemas.microsoft.com/office/drawing/2014/main" id="{2C2977ED-9E3A-48EF-8E4A-A48EEEBF838B}"/>
+              </a:ext>
+            </a:extLst>
+          </p:cNvPr>
+          <p:cNvSpPr/>
+          <p:nvPr/>
+        </p:nvSpPr>
+        <p:spPr>
+          <a:xfrm rot="527216">
+            <a:off x="4536900" y="6404508"/>
+            <a:ext cx="978408" cy="214212"/>
+          </a:xfrm>
+          <a:prstGeom prst="rightArrow">
+            <a:avLst/>
+          </a:prstGeom>
+        </p:spPr>
+        <p:style>
+          <a:lnRef idx="1">
+            <a:schemeClr val="accent1"/>
+          </a:lnRef>
+          <a:fillRef idx="3">
+            <a:schemeClr val="accent1"/>
+          </a:fillRef>
+          <a:effectRef idx="2">
+            <a:schemeClr val="accent1"/>
+          </a:effectRef>
+          <a:fontRef idx="minor">
+            <a:schemeClr val="lt1"/>
+          </a:fontRef>
+        </p:style>
+        <p:txBody>
+          <a:bodyPr rtlCol="1" anchor="ctr"/>
+          <a:lstStyle/>
+          <a:p>
+            <a:pPr algn="ctr"/>
+            <a:endParaRPr lang="he-IL"/>
+          </a:p>
+        </p:txBody>
+      </p:sp>
     </p:spTree>
   </p:cSld>
   <p:clrMapOvr>
@@ -10078,35 +9648,87 @@
         </p:nvSpPr>
         <p:spPr>
           <a:xfrm>
-            <a:off x="336884" y="-225384"/>
-            <a:ext cx="8229600" cy="1143000"/>
+            <a:off x="457200" y="0"/>
+            <a:ext cx="8229600" cy="822642"/>
           </a:xfrm>
         </p:spPr>
         <p:txBody>
-          <a:bodyPr>
-            <a:normAutofit/>
-          </a:bodyPr>
+          <a:bodyPr/>
           <a:lstStyle/>
           <a:p>
             <a:pPr algn="ctr" rtl="1"/>
             <a:r>
               <a:rPr dirty="0" err="1"/>
-              <a:t>Tpw</a:t>
-            </a:r>
-            <a:endParaRPr dirty="0"/>
+              <a:t>האזור</a:t>
+            </a:r>
+            <a:r>
+              <a:rPr dirty="0"/>
+              <a:t> </a:t>
+            </a:r>
+            <a:r>
+              <a:rPr dirty="0" err="1"/>
+              <a:t>הפעיל</a:t>
+            </a:r>
+            <a:r>
+              <a:rPr dirty="0"/>
+              <a:t> (</a:t>
+            </a:r>
+            <a:r>
+              <a:rPr dirty="0" err="1"/>
+              <a:t>Tdisp</a:t>
+            </a:r>
+            <a:r>
+              <a:rPr dirty="0"/>
+              <a:t>)</a:t>
+            </a:r>
           </a:p>
         </p:txBody>
       </p:sp>
+      <p:pic>
+        <p:nvPicPr>
+          <p:cNvPr id="6" name="תמונה 5">
+            <a:extLst>
+              <a:ext uri="{FF2B5EF4-FFF2-40B4-BE49-F238E27FC236}">
+                <a16:creationId xmlns:a16="http://schemas.microsoft.com/office/drawing/2014/main" id="{78B4CC5C-4E5D-43D3-AAF3-85064569D449}"/>
+              </a:ext>
+            </a:extLst>
+          </p:cNvPr>
+          <p:cNvPicPr>
+            <a:picLocks noChangeAspect="1"/>
+          </p:cNvPicPr>
+          <p:nvPr/>
+        </p:nvPicPr>
+        <p:blipFill rotWithShape="1">
+          <a:blip r:embed="rId2"/>
+          <a:srcRect t="21759"/>
+          <a:stretch/>
+        </p:blipFill>
+        <p:spPr>
+          <a:xfrm>
+            <a:off x="0" y="3069021"/>
+            <a:ext cx="9144000" cy="3788979"/>
+          </a:xfrm>
+          <a:prstGeom prst="rect">
+            <a:avLst/>
+          </a:prstGeom>
+        </p:spPr>
+      </p:pic>
       <p:sp>
         <p:nvSpPr>
-          <p:cNvPr id="3" name="TextBox 2"/>
+          <p:cNvPr id="8" name="תיבת טקסט 7">
+            <a:extLst>
+              <a:ext uri="{FF2B5EF4-FFF2-40B4-BE49-F238E27FC236}">
+                <a16:creationId xmlns:a16="http://schemas.microsoft.com/office/drawing/2014/main" id="{45A9546E-63E0-4E62-A7AB-04B90D519163}"/>
+              </a:ext>
+            </a:extLst>
+          </p:cNvPr>
           <p:cNvSpPr txBox="1"/>
           <p:nvPr/>
         </p:nvSpPr>
         <p:spPr>
           <a:xfrm>
-            <a:off x="434273" y="665665"/>
-            <a:ext cx="8495431" cy="1354217"/>
+            <a:off x="584791" y="1162493"/>
+            <a:ext cx="7974418" cy="1754326"/>
           </a:xfrm>
           <a:prstGeom prst="rect">
             <a:avLst/>
@@ -10114,323 +9736,228 @@
           <a:noFill/>
         </p:spPr>
         <p:txBody>
-          <a:bodyPr wrap="square">
+          <a:bodyPr wrap="square" rtlCol="1">
             <a:spAutoFit/>
           </a:bodyPr>
           <a:lstStyle/>
           <a:p>
-            <a:endParaRPr dirty="0"/>
-          </a:p>
-          <a:p>
-            <a:pPr algn="r" rtl="1">
-              <a:defRPr sz="1600"/>
-            </a:pPr>
-            <a:r>
-              <a:rPr dirty="0"/>
-              <a:t>• </a:t>
-            </a:r>
-            <a:r>
-              <a:rPr dirty="0" err="1"/>
-              <a:t>אות</a:t>
-            </a:r>
-            <a:r>
-              <a:rPr dirty="0"/>
-              <a:t> ה-HSYN</a:t>
+            <a:pPr algn="ctr"/>
+            <a:r>
+              <a:rPr lang="he-IL" dirty="0"/>
+              <a:t>פה אנחנו רואים את 640 (783 -144 ) מחזורי השעון </a:t>
+            </a:r>
+            <a:r>
+              <a:rPr lang="he-IL" dirty="0" err="1"/>
+              <a:t>הפעילים,ניתן</a:t>
+            </a:r>
+            <a:r>
+              <a:rPr lang="he-IL" dirty="0"/>
+              <a:t> לראות כי </a:t>
+            </a:r>
+          </a:p>
+          <a:p>
+            <a:pPr algn="ctr"/>
+            <a:r>
+              <a:rPr lang="en-US" dirty="0" err="1"/>
+              <a:t>addrb</a:t>
             </a:r>
             <a:r>
               <a:rPr lang="en-US" dirty="0"/>
-              <a:t>C</a:t>
-            </a:r>
-            <a:r>
-              <a:rPr lang="he-IL" dirty="0"/>
-              <a:t>:</a:t>
-            </a:r>
-          </a:p>
-          <a:p>
-            <a:pPr algn="r" rtl="1">
-              <a:defRPr sz="1600"/>
-            </a:pPr>
-            <a:r>
-              <a:rPr lang="he-IL" dirty="0"/>
-              <a:t>  </a:t>
-            </a:r>
-            <a:r>
-              <a:rPr dirty="0" err="1"/>
-              <a:t>זהו</a:t>
-            </a:r>
-            <a:r>
-              <a:rPr dirty="0"/>
-              <a:t> </a:t>
-            </a:r>
-            <a:r>
-              <a:rPr dirty="0" err="1"/>
-              <a:t>הטריגר</a:t>
-            </a:r>
-            <a:r>
-              <a:rPr dirty="0"/>
-              <a:t> </a:t>
-            </a:r>
-            <a:r>
-              <a:rPr dirty="0" err="1"/>
-              <a:t>הפיזי</a:t>
-            </a:r>
-            <a:r>
-              <a:rPr dirty="0"/>
-              <a:t> </a:t>
-            </a:r>
-            <a:r>
-              <a:rPr dirty="0" err="1"/>
-              <a:t>המורה</a:t>
-            </a:r>
-            <a:r>
-              <a:rPr dirty="0"/>
-              <a:t> </a:t>
-            </a:r>
-            <a:r>
-              <a:rPr dirty="0" err="1"/>
-              <a:t>למסך</a:t>
-            </a:r>
-            <a:r>
-              <a:rPr dirty="0"/>
-              <a:t> </a:t>
-            </a:r>
-            <a:r>
-              <a:rPr dirty="0" err="1"/>
-              <a:t>לבצע</a:t>
-            </a:r>
-            <a:r>
-              <a:rPr dirty="0"/>
-              <a:t> Retrace </a:t>
-            </a:r>
-            <a:r>
-              <a:rPr lang="he-IL" dirty="0"/>
-              <a:t> </a:t>
-            </a:r>
-            <a:r>
-              <a:rPr dirty="0" err="1"/>
-              <a:t>לתחילת</a:t>
-            </a:r>
-            <a:r>
-              <a:rPr dirty="0"/>
-              <a:t> </a:t>
-            </a:r>
-            <a:r>
-              <a:rPr dirty="0" err="1"/>
-              <a:t>השורה</a:t>
-            </a:r>
-            <a:r>
-              <a:rPr dirty="0"/>
-              <a:t> </a:t>
-            </a:r>
-            <a:r>
-              <a:rPr dirty="0" err="1"/>
-              <a:t>הבאה</a:t>
-            </a:r>
-            <a:r>
-              <a:rPr dirty="0"/>
-              <a:t>.</a:t>
-            </a:r>
-          </a:p>
-          <a:p>
-            <a:pPr algn="r" rtl="1">
-              <a:defRPr sz="1600"/>
-            </a:pPr>
-            <a:r>
-              <a:rPr dirty="0"/>
-              <a:t>• </a:t>
-            </a:r>
-            <a:r>
-              <a:rPr dirty="0" err="1"/>
-              <a:t>דיוק</a:t>
-            </a:r>
-            <a:r>
-              <a:rPr dirty="0"/>
-              <a:t> </a:t>
-            </a:r>
-            <a:r>
-              <a:rPr dirty="0" err="1"/>
-              <a:t>של</a:t>
-            </a:r>
-            <a:r>
-              <a:rPr dirty="0"/>
-              <a:t> </a:t>
-            </a:r>
-            <a:r>
-              <a:rPr dirty="0" err="1"/>
-              <a:t>מחזור</a:t>
-            </a:r>
-            <a:r>
-              <a:rPr dirty="0"/>
-              <a:t> </a:t>
-            </a:r>
-            <a:r>
-              <a:rPr dirty="0" err="1"/>
-              <a:t>בודד</a:t>
-            </a:r>
-            <a:r>
-              <a:rPr dirty="0"/>
-              <a:t>: </a:t>
-            </a:r>
+              <a:t> </a:t>
+            </a:r>
+            <a:r>
+              <a:rPr lang="he-IL" dirty="0"/>
+              <a:t>פעיל</a:t>
+            </a:r>
+          </a:p>
+          <a:p>
+            <a:pPr algn="r"/>
             <a:endParaRPr lang="he-IL" dirty="0"/>
           </a:p>
           <a:p>
-            <a:pPr algn="r" rtl="1">
-              <a:defRPr sz="1600"/>
-            </a:pPr>
-            <a:r>
-              <a:rPr lang="he-IL" dirty="0"/>
-              <a:t>   </a:t>
-            </a:r>
-            <a:r>
-              <a:rPr dirty="0" err="1"/>
-              <a:t>הצבת</a:t>
-            </a:r>
-            <a:r>
-              <a:rPr dirty="0"/>
+            <a:pPr algn="r"/>
+            <a:r>
+              <a:rPr lang="he-IL" dirty="0"/>
+              <a:t>הערה </a:t>
+            </a:r>
+          </a:p>
+          <a:p>
+            <a:pPr algn="r"/>
+            <a:r>
+              <a:rPr lang="he-IL" dirty="0"/>
+              <a:t>הצבעים </a:t>
+            </a:r>
+            <a:r>
+              <a:rPr lang="en-US" dirty="0"/>
+              <a:t>R G B</a:t>
+            </a:r>
+            <a:r>
+              <a:rPr lang="he-IL" dirty="0"/>
               <a:t> </a:t>
             </a:r>
             <a:r>
               <a:rPr lang="he-IL" dirty="0" err="1"/>
-              <a:t>קרסרים</a:t>
-            </a:r>
-            <a:r>
-              <a:rPr dirty="0"/>
-              <a:t> </a:t>
-            </a:r>
-            <a:r>
-              <a:rPr dirty="0" err="1"/>
-              <a:t>על</a:t>
-            </a:r>
-            <a:r>
-              <a:rPr dirty="0"/>
-              <a:t> </a:t>
-            </a:r>
-            <a:r>
-              <a:rPr dirty="0" err="1"/>
-              <a:t>הדילוג</a:t>
-            </a:r>
-            <a:r>
-              <a:rPr dirty="0"/>
-              <a:t> </a:t>
-            </a:r>
-            <a:r>
-              <a:rPr dirty="0" err="1"/>
-              <a:t>של</a:t>
-            </a:r>
-            <a:r>
-              <a:rPr dirty="0"/>
-              <a:t> </a:t>
-            </a:r>
-            <a:r>
-              <a:rPr dirty="0" err="1"/>
-              <a:t>האות</a:t>
-            </a:r>
-            <a:r>
-              <a:rPr dirty="0"/>
-              <a:t> </a:t>
-            </a:r>
-            <a:r>
-              <a:rPr dirty="0" err="1"/>
-              <a:t>הפיזי</a:t>
-            </a:r>
-            <a:r>
-              <a:rPr dirty="0"/>
-              <a:t> מ</a:t>
+              <a:t>וה</a:t>
+            </a:r>
+            <a:r>
+              <a:rPr lang="en-US" dirty="0"/>
+              <a:t>DTUB </a:t>
+            </a:r>
+          </a:p>
+          <a:p>
+            <a:pPr algn="r"/>
+            <a:r>
+              <a:rPr lang="he-IL" dirty="0"/>
+              <a:t>אינם </a:t>
             </a:r>
             <a:r>
               <a:rPr lang="he-IL" dirty="0" err="1"/>
-              <a:t>רא</a:t>
-            </a:r>
-            <a:r>
-              <a:rPr dirty="0"/>
-              <a:t>ה </a:t>
-            </a:r>
-            <a:r>
-              <a:rPr dirty="0" err="1"/>
-              <a:t>רוחב</a:t>
-            </a:r>
-            <a:r>
-              <a:rPr dirty="0"/>
-              <a:t> </a:t>
-            </a:r>
-            <a:r>
-              <a:rPr dirty="0" err="1"/>
-              <a:t>דופק</a:t>
-            </a:r>
-            <a:r>
-              <a:rPr dirty="0"/>
-              <a:t> </a:t>
-            </a:r>
-            <a:r>
-              <a:rPr dirty="0" err="1"/>
-              <a:t>מדויק</a:t>
-            </a:r>
-            <a:r>
-              <a:rPr dirty="0"/>
-              <a:t> </a:t>
-            </a:r>
-            <a:r>
-              <a:rPr dirty="0" err="1"/>
-              <a:t>של</a:t>
-            </a:r>
-            <a:r>
-              <a:rPr dirty="0"/>
-              <a:t> 3.84us, </a:t>
-            </a:r>
-            <a:r>
-              <a:rPr lang="he-IL" dirty="0"/>
-              <a:t> </a:t>
-            </a:r>
-            <a:r>
-              <a:rPr dirty="0" err="1"/>
-              <a:t>השקול</a:t>
-            </a:r>
-            <a:r>
-              <a:rPr dirty="0"/>
-              <a:t> ל-96 </a:t>
-            </a:r>
-            <a:r>
-              <a:rPr dirty="0" err="1"/>
-              <a:t>מחזורי</a:t>
-            </a:r>
-            <a:r>
-              <a:rPr dirty="0"/>
-              <a:t> </a:t>
-            </a:r>
-            <a:r>
-              <a:rPr dirty="0" err="1"/>
-              <a:t>שעון</a:t>
-            </a:r>
-            <a:r>
-              <a:rPr dirty="0"/>
-              <a:t>.</a:t>
-            </a:r>
+              <a:t>פעילים,טכנית</a:t>
+            </a:r>
+            <a:r>
+              <a:rPr lang="he-IL" dirty="0"/>
+              <a:t> ,על פי מה שנשלח בזמן זה מהטסט </a:t>
+            </a:r>
+            <a:r>
+              <a:rPr lang="he-IL" dirty="0" err="1"/>
+              <a:t>בנצ</a:t>
+            </a:r>
+            <a:endParaRPr lang="he-IL" dirty="0"/>
           </a:p>
         </p:txBody>
       </p:sp>
-      <p:pic>
-        <p:nvPicPr>
-          <p:cNvPr id="4" name="Picture 3" descr="modelsim_sync_pulse_assertion.png"/>
-          <p:cNvPicPr>
-            <a:picLocks noChangeAspect="1"/>
-          </p:cNvPicPr>
+      <p:sp>
+        <p:nvSpPr>
+          <p:cNvPr id="9" name="חץ: ימינה 8">
+            <a:extLst>
+              <a:ext uri="{FF2B5EF4-FFF2-40B4-BE49-F238E27FC236}">
+                <a16:creationId xmlns:a16="http://schemas.microsoft.com/office/drawing/2014/main" id="{5564EB7C-B5BD-46CE-ACAA-AEECA653AC1E}"/>
+              </a:ext>
+            </a:extLst>
+          </p:cNvPr>
+          <p:cNvSpPr/>
           <p:nvPr/>
-        </p:nvPicPr>
-        <p:blipFill rotWithShape="1">
-          <a:blip r:embed="rId2"/>
-          <a:srcRect t="25570" b="4034"/>
-          <a:stretch/>
-        </p:blipFill>
+        </p:nvSpPr>
         <p:spPr>
           <a:xfrm>
-            <a:off x="0" y="2358189"/>
-            <a:ext cx="9144000" cy="4487116"/>
+            <a:off x="2679404" y="4417537"/>
+            <a:ext cx="701961" cy="140287"/>
           </a:xfrm>
-          <a:prstGeom prst="rect">
+          <a:prstGeom prst="rightArrow">
             <a:avLst/>
           </a:prstGeom>
         </p:spPr>
-      </p:pic>
+        <p:style>
+          <a:lnRef idx="1">
+            <a:schemeClr val="accent1"/>
+          </a:lnRef>
+          <a:fillRef idx="3">
+            <a:schemeClr val="accent1"/>
+          </a:fillRef>
+          <a:effectRef idx="2">
+            <a:schemeClr val="accent1"/>
+          </a:effectRef>
+          <a:fontRef idx="minor">
+            <a:schemeClr val="lt1"/>
+          </a:fontRef>
+        </p:style>
+        <p:txBody>
+          <a:bodyPr rtlCol="1" anchor="ctr"/>
+          <a:lstStyle/>
+          <a:p>
+            <a:pPr algn="ctr"/>
+            <a:endParaRPr lang="he-IL"/>
+          </a:p>
+        </p:txBody>
+      </p:sp>
+      <p:sp>
+        <p:nvSpPr>
+          <p:cNvPr id="10" name="חץ: ימינה 9">
+            <a:extLst>
+              <a:ext uri="{FF2B5EF4-FFF2-40B4-BE49-F238E27FC236}">
+                <a16:creationId xmlns:a16="http://schemas.microsoft.com/office/drawing/2014/main" id="{39077EEF-E53C-4B66-80FB-73DF67647838}"/>
+              </a:ext>
+            </a:extLst>
+          </p:cNvPr>
+          <p:cNvSpPr/>
+          <p:nvPr/>
+        </p:nvSpPr>
+        <p:spPr>
+          <a:xfrm rot="10800000">
+            <a:off x="8410353" y="4458015"/>
+            <a:ext cx="552893" cy="99808"/>
+          </a:xfrm>
+          <a:prstGeom prst="rightArrow">
+            <a:avLst/>
+          </a:prstGeom>
+        </p:spPr>
+        <p:style>
+          <a:lnRef idx="1">
+            <a:schemeClr val="accent1"/>
+          </a:lnRef>
+          <a:fillRef idx="3">
+            <a:schemeClr val="accent1"/>
+          </a:fillRef>
+          <a:effectRef idx="2">
+            <a:schemeClr val="accent1"/>
+          </a:effectRef>
+          <a:fontRef idx="minor">
+            <a:schemeClr val="lt1"/>
+          </a:fontRef>
+        </p:style>
+        <p:txBody>
+          <a:bodyPr rtlCol="1" anchor="ctr"/>
+          <a:lstStyle/>
+          <a:p>
+            <a:pPr algn="ctr"/>
+            <a:endParaRPr lang="he-IL"/>
+          </a:p>
+        </p:txBody>
+      </p:sp>
+      <p:sp>
+        <p:nvSpPr>
+          <p:cNvPr id="11" name="חץ: ימינה 10">
+            <a:extLst>
+              <a:ext uri="{FF2B5EF4-FFF2-40B4-BE49-F238E27FC236}">
+                <a16:creationId xmlns:a16="http://schemas.microsoft.com/office/drawing/2014/main" id="{193DB722-913C-4AAC-8BD7-D18E6CC1B105}"/>
+              </a:ext>
+            </a:extLst>
+          </p:cNvPr>
+          <p:cNvSpPr/>
+          <p:nvPr/>
+        </p:nvSpPr>
+        <p:spPr>
+          <a:xfrm rot="1448323">
+            <a:off x="4485472" y="6316410"/>
+            <a:ext cx="807209" cy="197322"/>
+          </a:xfrm>
+          <a:prstGeom prst="rightArrow">
+            <a:avLst/>
+          </a:prstGeom>
+        </p:spPr>
+        <p:style>
+          <a:lnRef idx="1">
+            <a:schemeClr val="accent1"/>
+          </a:lnRef>
+          <a:fillRef idx="3">
+            <a:schemeClr val="accent1"/>
+          </a:fillRef>
+          <a:effectRef idx="2">
+            <a:schemeClr val="accent1"/>
+          </a:effectRef>
+          <a:fontRef idx="minor">
+            <a:schemeClr val="lt1"/>
+          </a:fontRef>
+        </p:style>
+        <p:txBody>
+          <a:bodyPr rtlCol="1" anchor="ctr"/>
+          <a:lstStyle/>
+          <a:p>
+            <a:pPr algn="ctr"/>
+            <a:endParaRPr lang="he-IL"/>
+          </a:p>
+        </p:txBody>
+      </p:sp>
     </p:spTree>
   </p:cSld>
   <p:clrMapOvr>
@@ -10468,6 +9995,226 @@
         </p:nvSpPr>
         <p:spPr>
           <a:xfrm>
+            <a:off x="379373" y="331930"/>
+            <a:ext cx="8229600" cy="1143000"/>
+          </a:xfrm>
+        </p:spPr>
+        <p:txBody>
+          <a:bodyPr/>
+          <a:lstStyle/>
+          <a:p>
+            <a:pPr algn="ctr" rtl="1"/>
+            <a:r>
+              <a:rPr lang="en-US" dirty="0"/>
+              <a:t>Front </a:t>
+            </a:r>
+            <a:r>
+              <a:rPr dirty="0"/>
+              <a:t>Porch</a:t>
+            </a:r>
+          </a:p>
+        </p:txBody>
+      </p:sp>
+      <p:sp>
+        <p:nvSpPr>
+          <p:cNvPr id="3" name="TextBox 2"/>
+          <p:cNvSpPr txBox="1"/>
+          <p:nvPr/>
+        </p:nvSpPr>
+        <p:spPr>
+          <a:xfrm>
+            <a:off x="-120316" y="1652501"/>
+            <a:ext cx="9262200" cy="646331"/>
+          </a:xfrm>
+          <a:prstGeom prst="rect">
+            <a:avLst/>
+          </a:prstGeom>
+          <a:noFill/>
+        </p:spPr>
+        <p:txBody>
+          <a:bodyPr wrap="square">
+            <a:spAutoFit/>
+          </a:bodyPr>
+          <a:lstStyle/>
+          <a:p>
+            <a:pPr algn="ctr"/>
+            <a:r>
+              <a:rPr lang="he-IL" dirty="0"/>
+              <a:t>16 (799-784)מחזורי שעון של </a:t>
+            </a:r>
+            <a:r>
+              <a:rPr lang="he-IL" dirty="0" err="1"/>
+              <a:t>השתקה,שהם</a:t>
+            </a:r>
+            <a:r>
+              <a:rPr lang="he-IL" dirty="0"/>
+              <a:t> בעצם שולי הביטחון של סוף סריקת השורה,</a:t>
+            </a:r>
+          </a:p>
+          <a:p>
+            <a:pPr algn="ctr"/>
+            <a:r>
+              <a:rPr lang="he-IL" dirty="0"/>
+              <a:t>והכנה לקראת קבלת פולס סנכרון חדש (האות האדומה של ה96)</a:t>
+            </a:r>
+            <a:endParaRPr dirty="0"/>
+          </a:p>
+        </p:txBody>
+      </p:sp>
+      <p:pic>
+        <p:nvPicPr>
+          <p:cNvPr id="6" name="תמונה 5">
+            <a:extLst>
+              <a:ext uri="{FF2B5EF4-FFF2-40B4-BE49-F238E27FC236}">
+                <a16:creationId xmlns:a16="http://schemas.microsoft.com/office/drawing/2014/main" id="{BAB4B761-1459-485A-BBEF-F80C8A8745C7}"/>
+              </a:ext>
+            </a:extLst>
+          </p:cNvPr>
+          <p:cNvPicPr>
+            <a:picLocks noChangeAspect="1"/>
+          </p:cNvPicPr>
+          <p:nvPr/>
+        </p:nvPicPr>
+        <p:blipFill rotWithShape="1">
+          <a:blip r:embed="rId3"/>
+          <a:srcRect l="2170" t="21440" r="-789" b="-1"/>
+          <a:stretch/>
+        </p:blipFill>
+        <p:spPr>
+          <a:xfrm>
+            <a:off x="0" y="3002928"/>
+            <a:ext cx="9216190" cy="3855071"/>
+          </a:xfrm>
+          <a:prstGeom prst="rect">
+            <a:avLst/>
+          </a:prstGeom>
+        </p:spPr>
+      </p:pic>
+      <p:sp>
+        <p:nvSpPr>
+          <p:cNvPr id="7" name="חץ: ימינה 6">
+            <a:extLst>
+              <a:ext uri="{FF2B5EF4-FFF2-40B4-BE49-F238E27FC236}">
+                <a16:creationId xmlns:a16="http://schemas.microsoft.com/office/drawing/2014/main" id="{19EE7F93-8A62-4441-A6E7-F59AA871B546}"/>
+              </a:ext>
+            </a:extLst>
+          </p:cNvPr>
+          <p:cNvSpPr/>
+          <p:nvPr/>
+        </p:nvSpPr>
+        <p:spPr>
+          <a:xfrm rot="9272466">
+            <a:off x="4936532" y="6242077"/>
+            <a:ext cx="978408" cy="239698"/>
+          </a:xfrm>
+          <a:prstGeom prst="rightArrow">
+            <a:avLst/>
+          </a:prstGeom>
+        </p:spPr>
+        <p:style>
+          <a:lnRef idx="1">
+            <a:schemeClr val="accent1"/>
+          </a:lnRef>
+          <a:fillRef idx="3">
+            <a:schemeClr val="accent1"/>
+          </a:fillRef>
+          <a:effectRef idx="2">
+            <a:schemeClr val="accent1"/>
+          </a:effectRef>
+          <a:fontRef idx="minor">
+            <a:schemeClr val="lt1"/>
+          </a:fontRef>
+        </p:style>
+        <p:txBody>
+          <a:bodyPr rtlCol="1" anchor="ctr"/>
+          <a:lstStyle/>
+          <a:p>
+            <a:pPr algn="ctr"/>
+            <a:endParaRPr lang="he-IL"/>
+          </a:p>
+        </p:txBody>
+      </p:sp>
+      <p:sp>
+        <p:nvSpPr>
+          <p:cNvPr id="8" name="חץ: ימינה 7">
+            <a:extLst>
+              <a:ext uri="{FF2B5EF4-FFF2-40B4-BE49-F238E27FC236}">
+                <a16:creationId xmlns:a16="http://schemas.microsoft.com/office/drawing/2014/main" id="{8D97C8BA-5FEC-4465-BEE8-21942673C426}"/>
+              </a:ext>
+            </a:extLst>
+          </p:cNvPr>
+          <p:cNvSpPr/>
+          <p:nvPr/>
+        </p:nvSpPr>
+        <p:spPr>
+          <a:xfrm rot="578915">
+            <a:off x="3140093" y="3400825"/>
+            <a:ext cx="978408" cy="169793"/>
+          </a:xfrm>
+          <a:prstGeom prst="rightArrow">
+            <a:avLst/>
+          </a:prstGeom>
+        </p:spPr>
+        <p:style>
+          <a:lnRef idx="1">
+            <a:schemeClr val="accent1"/>
+          </a:lnRef>
+          <a:fillRef idx="3">
+            <a:schemeClr val="accent1"/>
+          </a:fillRef>
+          <a:effectRef idx="2">
+            <a:schemeClr val="accent1"/>
+          </a:effectRef>
+          <a:fontRef idx="minor">
+            <a:schemeClr val="lt1"/>
+          </a:fontRef>
+        </p:style>
+        <p:txBody>
+          <a:bodyPr rtlCol="1" anchor="ctr"/>
+          <a:lstStyle/>
+          <a:p>
+            <a:pPr algn="ctr"/>
+            <a:endParaRPr lang="he-IL"/>
+          </a:p>
+        </p:txBody>
+      </p:sp>
+    </p:spTree>
+  </p:cSld>
+  <p:clrMapOvr>
+    <a:masterClrMapping/>
+  </p:clrMapOvr>
+</p:sld>
+</file>
+
+<file path=ppt/slides/slide22.xml><?xml version="1.0" encoding="utf-8"?>
+<p:sld xmlns:a="http://schemas.openxmlformats.org/drawingml/2006/main" xmlns:r="http://schemas.openxmlformats.org/officeDocument/2006/relationships" xmlns:p="http://schemas.openxmlformats.org/presentationml/2006/main">
+  <p:cSld>
+    <p:spTree>
+      <p:nvGrpSpPr>
+        <p:cNvPr id="1" name=""/>
+        <p:cNvGrpSpPr/>
+        <p:nvPr/>
+      </p:nvGrpSpPr>
+      <p:grpSpPr>
+        <a:xfrm>
+          <a:off x="0" y="0"/>
+          <a:ext cx="0" cy="0"/>
+          <a:chOff x="0" y="0"/>
+          <a:chExt cx="0" cy="0"/>
+        </a:xfrm>
+      </p:grpSpPr>
+      <p:sp>
+        <p:nvSpPr>
+          <p:cNvPr id="2" name="Title 1"/>
+          <p:cNvSpPr>
+            <a:spLocks noGrp="1"/>
+          </p:cNvSpPr>
+          <p:nvPr>
+            <p:ph type="title"/>
+          </p:nvPr>
+        </p:nvSpPr>
+        <p:spPr>
+          <a:xfrm>
             <a:off x="457200" y="268996"/>
             <a:ext cx="8229600" cy="1143000"/>
           </a:xfrm>
@@ -11241,7 +10988,7 @@
 </p:sld>
 </file>
 
-<file path=ppt/slides/slide22.xml><?xml version="1.0" encoding="utf-8"?>
+<file path=ppt/slides/slide23.xml><?xml version="1.0" encoding="utf-8"?>
 <p:sld xmlns:a="http://schemas.openxmlformats.org/drawingml/2006/main" xmlns:r="http://schemas.openxmlformats.org/officeDocument/2006/relationships" xmlns:p="http://schemas.openxmlformats.org/presentationml/2006/main">
   <p:cSld>
     <p:spTree>
@@ -11517,6 +11264,10 @@
             <a:r>
               <a:rPr dirty="0"/>
               <a:t> </a:t>
+            </a:r>
+            <a:r>
+              <a:rPr lang="he-IL" dirty="0"/>
+              <a:t>לדוגמא </a:t>
             </a:r>
             <a:r>
               <a:rPr dirty="0" err="1"/>
@@ -12112,7 +11863,7 @@
 </p:sld>
 </file>
 
-<file path=ppt/slides/slide23.xml><?xml version="1.0" encoding="utf-8"?>
+<file path=ppt/slides/slide24.xml><?xml version="1.0" encoding="utf-8"?>
 <p:sld xmlns:a="http://schemas.openxmlformats.org/drawingml/2006/main" xmlns:r="http://schemas.openxmlformats.org/officeDocument/2006/relationships" xmlns:p="http://schemas.openxmlformats.org/presentationml/2006/main">
   <p:cSld>
     <p:spTree>
@@ -12641,7 +12392,7 @@
 </p:sld>
 </file>
 
-<file path=ppt/slides/slide24.xml><?xml version="1.0" encoding="utf-8"?>
+<file path=ppt/slides/slide25.xml><?xml version="1.0" encoding="utf-8"?>
 <p:sld xmlns:a="http://schemas.openxmlformats.org/drawingml/2006/main" xmlns:r="http://schemas.openxmlformats.org/officeDocument/2006/relationships" xmlns:p="http://schemas.openxmlformats.org/presentationml/2006/main">
   <p:cSld>
     <p:spTree>
@@ -12874,7 +12625,7 @@
 </p:sld>
 </file>
 
-<file path=ppt/slides/slide25.xml><?xml version="1.0" encoding="utf-8"?>
+<file path=ppt/slides/slide26.xml><?xml version="1.0" encoding="utf-8"?>
 <p:sld xmlns:a="http://schemas.openxmlformats.org/drawingml/2006/main" xmlns:r="http://schemas.openxmlformats.org/officeDocument/2006/relationships" xmlns:p="http://schemas.openxmlformats.org/presentationml/2006/main">
   <p:cSld>
     <p:spTree>
@@ -12930,7 +12681,7 @@
         <p:spPr>
           <a:xfrm>
             <a:off x="-433137" y="471638"/>
-            <a:ext cx="9565713" cy="1600438"/>
+            <a:ext cx="9565713" cy="2092881"/>
           </a:xfrm>
           <a:prstGeom prst="rect">
             <a:avLst/>
@@ -12950,8 +12701,8 @@
               <a:defRPr sz="1600"/>
             </a:pPr>
             <a:r>
-              <a:rPr dirty="0"/>
-              <a:t>• </a:t>
+              <a:rPr lang="he-IL" dirty="0"/>
+              <a:t>   </a:t>
             </a:r>
             <a:r>
               <a:rPr dirty="0" err="1"/>
@@ -12983,7 +12734,7 @@
             </a:r>
             <a:r>
               <a:rPr lang="he-IL" dirty="0"/>
-              <a:t> 17, </a:t>
+              <a:t> 15, </a:t>
             </a:r>
             <a:r>
               <a:rPr dirty="0"/>
@@ -13069,149 +12820,38 @@
               <a:rPr dirty="0"/>
               <a:t> ה-ILA.</a:t>
             </a:r>
+            <a:endParaRPr lang="he-IL" dirty="0"/>
           </a:p>
           <a:p>
             <a:pPr algn="r" rtl="1">
               <a:defRPr sz="1600"/>
             </a:pPr>
-            <a:r>
-              <a:rPr dirty="0"/>
-              <a:t>• </a:t>
-            </a:r>
-            <a:r>
-              <a:rPr lang="he-IL" dirty="0"/>
-              <a:t>נשים </a:t>
-            </a:r>
-            <a:r>
-              <a:rPr dirty="0" err="1"/>
-              <a:t>לב</a:t>
-            </a:r>
-            <a:r>
-              <a:rPr dirty="0"/>
-              <a:t> </a:t>
-            </a:r>
-            <a:r>
-              <a:rPr dirty="0" err="1"/>
-              <a:t>לפער</a:t>
-            </a:r>
-            <a:r>
-              <a:rPr dirty="0"/>
-              <a:t> </a:t>
-            </a:r>
-            <a:r>
-              <a:rPr dirty="0" err="1"/>
-              <a:t>הפיזי</a:t>
-            </a:r>
-            <a:r>
-              <a:rPr dirty="0"/>
-              <a:t> - </a:t>
-            </a:r>
-            <a:r>
-              <a:rPr dirty="0" err="1"/>
-              <a:t>הכתובת</a:t>
-            </a:r>
-            <a:r>
-              <a:rPr dirty="0"/>
-              <a:t> 266880 </a:t>
-            </a:r>
-            <a:r>
-              <a:rPr dirty="0" err="1"/>
-              <a:t>נשלחת</a:t>
-            </a:r>
-            <a:r>
-              <a:rPr dirty="0"/>
-              <a:t> (</a:t>
-            </a:r>
-            <a:r>
-              <a:rPr dirty="0" err="1"/>
-              <a:t>bram_address_reg</a:t>
-            </a:r>
-            <a:r>
-              <a:rPr dirty="0"/>
-              <a:t>), </a:t>
-            </a:r>
-            <a:r>
-              <a:rPr dirty="0" err="1"/>
-              <a:t>אך</a:t>
-            </a:r>
-            <a:r>
-              <a:rPr dirty="0"/>
-              <a:t> </a:t>
-            </a:r>
-            <a:r>
-              <a:rPr dirty="0" err="1"/>
-              <a:t>הנתון</a:t>
-            </a:r>
-            <a:r>
-              <a:rPr dirty="0"/>
-              <a:t> 4ea </a:t>
-            </a:r>
-            <a:r>
-              <a:rPr dirty="0" err="1"/>
-              <a:t>מופיע</a:t>
-            </a:r>
-            <a:r>
-              <a:rPr dirty="0"/>
-              <a:t> </a:t>
-            </a:r>
-            <a:r>
-              <a:rPr dirty="0" err="1"/>
-              <a:t>רק</a:t>
-            </a:r>
-            <a:r>
-              <a:rPr dirty="0"/>
-              <a:t> </a:t>
-            </a:r>
-            <a:r>
-              <a:rPr dirty="0" err="1"/>
-              <a:t>לאחר</a:t>
-            </a:r>
-            <a:r>
-              <a:rPr dirty="0"/>
-              <a:t> </a:t>
-            </a:r>
-            <a:r>
-              <a:rPr dirty="0" err="1"/>
-              <a:t>מכן</a:t>
-            </a:r>
-            <a:r>
-              <a:rPr dirty="0"/>
-              <a:t>.</a:t>
-            </a:r>
+            <a:endParaRPr lang="he-IL" dirty="0"/>
           </a:p>
           <a:p>
             <a:pPr algn="r" rtl="1">
               <a:defRPr sz="1600"/>
             </a:pPr>
             <a:r>
-              <a:rPr dirty="0"/>
-              <a:t>• </a:t>
-            </a:r>
-            <a:r>
-              <a:rPr dirty="0" err="1"/>
-              <a:t>אכיפת</a:t>
-            </a:r>
-            <a:r>
-              <a:rPr dirty="0"/>
-              <a:t> </a:t>
-            </a:r>
-            <a:r>
-              <a:rPr dirty="0" err="1"/>
-              <a:t>שומר</a:t>
-            </a:r>
-            <a:r>
-              <a:rPr dirty="0"/>
-              <a:t> </a:t>
-            </a:r>
-            <a:r>
-              <a:rPr dirty="0" err="1"/>
-              <a:t>הסף</a:t>
-            </a:r>
-            <a:r>
-              <a:rPr dirty="0"/>
-              <a:t>: </a:t>
-            </a:r>
-            <a:endParaRPr lang="he-IL" dirty="0"/>
+              <a:rPr lang="he-IL" dirty="0"/>
+              <a:t>   ניתן לראות שהפיזיקה במקרה שלנו תואמת 1:1 לסימולציה של הלוגיקה </a:t>
+            </a:r>
+            <a:r>
+              <a:rPr lang="he-IL" dirty="0" err="1"/>
+              <a:t>במודלסים</a:t>
+            </a:r>
+            <a:r>
+              <a:rPr lang="he-IL" dirty="0"/>
+              <a:t> </a:t>
+            </a:r>
+            <a:r>
+              <a:rPr lang="he-IL" dirty="0" err="1"/>
+              <a:t>למעלה,כאשר</a:t>
+            </a:r>
+            <a:r>
+              <a:rPr lang="he-IL" dirty="0"/>
+              <a:t> הדגל נפתח</a:t>
+            </a:r>
           </a:p>
           <a:p>
             <a:pPr algn="r" rtl="1">
@@ -13219,106 +12859,93 @@
             </a:pPr>
             <a:r>
               <a:rPr lang="he-IL" dirty="0"/>
-              <a:t>  </a:t>
-            </a:r>
-            <a:r>
-              <a:rPr dirty="0" err="1"/>
-              <a:t>למרות</a:t>
-            </a:r>
-            <a:r>
-              <a:rPr dirty="0"/>
-              <a:t> </a:t>
-            </a:r>
-            <a:r>
-              <a:rPr dirty="0" err="1"/>
-              <a:t>שהאוגר</a:t>
-            </a:r>
-            <a:r>
-              <a:rPr dirty="0"/>
-              <a:t> </a:t>
-            </a:r>
-            <a:r>
-              <a:rPr dirty="0" err="1"/>
-              <a:t>התמלא</a:t>
-            </a:r>
-            <a:r>
-              <a:rPr dirty="0"/>
-              <a:t>, </a:t>
-            </a:r>
-            <a:r>
-              <a:rPr dirty="0" err="1"/>
-              <a:t>רק</a:t>
-            </a:r>
-            <a:r>
-              <a:rPr dirty="0"/>
-              <a:t> </a:t>
-            </a:r>
-            <a:r>
-              <a:rPr dirty="0" err="1"/>
-              <a:t>בקו</a:t>
-            </a:r>
-            <a:r>
-              <a:rPr dirty="0"/>
-              <a:t> </a:t>
-            </a:r>
-            <a:r>
-              <a:rPr dirty="0" err="1"/>
-              <a:t>הצהוב</a:t>
-            </a:r>
-            <a:r>
-              <a:rPr dirty="0"/>
-              <a:t>, </a:t>
-            </a:r>
-            <a:r>
-              <a:rPr dirty="0" err="1"/>
-              <a:t>כש-in_display_area_delayed</a:t>
-            </a:r>
-            <a:r>
-              <a:rPr dirty="0"/>
-              <a:t> </a:t>
-            </a:r>
-            <a:r>
-              <a:rPr dirty="0" err="1"/>
-              <a:t>עולה</a:t>
-            </a:r>
-            <a:r>
-              <a:rPr dirty="0"/>
-              <a:t> ל-'1', </a:t>
-            </a:r>
-            <a:r>
-              <a:rPr dirty="0" err="1"/>
-              <a:t>נתוני</a:t>
-            </a:r>
-            <a:r>
-              <a:rPr dirty="0"/>
-              <a:t> ה-RGB </a:t>
-            </a:r>
-            <a:r>
-              <a:rPr dirty="0" err="1"/>
-              <a:t>נפרצים</a:t>
-            </a:r>
-            <a:r>
-              <a:rPr dirty="0"/>
-              <a:t> </a:t>
-            </a:r>
-            <a:r>
-              <a:rPr dirty="0" err="1"/>
-              <a:t>החוצה</a:t>
-            </a:r>
-            <a:r>
-              <a:rPr dirty="0"/>
-              <a:t> </a:t>
-            </a:r>
-            <a:endParaRPr lang="he-IL" dirty="0"/>
+              <a:t>   (במקרה </a:t>
+            </a:r>
+            <a:r>
+              <a:rPr lang="he-IL" dirty="0" err="1"/>
+              <a:t>הנל</a:t>
+            </a:r>
+            <a:r>
+              <a:rPr lang="he-IL" dirty="0"/>
+              <a:t> דגמתי את </a:t>
+            </a:r>
+            <a:r>
+              <a:rPr lang="en-US" dirty="0" err="1"/>
+              <a:t>in_display_area_delayed</a:t>
+            </a:r>
+            <a:r>
+              <a:rPr lang="he-IL" dirty="0"/>
+              <a:t>) ,אזי המידע שמגיע מה</a:t>
+            </a:r>
+            <a:r>
+              <a:rPr lang="en-US" dirty="0" err="1"/>
+              <a:t>doutb</a:t>
+            </a:r>
+            <a:r>
+              <a:rPr lang="en-US" dirty="0"/>
+              <a:t> </a:t>
+            </a:r>
+            <a:r>
+              <a:rPr lang="he-IL" dirty="0"/>
+              <a:t>, מוזן לאחר ההתייצבות ב</a:t>
+            </a:r>
           </a:p>
           <a:p>
             <a:pPr algn="r" rtl="1">
               <a:defRPr sz="1600"/>
             </a:pPr>
             <a:r>
-              <a:rPr dirty="0"/>
-              <a:t>(0 -&gt; 4,e,a).</a:t>
-            </a:r>
+              <a:rPr lang="en-US" dirty="0" err="1"/>
+              <a:t>Pxl_data_reg</a:t>
+            </a:r>
+            <a:r>
+              <a:rPr lang="en-US" dirty="0"/>
+              <a:t>       </a:t>
+            </a:r>
+            <a:r>
+              <a:rPr lang="he-IL" dirty="0"/>
+              <a:t> ,ישירות אל קווי ה </a:t>
+            </a:r>
+            <a:r>
+              <a:rPr lang="en-US" dirty="0"/>
+              <a:t>R G B</a:t>
+            </a:r>
+            <a:endParaRPr lang="he-IL" dirty="0"/>
+          </a:p>
+          <a:p>
+            <a:pPr algn="r" rtl="1">
+              <a:defRPr sz="1600"/>
+            </a:pPr>
+            <a:r>
+              <a:rPr lang="he-IL" dirty="0"/>
+              <a:t>    (הערה: בצילום זה לא רואים ברור </a:t>
+            </a:r>
+            <a:r>
+              <a:rPr lang="he-IL" dirty="0" err="1"/>
+              <a:t>מספיק,אבל</a:t>
+            </a:r>
+            <a:r>
+              <a:rPr lang="he-IL" dirty="0"/>
+              <a:t> כמובן שמצד </a:t>
+            </a:r>
+            <a:r>
+              <a:rPr lang="he-IL" dirty="0" err="1"/>
+              <a:t>שמאל,כל</a:t>
+            </a:r>
+            <a:r>
+              <a:rPr lang="he-IL" dirty="0"/>
+              <a:t> עוד אנחנו באזור לא פעיל,</a:t>
+            </a:r>
+          </a:p>
+          <a:p>
+            <a:pPr algn="r" rtl="1">
+              <a:defRPr sz="1600"/>
+            </a:pPr>
+            <a:r>
+              <a:rPr lang="he-IL" dirty="0"/>
+              <a:t>     אין עדכונים של כתובות)</a:t>
+            </a:r>
+            <a:endParaRPr dirty="0"/>
           </a:p>
         </p:txBody>
       </p:sp>
@@ -13337,8 +12964,8 @@
         </p:blipFill>
         <p:spPr>
           <a:xfrm>
-            <a:off x="0" y="2310064"/>
-            <a:ext cx="9143999" cy="4800814"/>
+            <a:off x="0" y="2469822"/>
+            <a:ext cx="9143999" cy="4641055"/>
           </a:xfrm>
           <a:prstGeom prst="rect">
             <a:avLst/>
@@ -13353,7 +12980,7 @@
 </p:sld>
 </file>
 
-<file path=ppt/slides/slide26.xml><?xml version="1.0" encoding="utf-8"?>
+<file path=ppt/slides/slide27.xml><?xml version="1.0" encoding="utf-8"?>
 <p:sld xmlns:a="http://schemas.openxmlformats.org/drawingml/2006/main" xmlns:r="http://schemas.openxmlformats.org/officeDocument/2006/relationships" xmlns:p="http://schemas.openxmlformats.org/presentationml/2006/main">
   <p:cSld>
     <p:spTree>
@@ -13452,7 +13079,7 @@
 </p:sld>
 </file>
 
-<file path=ppt/slides/slide27.xml><?xml version="1.0" encoding="utf-8"?>
+<file path=ppt/slides/slide28.xml><?xml version="1.0" encoding="utf-8"?>
 <p:sld xmlns:a="http://schemas.openxmlformats.org/drawingml/2006/main" xmlns:r="http://schemas.openxmlformats.org/officeDocument/2006/relationships" xmlns:p="http://schemas.openxmlformats.org/presentationml/2006/main">
   <p:cSld>
     <p:spTree>
@@ -14021,7 +13648,7 @@
 </p:sld>
 </file>
 
-<file path=ppt/slides/slide28.xml><?xml version="1.0" encoding="utf-8"?>
+<file path=ppt/slides/slide29.xml><?xml version="1.0" encoding="utf-8"?>
 <p:sld xmlns:a="http://schemas.openxmlformats.org/drawingml/2006/main" xmlns:r="http://schemas.openxmlformats.org/officeDocument/2006/relationships" xmlns:p="http://schemas.openxmlformats.org/presentationml/2006/main">
   <p:cSld>
     <p:spTree>
@@ -15644,7 +15271,7 @@
         </p:nvSpPr>
         <p:spPr>
           <a:xfrm>
-            <a:off x="457200" y="644752"/>
+            <a:off x="457200" y="488635"/>
             <a:ext cx="8360229" cy="1143000"/>
           </a:xfrm>
         </p:spPr>
@@ -15703,7 +15330,7 @@
           <p:nvPr>
             <p:extLst>
               <p:ext uri="{D42A27DB-BD31-4B8C-83A1-F6EECF244321}">
-                <p14:modId xmlns:p14="http://schemas.microsoft.com/office/powerpoint/2010/main" val="2574125639"/>
+                <p14:modId xmlns:p14="http://schemas.microsoft.com/office/powerpoint/2010/main" val="1192457200"/>
               </p:ext>
             </p:extLst>
           </p:nvPr>
@@ -15989,7 +15616,84 @@
                         <a:defRPr sz="1400"/>
                       </a:pPr>
                       <a:r>
-                        <a:t>מכת מתח (טריגר) שמאלצת את הקרן לקפוץ חזרה שמאלה.</a:t>
+                        <a:rPr dirty="0" err="1"/>
+                        <a:t>מכת</a:t>
+                      </a:r>
+                      <a:r>
+                        <a:rPr dirty="0"/>
+                        <a:t> </a:t>
+                      </a:r>
+                      <a:r>
+                        <a:rPr dirty="0" err="1"/>
+                        <a:t>מתח</a:t>
+                      </a:r>
+                      <a:r>
+                        <a:rPr dirty="0"/>
+                        <a:t> </a:t>
+                      </a:r>
+                      <a:r>
+                        <a:rPr lang="he-IL" dirty="0"/>
+                        <a:t>(</a:t>
+                      </a:r>
+                      <a:r>
+                        <a:rPr dirty="0" err="1"/>
+                        <a:t>טריגר</a:t>
+                      </a:r>
+                      <a:r>
+                        <a:rPr lang="he-IL" dirty="0"/>
+                        <a:t>)</a:t>
+                      </a:r>
+                      <a:r>
+                        <a:rPr dirty="0"/>
+                        <a:t> </a:t>
+                      </a:r>
+                      <a:r>
+                        <a:rPr dirty="0" err="1"/>
+                        <a:t>שמאלצת</a:t>
+                      </a:r>
+                      <a:r>
+                        <a:rPr dirty="0"/>
+                        <a:t> </a:t>
+                      </a:r>
+                      <a:r>
+                        <a:rPr dirty="0" err="1"/>
+                        <a:t>את</a:t>
+                      </a:r>
+                      <a:r>
+                        <a:rPr dirty="0"/>
+                        <a:t> </a:t>
+                      </a:r>
+                      <a:r>
+                        <a:rPr dirty="0" err="1"/>
+                        <a:t>הקרן</a:t>
+                      </a:r>
+                      <a:r>
+                        <a:rPr dirty="0"/>
+                        <a:t> </a:t>
+                      </a:r>
+                      <a:r>
+                        <a:rPr dirty="0" err="1"/>
+                        <a:t>לקפוץ</a:t>
+                      </a:r>
+                      <a:r>
+                        <a:rPr dirty="0"/>
+                        <a:t> </a:t>
+                      </a:r>
+                      <a:r>
+                        <a:rPr dirty="0" err="1"/>
+                        <a:t>חזרה</a:t>
+                      </a:r>
+                      <a:r>
+                        <a:rPr dirty="0"/>
+                        <a:t> </a:t>
+                      </a:r>
+                      <a:r>
+                        <a:rPr dirty="0" err="1"/>
+                        <a:t>שמאלה</a:t>
+                      </a:r>
+                      <a:r>
+                        <a:rPr dirty="0"/>
+                        <a:t>.</a:t>
                       </a:r>
                     </a:p>
                   </a:txBody>
@@ -16685,6 +16389,422 @@
       </p:grpSpPr>
       <p:sp>
         <p:nvSpPr>
+          <p:cNvPr id="2" name="כותרת 1">
+            <a:extLst>
+              <a:ext uri="{FF2B5EF4-FFF2-40B4-BE49-F238E27FC236}">
+                <a16:creationId xmlns:a16="http://schemas.microsoft.com/office/drawing/2014/main" id="{11016F80-F95D-4CA5-A2E1-AA093B411BDE}"/>
+              </a:ext>
+            </a:extLst>
+          </p:cNvPr>
+          <p:cNvSpPr>
+            <a:spLocks noGrp="1"/>
+          </p:cNvSpPr>
+          <p:nvPr>
+            <p:ph type="title"/>
+          </p:nvPr>
+        </p:nvSpPr>
+        <p:spPr>
+          <a:xfrm>
+            <a:off x="268310" y="-363974"/>
+            <a:ext cx="8686799" cy="1228040"/>
+          </a:xfrm>
+        </p:spPr>
+        <p:txBody>
+          <a:bodyPr/>
+          <a:lstStyle/>
+          <a:p>
+            <a:r>
+              <a:rPr lang="he-IL" dirty="0"/>
+              <a:t>מילון אותות מרכזיים</a:t>
+            </a:r>
+          </a:p>
+        </p:txBody>
+      </p:sp>
+      <p:sp>
+        <p:nvSpPr>
+          <p:cNvPr id="4" name="תיבת טקסט 3">
+            <a:extLst>
+              <a:ext uri="{FF2B5EF4-FFF2-40B4-BE49-F238E27FC236}">
+                <a16:creationId xmlns:a16="http://schemas.microsoft.com/office/drawing/2014/main" id="{FB65AD89-7790-4637-AE13-D8FB7F12A232}"/>
+              </a:ext>
+            </a:extLst>
+          </p:cNvPr>
+          <p:cNvSpPr txBox="1"/>
+          <p:nvPr/>
+        </p:nvSpPr>
+        <p:spPr>
+          <a:xfrm>
+            <a:off x="163517" y="451258"/>
+            <a:ext cx="8980483" cy="1477328"/>
+          </a:xfrm>
+          <a:prstGeom prst="rect">
+            <a:avLst/>
+          </a:prstGeom>
+          <a:noFill/>
+        </p:spPr>
+        <p:txBody>
+          <a:bodyPr wrap="square" rtlCol="1">
+            <a:spAutoFit/>
+          </a:bodyPr>
+          <a:lstStyle/>
+          <a:p>
+            <a:pPr algn="r"/>
+            <a:r>
+              <a:rPr lang="he-IL" b="1" dirty="0"/>
+              <a:t>שעון ומוני בסיס</a:t>
+            </a:r>
+          </a:p>
+          <a:p>
+            <a:pPr algn="r"/>
+            <a:r>
+              <a:rPr lang="he-IL" dirty="0"/>
+              <a:t>שעון הפיקסלים (25 מגה הרץ) של הבקר ,מניע את הלוגיקה</a:t>
+            </a:r>
+            <a:r>
+              <a:rPr lang="en-US" dirty="0"/>
+              <a:t> :</a:t>
+            </a:r>
+            <a:r>
+              <a:rPr lang="en-US" dirty="0" err="1"/>
+              <a:t>pxl_clk</a:t>
+            </a:r>
+            <a:endParaRPr lang="en-US" dirty="0"/>
+          </a:p>
+          <a:p>
+            <a:pPr algn="r"/>
+            <a:r>
+              <a:rPr lang="he-IL" dirty="0"/>
+              <a:t>מונים המייצגים את מיקום הפיקסל הנוכחי על </a:t>
+            </a:r>
+            <a:r>
+              <a:rPr lang="he-IL" dirty="0" err="1"/>
+              <a:t>המסך,אנחנו</a:t>
+            </a:r>
+            <a:r>
+              <a:rPr lang="he-IL" dirty="0"/>
+              <a:t> נתמקד באופקי</a:t>
+            </a:r>
+            <a:r>
+              <a:rPr lang="en-US" dirty="0"/>
+              <a:t>  :</a:t>
+            </a:r>
+            <a:r>
+              <a:rPr lang="en-US" dirty="0" err="1"/>
+              <a:t>vsync_reg</a:t>
+            </a:r>
+            <a:r>
+              <a:rPr lang="en-US" dirty="0"/>
+              <a:t>/</a:t>
+            </a:r>
+            <a:r>
+              <a:rPr lang="en-US" dirty="0" err="1"/>
+              <a:t>hsync_reg</a:t>
+            </a:r>
+            <a:endParaRPr lang="en-US" dirty="0"/>
+          </a:p>
+          <a:p>
+            <a:pPr algn="r"/>
+            <a:r>
+              <a:rPr lang="he-IL" b="1" dirty="0"/>
+              <a:t> ממשק הזיכרון </a:t>
+            </a:r>
+            <a:r>
+              <a:rPr lang="en-US" b="1" dirty="0"/>
+              <a:t>BRAM</a:t>
+            </a:r>
+            <a:endParaRPr lang="he-IL" b="1" dirty="0"/>
+          </a:p>
+          <a:p>
+            <a:pPr algn="r"/>
+            <a:r>
+              <a:rPr lang="he-IL" dirty="0"/>
+              <a:t>אפיק הכתובת המחושב(בגודל 19 ביטים),הנשלח אל הזיכרון כדי לשלוף את הפיקסל הרלוונטי</a:t>
+            </a:r>
+            <a:r>
+              <a:rPr lang="en-US" dirty="0"/>
+              <a:t> :</a:t>
+            </a:r>
+            <a:r>
+              <a:rPr lang="en-US" dirty="0" err="1"/>
+              <a:t>addrb</a:t>
+            </a:r>
+            <a:endParaRPr lang="he-IL" dirty="0"/>
+          </a:p>
+        </p:txBody>
+      </p:sp>
+      <p:sp>
+        <p:nvSpPr>
+          <p:cNvPr id="7" name="תיבת טקסט 6">
+            <a:extLst>
+              <a:ext uri="{FF2B5EF4-FFF2-40B4-BE49-F238E27FC236}">
+                <a16:creationId xmlns:a16="http://schemas.microsoft.com/office/drawing/2014/main" id="{6527B4C6-5779-49A3-AEC0-FE0506B00903}"/>
+              </a:ext>
+            </a:extLst>
+          </p:cNvPr>
+          <p:cNvSpPr txBox="1"/>
+          <p:nvPr/>
+        </p:nvSpPr>
+        <p:spPr>
+          <a:xfrm>
+            <a:off x="-159391" y="1808866"/>
+            <a:ext cx="9303253" cy="3139321"/>
+          </a:xfrm>
+          <a:prstGeom prst="rect">
+            <a:avLst/>
+          </a:prstGeom>
+          <a:noFill/>
+        </p:spPr>
+        <p:txBody>
+          <a:bodyPr wrap="square" rtlCol="1">
+            <a:spAutoFit/>
+          </a:bodyPr>
+          <a:lstStyle/>
+          <a:p>
+            <a:pPr algn="r" rtl="1"/>
+            <a:r>
+              <a:rPr lang="he-IL" dirty="0"/>
+              <a:t> </a:t>
+            </a:r>
+            <a:r>
+              <a:rPr lang="en-US" dirty="0"/>
+              <a:t> :doubt</a:t>
+            </a:r>
+            <a:r>
+              <a:rPr lang="he-IL" dirty="0"/>
+              <a:t>אפיק הנתונים (12 ביט) החוזר מהזיכרון ונושא את ערך הצבע</a:t>
+            </a:r>
+          </a:p>
+          <a:p>
+            <a:pPr algn="r" rtl="1"/>
+            <a:r>
+              <a:rPr lang="he-IL" b="1" dirty="0"/>
+              <a:t>שליחת הנתונים ובקרה </a:t>
+            </a:r>
+          </a:p>
+          <a:p>
+            <a:pPr algn="r" rtl="1"/>
+            <a:r>
+              <a:rPr lang="en-US" dirty="0" err="1"/>
+              <a:t>In_display_area</a:t>
+            </a:r>
+            <a:r>
+              <a:rPr lang="he-IL" dirty="0"/>
+              <a:t>: דגל לוגי המציין שאנחנו נמצאים בתוך האזור תצוגה הפעיל(כאשר הדגל פעיל)</a:t>
+            </a:r>
+          </a:p>
+          <a:p>
+            <a:pPr algn="r" rtl="1"/>
+            <a:r>
+              <a:rPr lang="en-US" dirty="0"/>
+              <a:t> :</a:t>
+            </a:r>
+            <a:r>
+              <a:rPr lang="en-US" dirty="0" err="1"/>
+              <a:t>Pxl_data_reg</a:t>
+            </a:r>
+            <a:r>
+              <a:rPr lang="he-IL" dirty="0"/>
+              <a:t>רגיסטר הדגימה שאחראי על ייצוב הנתונים שנשלפים מהזיכרון(שהוא א סינכרוני),ולמנוע </a:t>
+            </a:r>
+            <a:r>
+              <a:rPr lang="he-IL" dirty="0" err="1"/>
+              <a:t>גליצים</a:t>
+            </a:r>
+            <a:r>
+              <a:rPr lang="he-IL" dirty="0"/>
+              <a:t> </a:t>
+            </a:r>
+            <a:r>
+              <a:rPr lang="he-IL" dirty="0" err="1"/>
+              <a:t>וכו</a:t>
+            </a:r>
+            <a:endParaRPr lang="he-IL" dirty="0"/>
+          </a:p>
+          <a:p>
+            <a:pPr algn="r" rtl="1"/>
+            <a:r>
+              <a:rPr lang="en-US" dirty="0" err="1"/>
+              <a:t>In_display_area_delayed</a:t>
+            </a:r>
+            <a:r>
+              <a:rPr lang="he-IL" dirty="0"/>
+              <a:t>: כמו הדגל </a:t>
+            </a:r>
+            <a:r>
+              <a:rPr lang="he-IL" dirty="0" err="1"/>
+              <a:t>למעלה,רק</a:t>
+            </a:r>
+            <a:r>
+              <a:rPr lang="he-IL" dirty="0"/>
+              <a:t> מושהה במחזור </a:t>
+            </a:r>
+            <a:r>
+              <a:rPr lang="he-IL" dirty="0" err="1"/>
+              <a:t>אחד,בגלל</a:t>
+            </a:r>
+            <a:r>
+              <a:rPr lang="he-IL" dirty="0"/>
+              <a:t> העיקוב שמיוצר </a:t>
+            </a:r>
+            <a:r>
+              <a:rPr lang="he-IL" dirty="0" err="1"/>
+              <a:t>מרגיסר</a:t>
+            </a:r>
+            <a:r>
+              <a:rPr lang="he-IL" dirty="0"/>
+              <a:t> הדגימה</a:t>
+            </a:r>
+          </a:p>
+          <a:p>
+            <a:pPr algn="r" rtl="1"/>
+            <a:r>
+              <a:rPr lang="he-IL" b="1" dirty="0"/>
+              <a:t>יציאות פיזיות</a:t>
+            </a:r>
+          </a:p>
+          <a:p>
+            <a:pPr algn="r" rtl="1"/>
+            <a:r>
+              <a:rPr lang="en-US" dirty="0"/>
+              <a:t>VGA VGA_G VGA_B</a:t>
+            </a:r>
+            <a:r>
+              <a:rPr lang="he-IL" dirty="0"/>
+              <a:t>ֹ_</a:t>
+            </a:r>
+            <a:r>
+              <a:rPr lang="en-US" dirty="0"/>
+              <a:t>   :R</a:t>
+            </a:r>
+            <a:r>
+              <a:rPr lang="he-IL" dirty="0"/>
+              <a:t>אותות ערוצי הצבע שמנותבים מהרגיסטר </a:t>
+            </a:r>
+            <a:r>
+              <a:rPr lang="he-IL" dirty="0" err="1"/>
+              <a:t>דגימה,ישירות</a:t>
+            </a:r>
+            <a:r>
+              <a:rPr lang="he-IL" dirty="0"/>
+              <a:t> אל הפינים הפיזיים</a:t>
+            </a:r>
+          </a:p>
+          <a:p>
+            <a:pPr algn="r" rtl="1"/>
+            <a:r>
+              <a:rPr lang="he-IL" dirty="0"/>
+              <a:t>של המסך(ניתן לראות זאת מפורש בדגימה </a:t>
+            </a:r>
+            <a:r>
+              <a:rPr lang="he-IL" dirty="0" err="1"/>
+              <a:t>באקסה</a:t>
+            </a:r>
+            <a:r>
+              <a:rPr lang="he-IL" dirty="0"/>
+              <a:t>)</a:t>
+            </a:r>
+          </a:p>
+          <a:p>
+            <a:pPr algn="r" rtl="1"/>
+            <a:r>
+              <a:rPr lang="en-US" dirty="0"/>
+              <a:t>VGA</a:t>
+            </a:r>
+            <a:r>
+              <a:rPr lang="he-IL" dirty="0"/>
+              <a:t>_</a:t>
+            </a:r>
+            <a:r>
+              <a:rPr lang="en-US" dirty="0"/>
+              <a:t>HS</a:t>
+            </a:r>
+            <a:r>
+              <a:rPr lang="he-IL" dirty="0"/>
+              <a:t>_</a:t>
+            </a:r>
+            <a:r>
+              <a:rPr lang="en-US" dirty="0"/>
+              <a:t>O</a:t>
+            </a:r>
+            <a:r>
+              <a:rPr lang="he-IL" dirty="0"/>
+              <a:t> ,</a:t>
+            </a:r>
+            <a:r>
+              <a:rPr lang="en-US" dirty="0"/>
+              <a:t>VGA</a:t>
+            </a:r>
+            <a:r>
+              <a:rPr lang="he-IL" dirty="0"/>
+              <a:t>_</a:t>
+            </a:r>
+            <a:r>
+              <a:rPr lang="en-US" dirty="0"/>
+              <a:t>VS</a:t>
+            </a:r>
+            <a:r>
+              <a:rPr lang="he-IL" dirty="0"/>
+              <a:t>_</a:t>
+            </a:r>
+            <a:r>
+              <a:rPr lang="en-US" dirty="0"/>
+              <a:t>  :O</a:t>
+            </a:r>
+            <a:r>
+              <a:rPr lang="he-IL" dirty="0"/>
+              <a:t>פולסי סנכרון </a:t>
+            </a:r>
+            <a:r>
+              <a:rPr lang="he-IL" dirty="0" err="1"/>
+              <a:t>ןאנכי</a:t>
+            </a:r>
+            <a:r>
+              <a:rPr lang="he-IL" dirty="0"/>
+              <a:t> ואופקי שנשלחים </a:t>
+            </a:r>
+            <a:r>
+              <a:rPr lang="he-IL" dirty="0" err="1"/>
+              <a:t>החוצה,עבור</a:t>
+            </a:r>
+            <a:r>
+              <a:rPr lang="he-IL" dirty="0"/>
+              <a:t> ניהול התזמונים של המסך</a:t>
+            </a:r>
+          </a:p>
+        </p:txBody>
+      </p:sp>
+    </p:spTree>
+    <p:extLst>
+      <p:ext uri="{BB962C8B-B14F-4D97-AF65-F5344CB8AC3E}">
+        <p14:creationId xmlns:p14="http://schemas.microsoft.com/office/powerpoint/2010/main" val="669765589"/>
+      </p:ext>
+    </p:extLst>
+  </p:cSld>
+  <p:clrMapOvr>
+    <a:masterClrMapping/>
+  </p:clrMapOvr>
+</p:sld>
+</file>
+
+<file path=ppt/slides/slide8.xml><?xml version="1.0" encoding="utf-8"?>
+<p:sld xmlns:a="http://schemas.openxmlformats.org/drawingml/2006/main" xmlns:r="http://schemas.openxmlformats.org/officeDocument/2006/relationships" xmlns:p="http://schemas.openxmlformats.org/presentationml/2006/main">
+  <p:cSld>
+    <p:spTree>
+      <p:nvGrpSpPr>
+        <p:cNvPr id="1" name=""/>
+        <p:cNvGrpSpPr/>
+        <p:nvPr/>
+      </p:nvGrpSpPr>
+      <p:grpSpPr>
+        <a:xfrm>
+          <a:off x="0" y="0"/>
+          <a:ext cx="0" cy="0"/>
+          <a:chOff x="0" y="0"/>
+          <a:chExt cx="0" cy="0"/>
+        </a:xfrm>
+      </p:grpSpPr>
+      <p:sp>
+        <p:nvSpPr>
           <p:cNvPr id="2" name="Title 1"/>
           <p:cNvSpPr>
             <a:spLocks noGrp="1"/>
@@ -16726,15 +16846,15 @@
             </a:r>
             <a:r>
               <a:rPr dirty="0"/>
-              <a:t> ל-RGB </a:t>
-            </a:r>
-            <a:r>
-              <a:rPr dirty="0" err="1"/>
-              <a:t>ומנגנון</a:t>
-            </a:r>
-            <a:r>
-              <a:rPr dirty="0"/>
-              <a:t> ה-Blanking</a:t>
+              <a:t> </a:t>
+            </a:r>
+            <a:r>
+              <a:rPr lang="he-IL" dirty="0"/>
+              <a:t>ל</a:t>
+            </a:r>
+            <a:r>
+              <a:rPr dirty="0"/>
+              <a:t>RGB</a:t>
             </a:r>
           </a:p>
         </p:txBody>
@@ -16747,7 +16867,7 @@
         </p:nvSpPr>
         <p:spPr>
           <a:xfrm>
-            <a:off x="173420" y="1164334"/>
+            <a:off x="285831" y="1089898"/>
             <a:ext cx="8628993" cy="2339102"/>
           </a:xfrm>
           <a:prstGeom prst="rect">
@@ -17162,22 +17282,27 @@
       </p:sp>
       <p:pic>
         <p:nvPicPr>
-          <p:cNvPr id="4" name="Picture 3" descr="vga_rgb_video_on_logic.png"/>
+          <p:cNvPr id="6" name="תמונה 5">
+            <a:extLst>
+              <a:ext uri="{FF2B5EF4-FFF2-40B4-BE49-F238E27FC236}">
+                <a16:creationId xmlns:a16="http://schemas.microsoft.com/office/drawing/2014/main" id="{FDE92B07-D836-457E-A416-FB1EAF327061}"/>
+              </a:ext>
+            </a:extLst>
+          </p:cNvPr>
           <p:cNvPicPr>
             <a:picLocks noChangeAspect="1"/>
           </p:cNvPicPr>
           <p:nvPr/>
         </p:nvPicPr>
-        <p:blipFill>
+        <p:blipFill rotWithShape="1">
           <a:blip r:embed="rId2"/>
-          <a:stretch>
-            <a:fillRect/>
-          </a:stretch>
+          <a:srcRect t="22678" r="3659" b="17053"/>
+          <a:stretch/>
         </p:blipFill>
         <p:spPr>
           <a:xfrm>
-            <a:off x="1350579" y="3646401"/>
-            <a:ext cx="6290441" cy="2982281"/>
+            <a:off x="330436" y="3514587"/>
+            <a:ext cx="8628993" cy="3254203"/>
           </a:xfrm>
           <a:prstGeom prst="rect">
             <a:avLst/>
@@ -17192,7 +17317,7 @@
 </p:sld>
 </file>
 
-<file path=ppt/slides/slide8.xml><?xml version="1.0" encoding="utf-8"?>
+<file path=ppt/slides/slide9.xml><?xml version="1.0" encoding="utf-8"?>
 <p:sld xmlns:a="http://schemas.openxmlformats.org/drawingml/2006/main" xmlns:r="http://schemas.openxmlformats.org/officeDocument/2006/relationships" xmlns:p="http://schemas.openxmlformats.org/presentationml/2006/main">
   <p:cSld>
     <p:spTree>
@@ -17540,7 +17665,7 @@
         </p:blipFill>
         <p:spPr>
           <a:xfrm>
-            <a:off x="1738954" y="3429000"/>
+            <a:off x="1190435" y="3305908"/>
             <a:ext cx="2785056" cy="3277456"/>
           </a:xfrm>
           <a:prstGeom prst="rect">
@@ -17625,682 +17750,6 @@
               <a:t>D TO A</a:t>
             </a:r>
             <a:endParaRPr lang="he-IL" dirty="0"/>
-          </a:p>
-        </p:txBody>
-      </p:sp>
-    </p:spTree>
-  </p:cSld>
-  <p:clrMapOvr>
-    <a:masterClrMapping/>
-  </p:clrMapOvr>
-</p:sld>
-</file>
-
-<file path=ppt/slides/slide9.xml><?xml version="1.0" encoding="utf-8"?>
-<p:sld xmlns:a="http://schemas.openxmlformats.org/drawingml/2006/main" xmlns:r="http://schemas.openxmlformats.org/officeDocument/2006/relationships" xmlns:p="http://schemas.openxmlformats.org/presentationml/2006/main">
-  <p:cSld>
-    <p:spTree>
-      <p:nvGrpSpPr>
-        <p:cNvPr id="1" name=""/>
-        <p:cNvGrpSpPr/>
-        <p:nvPr/>
-      </p:nvGrpSpPr>
-      <p:grpSpPr>
-        <a:xfrm>
-          <a:off x="0" y="0"/>
-          <a:ext cx="0" cy="0"/>
-          <a:chOff x="0" y="0"/>
-          <a:chExt cx="0" cy="0"/>
-        </a:xfrm>
-      </p:grpSpPr>
-      <p:sp>
-        <p:nvSpPr>
-          <p:cNvPr id="2" name="Title 1"/>
-          <p:cNvSpPr>
-            <a:spLocks noGrp="1"/>
-          </p:cNvSpPr>
-          <p:nvPr>
-            <p:ph type="title"/>
-          </p:nvPr>
-        </p:nvSpPr>
-        <p:spPr>
-          <a:xfrm>
-            <a:off x="457200" y="-96723"/>
-            <a:ext cx="8229599" cy="809297"/>
-          </a:xfrm>
-        </p:spPr>
-        <p:txBody>
-          <a:bodyPr>
-            <a:normAutofit/>
-          </a:bodyPr>
-          <a:lstStyle/>
-          <a:p>
-            <a:pPr algn="ctr" rtl="1"/>
-            <a:r>
-              <a:rPr lang="he-IL" dirty="0"/>
-              <a:t>משקלי הביטים:</a:t>
-            </a:r>
-            <a:endParaRPr dirty="0"/>
-          </a:p>
-        </p:txBody>
-      </p:sp>
-      <p:sp>
-        <p:nvSpPr>
-          <p:cNvPr id="3" name="TextBox 2"/>
-          <p:cNvSpPr txBox="1"/>
-          <p:nvPr/>
-        </p:nvSpPr>
-        <p:spPr>
-          <a:xfrm>
-            <a:off x="640694" y="231340"/>
-            <a:ext cx="8229598" cy="3077766"/>
-          </a:xfrm>
-          <a:prstGeom prst="rect">
-            <a:avLst/>
-          </a:prstGeom>
-          <a:noFill/>
-        </p:spPr>
-        <p:txBody>
-          <a:bodyPr wrap="square">
-            <a:spAutoFit/>
-          </a:bodyPr>
-          <a:lstStyle/>
-          <a:p>
-            <a:endParaRPr dirty="0"/>
-          </a:p>
-          <a:p>
-            <a:pPr algn="r" rtl="1">
-              <a:defRPr sz="1600"/>
-            </a:pPr>
-            <a:r>
-              <a:rPr lang="he-IL" dirty="0"/>
-              <a:t>• משקל פיזי לכל ביט</a:t>
-            </a:r>
-          </a:p>
-          <a:p>
-            <a:pPr algn="r" rtl="1">
-              <a:defRPr sz="1600"/>
-            </a:pPr>
-            <a:r>
-              <a:rPr lang="en-US" dirty="0"/>
-              <a:t> MSB  </a:t>
-            </a:r>
-            <a:r>
-              <a:rPr lang="he-IL" dirty="0"/>
-              <a:t>לעומת </a:t>
-            </a:r>
-            <a:r>
-              <a:rPr lang="en-US" dirty="0"/>
-              <a:t>LSB</a:t>
-            </a:r>
-            <a:r>
-              <a:rPr lang="he-IL" dirty="0"/>
-              <a:t> :</a:t>
-            </a:r>
-            <a:endParaRPr lang="en-US" dirty="0"/>
-          </a:p>
-          <a:p>
-            <a:pPr algn="r" rtl="1">
-              <a:defRPr sz="1600"/>
-            </a:pPr>
-            <a:r>
-              <a:rPr lang="en-US" dirty="0"/>
-              <a:t>  </a:t>
-            </a:r>
-            <a:r>
-              <a:rPr lang="he-IL" dirty="0"/>
-              <a:t>הביט המשמעותי ביותר (</a:t>
-            </a:r>
-            <a:r>
-              <a:rPr lang="en-US" dirty="0" err="1"/>
-              <a:t>msb</a:t>
-            </a:r>
-            <a:r>
-              <a:rPr lang="he-IL" dirty="0"/>
-              <a:t>)מחובר לנגד הקטן ביותר, ולכן מזרים את הזרם הגדול ביותר למעגל        ומשפיע משמעותית על עוצמת הצבע,</a:t>
-            </a:r>
-          </a:p>
-          <a:p>
-            <a:pPr algn="r" rtl="1">
-              <a:defRPr sz="1600"/>
-            </a:pPr>
-            <a:r>
-              <a:rPr dirty="0"/>
-              <a:t> </a:t>
-            </a:r>
-            <a:r>
-              <a:rPr lang="he-IL" dirty="0"/>
-              <a:t>  </a:t>
-            </a:r>
-            <a:r>
-              <a:rPr dirty="0" err="1"/>
-              <a:t>לעומתו</a:t>
-            </a:r>
-            <a:r>
-              <a:rPr dirty="0"/>
-              <a:t>, </a:t>
-            </a:r>
-            <a:r>
-              <a:rPr dirty="0" err="1"/>
-              <a:t>הביט</a:t>
-            </a:r>
-            <a:r>
-              <a:rPr dirty="0"/>
-              <a:t> </a:t>
-            </a:r>
-            <a:r>
-              <a:rPr dirty="0" err="1"/>
-              <a:t>הפחות</a:t>
-            </a:r>
-            <a:r>
-              <a:rPr dirty="0"/>
-              <a:t> </a:t>
-            </a:r>
-            <a:r>
-              <a:rPr dirty="0" err="1"/>
-              <a:t>משמעותי</a:t>
-            </a:r>
-            <a:r>
-              <a:rPr dirty="0"/>
-              <a:t> (LSB) </a:t>
-            </a:r>
-            <a:r>
-              <a:rPr dirty="0" err="1"/>
-              <a:t>מחובר</a:t>
-            </a:r>
-            <a:r>
-              <a:rPr dirty="0"/>
-              <a:t> </a:t>
-            </a:r>
-            <a:r>
-              <a:rPr dirty="0" err="1"/>
-              <a:t>לנגד</a:t>
-            </a:r>
-            <a:r>
-              <a:rPr dirty="0"/>
-              <a:t> </a:t>
-            </a:r>
-            <a:r>
-              <a:rPr dirty="0" err="1"/>
-              <a:t>הגדול</a:t>
-            </a:r>
-            <a:r>
-              <a:rPr dirty="0"/>
-              <a:t> </a:t>
-            </a:r>
-            <a:r>
-              <a:rPr dirty="0" err="1"/>
-              <a:t>ביותר</a:t>
-            </a:r>
-            <a:r>
-              <a:rPr dirty="0"/>
-              <a:t> </a:t>
-            </a:r>
-            <a:r>
-              <a:rPr dirty="0" err="1"/>
-              <a:t>בסולם</a:t>
-            </a:r>
-            <a:endParaRPr lang="he-IL" dirty="0"/>
-          </a:p>
-          <a:p>
-            <a:pPr algn="r" rtl="1">
-              <a:defRPr sz="1600"/>
-            </a:pPr>
-            <a:r>
-              <a:rPr lang="he-IL" dirty="0"/>
-              <a:t>  ו</a:t>
-            </a:r>
-            <a:r>
-              <a:rPr dirty="0" err="1"/>
-              <a:t>תרומתו</a:t>
-            </a:r>
-            <a:r>
-              <a:rPr dirty="0"/>
-              <a:t> </a:t>
-            </a:r>
-            <a:r>
-              <a:rPr dirty="0" err="1"/>
-              <a:t>לזרם</a:t>
-            </a:r>
-            <a:r>
-              <a:rPr dirty="0"/>
-              <a:t> </a:t>
-            </a:r>
-            <a:r>
-              <a:rPr dirty="0" err="1"/>
-              <a:t>הכולל</a:t>
-            </a:r>
-            <a:r>
-              <a:rPr dirty="0"/>
-              <a:t> </a:t>
-            </a:r>
-            <a:r>
-              <a:rPr dirty="0" err="1"/>
-              <a:t>היא</a:t>
-            </a:r>
-            <a:r>
-              <a:rPr dirty="0"/>
-              <a:t> </a:t>
-            </a:r>
-            <a:r>
-              <a:rPr dirty="0" err="1"/>
-              <a:t>מזערית</a:t>
-            </a:r>
-            <a:r>
-              <a:rPr dirty="0"/>
-              <a:t> </a:t>
-            </a:r>
-            <a:r>
-              <a:rPr dirty="0" err="1"/>
-              <a:t>ונועדה</a:t>
-            </a:r>
-            <a:r>
-              <a:rPr dirty="0"/>
-              <a:t> </a:t>
-            </a:r>
-            <a:r>
-              <a:rPr dirty="0" err="1"/>
-              <a:t>לכוונון</a:t>
-            </a:r>
-            <a:r>
-              <a:rPr dirty="0"/>
-              <a:t> </a:t>
-            </a:r>
-            <a:r>
-              <a:rPr dirty="0" err="1"/>
-              <a:t>עדין</a:t>
-            </a:r>
-            <a:r>
-              <a:rPr dirty="0"/>
-              <a:t> </a:t>
-            </a:r>
-            <a:r>
-              <a:rPr dirty="0" err="1"/>
-              <a:t>של</a:t>
-            </a:r>
-            <a:r>
-              <a:rPr dirty="0"/>
-              <a:t> </a:t>
-            </a:r>
-            <a:r>
-              <a:rPr dirty="0" err="1"/>
-              <a:t>הגוון</a:t>
-            </a:r>
-            <a:r>
-              <a:rPr dirty="0"/>
-              <a:t>.</a:t>
-            </a:r>
-          </a:p>
-          <a:p>
-            <a:pPr algn="r" rtl="1">
-              <a:defRPr sz="1600"/>
-            </a:pPr>
-            <a:r>
-              <a:rPr dirty="0"/>
-              <a:t>• </a:t>
-            </a:r>
-            <a:r>
-              <a:rPr dirty="0" err="1"/>
-              <a:t>סכימה</a:t>
-            </a:r>
-            <a:r>
-              <a:rPr dirty="0"/>
-              <a:t> </a:t>
-            </a:r>
-            <a:r>
-              <a:rPr dirty="0" err="1"/>
-              <a:t>אנלוגית</a:t>
-            </a:r>
-            <a:r>
-              <a:rPr dirty="0"/>
-              <a:t> </a:t>
-            </a:r>
-            <a:r>
-              <a:rPr dirty="0" err="1"/>
-              <a:t>על</a:t>
-            </a:r>
-            <a:r>
-              <a:rPr dirty="0"/>
-              <a:t> </a:t>
-            </a:r>
-            <a:r>
-              <a:rPr dirty="0" err="1"/>
-              <a:t>המסך</a:t>
-            </a:r>
-            <a:r>
-              <a:rPr dirty="0"/>
-              <a:t>: </a:t>
-            </a:r>
-            <a:endParaRPr lang="he-IL" dirty="0"/>
-          </a:p>
-          <a:p>
-            <a:pPr algn="r" rtl="1">
-              <a:defRPr sz="1600"/>
-            </a:pPr>
-            <a:r>
-              <a:rPr dirty="0" err="1"/>
-              <a:t>כל</a:t>
-            </a:r>
-            <a:r>
-              <a:rPr dirty="0"/>
-              <a:t> </a:t>
-            </a:r>
-            <a:r>
-              <a:rPr dirty="0" err="1"/>
-              <a:t>הזרמים</a:t>
-            </a:r>
-            <a:r>
-              <a:rPr dirty="0"/>
-              <a:t> </a:t>
-            </a:r>
-            <a:r>
-              <a:rPr dirty="0" err="1"/>
-              <a:t>מהביטים</a:t>
-            </a:r>
-            <a:r>
-              <a:rPr dirty="0"/>
-              <a:t> </a:t>
-            </a:r>
-            <a:r>
-              <a:rPr dirty="0" err="1"/>
-              <a:t>הפעילים</a:t>
-            </a:r>
-            <a:r>
-              <a:rPr dirty="0"/>
-              <a:t> ('1') </a:t>
-            </a:r>
-            <a:r>
-              <a:rPr dirty="0" err="1"/>
-              <a:t>מתחברים</a:t>
-            </a:r>
-            <a:r>
-              <a:rPr dirty="0"/>
-              <a:t> </a:t>
-            </a:r>
-            <a:r>
-              <a:rPr dirty="0" err="1"/>
-              <a:t>וזורמים</a:t>
-            </a:r>
-            <a:r>
-              <a:rPr dirty="0"/>
-              <a:t> </a:t>
-            </a:r>
-            <a:r>
-              <a:rPr dirty="0" err="1"/>
-              <a:t>יחד</a:t>
-            </a:r>
-            <a:r>
-              <a:rPr dirty="0"/>
-              <a:t> </a:t>
-            </a:r>
-            <a:r>
-              <a:rPr dirty="0" err="1"/>
-              <a:t>דרך</a:t>
-            </a:r>
-            <a:r>
-              <a:rPr dirty="0"/>
-              <a:t> </a:t>
-            </a:r>
-            <a:r>
-              <a:rPr dirty="0" err="1"/>
-              <a:t>נגד</a:t>
-            </a:r>
-            <a:r>
-              <a:rPr dirty="0"/>
-              <a:t> </a:t>
-            </a:r>
-            <a:r>
-              <a:rPr dirty="0" err="1"/>
-              <a:t>הסיומת</a:t>
-            </a:r>
-            <a:r>
-              <a:rPr dirty="0"/>
-              <a:t> </a:t>
-            </a:r>
-            <a:r>
-              <a:rPr dirty="0" err="1"/>
-              <a:t>של</a:t>
-            </a:r>
-            <a:r>
-              <a:rPr dirty="0"/>
-              <a:t> </a:t>
-            </a:r>
-            <a:r>
-              <a:rPr dirty="0" err="1"/>
-              <a:t>המסך</a:t>
-            </a:r>
-            <a:r>
-              <a:rPr dirty="0"/>
-              <a:t> (75Ω) </a:t>
-            </a:r>
-            <a:r>
-              <a:rPr dirty="0" err="1"/>
-              <a:t>אל</a:t>
-            </a:r>
-            <a:r>
-              <a:rPr dirty="0"/>
-              <a:t> </a:t>
-            </a:r>
-            <a:r>
-              <a:rPr dirty="0" err="1"/>
-              <a:t>האדמה</a:t>
-            </a:r>
-            <a:r>
-              <a:rPr dirty="0"/>
-              <a:t>. </a:t>
-            </a:r>
-            <a:r>
-              <a:rPr dirty="0" err="1"/>
-              <a:t>כך</a:t>
-            </a:r>
-            <a:r>
-              <a:rPr dirty="0"/>
-              <a:t> </a:t>
-            </a:r>
-            <a:r>
-              <a:rPr dirty="0" err="1"/>
-              <a:t>נוצר</a:t>
-            </a:r>
-            <a:r>
-              <a:rPr dirty="0"/>
-              <a:t> </a:t>
-            </a:r>
-            <a:r>
-              <a:rPr dirty="0" err="1"/>
-              <a:t>מחלק</a:t>
-            </a:r>
-            <a:r>
-              <a:rPr dirty="0"/>
-              <a:t> </a:t>
-            </a:r>
-            <a:r>
-              <a:rPr dirty="0" err="1"/>
-              <a:t>מתח</a:t>
-            </a:r>
-            <a:r>
-              <a:rPr dirty="0"/>
-              <a:t> </a:t>
-            </a:r>
-            <a:r>
-              <a:rPr dirty="0" err="1"/>
-              <a:t>דינמי</a:t>
-            </a:r>
-            <a:r>
-              <a:rPr dirty="0"/>
-              <a:t> </a:t>
-            </a:r>
-            <a:r>
-              <a:rPr dirty="0" err="1"/>
-              <a:t>המפיק</a:t>
-            </a:r>
-            <a:r>
-              <a:rPr dirty="0"/>
-              <a:t> 0V </a:t>
-            </a:r>
-            <a:r>
-              <a:rPr dirty="0" err="1"/>
-              <a:t>עד</a:t>
-            </a:r>
-            <a:r>
-              <a:rPr dirty="0"/>
-              <a:t> </a:t>
-            </a:r>
-            <a:r>
-              <a:rPr lang="en-US" dirty="0"/>
-              <a:t>3.3</a:t>
-            </a:r>
-            <a:r>
-              <a:rPr dirty="0"/>
-              <a:t>V</a:t>
-            </a:r>
-            <a:r>
-              <a:rPr lang="he-IL" dirty="0"/>
-              <a:t>.</a:t>
-            </a:r>
-            <a:endParaRPr lang="en-US" dirty="0"/>
-          </a:p>
-          <a:p>
-            <a:pPr algn="r" rtl="1">
-              <a:defRPr sz="1600"/>
-            </a:pPr>
-            <a:endParaRPr lang="en-US" dirty="0"/>
-          </a:p>
-          <a:p>
-            <a:pPr algn="r" rtl="1">
-              <a:defRPr sz="1600"/>
-            </a:pPr>
-            <a:r>
-              <a:rPr lang="he-IL" dirty="0"/>
-              <a:t>מימין בצבע כחול מיוצג החיבור הפיזי במסך ,משמאל מיוצג החיבור בלוח ה</a:t>
-            </a:r>
-            <a:r>
-              <a:rPr lang="en-US" dirty="0"/>
-              <a:t>FPGA</a:t>
-            </a:r>
-            <a:endParaRPr dirty="0"/>
-          </a:p>
-        </p:txBody>
-      </p:sp>
-      <p:pic>
-        <p:nvPicPr>
-          <p:cNvPr id="4" name="Picture 3" descr="vga_voltage_divider_dac.png"/>
-          <p:cNvPicPr>
-            <a:picLocks noChangeAspect="1"/>
-          </p:cNvPicPr>
-          <p:nvPr/>
-        </p:nvPicPr>
-        <p:blipFill rotWithShape="1">
-          <a:blip r:embed="rId2"/>
-          <a:srcRect t="10239" b="6031"/>
-          <a:stretch/>
-        </p:blipFill>
-        <p:spPr>
-          <a:xfrm>
-            <a:off x="2472121" y="3330901"/>
-            <a:ext cx="4566744" cy="3043511"/>
-          </a:xfrm>
-          <a:prstGeom prst="rect">
-            <a:avLst/>
-          </a:prstGeom>
-        </p:spPr>
-      </p:pic>
-      <p:sp>
-        <p:nvSpPr>
-          <p:cNvPr id="5" name="Rectangle 5">
-            <a:extLst>
-              <a:ext uri="{FF2B5EF4-FFF2-40B4-BE49-F238E27FC236}">
-                <a16:creationId xmlns:a16="http://schemas.microsoft.com/office/drawing/2014/main" id="{25C6F1A3-CEA7-43DA-BE32-B9A50E2F2E7C}"/>
-              </a:ext>
-            </a:extLst>
-          </p:cNvPr>
-          <p:cNvSpPr/>
-          <p:nvPr/>
-        </p:nvSpPr>
-        <p:spPr>
-          <a:xfrm>
-            <a:off x="5559620" y="3244573"/>
-            <a:ext cx="1886958" cy="3156116"/>
-          </a:xfrm>
-          <a:prstGeom prst="rect">
-            <a:avLst/>
-          </a:prstGeom>
-          <a:noFill/>
-          <a:ln w="50800">
-            <a:solidFill>
-              <a:srgbClr val="0070C0"/>
-            </a:solidFill>
-          </a:ln>
-        </p:spPr>
-        <p:style>
-          <a:lnRef idx="1">
-            <a:schemeClr val="accent1"/>
-          </a:lnRef>
-          <a:fillRef idx="3">
-            <a:schemeClr val="accent1"/>
-          </a:fillRef>
-          <a:effectRef idx="2">
-            <a:schemeClr val="accent1"/>
-          </a:effectRef>
-          <a:fontRef idx="minor">
-            <a:schemeClr val="lt1"/>
-          </a:fontRef>
-        </p:style>
-        <p:txBody>
-          <a:bodyPr rtlCol="0" anchor="ctr"/>
-          <a:lstStyle/>
-          <a:p>
-            <a:pPr algn="ctr"/>
-            <a:endParaRPr/>
-          </a:p>
-        </p:txBody>
-      </p:sp>
-      <p:sp>
-        <p:nvSpPr>
-          <p:cNvPr id="6" name="Rectangle 4">
-            <a:extLst>
-              <a:ext uri="{FF2B5EF4-FFF2-40B4-BE49-F238E27FC236}">
-                <a16:creationId xmlns:a16="http://schemas.microsoft.com/office/drawing/2014/main" id="{73D7872E-440C-47D3-9128-B0BE4AC00DBD}"/>
-              </a:ext>
-            </a:extLst>
-          </p:cNvPr>
-          <p:cNvSpPr/>
-          <p:nvPr/>
-        </p:nvSpPr>
-        <p:spPr>
-          <a:xfrm>
-            <a:off x="2879834" y="3244573"/>
-            <a:ext cx="2396007" cy="3156116"/>
-          </a:xfrm>
-          <a:prstGeom prst="rect">
-            <a:avLst/>
-          </a:prstGeom>
-          <a:noFill/>
-          <a:ln w="38100">
-            <a:solidFill>
-              <a:srgbClr val="FF0000"/>
-            </a:solidFill>
-          </a:ln>
-        </p:spPr>
-        <p:style>
-          <a:lnRef idx="1">
-            <a:schemeClr val="accent1"/>
-          </a:lnRef>
-          <a:fillRef idx="3">
-            <a:schemeClr val="accent1"/>
-          </a:fillRef>
-          <a:effectRef idx="2">
-            <a:schemeClr val="accent1"/>
-          </a:effectRef>
-          <a:fontRef idx="minor">
-            <a:schemeClr val="lt1"/>
-          </a:fontRef>
-        </p:style>
-        <p:txBody>
-          <a:bodyPr rtlCol="0" anchor="ctr"/>
-          <a:lstStyle/>
-          <a:p>
-            <a:pPr algn="ctr"/>
-            <a:endParaRPr/>
           </a:p>
         </p:txBody>
       </p:sp>

--- a/docs/presentation/output/VGA_Presentation_Yossi the rel deal.pptx
+++ b/docs/presentation/output/VGA_Presentation_Yossi the rel deal.pptx
@@ -5,7 +5,7 @@
     <p:sldMasterId id="2147483648" r:id="rId1"/>
   </p:sldMasterIdLst>
   <p:notesMasterIdLst>
-    <p:notesMasterId r:id="rId31"/>
+    <p:notesMasterId r:id="rId30"/>
   </p:notesMasterIdLst>
   <p:sldIdLst>
     <p:sldId id="256" r:id="rId2"/>
@@ -21,22 +21,21 @@
     <p:sldId id="267" r:id="rId12"/>
     <p:sldId id="268" r:id="rId13"/>
     <p:sldId id="269" r:id="rId14"/>
-    <p:sldId id="270" r:id="rId15"/>
-    <p:sldId id="271" r:id="rId16"/>
-    <p:sldId id="272" r:id="rId17"/>
-    <p:sldId id="273" r:id="rId18"/>
-    <p:sldId id="277" r:id="rId19"/>
-    <p:sldId id="276" r:id="rId20"/>
-    <p:sldId id="274" r:id="rId21"/>
-    <p:sldId id="275" r:id="rId22"/>
-    <p:sldId id="278" r:id="rId23"/>
-    <p:sldId id="279" r:id="rId24"/>
-    <p:sldId id="280" r:id="rId25"/>
-    <p:sldId id="287" r:id="rId26"/>
-    <p:sldId id="281" r:id="rId27"/>
-    <p:sldId id="282" r:id="rId28"/>
-    <p:sldId id="284" r:id="rId29"/>
-    <p:sldId id="286" r:id="rId30"/>
+    <p:sldId id="271" r:id="rId15"/>
+    <p:sldId id="272" r:id="rId16"/>
+    <p:sldId id="273" r:id="rId17"/>
+    <p:sldId id="277" r:id="rId18"/>
+    <p:sldId id="276" r:id="rId19"/>
+    <p:sldId id="274" r:id="rId20"/>
+    <p:sldId id="275" r:id="rId21"/>
+    <p:sldId id="278" r:id="rId22"/>
+    <p:sldId id="279" r:id="rId23"/>
+    <p:sldId id="280" r:id="rId24"/>
+    <p:sldId id="287" r:id="rId25"/>
+    <p:sldId id="281" r:id="rId26"/>
+    <p:sldId id="282" r:id="rId27"/>
+    <p:sldId id="284" r:id="rId28"/>
+    <p:sldId id="286" r:id="rId29"/>
   </p:sldIdLst>
   <p:sldSz cx="9144000" cy="6858000" type="screen4x3"/>
   <p:notesSz cx="6858000" cy="9144000"/>
@@ -236,7 +235,7 @@
           <a:p>
             <a:fld id="{07002FAE-C8C6-47A9-917F-069B340A5C16}" type="datetimeFigureOut">
               <a:rPr lang="he-IL" smtClean="0"/>
-              <a:t>ה'/אלול/תשפ"ו</a:t>
+              <a:t>ו'/אלול/תשפ"ו</a:t>
             </a:fld>
             <a:endParaRPr lang="he-IL"/>
           </a:p>
@@ -568,7 +567,7 @@
           <a:p>
             <a:fld id="{6BB60923-6C8D-45DF-8473-B9DD050EE40B}" type="slidenum">
               <a:rPr lang="he-IL" smtClean="0"/>
-              <a:t>21</a:t>
+              <a:t>20</a:t>
             </a:fld>
             <a:endParaRPr lang="he-IL"/>
           </a:p>
@@ -652,7 +651,7 @@
           <a:p>
             <a:fld id="{6BB60923-6C8D-45DF-8473-B9DD050EE40B}" type="slidenum">
               <a:rPr lang="he-IL" smtClean="0"/>
-              <a:t>25</a:t>
+              <a:t>24</a:t>
             </a:fld>
             <a:endParaRPr lang="he-IL"/>
           </a:p>
@@ -850,7 +849,7 @@
           <a:p>
             <a:fld id="{5BCAD085-E8A6-8845-BD4E-CB4CCA059FC4}" type="datetimeFigureOut">
               <a:rPr lang="en-US" smtClean="0"/>
-              <a:t>8/18/2026</a:t>
+              <a:t>8/19/2026</a:t>
             </a:fld>
             <a:endParaRPr lang="en-US"/>
           </a:p>
@@ -1018,7 +1017,7 @@
           <a:p>
             <a:fld id="{5BCAD085-E8A6-8845-BD4E-CB4CCA059FC4}" type="datetimeFigureOut">
               <a:rPr lang="en-US" smtClean="0"/>
-              <a:t>8/18/2026</a:t>
+              <a:t>8/19/2026</a:t>
             </a:fld>
             <a:endParaRPr lang="en-US"/>
           </a:p>
@@ -1196,7 +1195,7 @@
           <a:p>
             <a:fld id="{5BCAD085-E8A6-8845-BD4E-CB4CCA059FC4}" type="datetimeFigureOut">
               <a:rPr lang="en-US" smtClean="0"/>
-              <a:t>8/18/2026</a:t>
+              <a:t>8/19/2026</a:t>
             </a:fld>
             <a:endParaRPr lang="en-US"/>
           </a:p>
@@ -1364,7 +1363,7 @@
           <a:p>
             <a:fld id="{5BCAD085-E8A6-8845-BD4E-CB4CCA059FC4}" type="datetimeFigureOut">
               <a:rPr lang="en-US" smtClean="0"/>
-              <a:t>8/18/2026</a:t>
+              <a:t>8/19/2026</a:t>
             </a:fld>
             <a:endParaRPr lang="en-US"/>
           </a:p>
@@ -1609,7 +1608,7 @@
           <a:p>
             <a:fld id="{5BCAD085-E8A6-8845-BD4E-CB4CCA059FC4}" type="datetimeFigureOut">
               <a:rPr lang="en-US" smtClean="0"/>
-              <a:t>8/18/2026</a:t>
+              <a:t>8/19/2026</a:t>
             </a:fld>
             <a:endParaRPr lang="en-US"/>
           </a:p>
@@ -1894,7 +1893,7 @@
           <a:p>
             <a:fld id="{5BCAD085-E8A6-8845-BD4E-CB4CCA059FC4}" type="datetimeFigureOut">
               <a:rPr lang="en-US" smtClean="0"/>
-              <a:t>8/18/2026</a:t>
+              <a:t>8/19/2026</a:t>
             </a:fld>
             <a:endParaRPr lang="en-US"/>
           </a:p>
@@ -2313,7 +2312,7 @@
           <a:p>
             <a:fld id="{5BCAD085-E8A6-8845-BD4E-CB4CCA059FC4}" type="datetimeFigureOut">
               <a:rPr lang="en-US" smtClean="0"/>
-              <a:t>8/18/2026</a:t>
+              <a:t>8/19/2026</a:t>
             </a:fld>
             <a:endParaRPr lang="en-US"/>
           </a:p>
@@ -2430,7 +2429,7 @@
           <a:p>
             <a:fld id="{5BCAD085-E8A6-8845-BD4E-CB4CCA059FC4}" type="datetimeFigureOut">
               <a:rPr lang="en-US" smtClean="0"/>
-              <a:t>8/18/2026</a:t>
+              <a:t>8/19/2026</a:t>
             </a:fld>
             <a:endParaRPr lang="en-US"/>
           </a:p>
@@ -2525,7 +2524,7 @@
           <a:p>
             <a:fld id="{5BCAD085-E8A6-8845-BD4E-CB4CCA059FC4}" type="datetimeFigureOut">
               <a:rPr lang="en-US" smtClean="0"/>
-              <a:t>8/18/2026</a:t>
+              <a:t>8/19/2026</a:t>
             </a:fld>
             <a:endParaRPr lang="en-US"/>
           </a:p>
@@ -2800,7 +2799,7 @@
           <a:p>
             <a:fld id="{5BCAD085-E8A6-8845-BD4E-CB4CCA059FC4}" type="datetimeFigureOut">
               <a:rPr lang="en-US" smtClean="0"/>
-              <a:t>8/18/2026</a:t>
+              <a:t>8/19/2026</a:t>
             </a:fld>
             <a:endParaRPr lang="en-US"/>
           </a:p>
@@ -3052,7 +3051,7 @@
           <a:p>
             <a:fld id="{5BCAD085-E8A6-8845-BD4E-CB4CCA059FC4}" type="datetimeFigureOut">
               <a:rPr lang="en-US" smtClean="0"/>
-              <a:t>8/18/2026</a:t>
+              <a:t>8/19/2026</a:t>
             </a:fld>
             <a:endParaRPr lang="en-US"/>
           </a:p>
@@ -3263,7 +3262,7 @@
           <a:p>
             <a:fld id="{5BCAD085-E8A6-8845-BD4E-CB4CCA059FC4}" type="datetimeFigureOut">
               <a:rPr lang="en-US" smtClean="0"/>
-              <a:t>8/18/2026</a:t>
+              <a:t>8/19/2026</a:t>
             </a:fld>
             <a:endParaRPr lang="en-US"/>
           </a:p>
@@ -5473,7 +5472,7 @@
         <p:spPr>
           <a:xfrm>
             <a:off x="1103587" y="918604"/>
-            <a:ext cx="7703103" cy="2585323"/>
+            <a:ext cx="7703103" cy="2831544"/>
           </a:xfrm>
           <a:prstGeom prst="rect">
             <a:avLst/>
@@ -5622,15 +5621,15 @@
             </a:pPr>
             <a:r>
               <a:rPr lang="he-IL" dirty="0"/>
-              <a:t> ה</a:t>
+              <a:t> ה </a:t>
             </a:r>
             <a:r>
               <a:rPr lang="en-US" dirty="0"/>
-              <a:t>PLL</a:t>
-            </a:r>
-            <a:r>
-              <a:rPr lang="he-IL" dirty="0"/>
-              <a:t>מפיק תדר של 25</a:t>
+              <a:t>clk_wiz_0</a:t>
+            </a:r>
+            <a:r>
+              <a:rPr lang="he-IL" dirty="0"/>
+              <a:t> מפיק תדר של 25</a:t>
             </a:r>
             <a:r>
               <a:rPr lang="en-US" dirty="0"/>
@@ -5638,7 +5637,15 @@
             </a:r>
             <a:r>
               <a:rPr lang="he-IL" dirty="0"/>
-              <a:t>,המזין את בקר ה-</a:t>
+              <a:t>,</a:t>
+            </a:r>
+            <a:r>
+              <a:rPr lang="he-IL" dirty="0" err="1"/>
+              <a:t>אשרמזין</a:t>
+            </a:r>
+            <a:r>
+              <a:rPr lang="he-IL" dirty="0"/>
+              <a:t> את בקר ה-</a:t>
             </a:r>
             <a:r>
               <a:rPr lang="en-US" dirty="0"/>
@@ -5876,8 +5883,8 @@
         </p:blipFill>
         <p:spPr>
           <a:xfrm>
-            <a:off x="2722179" y="3484125"/>
-            <a:ext cx="4708635" cy="3099238"/>
+            <a:off x="2958353" y="3639575"/>
+            <a:ext cx="4472461" cy="2943788"/>
           </a:xfrm>
           <a:prstGeom prst="rect">
             <a:avLst/>
@@ -6575,320 +6582,6 @@
         </p:nvSpPr>
         <p:spPr>
           <a:xfrm>
-            <a:off x="457200" y="274638"/>
-            <a:ext cx="8686800" cy="822642"/>
-          </a:xfrm>
-        </p:spPr>
-        <p:txBody>
-          <a:bodyPr>
-            <a:normAutofit fontScale="90000"/>
-          </a:bodyPr>
-          <a:lstStyle/>
-          <a:p>
-            <a:pPr algn="ctr" rtl="1"/>
-            <a:r>
-              <a:rPr dirty="0" err="1"/>
-              <a:t>ממשק</a:t>
-            </a:r>
-            <a:r>
-              <a:rPr dirty="0"/>
-              <a:t> </a:t>
-            </a:r>
-            <a:r>
-              <a:rPr dirty="0" err="1"/>
-              <a:t>המצלמה</a:t>
-            </a:r>
-            <a:r>
-              <a:rPr lang="he-IL" dirty="0"/>
-              <a:t>,</a:t>
-            </a:r>
-            <a:r>
-              <a:rPr dirty="0"/>
-              <a:t> </a:t>
-            </a:r>
-            <a:r>
-              <a:rPr dirty="0" err="1"/>
-              <a:t>מהעולם</a:t>
-            </a:r>
-            <a:r>
-              <a:rPr dirty="0"/>
-              <a:t> </a:t>
-            </a:r>
-            <a:r>
-              <a:rPr dirty="0" err="1"/>
-              <a:t>הפיזי</a:t>
-            </a:r>
-            <a:r>
-              <a:rPr dirty="0"/>
-              <a:t> </a:t>
-            </a:r>
-            <a:r>
-              <a:rPr dirty="0" err="1"/>
-              <a:t>אל</a:t>
-            </a:r>
-            <a:r>
-              <a:rPr dirty="0"/>
-              <a:t> </a:t>
-            </a:r>
-            <a:r>
-              <a:rPr dirty="0" err="1"/>
-              <a:t>הזיכרון</a:t>
-            </a:r>
-            <a:endParaRPr dirty="0"/>
-          </a:p>
-        </p:txBody>
-      </p:sp>
-      <p:sp>
-        <p:nvSpPr>
-          <p:cNvPr id="3" name="TextBox 2"/>
-          <p:cNvSpPr txBox="1"/>
-          <p:nvPr/>
-        </p:nvSpPr>
-        <p:spPr>
-          <a:xfrm>
-            <a:off x="3392906" y="1097280"/>
-            <a:ext cx="8686800" cy="646331"/>
-          </a:xfrm>
-          <a:prstGeom prst="rect">
-            <a:avLst/>
-          </a:prstGeom>
-          <a:noFill/>
-        </p:spPr>
-        <p:txBody>
-          <a:bodyPr wrap="square">
-            <a:spAutoFit/>
-          </a:bodyPr>
-          <a:lstStyle/>
-          <a:p>
-            <a:r>
-              <a:rPr lang="he-IL" dirty="0"/>
-              <a:t>התקשורת בין המצלמה ללוח מחולקת לשני ערוצים מקבילים:</a:t>
-            </a:r>
-          </a:p>
-          <a:p>
-            <a:endParaRPr dirty="0"/>
-          </a:p>
-        </p:txBody>
-      </p:sp>
-      <p:pic>
-        <p:nvPicPr>
-          <p:cNvPr id="4" name="Picture 3" descr="camera_capture_flow.png.jpeg"/>
-          <p:cNvPicPr>
-            <a:picLocks noChangeAspect="1"/>
-          </p:cNvPicPr>
-          <p:nvPr/>
-        </p:nvPicPr>
-        <p:blipFill>
-          <a:blip r:embed="rId2"/>
-          <a:stretch>
-            <a:fillRect/>
-          </a:stretch>
-        </p:blipFill>
-        <p:spPr>
-          <a:xfrm>
-            <a:off x="3175686" y="3536688"/>
-            <a:ext cx="3855734" cy="3028781"/>
-          </a:xfrm>
-          <a:prstGeom prst="rect">
-            <a:avLst/>
-          </a:prstGeom>
-        </p:spPr>
-      </p:pic>
-      <p:sp>
-        <p:nvSpPr>
-          <p:cNvPr id="7" name="תיבת טקסט 6">
-            <a:extLst>
-              <a:ext uri="{FF2B5EF4-FFF2-40B4-BE49-F238E27FC236}">
-                <a16:creationId xmlns:a16="http://schemas.microsoft.com/office/drawing/2014/main" id="{8087304A-78FE-4B66-A4CF-6BC507A5CA47}"/>
-              </a:ext>
-            </a:extLst>
-          </p:cNvPr>
-          <p:cNvSpPr txBox="1"/>
-          <p:nvPr/>
-        </p:nvSpPr>
-        <p:spPr>
-          <a:xfrm>
-            <a:off x="0" y="1397675"/>
-            <a:ext cx="8916506" cy="2308324"/>
-          </a:xfrm>
-          <a:prstGeom prst="rect">
-            <a:avLst/>
-          </a:prstGeom>
-          <a:noFill/>
-        </p:spPr>
-        <p:txBody>
-          <a:bodyPr wrap="square" rtlCol="1">
-            <a:spAutoFit/>
-          </a:bodyPr>
-          <a:lstStyle/>
-          <a:p>
-            <a:pPr algn="r" rtl="1"/>
-            <a:r>
-              <a:rPr lang="he-IL" dirty="0">
-                <a:effectLst/>
-              </a:rPr>
-              <a:t>•</a:t>
-            </a:r>
-            <a:r>
-              <a:rPr lang="he-IL" dirty="0"/>
-              <a:t>ערוץ בקרה </a:t>
-            </a:r>
-            <a:r>
-              <a:rPr lang="en-US" dirty="0"/>
-              <a:t>(SCCB)</a:t>
-            </a:r>
-            <a:r>
-              <a:rPr lang="he-IL" dirty="0"/>
-              <a:t> :                                                </a:t>
-            </a:r>
-            <a:endParaRPr lang="he-IL" dirty="0">
-              <a:effectLst/>
-            </a:endParaRPr>
-          </a:p>
-          <a:p>
-            <a:pPr algn="r" rtl="1"/>
-            <a:r>
-              <a:rPr lang="he-IL" dirty="0">
-                <a:effectLst/>
-              </a:rPr>
-              <a:t>ממשק תקשורת דמוי </a:t>
-            </a:r>
-            <a:r>
-              <a:rPr lang="en-US" dirty="0">
-                <a:effectLst/>
-              </a:rPr>
-              <a:t>I2C </a:t>
-            </a:r>
-            <a:r>
-              <a:rPr lang="he-IL" dirty="0">
-                <a:effectLst/>
-              </a:rPr>
-              <a:t> המשמש </a:t>
-            </a:r>
-            <a:r>
-              <a:rPr lang="he-IL" dirty="0" err="1">
-                <a:effectLst/>
-              </a:rPr>
-              <a:t>לקינפוג</a:t>
-            </a:r>
-            <a:r>
-              <a:rPr lang="he-IL" dirty="0">
-                <a:effectLst/>
-              </a:rPr>
-              <a:t> ראשוני של הגדרות המצלמה</a:t>
-            </a:r>
-          </a:p>
-          <a:p>
-            <a:pPr algn="r" rtl="1"/>
-            <a:r>
-              <a:rPr lang="he-IL" dirty="0">
-                <a:effectLst/>
-              </a:rPr>
-              <a:t> (כמו רזולוציה ופורמט תמונה) בתחילת העבודה.</a:t>
-            </a:r>
-          </a:p>
-          <a:p>
-            <a:pPr algn="r" rtl="1"/>
-            <a:r>
-              <a:rPr lang="he-IL" dirty="0">
-                <a:effectLst/>
-              </a:rPr>
-              <a:t>•</a:t>
-            </a:r>
-            <a:r>
-              <a:rPr lang="he-IL" dirty="0"/>
-              <a:t>ערוץ נתונים וסנכרון:</a:t>
-            </a:r>
-          </a:p>
-          <a:p>
-            <a:pPr algn="r" rtl="1"/>
-            <a:r>
-              <a:rPr lang="he-IL" dirty="0"/>
-              <a:t> המצלמה מזרימה את נתוני התמונה ברצף החוצה, ומלווה אותם בשלושה אותות סנכרון פשוטים – </a:t>
-            </a:r>
-            <a:r>
-              <a:rPr lang="en-US" dirty="0"/>
-              <a:t>VSYNC </a:t>
-            </a:r>
-            <a:r>
-              <a:rPr lang="he-IL" dirty="0"/>
-              <a:t>(תחילת פריים), </a:t>
-            </a:r>
-            <a:r>
-              <a:rPr lang="en-US" dirty="0"/>
-              <a:t>HREF </a:t>
-            </a:r>
-            <a:r>
-              <a:rPr lang="he-IL" dirty="0"/>
-              <a:t>(תחילת שורה) ו-</a:t>
-            </a:r>
-            <a:r>
-              <a:rPr lang="en-US" dirty="0"/>
-              <a:t>)PCLK </a:t>
-            </a:r>
-            <a:r>
-              <a:rPr lang="he-IL" dirty="0"/>
-              <a:t>שעון נתונים). אותות אלו מאפשרים ל-</a:t>
-            </a:r>
-            <a:r>
-              <a:rPr lang="en-US" dirty="0"/>
-              <a:t>FPGA "</a:t>
-            </a:r>
-            <a:r>
-              <a:rPr lang="he-IL" dirty="0"/>
-              <a:t>להאזין" למצלמה, לדעת בדיוק מתי מתחילה תמונה חדשה, ולדחוף את המידע ישירות לזיכרון ה-</a:t>
-            </a:r>
-            <a:r>
-              <a:rPr lang="en-US" dirty="0"/>
-              <a:t>BRAM </a:t>
-            </a:r>
-            <a:r>
-              <a:rPr lang="he-IL" dirty="0"/>
-              <a:t>בצורה חלקה</a:t>
-            </a:r>
-            <a:endParaRPr lang="he-IL" dirty="0">
-              <a:effectLst/>
-            </a:endParaRPr>
-          </a:p>
-        </p:txBody>
-      </p:sp>
-    </p:spTree>
-  </p:cSld>
-  <p:clrMapOvr>
-    <a:masterClrMapping/>
-  </p:clrMapOvr>
-</p:sld>
-</file>
-
-<file path=ppt/slides/slide15.xml><?xml version="1.0" encoding="utf-8"?>
-<p:sld xmlns:a="http://schemas.openxmlformats.org/drawingml/2006/main" xmlns:r="http://schemas.openxmlformats.org/officeDocument/2006/relationships" xmlns:p="http://schemas.openxmlformats.org/presentationml/2006/main">
-  <p:cSld>
-    <p:spTree>
-      <p:nvGrpSpPr>
-        <p:cNvPr id="1" name=""/>
-        <p:cNvGrpSpPr/>
-        <p:nvPr/>
-      </p:nvGrpSpPr>
-      <p:grpSpPr>
-        <a:xfrm>
-          <a:off x="0" y="0"/>
-          <a:ext cx="0" cy="0"/>
-          <a:chOff x="0" y="0"/>
-          <a:chExt cx="0" cy="0"/>
-        </a:xfrm>
-      </p:grpSpPr>
-      <p:sp>
-        <p:nvSpPr>
-          <p:cNvPr id="2" name="Title 1"/>
-          <p:cNvSpPr>
-            <a:spLocks noGrp="1"/>
-          </p:cNvSpPr>
-          <p:nvPr>
-            <p:ph type="title"/>
-          </p:nvPr>
-        </p:nvSpPr>
-        <p:spPr>
-          <a:xfrm>
             <a:off x="0" y="30843"/>
             <a:ext cx="9085942" cy="978496"/>
           </a:xfrm>
@@ -7544,7 +7237,7 @@
 </p:sld>
 </file>
 
-<file path=ppt/slides/slide16.xml><?xml version="1.0" encoding="utf-8"?>
+<file path=ppt/slides/slide15.xml><?xml version="1.0" encoding="utf-8"?>
 <p:sld xmlns:a="http://schemas.openxmlformats.org/drawingml/2006/main" xmlns:r="http://schemas.openxmlformats.org/officeDocument/2006/relationships" xmlns:p="http://schemas.openxmlformats.org/presentationml/2006/main">
   <p:cSld>
     <p:spTree>
@@ -7836,7 +7529,7 @@
 </p:sld>
 </file>
 
-<file path=ppt/slides/slide17.xml><?xml version="1.0" encoding="utf-8"?>
+<file path=ppt/slides/slide16.xml><?xml version="1.0" encoding="utf-8"?>
 <p:sld xmlns:a="http://schemas.openxmlformats.org/drawingml/2006/main" xmlns:r="http://schemas.openxmlformats.org/officeDocument/2006/relationships" xmlns:p="http://schemas.openxmlformats.org/presentationml/2006/main">
   <p:cSld>
     <p:spTree>
@@ -7950,14 +7643,14 @@
           </a:bodyPr>
           <a:lstStyle/>
           <a:p>
-            <a:pPr algn="ctr"/>
+            <a:pPr algn="r"/>
             <a:r>
               <a:rPr lang="he-IL" dirty="0"/>
               <a:t>אימות עמידות הלוגיקה </a:t>
             </a:r>
           </a:p>
           <a:p>
-            <a:pPr algn="ctr"/>
+            <a:pPr algn="r"/>
             <a:r>
               <a:rPr lang="he-IL" dirty="0"/>
               <a:t>640פיקסלים</a:t>
@@ -7981,7 +7674,7 @@
             <a:endParaRPr lang="en-US" dirty="0"/>
           </a:p>
           <a:p>
-            <a:pPr algn="ctr"/>
+            <a:pPr algn="r"/>
             <a:r>
               <a:rPr lang="he-IL" dirty="0"/>
               <a:t>25</a:t>
@@ -8012,7 +7705,7 @@
         </p:nvSpPr>
         <p:spPr>
           <a:xfrm>
-            <a:off x="1955800" y="2052134"/>
+            <a:off x="1955800" y="2100871"/>
             <a:ext cx="6324600" cy="369332"/>
           </a:xfrm>
           <a:prstGeom prst="rect">
@@ -8156,6 +7849,35 @@
           </a:p>
         </p:txBody>
       </p:sp>
+      <p:pic>
+        <p:nvPicPr>
+          <p:cNvPr id="10" name="תמונה 9">
+            <a:extLst>
+              <a:ext uri="{FF2B5EF4-FFF2-40B4-BE49-F238E27FC236}">
+                <a16:creationId xmlns:a16="http://schemas.microsoft.com/office/drawing/2014/main" id="{354CE5CE-105A-4338-BE3B-953AA543E6DF}"/>
+              </a:ext>
+            </a:extLst>
+          </p:cNvPr>
+          <p:cNvPicPr>
+            <a:picLocks noChangeAspect="1"/>
+          </p:cNvPicPr>
+          <p:nvPr/>
+        </p:nvPicPr>
+        <p:blipFill rotWithShape="1">
+          <a:blip r:embed="rId3"/>
+          <a:srcRect l="15302" r="17020" b="64601"/>
+          <a:stretch/>
+        </p:blipFill>
+        <p:spPr>
+          <a:xfrm>
+            <a:off x="1024292" y="632299"/>
+            <a:ext cx="2785243" cy="1443314"/>
+          </a:xfrm>
+          <a:prstGeom prst="rect">
+            <a:avLst/>
+          </a:prstGeom>
+        </p:spPr>
+      </p:pic>
     </p:spTree>
   </p:cSld>
   <p:clrMapOvr>
@@ -8164,7 +7886,7 @@
 </p:sld>
 </file>
 
-<file path=ppt/slides/slide18.xml><?xml version="1.0" encoding="utf-8"?>
+<file path=ppt/slides/slide17.xml><?xml version="1.0" encoding="utf-8"?>
 <p:sld xmlns:a="http://schemas.openxmlformats.org/drawingml/2006/main" xmlns:r="http://schemas.openxmlformats.org/officeDocument/2006/relationships" xmlns:p="http://schemas.openxmlformats.org/presentationml/2006/main">
   <p:cSld>
     <p:spTree>
@@ -8524,7 +8246,7 @@
 </p:sld>
 </file>
 
-<file path=ppt/slides/slide19.xml><?xml version="1.0" encoding="utf-8"?>
+<file path=ppt/slides/slide18.xml><?xml version="1.0" encoding="utf-8"?>
 <p:sld xmlns:a="http://schemas.openxmlformats.org/drawingml/2006/main" xmlns:r="http://schemas.openxmlformats.org/officeDocument/2006/relationships" xmlns:p="http://schemas.openxmlformats.org/presentationml/2006/main">
   <p:cSld>
     <p:spTree>
@@ -8867,759 +8589,7 @@
 </p:sld>
 </file>
 
-<file path=ppt/slides/slide2.xml><?xml version="1.0" encoding="utf-8"?>
-<p:sld xmlns:a="http://schemas.openxmlformats.org/drawingml/2006/main" xmlns:r="http://schemas.openxmlformats.org/officeDocument/2006/relationships" xmlns:p="http://schemas.openxmlformats.org/presentationml/2006/main">
-  <p:cSld>
-    <p:spTree>
-      <p:nvGrpSpPr>
-        <p:cNvPr id="1" name=""/>
-        <p:cNvGrpSpPr/>
-        <p:nvPr/>
-      </p:nvGrpSpPr>
-      <p:grpSpPr>
-        <a:xfrm>
-          <a:off x="0" y="0"/>
-          <a:ext cx="0" cy="0"/>
-          <a:chOff x="0" y="0"/>
-          <a:chExt cx="0" cy="0"/>
-        </a:xfrm>
-      </p:grpSpPr>
-      <p:sp>
-        <p:nvSpPr>
-          <p:cNvPr id="2" name="Title 1"/>
-          <p:cNvSpPr>
-            <a:spLocks noGrp="1"/>
-          </p:cNvSpPr>
-          <p:nvPr>
-            <p:ph type="title"/>
-          </p:nvPr>
-        </p:nvSpPr>
-        <p:spPr/>
-        <p:txBody>
-          <a:bodyPr/>
-          <a:lstStyle/>
-          <a:p>
-            <a:pPr rtl="1"/>
-            <a:r>
-              <a:t>ארכיטקטורת המערכת</a:t>
-            </a:r>
-          </a:p>
-        </p:txBody>
-      </p:sp>
-      <p:sp>
-        <p:nvSpPr>
-          <p:cNvPr id="3" name="TextBox 2"/>
-          <p:cNvSpPr txBox="1"/>
-          <p:nvPr/>
-        </p:nvSpPr>
-        <p:spPr>
-          <a:xfrm>
-            <a:off x="457200" y="1097280"/>
-            <a:ext cx="8229600" cy="914400"/>
-          </a:xfrm>
-          <a:prstGeom prst="rect">
-            <a:avLst/>
-          </a:prstGeom>
-          <a:noFill/>
-        </p:spPr>
-        <p:txBody>
-          <a:bodyPr wrap="none">
-            <a:spAutoFit/>
-          </a:bodyPr>
-          <a:lstStyle/>
-          <a:p>
-            <a:endParaRPr dirty="0"/>
-          </a:p>
-          <a:p>
-            <a:pPr algn="r" rtl="1">
-              <a:defRPr sz="1800"/>
-            </a:pPr>
-            <a:r>
-              <a:rPr dirty="0" err="1"/>
-              <a:t>נתוני</a:t>
-            </a:r>
-            <a:r>
-              <a:rPr dirty="0"/>
-              <a:t> </a:t>
-            </a:r>
-            <a:r>
-              <a:rPr dirty="0" err="1"/>
-              <a:t>התמונה</a:t>
-            </a:r>
-            <a:r>
-              <a:rPr dirty="0"/>
-              <a:t> </a:t>
-            </a:r>
-            <a:r>
-              <a:rPr dirty="0" err="1"/>
-              <a:t>הגולמיים</a:t>
-            </a:r>
-            <a:r>
-              <a:rPr dirty="0"/>
-              <a:t> </a:t>
-            </a:r>
-            <a:r>
-              <a:rPr dirty="0" err="1"/>
-              <a:t>נקלטים</a:t>
-            </a:r>
-            <a:r>
-              <a:rPr dirty="0"/>
-              <a:t> </a:t>
-            </a:r>
-            <a:r>
-              <a:rPr dirty="0" err="1"/>
-              <a:t>מהמצלמה</a:t>
-            </a:r>
-            <a:r>
-              <a:rPr dirty="0"/>
-              <a:t> </a:t>
-            </a:r>
-            <a:r>
-              <a:rPr dirty="0" err="1"/>
-              <a:t>ונאגרים</a:t>
-            </a:r>
-            <a:r>
-              <a:rPr dirty="0"/>
-              <a:t> </a:t>
-            </a:r>
-            <a:r>
-              <a:rPr dirty="0" err="1"/>
-              <a:t>בזיכרון</a:t>
-            </a:r>
-            <a:r>
-              <a:rPr dirty="0"/>
-              <a:t> ה-BRAM.</a:t>
-            </a:r>
-          </a:p>
-          <a:p>
-            <a:pPr algn="r" rtl="1">
-              <a:defRPr sz="1800"/>
-            </a:pPr>
-            <a:r>
-              <a:rPr dirty="0" err="1"/>
-              <a:t>בקר</a:t>
-            </a:r>
-            <a:r>
-              <a:rPr dirty="0"/>
-              <a:t> ה-VGA </a:t>
-            </a:r>
-            <a:r>
-              <a:rPr dirty="0" err="1"/>
-              <a:t>שולף</a:t>
-            </a:r>
-            <a:r>
-              <a:rPr dirty="0"/>
-              <a:t> </a:t>
-            </a:r>
-            <a:r>
-              <a:rPr dirty="0" err="1"/>
-              <a:t>את</a:t>
-            </a:r>
-            <a:r>
-              <a:rPr dirty="0"/>
-              <a:t> </a:t>
-            </a:r>
-            <a:r>
-              <a:rPr dirty="0" err="1"/>
-              <a:t>הנתונים</a:t>
-            </a:r>
-            <a:r>
-              <a:rPr dirty="0"/>
-              <a:t> </a:t>
-            </a:r>
-            <a:r>
-              <a:rPr dirty="0" err="1"/>
-              <a:t>ומעביר</a:t>
-            </a:r>
-            <a:r>
-              <a:rPr dirty="0"/>
-              <a:t> </a:t>
-            </a:r>
-            <a:r>
-              <a:rPr dirty="0" err="1"/>
-              <a:t>לממירD</a:t>
-            </a:r>
-            <a:r>
-              <a:rPr dirty="0"/>
-              <a:t> to A </a:t>
-            </a:r>
-            <a:r>
-              <a:rPr lang="he-IL" dirty="0"/>
-              <a:t> </a:t>
-            </a:r>
-            <a:r>
-              <a:rPr dirty="0" err="1"/>
-              <a:t>לקבלת</a:t>
-            </a:r>
-            <a:r>
-              <a:rPr dirty="0"/>
-              <a:t> </a:t>
-            </a:r>
-            <a:r>
-              <a:rPr dirty="0" err="1"/>
-              <a:t>אות</a:t>
-            </a:r>
-            <a:r>
-              <a:rPr dirty="0"/>
-              <a:t> </a:t>
-            </a:r>
-            <a:r>
-              <a:rPr dirty="0" err="1"/>
-              <a:t>אנלוגי</a:t>
-            </a:r>
-            <a:r>
-              <a:rPr dirty="0"/>
-              <a:t> </a:t>
-            </a:r>
-            <a:r>
-              <a:rPr dirty="0" err="1"/>
-              <a:t>פיזי</a:t>
-            </a:r>
-            <a:r>
-              <a:rPr dirty="0"/>
-              <a:t> </a:t>
-            </a:r>
-            <a:r>
-              <a:rPr dirty="0" err="1"/>
-              <a:t>למסך</a:t>
-            </a:r>
-            <a:r>
-              <a:rPr dirty="0"/>
-              <a:t>.</a:t>
-            </a:r>
-          </a:p>
-        </p:txBody>
-      </p:sp>
-      <p:sp>
-        <p:nvSpPr>
-          <p:cNvPr id="4" name="Rectangle 3"/>
-          <p:cNvSpPr/>
-          <p:nvPr/>
-        </p:nvSpPr>
-        <p:spPr>
-          <a:xfrm>
-            <a:off x="3474720" y="2194560"/>
-            <a:ext cx="2011680" cy="1645920"/>
-          </a:xfrm>
-          <a:prstGeom prst="rect">
-            <a:avLst/>
-          </a:prstGeom>
-          <a:solidFill>
-            <a:srgbClr val="000000"/>
-          </a:solidFill>
-        </p:spPr>
-        <p:style>
-          <a:lnRef idx="1">
-            <a:schemeClr val="accent1"/>
-          </a:lnRef>
-          <a:fillRef idx="3">
-            <a:schemeClr val="accent1"/>
-          </a:fillRef>
-          <a:effectRef idx="2">
-            <a:schemeClr val="accent1"/>
-          </a:effectRef>
-          <a:fontRef idx="minor">
-            <a:schemeClr val="lt1"/>
-          </a:fontRef>
-        </p:style>
-        <p:txBody>
-          <a:bodyPr rtlCol="0" anchor="ctr"/>
-          <a:lstStyle/>
-          <a:p>
-            <a:pPr algn="ctr" rtl="1">
-              <a:defRPr>
-                <a:solidFill>
-                  <a:srgbClr val="FFFFFF"/>
-                </a:solidFill>
-              </a:defRPr>
-            </a:pPr>
-            <a:r>
-              <a:t>מערכת התראת נפילה</a:t>
-            </a:r>
-            <a:br/>
-            <a:r>
-              <a:t>מבוסס FPGA</a:t>
-            </a:r>
-          </a:p>
-        </p:txBody>
-      </p:sp>
-      <p:sp>
-        <p:nvSpPr>
-          <p:cNvPr id="5" name="TextBox 4"/>
-          <p:cNvSpPr txBox="1"/>
-          <p:nvPr/>
-        </p:nvSpPr>
-        <p:spPr>
-          <a:xfrm>
-            <a:off x="1097280" y="1920240"/>
-            <a:ext cx="2286000" cy="1828800"/>
-          </a:xfrm>
-          <a:prstGeom prst="rect">
-            <a:avLst/>
-          </a:prstGeom>
-          <a:noFill/>
-        </p:spPr>
-        <p:txBody>
-          <a:bodyPr wrap="none">
-            <a:spAutoFit/>
-          </a:bodyPr>
-          <a:lstStyle/>
-          <a:p>
-            <a:pPr algn="r">
-              <a:defRPr sz="1300"/>
-            </a:pPr>
-            <a:r>
-              <a:t>Inputs:</a:t>
-            </a:r>
-            <a:br/>
-            <a:r>
-              <a:t>clk, reset</a:t>
-            </a:r>
-            <a:br/>
-            <a:r>
-              <a:t>ov7670_vsync, href, pclk</a:t>
-            </a:r>
-            <a:br/>
-            <a:r>
-              <a:t>ov7670_data[7:0]</a:t>
-            </a:r>
-            <a:br/>
-            <a:r>
-              <a:t>btn[1:0], sw[1:0]</a:t>
-            </a:r>
-            <a:br/>
-            <a:r>
-              <a:t>scl, sda</a:t>
-            </a:r>
-          </a:p>
-        </p:txBody>
-      </p:sp>
-      <p:sp>
-        <p:nvSpPr>
-          <p:cNvPr id="6" name="Right Arrow 5"/>
-          <p:cNvSpPr/>
-          <p:nvPr/>
-        </p:nvSpPr>
-        <p:spPr>
-          <a:xfrm>
-            <a:off x="2788920" y="3324422"/>
-            <a:ext cx="548640" cy="274320"/>
-          </a:xfrm>
-          <a:prstGeom prst="rightArrow">
-            <a:avLst/>
-          </a:prstGeom>
-        </p:spPr>
-        <p:style>
-          <a:lnRef idx="1">
-            <a:schemeClr val="accent1"/>
-          </a:lnRef>
-          <a:fillRef idx="3">
-            <a:schemeClr val="accent1"/>
-          </a:fillRef>
-          <a:effectRef idx="2">
-            <a:schemeClr val="accent1"/>
-          </a:effectRef>
-          <a:fontRef idx="minor">
-            <a:schemeClr val="lt1"/>
-          </a:fontRef>
-        </p:style>
-        <p:txBody>
-          <a:bodyPr rtlCol="0" anchor="ctr"/>
-          <a:lstStyle/>
-          <a:p>
-            <a:pPr algn="ctr"/>
-            <a:endParaRPr/>
-          </a:p>
-        </p:txBody>
-      </p:sp>
-      <p:sp>
-        <p:nvSpPr>
-          <p:cNvPr id="7" name="TextBox 6"/>
-          <p:cNvSpPr txBox="1"/>
-          <p:nvPr/>
-        </p:nvSpPr>
-        <p:spPr>
-          <a:xfrm>
-            <a:off x="5669280" y="1920240"/>
-            <a:ext cx="3200400" cy="1828800"/>
-          </a:xfrm>
-          <a:prstGeom prst="rect">
-            <a:avLst/>
-          </a:prstGeom>
-          <a:noFill/>
-        </p:spPr>
-        <p:txBody>
-          <a:bodyPr wrap="none">
-            <a:spAutoFit/>
-          </a:bodyPr>
-          <a:lstStyle/>
-          <a:p>
-            <a:pPr>
-              <a:defRPr sz="1300"/>
-            </a:pPr>
-            <a:r>
-              <a:t>Outputs:</a:t>
-            </a:r>
-            <a:br/>
-            <a:r>
-              <a:t>VGA_HS_O, VGA_VS_O</a:t>
-            </a:r>
-            <a:br/>
-            <a:r>
-              <a:t>VGA_R[3:0], G[3:0], B[3:0]</a:t>
-            </a:r>
-            <a:br/>
-            <a:r>
-              <a:t>ov7670_xclk, pwdn, reset</a:t>
-            </a:r>
-            <a:br/>
-            <a:r>
-              <a:t>led[3:0]</a:t>
-            </a:r>
-          </a:p>
-        </p:txBody>
-      </p:sp>
-      <p:sp>
-        <p:nvSpPr>
-          <p:cNvPr id="8" name="Right Arrow 7"/>
-          <p:cNvSpPr/>
-          <p:nvPr/>
-        </p:nvSpPr>
-        <p:spPr>
-          <a:xfrm>
-            <a:off x="5669280" y="3291840"/>
-            <a:ext cx="548640" cy="274320"/>
-          </a:xfrm>
-          <a:prstGeom prst="rightArrow">
-            <a:avLst/>
-          </a:prstGeom>
-        </p:spPr>
-        <p:style>
-          <a:lnRef idx="1">
-            <a:schemeClr val="accent1"/>
-          </a:lnRef>
-          <a:fillRef idx="3">
-            <a:schemeClr val="accent1"/>
-          </a:fillRef>
-          <a:effectRef idx="2">
-            <a:schemeClr val="accent1"/>
-          </a:effectRef>
-          <a:fontRef idx="minor">
-            <a:schemeClr val="lt1"/>
-          </a:fontRef>
-        </p:style>
-        <p:txBody>
-          <a:bodyPr rtlCol="0" anchor="ctr"/>
-          <a:lstStyle/>
-          <a:p>
-            <a:pPr algn="ctr"/>
-            <a:endParaRPr/>
-          </a:p>
-        </p:txBody>
-      </p:sp>
-      <p:sp>
-        <p:nvSpPr>
-          <p:cNvPr id="9" name="Rounded Rectangle 8"/>
-          <p:cNvSpPr/>
-          <p:nvPr/>
-        </p:nvSpPr>
-        <p:spPr>
-          <a:xfrm>
-            <a:off x="548640" y="4754880"/>
-            <a:ext cx="1554480" cy="731520"/>
-          </a:xfrm>
-          <a:prstGeom prst="roundRect">
-            <a:avLst/>
-          </a:prstGeom>
-          <a:solidFill>
-            <a:srgbClr val="4F81BD"/>
-          </a:solidFill>
-        </p:spPr>
-        <p:style>
-          <a:lnRef idx="1">
-            <a:schemeClr val="accent1"/>
-          </a:lnRef>
-          <a:fillRef idx="3">
-            <a:schemeClr val="accent1"/>
-          </a:fillRef>
-          <a:effectRef idx="2">
-            <a:schemeClr val="accent1"/>
-          </a:effectRef>
-          <a:fontRef idx="minor">
-            <a:schemeClr val="lt1"/>
-          </a:fontRef>
-        </p:style>
-        <p:txBody>
-          <a:bodyPr rtlCol="0" anchor="ctr"/>
-          <a:lstStyle/>
-          <a:p>
-            <a:pPr algn="ctr">
-              <a:defRPr sz="1400"/>
-            </a:pPr>
-            <a:r>
-              <a:t>ov7670_capture</a:t>
-            </a:r>
-          </a:p>
-        </p:txBody>
-      </p:sp>
-      <p:sp>
-        <p:nvSpPr>
-          <p:cNvPr id="10" name="Right Arrow 9"/>
-          <p:cNvSpPr/>
-          <p:nvPr/>
-        </p:nvSpPr>
-        <p:spPr>
-          <a:xfrm>
-            <a:off x="2103120" y="5029200"/>
-            <a:ext cx="457200" cy="182880"/>
-          </a:xfrm>
-          <a:prstGeom prst="rightArrow">
-            <a:avLst/>
-          </a:prstGeom>
-        </p:spPr>
-        <p:style>
-          <a:lnRef idx="1">
-            <a:schemeClr val="accent1"/>
-          </a:lnRef>
-          <a:fillRef idx="3">
-            <a:schemeClr val="accent1"/>
-          </a:fillRef>
-          <a:effectRef idx="2">
-            <a:schemeClr val="accent1"/>
-          </a:effectRef>
-          <a:fontRef idx="minor">
-            <a:schemeClr val="lt1"/>
-          </a:fontRef>
-        </p:style>
-        <p:txBody>
-          <a:bodyPr rtlCol="0" anchor="ctr"/>
-          <a:lstStyle/>
-          <a:p>
-            <a:pPr algn="ctr"/>
-            <a:endParaRPr/>
-          </a:p>
-        </p:txBody>
-      </p:sp>
-      <p:sp>
-        <p:nvSpPr>
-          <p:cNvPr id="11" name="Rounded Rectangle 10"/>
-          <p:cNvSpPr/>
-          <p:nvPr/>
-        </p:nvSpPr>
-        <p:spPr>
-          <a:xfrm>
-            <a:off x="2560320" y="4754880"/>
-            <a:ext cx="1554480" cy="731520"/>
-          </a:xfrm>
-          <a:prstGeom prst="roundRect">
-            <a:avLst/>
-          </a:prstGeom>
-          <a:solidFill>
-            <a:srgbClr val="4F81BD"/>
-          </a:solidFill>
-        </p:spPr>
-        <p:style>
-          <a:lnRef idx="1">
-            <a:schemeClr val="accent1"/>
-          </a:lnRef>
-          <a:fillRef idx="3">
-            <a:schemeClr val="accent1"/>
-          </a:fillRef>
-          <a:effectRef idx="2">
-            <a:schemeClr val="accent1"/>
-          </a:effectRef>
-          <a:fontRef idx="minor">
-            <a:schemeClr val="lt1"/>
-          </a:fontRef>
-        </p:style>
-        <p:txBody>
-          <a:bodyPr rtlCol="0" anchor="ctr"/>
-          <a:lstStyle/>
-          <a:p>
-            <a:pPr algn="ctr">
-              <a:defRPr sz="1400"/>
-            </a:pPr>
-            <a:r>
-              <a:t>frame_buffer</a:t>
-            </a:r>
-          </a:p>
-        </p:txBody>
-      </p:sp>
-      <p:sp>
-        <p:nvSpPr>
-          <p:cNvPr id="12" name="Right Arrow 11"/>
-          <p:cNvSpPr/>
-          <p:nvPr/>
-        </p:nvSpPr>
-        <p:spPr>
-          <a:xfrm>
-            <a:off x="4114800" y="5029200"/>
-            <a:ext cx="457200" cy="182880"/>
-          </a:xfrm>
-          <a:prstGeom prst="rightArrow">
-            <a:avLst/>
-          </a:prstGeom>
-        </p:spPr>
-        <p:style>
-          <a:lnRef idx="1">
-            <a:schemeClr val="accent1"/>
-          </a:lnRef>
-          <a:fillRef idx="3">
-            <a:schemeClr val="accent1"/>
-          </a:fillRef>
-          <a:effectRef idx="2">
-            <a:schemeClr val="accent1"/>
-          </a:effectRef>
-          <a:fontRef idx="minor">
-            <a:schemeClr val="lt1"/>
-          </a:fontRef>
-        </p:style>
-        <p:txBody>
-          <a:bodyPr rtlCol="0" anchor="ctr"/>
-          <a:lstStyle/>
-          <a:p>
-            <a:pPr algn="ctr"/>
-            <a:endParaRPr/>
-          </a:p>
-        </p:txBody>
-      </p:sp>
-      <p:sp>
-        <p:nvSpPr>
-          <p:cNvPr id="13" name="Rounded Rectangle 12"/>
-          <p:cNvSpPr/>
-          <p:nvPr/>
-        </p:nvSpPr>
-        <p:spPr>
-          <a:xfrm>
-            <a:off x="4572000" y="4754880"/>
-            <a:ext cx="1554480" cy="731520"/>
-          </a:xfrm>
-          <a:prstGeom prst="roundRect">
-            <a:avLst/>
-          </a:prstGeom>
-          <a:solidFill>
-            <a:srgbClr val="4F81BD"/>
-          </a:solidFill>
-        </p:spPr>
-        <p:style>
-          <a:lnRef idx="1">
-            <a:schemeClr val="accent1"/>
-          </a:lnRef>
-          <a:fillRef idx="3">
-            <a:schemeClr val="accent1"/>
-          </a:fillRef>
-          <a:effectRef idx="2">
-            <a:schemeClr val="accent1"/>
-          </a:effectRef>
-          <a:fontRef idx="minor">
-            <a:schemeClr val="lt1"/>
-          </a:fontRef>
-        </p:style>
-        <p:txBody>
-          <a:bodyPr rtlCol="0" anchor="ctr"/>
-          <a:lstStyle/>
-          <a:p>
-            <a:pPr algn="ctr">
-              <a:defRPr sz="1400"/>
-            </a:pPr>
-            <a:r>
-              <a:t>vga_controller</a:t>
-            </a:r>
-          </a:p>
-        </p:txBody>
-      </p:sp>
-      <p:sp>
-        <p:nvSpPr>
-          <p:cNvPr id="14" name="Right Arrow 13"/>
-          <p:cNvSpPr/>
-          <p:nvPr/>
-        </p:nvSpPr>
-        <p:spPr>
-          <a:xfrm>
-            <a:off x="6126480" y="5029200"/>
-            <a:ext cx="457200" cy="182880"/>
-          </a:xfrm>
-          <a:prstGeom prst="rightArrow">
-            <a:avLst/>
-          </a:prstGeom>
-        </p:spPr>
-        <p:style>
-          <a:lnRef idx="1">
-            <a:schemeClr val="accent1"/>
-          </a:lnRef>
-          <a:fillRef idx="3">
-            <a:schemeClr val="accent1"/>
-          </a:fillRef>
-          <a:effectRef idx="2">
-            <a:schemeClr val="accent1"/>
-          </a:effectRef>
-          <a:fontRef idx="minor">
-            <a:schemeClr val="lt1"/>
-          </a:fontRef>
-        </p:style>
-        <p:txBody>
-          <a:bodyPr rtlCol="0" anchor="ctr"/>
-          <a:lstStyle/>
-          <a:p>
-            <a:pPr algn="ctr"/>
-            <a:endParaRPr/>
-          </a:p>
-        </p:txBody>
-      </p:sp>
-      <p:sp>
-        <p:nvSpPr>
-          <p:cNvPr id="15" name="Rounded Rectangle 14"/>
-          <p:cNvSpPr/>
-          <p:nvPr/>
-        </p:nvSpPr>
-        <p:spPr>
-          <a:xfrm>
-            <a:off x="6583680" y="4754880"/>
-            <a:ext cx="1554480" cy="731520"/>
-          </a:xfrm>
-          <a:prstGeom prst="roundRect">
-            <a:avLst/>
-          </a:prstGeom>
-          <a:solidFill>
-            <a:srgbClr val="4F81BD"/>
-          </a:solidFill>
-        </p:spPr>
-        <p:style>
-          <a:lnRef idx="1">
-            <a:schemeClr val="accent1"/>
-          </a:lnRef>
-          <a:fillRef idx="3">
-            <a:schemeClr val="accent1"/>
-          </a:fillRef>
-          <a:effectRef idx="2">
-            <a:schemeClr val="accent1"/>
-          </a:effectRef>
-          <a:fontRef idx="minor">
-            <a:schemeClr val="lt1"/>
-          </a:fontRef>
-        </p:style>
-        <p:txBody>
-          <a:bodyPr rtlCol="0" anchor="ctr"/>
-          <a:lstStyle/>
-          <a:p>
-            <a:pPr algn="ctr">
-              <a:defRPr sz="1400"/>
-            </a:pPr>
-            <a:r>
-              <a:t>D to A Converter</a:t>
-            </a:r>
-          </a:p>
-        </p:txBody>
-      </p:sp>
-    </p:spTree>
-  </p:cSld>
-  <p:clrMapOvr>
-    <a:masterClrMapping/>
-  </p:clrMapOvr>
-</p:sld>
-</file>
-
-<file path=ppt/slides/slide20.xml><?xml version="1.0" encoding="utf-8"?>
+<file path=ppt/slides/slide19.xml><?xml version="1.0" encoding="utf-8"?>
 <p:sld xmlns:a="http://schemas.openxmlformats.org/drawingml/2006/main" xmlns:r="http://schemas.openxmlformats.org/officeDocument/2006/relationships" xmlns:p="http://schemas.openxmlformats.org/presentationml/2006/main">
   <p:cSld>
     <p:spTree>
@@ -9966,7 +8936,850 @@
 </p:sld>
 </file>
 
-<file path=ppt/slides/slide21.xml><?xml version="1.0" encoding="utf-8"?>
+<file path=ppt/slides/slide2.xml><?xml version="1.0" encoding="utf-8"?>
+<p:sld xmlns:a="http://schemas.openxmlformats.org/drawingml/2006/main" xmlns:r="http://schemas.openxmlformats.org/officeDocument/2006/relationships" xmlns:p="http://schemas.openxmlformats.org/presentationml/2006/main">
+  <p:cSld>
+    <p:spTree>
+      <p:nvGrpSpPr>
+        <p:cNvPr id="1" name=""/>
+        <p:cNvGrpSpPr/>
+        <p:nvPr/>
+      </p:nvGrpSpPr>
+      <p:grpSpPr>
+        <a:xfrm>
+          <a:off x="0" y="0"/>
+          <a:ext cx="0" cy="0"/>
+          <a:chOff x="0" y="0"/>
+          <a:chExt cx="0" cy="0"/>
+        </a:xfrm>
+      </p:grpSpPr>
+      <p:sp>
+        <p:nvSpPr>
+          <p:cNvPr id="2" name="Title 1"/>
+          <p:cNvSpPr>
+            <a:spLocks noGrp="1"/>
+          </p:cNvSpPr>
+          <p:nvPr>
+            <p:ph type="title"/>
+          </p:nvPr>
+        </p:nvSpPr>
+        <p:spPr/>
+        <p:txBody>
+          <a:bodyPr/>
+          <a:lstStyle/>
+          <a:p>
+            <a:pPr rtl="1"/>
+            <a:r>
+              <a:t>ארכיטקטורת המערכת</a:t>
+            </a:r>
+          </a:p>
+        </p:txBody>
+      </p:sp>
+      <p:sp>
+        <p:nvSpPr>
+          <p:cNvPr id="3" name="TextBox 2"/>
+          <p:cNvSpPr txBox="1"/>
+          <p:nvPr/>
+        </p:nvSpPr>
+        <p:spPr>
+          <a:xfrm>
+            <a:off x="457200" y="1097280"/>
+            <a:ext cx="8229600" cy="914400"/>
+          </a:xfrm>
+          <a:prstGeom prst="rect">
+            <a:avLst/>
+          </a:prstGeom>
+          <a:noFill/>
+        </p:spPr>
+        <p:txBody>
+          <a:bodyPr wrap="none">
+            <a:spAutoFit/>
+          </a:bodyPr>
+          <a:lstStyle/>
+          <a:p>
+            <a:endParaRPr dirty="0"/>
+          </a:p>
+          <a:p>
+            <a:pPr algn="ctr" rtl="1">
+              <a:defRPr sz="1800"/>
+            </a:pPr>
+            <a:r>
+              <a:rPr dirty="0" err="1"/>
+              <a:t>נתוני</a:t>
+            </a:r>
+            <a:r>
+              <a:rPr dirty="0"/>
+              <a:t> </a:t>
+            </a:r>
+            <a:r>
+              <a:rPr dirty="0" err="1"/>
+              <a:t>התמונה</a:t>
+            </a:r>
+            <a:r>
+              <a:rPr dirty="0"/>
+              <a:t> </a:t>
+            </a:r>
+            <a:r>
+              <a:rPr dirty="0" err="1"/>
+              <a:t>הגולמיים</a:t>
+            </a:r>
+            <a:r>
+              <a:rPr dirty="0"/>
+              <a:t> </a:t>
+            </a:r>
+            <a:r>
+              <a:rPr dirty="0" err="1"/>
+              <a:t>נקלטים</a:t>
+            </a:r>
+            <a:r>
+              <a:rPr dirty="0"/>
+              <a:t> </a:t>
+            </a:r>
+            <a:r>
+              <a:rPr dirty="0" err="1"/>
+              <a:t>מהמצלמה</a:t>
+            </a:r>
+            <a:r>
+              <a:rPr dirty="0"/>
+              <a:t> </a:t>
+            </a:r>
+            <a:r>
+              <a:rPr dirty="0" err="1"/>
+              <a:t>ונאגרים</a:t>
+            </a:r>
+            <a:r>
+              <a:rPr dirty="0"/>
+              <a:t> </a:t>
+            </a:r>
+            <a:r>
+              <a:rPr dirty="0" err="1"/>
+              <a:t>בזיכרון</a:t>
+            </a:r>
+            <a:r>
+              <a:rPr dirty="0"/>
+              <a:t> ה-BRAM</a:t>
+            </a:r>
+          </a:p>
+          <a:p>
+            <a:pPr algn="r" rtl="1">
+              <a:defRPr sz="1800"/>
+            </a:pPr>
+            <a:r>
+              <a:rPr dirty="0" err="1"/>
+              <a:t>בקר</a:t>
+            </a:r>
+            <a:r>
+              <a:rPr dirty="0"/>
+              <a:t> ה-VGA </a:t>
+            </a:r>
+            <a:r>
+              <a:rPr dirty="0" err="1"/>
+              <a:t>שולף</a:t>
+            </a:r>
+            <a:r>
+              <a:rPr dirty="0"/>
+              <a:t> </a:t>
+            </a:r>
+            <a:r>
+              <a:rPr dirty="0" err="1"/>
+              <a:t>את</a:t>
+            </a:r>
+            <a:r>
+              <a:rPr dirty="0"/>
+              <a:t> </a:t>
+            </a:r>
+            <a:r>
+              <a:rPr dirty="0" err="1"/>
+              <a:t>הנתונים</a:t>
+            </a:r>
+            <a:r>
+              <a:rPr dirty="0"/>
+              <a:t> </a:t>
+            </a:r>
+            <a:r>
+              <a:rPr dirty="0" err="1"/>
+              <a:t>ומעביר</a:t>
+            </a:r>
+            <a:r>
+              <a:rPr dirty="0"/>
+              <a:t> </a:t>
+            </a:r>
+            <a:r>
+              <a:rPr dirty="0" err="1"/>
+              <a:t>לממירD</a:t>
+            </a:r>
+            <a:r>
+              <a:rPr dirty="0"/>
+              <a:t> to A </a:t>
+            </a:r>
+            <a:r>
+              <a:rPr lang="he-IL" dirty="0"/>
+              <a:t> </a:t>
+            </a:r>
+            <a:r>
+              <a:rPr dirty="0" err="1"/>
+              <a:t>לקבלת</a:t>
+            </a:r>
+            <a:r>
+              <a:rPr dirty="0"/>
+              <a:t> </a:t>
+            </a:r>
+            <a:r>
+              <a:rPr dirty="0" err="1"/>
+              <a:t>אות</a:t>
+            </a:r>
+            <a:r>
+              <a:rPr dirty="0"/>
+              <a:t> </a:t>
+            </a:r>
+            <a:r>
+              <a:rPr dirty="0" err="1"/>
+              <a:t>אנלוגי</a:t>
+            </a:r>
+            <a:r>
+              <a:rPr dirty="0"/>
+              <a:t> </a:t>
+            </a:r>
+            <a:r>
+              <a:rPr dirty="0" err="1"/>
+              <a:t>פיזי</a:t>
+            </a:r>
+            <a:r>
+              <a:rPr dirty="0"/>
+              <a:t> </a:t>
+            </a:r>
+            <a:r>
+              <a:rPr dirty="0" err="1"/>
+              <a:t>למסך</a:t>
+            </a:r>
+            <a:r>
+              <a:rPr dirty="0"/>
+              <a:t>.</a:t>
+            </a:r>
+          </a:p>
+        </p:txBody>
+      </p:sp>
+      <p:sp>
+        <p:nvSpPr>
+          <p:cNvPr id="4" name="Rectangle 3"/>
+          <p:cNvSpPr/>
+          <p:nvPr/>
+        </p:nvSpPr>
+        <p:spPr>
+          <a:xfrm>
+            <a:off x="3474720" y="2194560"/>
+            <a:ext cx="2011680" cy="2240598"/>
+          </a:xfrm>
+          <a:prstGeom prst="rect">
+            <a:avLst/>
+          </a:prstGeom>
+          <a:solidFill>
+            <a:srgbClr val="000000"/>
+          </a:solidFill>
+        </p:spPr>
+        <p:style>
+          <a:lnRef idx="1">
+            <a:schemeClr val="accent1"/>
+          </a:lnRef>
+          <a:fillRef idx="3">
+            <a:schemeClr val="accent1"/>
+          </a:fillRef>
+          <a:effectRef idx="2">
+            <a:schemeClr val="accent1"/>
+          </a:effectRef>
+          <a:fontRef idx="minor">
+            <a:schemeClr val="lt1"/>
+          </a:fontRef>
+        </p:style>
+        <p:txBody>
+          <a:bodyPr rtlCol="0" anchor="ctr"/>
+          <a:lstStyle/>
+          <a:p>
+            <a:pPr algn="ctr" rtl="1">
+              <a:defRPr>
+                <a:solidFill>
+                  <a:srgbClr val="FFFFFF"/>
+                </a:solidFill>
+              </a:defRPr>
+            </a:pPr>
+            <a:r>
+              <a:rPr dirty="0" err="1"/>
+              <a:t>מערכת</a:t>
+            </a:r>
+            <a:r>
+              <a:rPr dirty="0"/>
+              <a:t> </a:t>
+            </a:r>
+            <a:r>
+              <a:rPr dirty="0" err="1"/>
+              <a:t>התראת</a:t>
+            </a:r>
+            <a:r>
+              <a:rPr dirty="0"/>
+              <a:t> </a:t>
+            </a:r>
+            <a:r>
+              <a:rPr dirty="0" err="1"/>
+              <a:t>נפילה</a:t>
+            </a:r>
+            <a:br>
+              <a:rPr dirty="0"/>
+            </a:br>
+            <a:r>
+              <a:rPr dirty="0" err="1"/>
+              <a:t>מבוסס</a:t>
+            </a:r>
+            <a:r>
+              <a:rPr dirty="0"/>
+              <a:t> FPGA</a:t>
+            </a:r>
+          </a:p>
+        </p:txBody>
+      </p:sp>
+      <p:sp>
+        <p:nvSpPr>
+          <p:cNvPr id="5" name="TextBox 4"/>
+          <p:cNvSpPr txBox="1"/>
+          <p:nvPr/>
+        </p:nvSpPr>
+        <p:spPr>
+          <a:xfrm>
+            <a:off x="1208663" y="2110117"/>
+            <a:ext cx="1841466" cy="1292662"/>
+          </a:xfrm>
+          <a:prstGeom prst="rect">
+            <a:avLst/>
+          </a:prstGeom>
+          <a:noFill/>
+        </p:spPr>
+        <p:txBody>
+          <a:bodyPr wrap="none">
+            <a:spAutoFit/>
+          </a:bodyPr>
+          <a:lstStyle/>
+          <a:p>
+            <a:pPr algn="ctr">
+              <a:defRPr sz="1300"/>
+            </a:pPr>
+            <a:r>
+              <a:rPr dirty="0"/>
+              <a:t>Inputs:</a:t>
+            </a:r>
+            <a:br>
+              <a:rPr dirty="0"/>
+            </a:br>
+            <a:r>
+              <a:rPr dirty="0" err="1"/>
+              <a:t>clk</a:t>
+            </a:r>
+            <a:r>
+              <a:rPr dirty="0"/>
+              <a:t>, reset</a:t>
+            </a:r>
+            <a:br>
+              <a:rPr dirty="0"/>
+            </a:br>
+            <a:r>
+              <a:rPr dirty="0"/>
+              <a:t>ov7670_vsync, </a:t>
+            </a:r>
+            <a:r>
+              <a:rPr dirty="0" err="1"/>
+              <a:t>href</a:t>
+            </a:r>
+            <a:r>
+              <a:rPr dirty="0"/>
+              <a:t>, pclk</a:t>
+            </a:r>
+            <a:br>
+              <a:rPr dirty="0"/>
+            </a:br>
+            <a:r>
+              <a:rPr dirty="0"/>
+              <a:t>ov7670_data[7:0]</a:t>
+            </a:r>
+            <a:br>
+              <a:rPr dirty="0"/>
+            </a:br>
+            <a:r>
+              <a:rPr dirty="0" err="1"/>
+              <a:t>btn</a:t>
+            </a:r>
+            <a:r>
+              <a:rPr dirty="0"/>
+              <a:t>[1:0], </a:t>
+            </a:r>
+            <a:r>
+              <a:rPr dirty="0" err="1"/>
+              <a:t>sw</a:t>
+            </a:r>
+            <a:r>
+              <a:rPr dirty="0"/>
+              <a:t>[1:0]</a:t>
+            </a:r>
+            <a:br>
+              <a:rPr dirty="0"/>
+            </a:br>
+            <a:r>
+              <a:rPr dirty="0" err="1"/>
+              <a:t>scl</a:t>
+            </a:r>
+            <a:r>
+              <a:rPr dirty="0"/>
+              <a:t>, </a:t>
+            </a:r>
+            <a:r>
+              <a:rPr dirty="0" err="1"/>
+              <a:t>sda</a:t>
+            </a:r>
+            <a:endParaRPr dirty="0"/>
+          </a:p>
+        </p:txBody>
+      </p:sp>
+      <p:sp>
+        <p:nvSpPr>
+          <p:cNvPr id="6" name="Right Arrow 5"/>
+          <p:cNvSpPr/>
+          <p:nvPr/>
+        </p:nvSpPr>
+        <p:spPr>
+          <a:xfrm>
+            <a:off x="2788920" y="3324422"/>
+            <a:ext cx="548640" cy="274320"/>
+          </a:xfrm>
+          <a:prstGeom prst="rightArrow">
+            <a:avLst/>
+          </a:prstGeom>
+        </p:spPr>
+        <p:style>
+          <a:lnRef idx="1">
+            <a:schemeClr val="accent1"/>
+          </a:lnRef>
+          <a:fillRef idx="3">
+            <a:schemeClr val="accent1"/>
+          </a:fillRef>
+          <a:effectRef idx="2">
+            <a:schemeClr val="accent1"/>
+          </a:effectRef>
+          <a:fontRef idx="minor">
+            <a:schemeClr val="lt1"/>
+          </a:fontRef>
+        </p:style>
+        <p:txBody>
+          <a:bodyPr rtlCol="0" anchor="ctr"/>
+          <a:lstStyle/>
+          <a:p>
+            <a:pPr algn="ctr"/>
+            <a:endParaRPr/>
+          </a:p>
+        </p:txBody>
+      </p:sp>
+      <p:sp>
+        <p:nvSpPr>
+          <p:cNvPr id="7" name="TextBox 6"/>
+          <p:cNvSpPr txBox="1"/>
+          <p:nvPr/>
+        </p:nvSpPr>
+        <p:spPr>
+          <a:xfrm>
+            <a:off x="5669280" y="2107793"/>
+            <a:ext cx="1961947" cy="1092607"/>
+          </a:xfrm>
+          <a:prstGeom prst="rect">
+            <a:avLst/>
+          </a:prstGeom>
+          <a:noFill/>
+        </p:spPr>
+        <p:txBody>
+          <a:bodyPr wrap="none">
+            <a:spAutoFit/>
+          </a:bodyPr>
+          <a:lstStyle/>
+          <a:p>
+            <a:pPr algn="ctr">
+              <a:defRPr sz="1300"/>
+            </a:pPr>
+            <a:r>
+              <a:rPr dirty="0"/>
+              <a:t>Outputs:</a:t>
+            </a:r>
+            <a:br>
+              <a:rPr dirty="0"/>
+            </a:br>
+            <a:r>
+              <a:rPr dirty="0"/>
+              <a:t>VGA_HS_O, VGA_VS_O</a:t>
+            </a:r>
+            <a:br>
+              <a:rPr dirty="0"/>
+            </a:br>
+            <a:r>
+              <a:rPr dirty="0"/>
+              <a:t>VGA_R[3:0], G[3:0], B[3:0]</a:t>
+            </a:r>
+            <a:br>
+              <a:rPr dirty="0"/>
+            </a:br>
+            <a:r>
+              <a:rPr dirty="0"/>
+              <a:t>ov7670_xclk, </a:t>
+            </a:r>
+            <a:r>
+              <a:rPr dirty="0" err="1"/>
+              <a:t>pwdn</a:t>
+            </a:r>
+            <a:r>
+              <a:rPr dirty="0"/>
+              <a:t>, reset</a:t>
+            </a:r>
+            <a:br>
+              <a:rPr dirty="0"/>
+            </a:br>
+            <a:endParaRPr dirty="0"/>
+          </a:p>
+        </p:txBody>
+      </p:sp>
+      <p:sp>
+        <p:nvSpPr>
+          <p:cNvPr id="8" name="Right Arrow 7"/>
+          <p:cNvSpPr/>
+          <p:nvPr/>
+        </p:nvSpPr>
+        <p:spPr>
+          <a:xfrm>
+            <a:off x="5669280" y="3291840"/>
+            <a:ext cx="548640" cy="274320"/>
+          </a:xfrm>
+          <a:prstGeom prst="rightArrow">
+            <a:avLst/>
+          </a:prstGeom>
+        </p:spPr>
+        <p:style>
+          <a:lnRef idx="1">
+            <a:schemeClr val="accent1"/>
+          </a:lnRef>
+          <a:fillRef idx="3">
+            <a:schemeClr val="accent1"/>
+          </a:fillRef>
+          <a:effectRef idx="2">
+            <a:schemeClr val="accent1"/>
+          </a:effectRef>
+          <a:fontRef idx="minor">
+            <a:schemeClr val="lt1"/>
+          </a:fontRef>
+        </p:style>
+        <p:txBody>
+          <a:bodyPr rtlCol="0" anchor="ctr"/>
+          <a:lstStyle/>
+          <a:p>
+            <a:pPr algn="ctr"/>
+            <a:endParaRPr/>
+          </a:p>
+        </p:txBody>
+      </p:sp>
+      <p:sp>
+        <p:nvSpPr>
+          <p:cNvPr id="9" name="Rounded Rectangle 8"/>
+          <p:cNvSpPr/>
+          <p:nvPr/>
+        </p:nvSpPr>
+        <p:spPr>
+          <a:xfrm>
+            <a:off x="548640" y="4754880"/>
+            <a:ext cx="1554480" cy="731520"/>
+          </a:xfrm>
+          <a:prstGeom prst="roundRect">
+            <a:avLst/>
+          </a:prstGeom>
+          <a:solidFill>
+            <a:srgbClr val="4F81BD"/>
+          </a:solidFill>
+        </p:spPr>
+        <p:style>
+          <a:lnRef idx="1">
+            <a:schemeClr val="accent1"/>
+          </a:lnRef>
+          <a:fillRef idx="3">
+            <a:schemeClr val="accent1"/>
+          </a:fillRef>
+          <a:effectRef idx="2">
+            <a:schemeClr val="accent1"/>
+          </a:effectRef>
+          <a:fontRef idx="minor">
+            <a:schemeClr val="lt1"/>
+          </a:fontRef>
+        </p:style>
+        <p:txBody>
+          <a:bodyPr rtlCol="0" anchor="ctr"/>
+          <a:lstStyle/>
+          <a:p>
+            <a:pPr algn="ctr">
+              <a:defRPr sz="1400"/>
+            </a:pPr>
+            <a:r>
+              <a:t>ov7670_capture</a:t>
+            </a:r>
+          </a:p>
+        </p:txBody>
+      </p:sp>
+      <p:sp>
+        <p:nvSpPr>
+          <p:cNvPr id="10" name="Right Arrow 9"/>
+          <p:cNvSpPr/>
+          <p:nvPr/>
+        </p:nvSpPr>
+        <p:spPr>
+          <a:xfrm>
+            <a:off x="2103120" y="5029200"/>
+            <a:ext cx="457200" cy="182880"/>
+          </a:xfrm>
+          <a:prstGeom prst="rightArrow">
+            <a:avLst/>
+          </a:prstGeom>
+        </p:spPr>
+        <p:style>
+          <a:lnRef idx="1">
+            <a:schemeClr val="accent1"/>
+          </a:lnRef>
+          <a:fillRef idx="3">
+            <a:schemeClr val="accent1"/>
+          </a:fillRef>
+          <a:effectRef idx="2">
+            <a:schemeClr val="accent1"/>
+          </a:effectRef>
+          <a:fontRef idx="minor">
+            <a:schemeClr val="lt1"/>
+          </a:fontRef>
+        </p:style>
+        <p:txBody>
+          <a:bodyPr rtlCol="0" anchor="ctr"/>
+          <a:lstStyle/>
+          <a:p>
+            <a:pPr algn="ctr"/>
+            <a:endParaRPr/>
+          </a:p>
+        </p:txBody>
+      </p:sp>
+      <p:sp>
+        <p:nvSpPr>
+          <p:cNvPr id="11" name="Rounded Rectangle 10"/>
+          <p:cNvSpPr/>
+          <p:nvPr/>
+        </p:nvSpPr>
+        <p:spPr>
+          <a:xfrm>
+            <a:off x="2560320" y="4754880"/>
+            <a:ext cx="1554480" cy="731520"/>
+          </a:xfrm>
+          <a:prstGeom prst="roundRect">
+            <a:avLst/>
+          </a:prstGeom>
+          <a:solidFill>
+            <a:srgbClr val="4F81BD"/>
+          </a:solidFill>
+        </p:spPr>
+        <p:style>
+          <a:lnRef idx="1">
+            <a:schemeClr val="accent1"/>
+          </a:lnRef>
+          <a:fillRef idx="3">
+            <a:schemeClr val="accent1"/>
+          </a:fillRef>
+          <a:effectRef idx="2">
+            <a:schemeClr val="accent1"/>
+          </a:effectRef>
+          <a:fontRef idx="minor">
+            <a:schemeClr val="lt1"/>
+          </a:fontRef>
+        </p:style>
+        <p:txBody>
+          <a:bodyPr rtlCol="0" anchor="ctr"/>
+          <a:lstStyle/>
+          <a:p>
+            <a:pPr algn="ctr">
+              <a:defRPr sz="1400"/>
+            </a:pPr>
+            <a:r>
+              <a:t>frame_buffer</a:t>
+            </a:r>
+          </a:p>
+        </p:txBody>
+      </p:sp>
+      <p:sp>
+        <p:nvSpPr>
+          <p:cNvPr id="12" name="Right Arrow 11"/>
+          <p:cNvSpPr/>
+          <p:nvPr/>
+        </p:nvSpPr>
+        <p:spPr>
+          <a:xfrm>
+            <a:off x="4114800" y="5029200"/>
+            <a:ext cx="457200" cy="182880"/>
+          </a:xfrm>
+          <a:prstGeom prst="rightArrow">
+            <a:avLst/>
+          </a:prstGeom>
+        </p:spPr>
+        <p:style>
+          <a:lnRef idx="1">
+            <a:schemeClr val="accent1"/>
+          </a:lnRef>
+          <a:fillRef idx="3">
+            <a:schemeClr val="accent1"/>
+          </a:fillRef>
+          <a:effectRef idx="2">
+            <a:schemeClr val="accent1"/>
+          </a:effectRef>
+          <a:fontRef idx="minor">
+            <a:schemeClr val="lt1"/>
+          </a:fontRef>
+        </p:style>
+        <p:txBody>
+          <a:bodyPr rtlCol="0" anchor="ctr"/>
+          <a:lstStyle/>
+          <a:p>
+            <a:pPr algn="ctr"/>
+            <a:endParaRPr/>
+          </a:p>
+        </p:txBody>
+      </p:sp>
+      <p:sp>
+        <p:nvSpPr>
+          <p:cNvPr id="13" name="Rounded Rectangle 12"/>
+          <p:cNvSpPr/>
+          <p:nvPr/>
+        </p:nvSpPr>
+        <p:spPr>
+          <a:xfrm>
+            <a:off x="4572000" y="4754880"/>
+            <a:ext cx="1554480" cy="731520"/>
+          </a:xfrm>
+          <a:prstGeom prst="roundRect">
+            <a:avLst/>
+          </a:prstGeom>
+          <a:solidFill>
+            <a:srgbClr val="4F81BD"/>
+          </a:solidFill>
+        </p:spPr>
+        <p:style>
+          <a:lnRef idx="1">
+            <a:schemeClr val="accent1"/>
+          </a:lnRef>
+          <a:fillRef idx="3">
+            <a:schemeClr val="accent1"/>
+          </a:fillRef>
+          <a:effectRef idx="2">
+            <a:schemeClr val="accent1"/>
+          </a:effectRef>
+          <a:fontRef idx="minor">
+            <a:schemeClr val="lt1"/>
+          </a:fontRef>
+        </p:style>
+        <p:txBody>
+          <a:bodyPr rtlCol="0" anchor="ctr"/>
+          <a:lstStyle/>
+          <a:p>
+            <a:pPr algn="ctr">
+              <a:defRPr sz="1400"/>
+            </a:pPr>
+            <a:r>
+              <a:t>vga_controller</a:t>
+            </a:r>
+          </a:p>
+        </p:txBody>
+      </p:sp>
+      <p:sp>
+        <p:nvSpPr>
+          <p:cNvPr id="14" name="Right Arrow 13"/>
+          <p:cNvSpPr/>
+          <p:nvPr/>
+        </p:nvSpPr>
+        <p:spPr>
+          <a:xfrm>
+            <a:off x="6126480" y="5029200"/>
+            <a:ext cx="457200" cy="182880"/>
+          </a:xfrm>
+          <a:prstGeom prst="rightArrow">
+            <a:avLst/>
+          </a:prstGeom>
+        </p:spPr>
+        <p:style>
+          <a:lnRef idx="1">
+            <a:schemeClr val="accent1"/>
+          </a:lnRef>
+          <a:fillRef idx="3">
+            <a:schemeClr val="accent1"/>
+          </a:fillRef>
+          <a:effectRef idx="2">
+            <a:schemeClr val="accent1"/>
+          </a:effectRef>
+          <a:fontRef idx="minor">
+            <a:schemeClr val="lt1"/>
+          </a:fontRef>
+        </p:style>
+        <p:txBody>
+          <a:bodyPr rtlCol="0" anchor="ctr"/>
+          <a:lstStyle/>
+          <a:p>
+            <a:pPr algn="ctr"/>
+            <a:endParaRPr/>
+          </a:p>
+        </p:txBody>
+      </p:sp>
+      <p:sp>
+        <p:nvSpPr>
+          <p:cNvPr id="15" name="Rounded Rectangle 14"/>
+          <p:cNvSpPr/>
+          <p:nvPr/>
+        </p:nvSpPr>
+        <p:spPr>
+          <a:xfrm>
+            <a:off x="6583680" y="4754880"/>
+            <a:ext cx="1554480" cy="731520"/>
+          </a:xfrm>
+          <a:prstGeom prst="roundRect">
+            <a:avLst/>
+          </a:prstGeom>
+          <a:solidFill>
+            <a:srgbClr val="4F81BD"/>
+          </a:solidFill>
+        </p:spPr>
+        <p:style>
+          <a:lnRef idx="1">
+            <a:schemeClr val="accent1"/>
+          </a:lnRef>
+          <a:fillRef idx="3">
+            <a:schemeClr val="accent1"/>
+          </a:fillRef>
+          <a:effectRef idx="2">
+            <a:schemeClr val="accent1"/>
+          </a:effectRef>
+          <a:fontRef idx="minor">
+            <a:schemeClr val="lt1"/>
+          </a:fontRef>
+        </p:style>
+        <p:txBody>
+          <a:bodyPr rtlCol="0" anchor="ctr"/>
+          <a:lstStyle/>
+          <a:p>
+            <a:pPr algn="ctr">
+              <a:defRPr sz="1400"/>
+            </a:pPr>
+            <a:r>
+              <a:t>D to A Converter</a:t>
+            </a:r>
+          </a:p>
+        </p:txBody>
+      </p:sp>
+    </p:spTree>
+  </p:cSld>
+  <p:clrMapOvr>
+    <a:masterClrMapping/>
+  </p:clrMapOvr>
+</p:sld>
+</file>
+
+<file path=ppt/slides/slide20.xml><?xml version="1.0" encoding="utf-8"?>
 <p:sld xmlns:a="http://schemas.openxmlformats.org/drawingml/2006/main" xmlns:r="http://schemas.openxmlformats.org/officeDocument/2006/relationships" xmlns:p="http://schemas.openxmlformats.org/presentationml/2006/main">
   <p:cSld>
     <p:spTree>
@@ -9995,7 +9808,7 @@
         </p:nvSpPr>
         <p:spPr>
           <a:xfrm>
-            <a:off x="379373" y="331930"/>
+            <a:off x="379373" y="-194595"/>
             <a:ext cx="8229600" cy="1143000"/>
           </a:xfrm>
         </p:spPr>
@@ -10023,7 +9836,7 @@
         </p:nvSpPr>
         <p:spPr>
           <a:xfrm>
-            <a:off x="-120316" y="1652501"/>
+            <a:off x="-136927" y="1265510"/>
             <a:ext cx="9262200" cy="646331"/>
           </a:xfrm>
           <a:prstGeom prst="rect">
@@ -10186,7 +9999,7 @@
 </p:sld>
 </file>
 
-<file path=ppt/slides/slide22.xml><?xml version="1.0" encoding="utf-8"?>
+<file path=ppt/slides/slide21.xml><?xml version="1.0" encoding="utf-8"?>
 <p:sld xmlns:a="http://schemas.openxmlformats.org/drawingml/2006/main" xmlns:r="http://schemas.openxmlformats.org/officeDocument/2006/relationships" xmlns:p="http://schemas.openxmlformats.org/presentationml/2006/main">
   <p:cSld>
     <p:spTree>
@@ -10988,7 +10801,7 @@
 </p:sld>
 </file>
 
-<file path=ppt/slides/slide23.xml><?xml version="1.0" encoding="utf-8"?>
+<file path=ppt/slides/slide22.xml><?xml version="1.0" encoding="utf-8"?>
 <p:sld xmlns:a="http://schemas.openxmlformats.org/drawingml/2006/main" xmlns:r="http://schemas.openxmlformats.org/officeDocument/2006/relationships" xmlns:p="http://schemas.openxmlformats.org/presentationml/2006/main">
   <p:cSld>
     <p:spTree>
@@ -11863,7 +11676,7 @@
 </p:sld>
 </file>
 
-<file path=ppt/slides/slide24.xml><?xml version="1.0" encoding="utf-8"?>
+<file path=ppt/slides/slide23.xml><?xml version="1.0" encoding="utf-8"?>
 <p:sld xmlns:a="http://schemas.openxmlformats.org/drawingml/2006/main" xmlns:r="http://schemas.openxmlformats.org/officeDocument/2006/relationships" xmlns:p="http://schemas.openxmlformats.org/presentationml/2006/main">
   <p:cSld>
     <p:spTree>
@@ -12392,7 +12205,7 @@
 </p:sld>
 </file>
 
-<file path=ppt/slides/slide25.xml><?xml version="1.0" encoding="utf-8"?>
+<file path=ppt/slides/slide24.xml><?xml version="1.0" encoding="utf-8"?>
 <p:sld xmlns:a="http://schemas.openxmlformats.org/drawingml/2006/main" xmlns:r="http://schemas.openxmlformats.org/officeDocument/2006/relationships" xmlns:p="http://schemas.openxmlformats.org/presentationml/2006/main">
   <p:cSld>
     <p:spTree>
@@ -12625,7 +12438,7 @@
 </p:sld>
 </file>
 
-<file path=ppt/slides/slide26.xml><?xml version="1.0" encoding="utf-8"?>
+<file path=ppt/slides/slide25.xml><?xml version="1.0" encoding="utf-8"?>
 <p:sld xmlns:a="http://schemas.openxmlformats.org/drawingml/2006/main" xmlns:r="http://schemas.openxmlformats.org/officeDocument/2006/relationships" xmlns:p="http://schemas.openxmlformats.org/presentationml/2006/main">
   <p:cSld>
     <p:spTree>
@@ -12980,7 +12793,7 @@
 </p:sld>
 </file>
 
-<file path=ppt/slides/slide27.xml><?xml version="1.0" encoding="utf-8"?>
+<file path=ppt/slides/slide26.xml><?xml version="1.0" encoding="utf-8"?>
 <p:sld xmlns:a="http://schemas.openxmlformats.org/drawingml/2006/main" xmlns:r="http://schemas.openxmlformats.org/officeDocument/2006/relationships" xmlns:p="http://schemas.openxmlformats.org/presentationml/2006/main">
   <p:cSld>
     <p:spTree>
@@ -13079,7 +12892,7 @@
 </p:sld>
 </file>
 
-<file path=ppt/slides/slide28.xml><?xml version="1.0" encoding="utf-8"?>
+<file path=ppt/slides/slide27.xml><?xml version="1.0" encoding="utf-8"?>
 <p:sld xmlns:a="http://schemas.openxmlformats.org/drawingml/2006/main" xmlns:r="http://schemas.openxmlformats.org/officeDocument/2006/relationships" xmlns:p="http://schemas.openxmlformats.org/presentationml/2006/main">
   <p:cSld>
     <p:spTree>
@@ -13648,7 +13461,7 @@
 </p:sld>
 </file>
 
-<file path=ppt/slides/slide29.xml><?xml version="1.0" encoding="utf-8"?>
+<file path=ppt/slides/slide28.xml><?xml version="1.0" encoding="utf-8"?>
 <p:sld xmlns:a="http://schemas.openxmlformats.org/drawingml/2006/main" xmlns:r="http://schemas.openxmlformats.org/officeDocument/2006/relationships" xmlns:p="http://schemas.openxmlformats.org/presentationml/2006/main">
   <p:cSld>
     <p:spTree>
@@ -15879,7 +15692,12 @@
             <p:ph type="title"/>
           </p:nvPr>
         </p:nvSpPr>
-        <p:spPr/>
+        <p:spPr>
+          <a:xfrm>
+            <a:off x="472966" y="176604"/>
+            <a:ext cx="8229600" cy="1143000"/>
+          </a:xfrm>
+        </p:spPr>
         <p:txBody>
           <a:bodyPr>
             <a:normAutofit fontScale="90000"/>
@@ -15918,8 +15736,8 @@
         </p:nvSpPr>
         <p:spPr>
           <a:xfrm>
-            <a:off x="688427" y="1275956"/>
-            <a:ext cx="8044297" cy="1846659"/>
+            <a:off x="642503" y="1089898"/>
+            <a:ext cx="8044297" cy="2339102"/>
           </a:xfrm>
           <a:prstGeom prst="rect">
             <a:avLst/>
@@ -15939,9 +15757,24 @@
               <a:defRPr sz="1600"/>
             </a:pPr>
             <a:r>
-              <a:rPr dirty="0"/>
-              <a:t>• </a:t>
-            </a:r>
+              <a:rPr lang="he-IL" dirty="0"/>
+              <a:t>בעיקרון המניות הם אופקי </a:t>
+            </a:r>
+            <a:r>
+              <a:rPr lang="he-IL" dirty="0" err="1"/>
+              <a:t>ואנכי,אנו</a:t>
+            </a:r>
+            <a:r>
+              <a:rPr lang="he-IL" dirty="0"/>
+              <a:t> נתמקד באופקי</a:t>
+            </a:r>
+          </a:p>
+          <a:p>
+            <a:pPr marL="285750" indent="-285750" algn="r" rtl="1">
+              <a:buFont typeface="Arial" panose="020B0604020202020204" pitchFamily="34" charset="0"/>
+              <a:buChar char="•"/>
+              <a:defRPr sz="1600"/>
+            </a:pPr>
             <a:r>
               <a:rPr dirty="0" err="1"/>
               <a:t>מחזור</a:t>
@@ -16008,8 +15841,8 @@
               <a:t> (</a:t>
             </a:r>
             <a:r>
-              <a:rPr dirty="0" err="1"/>
-              <a:t>h_count</a:t>
+              <a:rPr lang="en-US" dirty="0" err="1"/>
+              <a:t>hsync_reg</a:t>
             </a:r>
             <a:r>
               <a:rPr dirty="0"/>
@@ -16181,12 +16014,31 @@
               <a:rPr dirty="0"/>
               <a:t> 60Hz.</a:t>
             </a:r>
+            <a:endParaRPr lang="he-IL" dirty="0"/>
           </a:p>
           <a:p>
             <a:pPr algn="r" rtl="1">
               <a:defRPr sz="1600"/>
             </a:pPr>
             <a:r>
+              <a:rPr lang="he-IL" dirty="0"/>
+              <a:t>(זמן חישוב של מטריצה </a:t>
+            </a:r>
+            <a:r>
+              <a:rPr lang="he-IL" dirty="0" err="1"/>
+              <a:t>שלמה,שורות</a:t>
+            </a:r>
+            <a:r>
+              <a:rPr lang="he-IL" dirty="0"/>
+              <a:t> על עמודות)</a:t>
+            </a:r>
+            <a:endParaRPr dirty="0"/>
+          </a:p>
+          <a:p>
+            <a:pPr algn="r" rtl="1">
+              <a:defRPr sz="1600"/>
+            </a:pPr>
+            <a:r>
               <a:rPr dirty="0"/>
               <a:t>• </a:t>
             </a:r>
@@ -16199,16 +16051,8 @@
               <a:t> </a:t>
             </a:r>
             <a:r>
-              <a:rPr dirty="0" err="1"/>
-              <a:t>שחור</a:t>
-            </a:r>
-            <a:r>
-              <a:rPr dirty="0"/>
-              <a:t> (Blanking) </a:t>
-            </a:r>
-            <a:r>
-              <a:rPr lang="he-IL" dirty="0"/>
-              <a:t>:</a:t>
+              <a:rPr lang="he-IL" dirty="0"/>
+              <a:t>השחרה מחוץ לתחום:</a:t>
             </a:r>
           </a:p>
           <a:p>
@@ -16354,8 +16198,8 @@
         </p:blipFill>
         <p:spPr>
           <a:xfrm>
-            <a:off x="4923046" y="3234267"/>
-            <a:ext cx="3657600" cy="3623733"/>
+            <a:off x="5059730" y="3615058"/>
+            <a:ext cx="3520915" cy="3242942"/>
           </a:xfrm>
           <a:prstGeom prst="rect">
             <a:avLst/>
@@ -16405,7 +16249,7 @@
         </p:nvSpPr>
         <p:spPr>
           <a:xfrm>
-            <a:off x="268310" y="-363974"/>
+            <a:off x="279128" y="0"/>
             <a:ext cx="8686799" cy="1228040"/>
           </a:xfrm>
         </p:spPr>
@@ -16434,8 +16278,8 @@
         </p:nvSpPr>
         <p:spPr>
           <a:xfrm>
-            <a:off x="163517" y="451258"/>
-            <a:ext cx="8980483" cy="1477328"/>
+            <a:off x="132285" y="1228040"/>
+            <a:ext cx="8980483" cy="2031325"/>
           </a:xfrm>
           <a:prstGeom prst="rect">
             <a:avLst/>
@@ -16456,6 +16300,10 @@
           </a:p>
           <a:p>
             <a:pPr algn="r"/>
+            <a:endParaRPr lang="he-IL" b="1" dirty="0"/>
+          </a:p>
+          <a:p>
+            <a:pPr algn="r"/>
             <a:r>
               <a:rPr lang="he-IL" dirty="0"/>
               <a:t>שעון הפיקסלים (25 מגה הרץ) של הבקר ,מניע את הלוגיקה</a:t>
@@ -16506,7 +16354,14 @@
             <a:pPr algn="r"/>
             <a:r>
               <a:rPr lang="he-IL" b="1" dirty="0"/>
-              <a:t> ממשק הזיכרון </a:t>
+              <a:t> ממשק הזיכרון</a:t>
+            </a:r>
+          </a:p>
+          <a:p>
+            <a:pPr algn="r"/>
+            <a:r>
+              <a:rPr lang="he-IL" b="1" dirty="0"/>
+              <a:t> </a:t>
             </a:r>
             <a:r>
               <a:rPr lang="en-US" b="1" dirty="0"/>
@@ -16546,8 +16401,8 @@
         </p:nvSpPr>
         <p:spPr>
           <a:xfrm>
-            <a:off x="-159391" y="1808866"/>
-            <a:ext cx="9303253" cy="3139321"/>
+            <a:off x="-148443" y="3086485"/>
+            <a:ext cx="9303253" cy="3693319"/>
           </a:xfrm>
           <a:prstGeom prst="rect">
             <a:avLst/>
@@ -16583,6 +16438,10 @@
           </a:p>
           <a:p>
             <a:pPr algn="r" rtl="1"/>
+            <a:endParaRPr lang="he-IL" b="1" dirty="0"/>
+          </a:p>
+          <a:p>
+            <a:pPr algn="r" rtl="1"/>
             <a:r>
               <a:rPr lang="en-US" dirty="0" err="1"/>
               <a:t>In_display_area</a:t>
@@ -16661,6 +16520,10 @@
               <a:rPr lang="he-IL" b="1" dirty="0"/>
               <a:t>יציאות פיזיות</a:t>
             </a:r>
+          </a:p>
+          <a:p>
+            <a:pPr algn="r" rtl="1"/>
+            <a:endParaRPr lang="he-IL" b="1" dirty="0"/>
           </a:p>
           <a:p>
             <a:pPr algn="r" rtl="1"/>
@@ -17202,7 +17065,35 @@
             </a:r>
             <a:r>
               <a:rPr dirty="0"/>
-              <a:t> ב-'1', </a:t>
+              <a:t> </a:t>
+            </a:r>
+            <a:r>
+              <a:rPr lang="he-IL" dirty="0"/>
+              <a:t> </a:t>
+            </a:r>
+            <a:r>
+              <a:rPr lang="en-US" dirty="0" err="1"/>
+              <a:t>in_display_area</a:t>
+            </a:r>
+            <a:r>
+              <a:rPr lang="he-IL" dirty="0"/>
+              <a:t> </a:t>
+            </a:r>
+            <a:r>
+              <a:rPr dirty="0"/>
+              <a:t>ב-'1', </a:t>
+            </a:r>
+            <a:r>
+              <a:rPr lang="he-IL" dirty="0"/>
+              <a:t>(מצב </a:t>
+            </a:r>
+            <a:r>
+              <a:rPr lang="en-US" dirty="0"/>
+              <a:t>display</a:t>
+            </a:r>
+            <a:r>
+              <a:rPr lang="he-IL" dirty="0"/>
+              <a:t> ) </a:t>
             </a:r>
             <a:r>
               <a:rPr dirty="0" err="1"/>
@@ -17229,12 +17120,36 @@
               <a:t> VGA_R/G/B. </a:t>
             </a:r>
             <a:r>
+              <a:rPr lang="he-IL" dirty="0"/>
+              <a:t>           </a:t>
+            </a:r>
+            <a:r>
               <a:rPr dirty="0" err="1"/>
               <a:t>בזמני</a:t>
             </a:r>
             <a:r>
               <a:rPr dirty="0"/>
-              <a:t> ה-Porch </a:t>
+              <a:t> ה-</a:t>
+            </a:r>
+            <a:r>
+              <a:rPr lang="he-IL" dirty="0"/>
+              <a:t> </a:t>
+            </a:r>
+            <a:r>
+              <a:rPr dirty="0"/>
+              <a:t>Porch </a:t>
+            </a:r>
+            <a:r>
+              <a:rPr lang="he-IL" dirty="0"/>
+              <a:t> (</a:t>
+            </a:r>
+            <a:r>
+              <a:rPr lang="en-US" dirty="0"/>
+              <a:t>blanking</a:t>
+            </a:r>
+            <a:r>
+              <a:rPr lang="he-IL" dirty="0"/>
+              <a:t>) </a:t>
             </a:r>
             <a:r>
               <a:rPr dirty="0" err="1"/>
